--- a/odevzdani/cviceni-03-prototyp/prezentace.pptx
+++ b/odevzdani/cviceni-03-prototyp/prezentace.pptx
@@ -787,7 +787,7 @@
           <a:lstStyle/>
           <a:p>
             <a:r>
-              <a:t>Ve druhé ukázce zadáme Neon do globálního hledání. Výsledky oddělují účinkující od souvisejících vystoupení. U Neon Wave otevřeme dialog s žánrem, popisem a programem. Odkaz do programu zachová kontext interpreta. Kontrolujeme, že údaje pocházejí ze stejné základny a dialog lze zavřít klávesou Escape. Hledaný text se nevkládá jako spustitelné HTML. Návštěvník dostane srozumitelnou zprávu i tehdy, když hledání nic nenajde.</a:t>
+              <a:t>Ve druhé ukázce zadáme Atlas do globálního hledání. Výsledky oddělují účinkující od souvisejících vystoupení. U Atlas Motel otevřeme dialog s žánrem, popisem a programem. Odkaz do programu zachová kontext interpreta. Kontrolujeme, že údaje pocházejí ze stejné základny a dialog lze zavřít klávesou Escape. Hledaný text se nevkládá jako spustitelné HTML. Návštěvník dostane srozumitelnou zprávu i tehdy, když hledání nic nenajde.</a:t>
             </a:r>
           </a:p>
         </p:txBody>
@@ -4028,7 +4028,7 @@
               </a:defRPr>
             </a:pPr>
             <a:r>
-              <a:t>ROCKS</a:t>
+              <a:t>PULSE</a:t>
             </a:r>
           </a:p>
         </p:txBody>
@@ -4070,7 +4070,7 @@
               </a:defRPr>
             </a:pPr>
             <a:r>
-              <a:t>FESTIVAL / 2026</a:t>
+              <a:t>FEST / 2027</a:t>
             </a:r>
           </a:p>
         </p:txBody>
@@ -4403,7 +4403,7 @@
               </a:defRPr>
             </a:pPr>
             <a:r>
-              <a:t>2026</a:t>
+              <a:t>2027</a:t>
             </a:r>
           </a:p>
         </p:txBody>
@@ -4754,7 +4754,7 @@
               </a:defRPr>
             </a:pPr>
             <a:r>
-              <a:t>ROCKS</a:t>
+              <a:t>PULSE</a:t>
             </a:r>
           </a:p>
         </p:txBody>
@@ -4796,7 +4796,7 @@
               </a:defRPr>
             </a:pPr>
             <a:r>
-              <a:t>FESTIVAL / 2026</a:t>
+              <a:t>FEST / 2027</a:t>
             </a:r>
           </a:p>
         </p:txBody>
@@ -5867,7 +5867,7 @@
               </a:defRPr>
             </a:pPr>
             <a:r>
-              <a:t>ROCKS</a:t>
+              <a:t>PULSE</a:t>
             </a:r>
           </a:p>
         </p:txBody>
@@ -5909,7 +5909,7 @@
               </a:defRPr>
             </a:pPr>
             <a:r>
-              <a:t>FESTIVAL / 2026</a:t>
+              <a:t>FEST / 2027</a:t>
             </a:r>
           </a:p>
         </p:txBody>
@@ -6779,7 +6779,7 @@
               </a:defRPr>
             </a:pPr>
             <a:r>
-              <a:t>ROCKS</a:t>
+              <a:t>PULSE</a:t>
             </a:r>
           </a:p>
         </p:txBody>
@@ -6821,7 +6821,7 @@
               </a:defRPr>
             </a:pPr>
             <a:r>
-              <a:t>FESTIVAL / 2026</a:t>
+              <a:t>FEST / 2027</a:t>
             </a:r>
           </a:p>
         </p:txBody>
@@ -8083,7 +8083,7 @@
               </a:defRPr>
             </a:pPr>
             <a:r>
-              <a:t>ROCKS</a:t>
+              <a:t>PULSE</a:t>
             </a:r>
           </a:p>
         </p:txBody>
@@ -8125,7 +8125,7 @@
               </a:defRPr>
             </a:pPr>
             <a:r>
-              <a:t>FESTIVAL / 2026</a:t>
+              <a:t>FEST / 2027</a:t>
             </a:r>
           </a:p>
         </p:txBody>
@@ -8422,7 +8422,7 @@
               </a:defRPr>
             </a:pPr>
             <a:r>
-              <a:t>Neon</a:t>
+              <a:t>Atlas</a:t>
             </a:r>
           </a:p>
         </p:txBody>
@@ -8844,7 +8844,7 @@
               </a:defRPr>
             </a:pPr>
             <a:r>
-              <a:t>Neon Wave</a:t>
+              <a:t>Atlas Motel</a:t>
             </a:r>
           </a:p>
         </p:txBody>
@@ -9387,7 +9387,7 @@
               </a:defRPr>
             </a:pPr>
             <a:r>
-              <a:t>ROCKS</a:t>
+              <a:t>PULSE</a:t>
             </a:r>
           </a:p>
         </p:txBody>
@@ -9429,7 +9429,7 @@
               </a:defRPr>
             </a:pPr>
             <a:r>
-              <a:t>FESTIVAL / 2026</a:t>
+              <a:t>FEST / 2027</a:t>
             </a:r>
           </a:p>
         </p:txBody>

--- a/odevzdani/cviceni-03-prototyp/prezentace.pptx
+++ b/odevzdani/cviceni-03-prototyp/prezentace.pptx
@@ -787,7 +787,7 @@
           <a:lstStyle/>
           <a:p>
             <a:r>
-              <a:t>Ve druhé ukázce zadáme Atlas do globálního hledání. Výsledky oddělují účinkující od souvisejících vystoupení. U Atlas Motel otevřeme dialog s žánrem, popisem a programem. Odkaz do programu zachová kontext interpreta. Kontrolujeme, že údaje pocházejí ze stejné základny a dialog lze zavřít klávesou Escape. Hledaný text se nevkládá jako spustitelné HTML. Návštěvník dostane srozumitelnou zprávu i tehdy, když hledání nic nenajde.</a:t>
+              <a:t>Ve druhé ukázce zadáme DARKZY do globálního hledání. Výsledky oddělují účinkující od souvisejících vystoupení. U DARKZY otevřeme dialog s žánrem, popisem a programem. Odkaz do programu zachová kontext interpreta. Kontrolujeme, že údaje pocházejí ze stejné základny a dialog lze zavřít klávesou Escape. Hledaný text se nevkládá jako spustitelné HTML. Návštěvník dostane srozumitelnou zprávu i tehdy, když hledání nic nenajde.</a:t>
             </a:r>
           </a:p>
         </p:txBody>
@@ -4077,50 +4077,7 @@
       </p:sp>
       <p:sp>
         <p:nvSpPr>
-          <p:cNvPr id="7" name="Rectangle 6"/>
-          <p:cNvSpPr/>
-          <p:nvPr/>
-        </p:nvSpPr>
-        <p:spPr>
-          <a:xfrm>
-            <a:off x="2266950" y="463550"/>
-            <a:ext cx="115570" cy="561340"/>
-          </a:xfrm>
-          <a:prstGeom prst="rect">
-            <a:avLst/>
-          </a:prstGeom>
-          <a:solidFill>
-            <a:srgbClr val="F4F0E7"/>
-          </a:solidFill>
-          <a:ln>
-            <a:noFill/>
-          </a:ln>
-        </p:spPr>
-        <p:style>
-          <a:lnRef idx="1">
-            <a:schemeClr val="accent1"/>
-          </a:lnRef>
-          <a:fillRef idx="3">
-            <a:schemeClr val="accent1"/>
-          </a:fillRef>
-          <a:effectRef idx="2">
-            <a:schemeClr val="accent1"/>
-          </a:effectRef>
-          <a:fontRef idx="minor">
-            <a:schemeClr val="lt1"/>
-          </a:fontRef>
-        </p:style>
-        <p:txBody>
-          <a:bodyPr rtlCol="0" anchor="ctr"/>
-          <a:lstStyle/>
-          <a:p>
-            <a:pPr algn="ctr"/>
-          </a:p>
-        </p:txBody>
-      </p:sp>
-      <p:sp>
-        <p:nvSpPr>
-          <p:cNvPr id="8" name="TextBox 7"/>
+          <p:cNvPr id="7" name="TextBox 6"/>
           <p:cNvSpPr txBox="1"/>
           <p:nvPr/>
         </p:nvSpPr>
@@ -4162,7 +4119,7 @@
       </p:sp>
       <p:sp>
         <p:nvSpPr>
-          <p:cNvPr id="9" name="TextBox 8"/>
+          <p:cNvPr id="8" name="TextBox 7"/>
           <p:cNvSpPr txBox="1"/>
           <p:nvPr/>
         </p:nvSpPr>
@@ -4223,7 +4180,7 @@
       </p:sp>
       <p:sp>
         <p:nvSpPr>
-          <p:cNvPr id="10" name="TextBox 9"/>
+          <p:cNvPr id="9" name="TextBox 8"/>
           <p:cNvSpPr txBox="1"/>
           <p:nvPr/>
         </p:nvSpPr>
@@ -4284,7 +4241,7 @@
       </p:sp>
       <p:sp>
         <p:nvSpPr>
-          <p:cNvPr id="11" name="TextBox 10"/>
+          <p:cNvPr id="10" name="TextBox 9"/>
           <p:cNvSpPr txBox="1"/>
           <p:nvPr/>
         </p:nvSpPr>
@@ -4326,7 +4283,7 @@
       </p:sp>
       <p:sp>
         <p:nvSpPr>
-          <p:cNvPr id="12" name="TextBox 11"/>
+          <p:cNvPr id="11" name="TextBox 10"/>
           <p:cNvSpPr txBox="1"/>
           <p:nvPr/>
         </p:nvSpPr>
@@ -4368,7 +4325,7 @@
       </p:sp>
       <p:sp>
         <p:nvSpPr>
-          <p:cNvPr id="13" name="TextBox 12"/>
+          <p:cNvPr id="12" name="TextBox 11"/>
           <p:cNvSpPr txBox="1"/>
           <p:nvPr/>
         </p:nvSpPr>
@@ -4410,7 +4367,7 @@
       </p:sp>
       <p:sp>
         <p:nvSpPr>
-          <p:cNvPr id="14" name="TextBox 13"/>
+          <p:cNvPr id="13" name="TextBox 12"/>
           <p:cNvSpPr txBox="1"/>
           <p:nvPr/>
         </p:nvSpPr>
@@ -4471,7 +4428,7 @@
       </p:sp>
       <p:sp>
         <p:nvSpPr>
-          <p:cNvPr id="15" name="TextBox 14"/>
+          <p:cNvPr id="14" name="TextBox 13"/>
           <p:cNvSpPr txBox="1"/>
           <p:nvPr/>
         </p:nvSpPr>
@@ -4532,7 +4489,7 @@
       </p:sp>
       <p:sp>
         <p:nvSpPr>
-          <p:cNvPr id="16" name="TextBox 15"/>
+          <p:cNvPr id="15" name="TextBox 14"/>
           <p:cNvSpPr txBox="1"/>
           <p:nvPr/>
         </p:nvSpPr>
@@ -4574,7 +4531,7 @@
       </p:sp>
       <p:sp>
         <p:nvSpPr>
-          <p:cNvPr id="17" name="TextBox 16"/>
+          <p:cNvPr id="16" name="TextBox 15"/>
           <p:cNvSpPr txBox="1"/>
           <p:nvPr/>
         </p:nvSpPr>
@@ -4803,20 +4760,62 @@
       </p:sp>
       <p:sp>
         <p:nvSpPr>
-          <p:cNvPr id="6" name="Rectangle 5"/>
+          <p:cNvPr id="6" name="TextBox 5"/>
+          <p:cNvSpPr txBox="1"/>
+          <p:nvPr/>
+        </p:nvSpPr>
+        <p:spPr>
+          <a:xfrm>
+            <a:off x="5588000" y="533400"/>
+            <a:ext cx="6070600" cy="220979"/>
+          </a:xfrm>
+          <a:prstGeom prst="rect">
+            <a:avLst/>
+          </a:prstGeom>
+          <a:noFill/>
+        </p:spPr>
+        <p:txBody>
+          <a:bodyPr wrap="none" lIns="0" rIns="0" tIns="0" bIns="0">
+            <a:spAutoFit/>
+          </a:bodyPr>
+          <a:lstStyle/>
+          <a:p>
+            <a:pPr>
+              <a:lnSpc>
+                <a:spcPts val="1240"/>
+              </a:lnSpc>
+              <a:spcAft>
+                <a:spcPts val="0"/>
+              </a:spcAft>
+              <a:defRPr sz="1000" b="1">
+                <a:solidFill>
+                  <a:srgbClr val="68635B"/>
+                </a:solidFill>
+                <a:latin typeface="Arial"/>
+              </a:defRPr>
+            </a:pPr>
+            <a:r>
+              <a:t>ČTYŘI FUNKCE, NE SLIDESHOW</a:t>
+            </a:r>
+          </a:p>
+        </p:txBody>
+      </p:sp>
+      <p:sp>
+        <p:nvSpPr>
+          <p:cNvPr id="7" name="Rectangle 6"/>
           <p:cNvSpPr/>
           <p:nvPr/>
         </p:nvSpPr>
         <p:spPr>
           <a:xfrm>
-            <a:off x="1866900" y="368300"/>
-            <a:ext cx="88900" cy="431800"/>
+            <a:off x="533400" y="1155700"/>
+            <a:ext cx="11125200" cy="25400"/>
           </a:xfrm>
           <a:prstGeom prst="rect">
             <a:avLst/>
           </a:prstGeom>
           <a:solidFill>
-            <a:srgbClr val="F45E2B"/>
+            <a:srgbClr val="181817"/>
           </a:solidFill>
           <a:ln>
             <a:noFill/>
@@ -4846,14 +4845,14 @@
       </p:sp>
       <p:sp>
         <p:nvSpPr>
-          <p:cNvPr id="7" name="TextBox 6"/>
+          <p:cNvPr id="8" name="TextBox 7"/>
           <p:cNvSpPr txBox="1"/>
           <p:nvPr/>
         </p:nvSpPr>
         <p:spPr>
           <a:xfrm>
-            <a:off x="5588000" y="533400"/>
-            <a:ext cx="6070600" cy="220979"/>
+            <a:off x="508000" y="1422400"/>
+            <a:ext cx="11176000" cy="1079500"/>
           </a:xfrm>
           <a:prstGeom prst="rect">
             <a:avLst/>
@@ -4868,34 +4867,34 @@
           <a:p>
             <a:pPr>
               <a:lnSpc>
-                <a:spcPts val="1240"/>
-              </a:lnSpc>
-              <a:spcAft>
-                <a:spcPts val="0"/>
-              </a:spcAft>
-              <a:defRPr sz="1000" b="1">
-                <a:solidFill>
-                  <a:srgbClr val="68635B"/>
-                </a:solidFill>
-                <a:latin typeface="Arial"/>
-              </a:defRPr>
-            </a:pPr>
-            <a:r>
-              <a:t>ČTYŘI FUNKCE, NE SLIDESHOW</a:t>
-            </a:r>
-          </a:p>
-        </p:txBody>
-      </p:sp>
-      <p:sp>
-        <p:nvSpPr>
-          <p:cNvPr id="8" name="Rectangle 7"/>
+                <a:spcPts val="3740"/>
+              </a:lnSpc>
+              <a:spcAft>
+                <a:spcPts val="0"/>
+              </a:spcAft>
+              <a:defRPr sz="3400" b="1">
+                <a:solidFill>
+                  <a:srgbClr val="181817"/>
+                </a:solidFill>
+                <a:latin typeface="Arial"/>
+              </a:defRPr>
+            </a:pPr>
+            <a:r>
+              <a:t>Interaktivita řeší potřebu.</a:t>
+            </a:r>
+          </a:p>
+        </p:txBody>
+      </p:sp>
+      <p:sp>
+        <p:nvSpPr>
+          <p:cNvPr id="9" name="Rectangle 8"/>
           <p:cNvSpPr/>
           <p:nvPr/>
         </p:nvSpPr>
         <p:spPr>
           <a:xfrm>
-            <a:off x="533400" y="1155700"/>
-            <a:ext cx="11125200" cy="25400"/>
+            <a:off x="533400" y="2768600"/>
+            <a:ext cx="3556000" cy="2603500"/>
           </a:xfrm>
           <a:prstGeom prst="rect">
             <a:avLst/>
@@ -4931,48 +4930,6 @@
       </p:sp>
       <p:sp>
         <p:nvSpPr>
-          <p:cNvPr id="9" name="TextBox 8"/>
-          <p:cNvSpPr txBox="1"/>
-          <p:nvPr/>
-        </p:nvSpPr>
-        <p:spPr>
-          <a:xfrm>
-            <a:off x="508000" y="1422400"/>
-            <a:ext cx="11176000" cy="1079500"/>
-          </a:xfrm>
-          <a:prstGeom prst="rect">
-            <a:avLst/>
-          </a:prstGeom>
-          <a:noFill/>
-        </p:spPr>
-        <p:txBody>
-          <a:bodyPr wrap="none" lIns="0" rIns="0" tIns="0" bIns="0">
-            <a:spAutoFit/>
-          </a:bodyPr>
-          <a:lstStyle/>
-          <a:p>
-            <a:pPr>
-              <a:lnSpc>
-                <a:spcPts val="3740"/>
-              </a:lnSpc>
-              <a:spcAft>
-                <a:spcPts val="0"/>
-              </a:spcAft>
-              <a:defRPr sz="3400" b="1">
-                <a:solidFill>
-                  <a:srgbClr val="181817"/>
-                </a:solidFill>
-                <a:latin typeface="Arial"/>
-              </a:defRPr>
-            </a:pPr>
-            <a:r>
-              <a:t>Interaktivita řeší potřebu.</a:t>
-            </a:r>
-          </a:p>
-        </p:txBody>
-      </p:sp>
-      <p:sp>
-        <p:nvSpPr>
           <p:cNvPr id="10" name="Rectangle 9"/>
           <p:cNvSpPr/>
           <p:nvPr/>
@@ -4980,13 +4937,13 @@
         <p:spPr>
           <a:xfrm>
             <a:off x="533400" y="2768600"/>
-            <a:ext cx="3556000" cy="2603500"/>
+            <a:ext cx="3556000" cy="76200"/>
           </a:xfrm>
           <a:prstGeom prst="rect">
             <a:avLst/>
           </a:prstGeom>
           <a:solidFill>
-            <a:srgbClr val="181817"/>
+            <a:srgbClr val="F45E2B"/>
           </a:solidFill>
           <a:ln>
             <a:noFill/>
@@ -5016,20 +4973,158 @@
       </p:sp>
       <p:sp>
         <p:nvSpPr>
-          <p:cNvPr id="11" name="Rectangle 10"/>
+          <p:cNvPr id="11" name="TextBox 10"/>
+          <p:cNvSpPr txBox="1"/>
+          <p:nvPr/>
+        </p:nvSpPr>
+        <p:spPr>
+          <a:xfrm>
+            <a:off x="749300" y="3035300"/>
+            <a:ext cx="3124200" cy="685800"/>
+          </a:xfrm>
+          <a:prstGeom prst="rect">
+            <a:avLst/>
+          </a:prstGeom>
+          <a:noFill/>
+        </p:spPr>
+        <p:txBody>
+          <a:bodyPr wrap="none" lIns="0" rIns="0" tIns="0" bIns="0">
+            <a:spAutoFit/>
+          </a:bodyPr>
+          <a:lstStyle/>
+          <a:p>
+            <a:pPr>
+              <a:lnSpc>
+                <a:spcPts val="2200"/>
+              </a:lnSpc>
+              <a:spcAft>
+                <a:spcPts val="0"/>
+              </a:spcAft>
+              <a:defRPr sz="2000" b="1">
+                <a:solidFill>
+                  <a:srgbClr val="F4F0E7"/>
+                </a:solidFill>
+                <a:latin typeface="Arial"/>
+              </a:defRPr>
+            </a:pPr>
+            <a:r>
+              <a:t>Zúžit program</a:t>
+            </a:r>
+          </a:p>
+        </p:txBody>
+      </p:sp>
+      <p:sp>
+        <p:nvSpPr>
+          <p:cNvPr id="12" name="TextBox 11"/>
+          <p:cNvSpPr txBox="1"/>
+          <p:nvPr/>
+        </p:nvSpPr>
+        <p:spPr>
+          <a:xfrm>
+            <a:off x="749300" y="3733800"/>
+            <a:ext cx="3124200" cy="1511300"/>
+          </a:xfrm>
+          <a:prstGeom prst="rect">
+            <a:avLst/>
+          </a:prstGeom>
+          <a:noFill/>
+        </p:spPr>
+        <p:txBody>
+          <a:bodyPr wrap="none" lIns="0" rIns="0" tIns="0" bIns="0">
+            <a:spAutoFit/>
+          </a:bodyPr>
+          <a:lstStyle/>
+          <a:p>
+            <a:pPr>
+              <a:lnSpc>
+                <a:spcPts val="1689"/>
+              </a:lnSpc>
+              <a:spcAft>
+                <a:spcPts val="0"/>
+              </a:spcAft>
+              <a:defRPr sz="1420" b="0">
+                <a:solidFill>
+                  <a:srgbClr val="F4F0E7"/>
+                </a:solidFill>
+                <a:latin typeface="Arial"/>
+              </a:defRPr>
+            </a:pPr>
+            <a:r>
+              <a:t>Den + scéna společně mění</a:t>
+            </a:r>
+          </a:p>
+          <a:p>
+            <a:pPr>
+              <a:lnSpc>
+                <a:spcPts val="1689"/>
+              </a:lnSpc>
+              <a:spcAft>
+                <a:spcPts val="0"/>
+              </a:spcAft>
+              <a:defRPr sz="1420" b="0">
+                <a:solidFill>
+                  <a:srgbClr val="F4F0E7"/>
+                </a:solidFill>
+                <a:latin typeface="Arial"/>
+              </a:defRPr>
+            </a:pPr>
+            <a:r>
+              <a:t>skutečný seznam vystoupení.</a:t>
+            </a:r>
+          </a:p>
+          <a:p>
+            <a:pPr>
+              <a:lnSpc>
+                <a:spcPts val="1689"/>
+              </a:lnSpc>
+              <a:spcAft>
+                <a:spcPts val="0"/>
+              </a:spcAft>
+              <a:defRPr sz="1420" b="0">
+                <a:solidFill>
+                  <a:srgbClr val="F4F0E7"/>
+                </a:solidFill>
+                <a:latin typeface="Arial"/>
+              </a:defRPr>
+            </a:pPr>
+          </a:p>
+          <a:p>
+            <a:pPr>
+              <a:lnSpc>
+                <a:spcPts val="1689"/>
+              </a:lnSpc>
+              <a:spcAft>
+                <a:spcPts val="0"/>
+              </a:spcAft>
+              <a:defRPr sz="1420" b="0">
+                <a:solidFill>
+                  <a:srgbClr val="F4F0E7"/>
+                </a:solidFill>
+                <a:latin typeface="Arial"/>
+              </a:defRPr>
+            </a:pPr>
+            <a:r>
+              <a:t>Méně nesouvisejících výsledků.</a:t>
+            </a:r>
+          </a:p>
+        </p:txBody>
+      </p:sp>
+      <p:sp>
+        <p:nvSpPr>
+          <p:cNvPr id="13" name="Rectangle 12"/>
           <p:cNvSpPr/>
           <p:nvPr/>
         </p:nvSpPr>
         <p:spPr>
           <a:xfrm>
-            <a:off x="533400" y="2768600"/>
-            <a:ext cx="3556000" cy="76200"/>
+            <a:off x="4318000" y="2768600"/>
+            <a:ext cx="3556000" cy="2603500"/>
           </a:xfrm>
           <a:prstGeom prst="rect">
             <a:avLst/>
           </a:prstGeom>
           <a:solidFill>
-            <a:srgbClr val="F45E2B"/>
+            <a:srgbClr val="E7E0D5"/>
           </a:solidFill>
           <a:ln>
             <a:noFill/>
@@ -5059,144 +5154,6 @@
       </p:sp>
       <p:sp>
         <p:nvSpPr>
-          <p:cNvPr id="12" name="TextBox 11"/>
-          <p:cNvSpPr txBox="1"/>
-          <p:nvPr/>
-        </p:nvSpPr>
-        <p:spPr>
-          <a:xfrm>
-            <a:off x="749300" y="3035300"/>
-            <a:ext cx="3124200" cy="685800"/>
-          </a:xfrm>
-          <a:prstGeom prst="rect">
-            <a:avLst/>
-          </a:prstGeom>
-          <a:noFill/>
-        </p:spPr>
-        <p:txBody>
-          <a:bodyPr wrap="none" lIns="0" rIns="0" tIns="0" bIns="0">
-            <a:spAutoFit/>
-          </a:bodyPr>
-          <a:lstStyle/>
-          <a:p>
-            <a:pPr>
-              <a:lnSpc>
-                <a:spcPts val="2200"/>
-              </a:lnSpc>
-              <a:spcAft>
-                <a:spcPts val="0"/>
-              </a:spcAft>
-              <a:defRPr sz="2000" b="1">
-                <a:solidFill>
-                  <a:srgbClr val="F4F0E7"/>
-                </a:solidFill>
-                <a:latin typeface="Arial"/>
-              </a:defRPr>
-            </a:pPr>
-            <a:r>
-              <a:t>Zúžit program</a:t>
-            </a:r>
-          </a:p>
-        </p:txBody>
-      </p:sp>
-      <p:sp>
-        <p:nvSpPr>
-          <p:cNvPr id="13" name="TextBox 12"/>
-          <p:cNvSpPr txBox="1"/>
-          <p:nvPr/>
-        </p:nvSpPr>
-        <p:spPr>
-          <a:xfrm>
-            <a:off x="749300" y="3733800"/>
-            <a:ext cx="3124200" cy="1511300"/>
-          </a:xfrm>
-          <a:prstGeom prst="rect">
-            <a:avLst/>
-          </a:prstGeom>
-          <a:noFill/>
-        </p:spPr>
-        <p:txBody>
-          <a:bodyPr wrap="none" lIns="0" rIns="0" tIns="0" bIns="0">
-            <a:spAutoFit/>
-          </a:bodyPr>
-          <a:lstStyle/>
-          <a:p>
-            <a:pPr>
-              <a:lnSpc>
-                <a:spcPts val="1689"/>
-              </a:lnSpc>
-              <a:spcAft>
-                <a:spcPts val="0"/>
-              </a:spcAft>
-              <a:defRPr sz="1420" b="0">
-                <a:solidFill>
-                  <a:srgbClr val="F4F0E7"/>
-                </a:solidFill>
-                <a:latin typeface="Arial"/>
-              </a:defRPr>
-            </a:pPr>
-            <a:r>
-              <a:t>Den + scéna společně mění</a:t>
-            </a:r>
-          </a:p>
-          <a:p>
-            <a:pPr>
-              <a:lnSpc>
-                <a:spcPts val="1689"/>
-              </a:lnSpc>
-              <a:spcAft>
-                <a:spcPts val="0"/>
-              </a:spcAft>
-              <a:defRPr sz="1420" b="0">
-                <a:solidFill>
-                  <a:srgbClr val="F4F0E7"/>
-                </a:solidFill>
-                <a:latin typeface="Arial"/>
-              </a:defRPr>
-            </a:pPr>
-            <a:r>
-              <a:t>skutečný seznam vystoupení.</a:t>
-            </a:r>
-          </a:p>
-          <a:p>
-            <a:pPr>
-              <a:lnSpc>
-                <a:spcPts val="1689"/>
-              </a:lnSpc>
-              <a:spcAft>
-                <a:spcPts val="0"/>
-              </a:spcAft>
-              <a:defRPr sz="1420" b="0">
-                <a:solidFill>
-                  <a:srgbClr val="F4F0E7"/>
-                </a:solidFill>
-                <a:latin typeface="Arial"/>
-              </a:defRPr>
-            </a:pPr>
-          </a:p>
-          <a:p>
-            <a:pPr>
-              <a:lnSpc>
-                <a:spcPts val="1689"/>
-              </a:lnSpc>
-              <a:spcAft>
-                <a:spcPts val="0"/>
-              </a:spcAft>
-              <a:defRPr sz="1420" b="0">
-                <a:solidFill>
-                  <a:srgbClr val="F4F0E7"/>
-                </a:solidFill>
-                <a:latin typeface="Arial"/>
-              </a:defRPr>
-            </a:pPr>
-            <a:r>
-              <a:t>Méně nesouvisejících výsledků.</a:t>
-            </a:r>
-          </a:p>
-        </p:txBody>
-      </p:sp>
-      <p:sp>
-        <p:nvSpPr>
           <p:cNvPr id="14" name="Rectangle 13"/>
           <p:cNvSpPr/>
           <p:nvPr/>
@@ -5204,13 +5161,13 @@
         <p:spPr>
           <a:xfrm>
             <a:off x="4318000" y="2768600"/>
-            <a:ext cx="3556000" cy="2603500"/>
+            <a:ext cx="3556000" cy="76200"/>
           </a:xfrm>
           <a:prstGeom prst="rect">
             <a:avLst/>
           </a:prstGeom>
           <a:solidFill>
-            <a:srgbClr val="E7E0D5"/>
+            <a:srgbClr val="F45E2B"/>
           </a:solidFill>
           <a:ln>
             <a:noFill/>
@@ -5240,20 +5197,158 @@
       </p:sp>
       <p:sp>
         <p:nvSpPr>
-          <p:cNvPr id="15" name="Rectangle 14"/>
+          <p:cNvPr id="15" name="TextBox 14"/>
+          <p:cNvSpPr txBox="1"/>
+          <p:nvPr/>
+        </p:nvSpPr>
+        <p:spPr>
+          <a:xfrm>
+            <a:off x="4533900" y="3035300"/>
+            <a:ext cx="3124200" cy="685800"/>
+          </a:xfrm>
+          <a:prstGeom prst="rect">
+            <a:avLst/>
+          </a:prstGeom>
+          <a:noFill/>
+        </p:spPr>
+        <p:txBody>
+          <a:bodyPr wrap="none" lIns="0" rIns="0" tIns="0" bIns="0">
+            <a:spAutoFit/>
+          </a:bodyPr>
+          <a:lstStyle/>
+          <a:p>
+            <a:pPr>
+              <a:lnSpc>
+                <a:spcPts val="2200"/>
+              </a:lnSpc>
+              <a:spcAft>
+                <a:spcPts val="0"/>
+              </a:spcAft>
+              <a:defRPr sz="2000" b="1">
+                <a:solidFill>
+                  <a:srgbClr val="181817"/>
+                </a:solidFill>
+                <a:latin typeface="Arial"/>
+              </a:defRPr>
+            </a:pPr>
+            <a:r>
+              <a:t>Uchovat výběr</a:t>
+            </a:r>
+          </a:p>
+        </p:txBody>
+      </p:sp>
+      <p:sp>
+        <p:nvSpPr>
+          <p:cNvPr id="16" name="TextBox 15"/>
+          <p:cNvSpPr txBox="1"/>
+          <p:nvPr/>
+        </p:nvSpPr>
+        <p:spPr>
+          <a:xfrm>
+            <a:off x="4533900" y="3733800"/>
+            <a:ext cx="3124200" cy="1511300"/>
+          </a:xfrm>
+          <a:prstGeom prst="rect">
+            <a:avLst/>
+          </a:prstGeom>
+          <a:noFill/>
+        </p:spPr>
+        <p:txBody>
+          <a:bodyPr wrap="none" lIns="0" rIns="0" tIns="0" bIns="0">
+            <a:spAutoFit/>
+          </a:bodyPr>
+          <a:lstStyle/>
+          <a:p>
+            <a:pPr>
+              <a:lnSpc>
+                <a:spcPts val="1689"/>
+              </a:lnSpc>
+              <a:spcAft>
+                <a:spcPts val="0"/>
+              </a:spcAft>
+              <a:defRPr sz="1420" b="0">
+                <a:solidFill>
+                  <a:srgbClr val="181817"/>
+                </a:solidFill>
+                <a:latin typeface="Arial"/>
+              </a:defRPr>
+            </a:pPr>
+            <a:r>
+              <a:t>Přidání do osobního programu a</a:t>
+            </a:r>
+          </a:p>
+          <a:p>
+            <a:pPr>
+              <a:lnSpc>
+                <a:spcPts val="1689"/>
+              </a:lnSpc>
+              <a:spcAft>
+                <a:spcPts val="0"/>
+              </a:spcAft>
+              <a:defRPr sz="1420" b="0">
+                <a:solidFill>
+                  <a:srgbClr val="181817"/>
+                </a:solidFill>
+                <a:latin typeface="Arial"/>
+              </a:defRPr>
+            </a:pPr>
+            <a:r>
+              <a:t>filtr „Jen uložené“.</a:t>
+            </a:r>
+          </a:p>
+          <a:p>
+            <a:pPr>
+              <a:lnSpc>
+                <a:spcPts val="1689"/>
+              </a:lnSpc>
+              <a:spcAft>
+                <a:spcPts val="0"/>
+              </a:spcAft>
+              <a:defRPr sz="1420" b="0">
+                <a:solidFill>
+                  <a:srgbClr val="181817"/>
+                </a:solidFill>
+                <a:latin typeface="Arial"/>
+              </a:defRPr>
+            </a:pPr>
+          </a:p>
+          <a:p>
+            <a:pPr>
+              <a:lnSpc>
+                <a:spcPts val="1689"/>
+              </a:lnSpc>
+              <a:spcAft>
+                <a:spcPts val="0"/>
+              </a:spcAft>
+              <a:defRPr sz="1420" b="0">
+                <a:solidFill>
+                  <a:srgbClr val="181817"/>
+                </a:solidFill>
+                <a:latin typeface="Arial"/>
+              </a:defRPr>
+            </a:pPr>
+            <a:r>
+              <a:t>Výběr zůstává po obnovení.</a:t>
+            </a:r>
+          </a:p>
+        </p:txBody>
+      </p:sp>
+      <p:sp>
+        <p:nvSpPr>
+          <p:cNvPr id="17" name="Rectangle 16"/>
           <p:cNvSpPr/>
           <p:nvPr/>
         </p:nvSpPr>
         <p:spPr>
           <a:xfrm>
-            <a:off x="4318000" y="2768600"/>
-            <a:ext cx="3556000" cy="76200"/>
+            <a:off x="8102600" y="2768600"/>
+            <a:ext cx="3556000" cy="2603500"/>
           </a:xfrm>
           <a:prstGeom prst="rect">
             <a:avLst/>
           </a:prstGeom>
           <a:solidFill>
-            <a:srgbClr val="F45E2B"/>
+            <a:srgbClr val="E7E0D5"/>
           </a:solidFill>
           <a:ln>
             <a:noFill/>
@@ -5283,144 +5378,6 @@
       </p:sp>
       <p:sp>
         <p:nvSpPr>
-          <p:cNvPr id="16" name="TextBox 15"/>
-          <p:cNvSpPr txBox="1"/>
-          <p:nvPr/>
-        </p:nvSpPr>
-        <p:spPr>
-          <a:xfrm>
-            <a:off x="4533900" y="3035300"/>
-            <a:ext cx="3124200" cy="685800"/>
-          </a:xfrm>
-          <a:prstGeom prst="rect">
-            <a:avLst/>
-          </a:prstGeom>
-          <a:noFill/>
-        </p:spPr>
-        <p:txBody>
-          <a:bodyPr wrap="none" lIns="0" rIns="0" tIns="0" bIns="0">
-            <a:spAutoFit/>
-          </a:bodyPr>
-          <a:lstStyle/>
-          <a:p>
-            <a:pPr>
-              <a:lnSpc>
-                <a:spcPts val="2200"/>
-              </a:lnSpc>
-              <a:spcAft>
-                <a:spcPts val="0"/>
-              </a:spcAft>
-              <a:defRPr sz="2000" b="1">
-                <a:solidFill>
-                  <a:srgbClr val="181817"/>
-                </a:solidFill>
-                <a:latin typeface="Arial"/>
-              </a:defRPr>
-            </a:pPr>
-            <a:r>
-              <a:t>Uchovat výběr</a:t>
-            </a:r>
-          </a:p>
-        </p:txBody>
-      </p:sp>
-      <p:sp>
-        <p:nvSpPr>
-          <p:cNvPr id="17" name="TextBox 16"/>
-          <p:cNvSpPr txBox="1"/>
-          <p:nvPr/>
-        </p:nvSpPr>
-        <p:spPr>
-          <a:xfrm>
-            <a:off x="4533900" y="3733800"/>
-            <a:ext cx="3124200" cy="1511300"/>
-          </a:xfrm>
-          <a:prstGeom prst="rect">
-            <a:avLst/>
-          </a:prstGeom>
-          <a:noFill/>
-        </p:spPr>
-        <p:txBody>
-          <a:bodyPr wrap="none" lIns="0" rIns="0" tIns="0" bIns="0">
-            <a:spAutoFit/>
-          </a:bodyPr>
-          <a:lstStyle/>
-          <a:p>
-            <a:pPr>
-              <a:lnSpc>
-                <a:spcPts val="1689"/>
-              </a:lnSpc>
-              <a:spcAft>
-                <a:spcPts val="0"/>
-              </a:spcAft>
-              <a:defRPr sz="1420" b="0">
-                <a:solidFill>
-                  <a:srgbClr val="181817"/>
-                </a:solidFill>
-                <a:latin typeface="Arial"/>
-              </a:defRPr>
-            </a:pPr>
-            <a:r>
-              <a:t>Přidání do osobního programu a</a:t>
-            </a:r>
-          </a:p>
-          <a:p>
-            <a:pPr>
-              <a:lnSpc>
-                <a:spcPts val="1689"/>
-              </a:lnSpc>
-              <a:spcAft>
-                <a:spcPts val="0"/>
-              </a:spcAft>
-              <a:defRPr sz="1420" b="0">
-                <a:solidFill>
-                  <a:srgbClr val="181817"/>
-                </a:solidFill>
-                <a:latin typeface="Arial"/>
-              </a:defRPr>
-            </a:pPr>
-            <a:r>
-              <a:t>filtr „Jen uložené“.</a:t>
-            </a:r>
-          </a:p>
-          <a:p>
-            <a:pPr>
-              <a:lnSpc>
-                <a:spcPts val="1689"/>
-              </a:lnSpc>
-              <a:spcAft>
-                <a:spcPts val="0"/>
-              </a:spcAft>
-              <a:defRPr sz="1420" b="0">
-                <a:solidFill>
-                  <a:srgbClr val="181817"/>
-                </a:solidFill>
-                <a:latin typeface="Arial"/>
-              </a:defRPr>
-            </a:pPr>
-          </a:p>
-          <a:p>
-            <a:pPr>
-              <a:lnSpc>
-                <a:spcPts val="1689"/>
-              </a:lnSpc>
-              <a:spcAft>
-                <a:spcPts val="0"/>
-              </a:spcAft>
-              <a:defRPr sz="1420" b="0">
-                <a:solidFill>
-                  <a:srgbClr val="181817"/>
-                </a:solidFill>
-                <a:latin typeface="Arial"/>
-              </a:defRPr>
-            </a:pPr>
-            <a:r>
-              <a:t>Výběr zůstává po obnovení.</a:t>
-            </a:r>
-          </a:p>
-        </p:txBody>
-      </p:sp>
-      <p:sp>
-        <p:nvSpPr>
           <p:cNvPr id="18" name="Rectangle 17"/>
           <p:cNvSpPr/>
           <p:nvPr/>
@@ -5428,13 +5385,13 @@
         <p:spPr>
           <a:xfrm>
             <a:off x="8102600" y="2768600"/>
-            <a:ext cx="3556000" cy="2603500"/>
+            <a:ext cx="3556000" cy="76200"/>
           </a:xfrm>
           <a:prstGeom prst="rect">
             <a:avLst/>
           </a:prstGeom>
           <a:solidFill>
-            <a:srgbClr val="E7E0D5"/>
+            <a:srgbClr val="F45E2B"/>
           </a:solidFill>
           <a:ln>
             <a:noFill/>
@@ -5464,50 +5421,7 @@
       </p:sp>
       <p:sp>
         <p:nvSpPr>
-          <p:cNvPr id="19" name="Rectangle 18"/>
-          <p:cNvSpPr/>
-          <p:nvPr/>
-        </p:nvSpPr>
-        <p:spPr>
-          <a:xfrm>
-            <a:off x="8102600" y="2768600"/>
-            <a:ext cx="3556000" cy="76200"/>
-          </a:xfrm>
-          <a:prstGeom prst="rect">
-            <a:avLst/>
-          </a:prstGeom>
-          <a:solidFill>
-            <a:srgbClr val="F45E2B"/>
-          </a:solidFill>
-          <a:ln>
-            <a:noFill/>
-          </a:ln>
-        </p:spPr>
-        <p:style>
-          <a:lnRef idx="1">
-            <a:schemeClr val="accent1"/>
-          </a:lnRef>
-          <a:fillRef idx="3">
-            <a:schemeClr val="accent1"/>
-          </a:fillRef>
-          <a:effectRef idx="2">
-            <a:schemeClr val="accent1"/>
-          </a:effectRef>
-          <a:fontRef idx="minor">
-            <a:schemeClr val="lt1"/>
-          </a:fontRef>
-        </p:style>
-        <p:txBody>
-          <a:bodyPr rtlCol="0" anchor="ctr"/>
-          <a:lstStyle/>
-          <a:p>
-            <a:pPr algn="ctr"/>
-          </a:p>
-        </p:txBody>
-      </p:sp>
-      <p:sp>
-        <p:nvSpPr>
-          <p:cNvPr id="20" name="TextBox 19"/>
+          <p:cNvPr id="19" name="TextBox 18"/>
           <p:cNvSpPr txBox="1"/>
           <p:nvPr/>
         </p:nvSpPr>
@@ -5549,7 +5463,7 @@
       </p:sp>
       <p:sp>
         <p:nvSpPr>
-          <p:cNvPr id="21" name="TextBox 20"/>
+          <p:cNvPr id="20" name="TextBox 19"/>
           <p:cNvSpPr txBox="1"/>
           <p:nvPr/>
         </p:nvSpPr>
@@ -5645,7 +5559,7 @@
       </p:sp>
       <p:sp>
         <p:nvSpPr>
-          <p:cNvPr id="22" name="TextBox 21"/>
+          <p:cNvPr id="21" name="TextBox 20"/>
           <p:cNvSpPr txBox="1"/>
           <p:nvPr/>
         </p:nvSpPr>
@@ -5687,7 +5601,7 @@
       </p:sp>
       <p:sp>
         <p:nvSpPr>
-          <p:cNvPr id="23" name="TextBox 22"/>
+          <p:cNvPr id="22" name="TextBox 21"/>
           <p:cNvSpPr txBox="1"/>
           <p:nvPr/>
         </p:nvSpPr>
@@ -5916,20 +5830,62 @@
       </p:sp>
       <p:sp>
         <p:nvSpPr>
-          <p:cNvPr id="6" name="Rectangle 5"/>
+          <p:cNvPr id="6" name="TextBox 5"/>
+          <p:cNvSpPr txBox="1"/>
+          <p:nvPr/>
+        </p:nvSpPr>
+        <p:spPr>
+          <a:xfrm>
+            <a:off x="5588000" y="533400"/>
+            <a:ext cx="6070600" cy="220979"/>
+          </a:xfrm>
+          <a:prstGeom prst="rect">
+            <a:avLst/>
+          </a:prstGeom>
+          <a:noFill/>
+        </p:spPr>
+        <p:txBody>
+          <a:bodyPr wrap="none" lIns="0" rIns="0" tIns="0" bIns="0">
+            <a:spAutoFit/>
+          </a:bodyPr>
+          <a:lstStyle/>
+          <a:p>
+            <a:pPr>
+              <a:lnSpc>
+                <a:spcPts val="1240"/>
+              </a:lnSpc>
+              <a:spcAft>
+                <a:spcPts val="0"/>
+              </a:spcAft>
+              <a:defRPr sz="1000" b="1">
+                <a:solidFill>
+                  <a:srgbClr val="68635B"/>
+                </a:solidFill>
+                <a:latin typeface="Arial"/>
+              </a:defRPr>
+            </a:pPr>
+            <a:r>
+              <a:t>RESPONZIVNÍ HIERARCHIE</a:t>
+            </a:r>
+          </a:p>
+        </p:txBody>
+      </p:sp>
+      <p:sp>
+        <p:nvSpPr>
+          <p:cNvPr id="7" name="Rectangle 6"/>
           <p:cNvSpPr/>
           <p:nvPr/>
         </p:nvSpPr>
         <p:spPr>
           <a:xfrm>
-            <a:off x="1866900" y="368300"/>
-            <a:ext cx="88900" cy="431800"/>
+            <a:off x="533400" y="1155700"/>
+            <a:ext cx="11125200" cy="25400"/>
           </a:xfrm>
           <a:prstGeom prst="rect">
             <a:avLst/>
           </a:prstGeom>
           <a:solidFill>
-            <a:srgbClr val="F45E2B"/>
+            <a:srgbClr val="181817"/>
           </a:solidFill>
           <a:ln>
             <a:noFill/>
@@ -5959,14 +5915,14 @@
       </p:sp>
       <p:sp>
         <p:nvSpPr>
-          <p:cNvPr id="7" name="TextBox 6"/>
+          <p:cNvPr id="8" name="TextBox 7"/>
           <p:cNvSpPr txBox="1"/>
           <p:nvPr/>
         </p:nvSpPr>
         <p:spPr>
           <a:xfrm>
-            <a:off x="5588000" y="533400"/>
-            <a:ext cx="6070600" cy="220979"/>
+            <a:off x="508000" y="1422400"/>
+            <a:ext cx="11176000" cy="1079500"/>
           </a:xfrm>
           <a:prstGeom prst="rect">
             <a:avLst/>
@@ -5981,34 +5937,34 @@
           <a:p>
             <a:pPr>
               <a:lnSpc>
-                <a:spcPts val="1240"/>
-              </a:lnSpc>
-              <a:spcAft>
-                <a:spcPts val="0"/>
-              </a:spcAft>
-              <a:defRPr sz="1000" b="1">
-                <a:solidFill>
-                  <a:srgbClr val="68635B"/>
-                </a:solidFill>
-                <a:latin typeface="Arial"/>
-              </a:defRPr>
-            </a:pPr>
-            <a:r>
-              <a:t>RESPONZIVNÍ HIERARCHIE</a:t>
-            </a:r>
-          </a:p>
-        </p:txBody>
-      </p:sp>
-      <p:sp>
-        <p:nvSpPr>
-          <p:cNvPr id="8" name="Rectangle 7"/>
+                <a:spcPts val="3740"/>
+              </a:lnSpc>
+              <a:spcAft>
+                <a:spcPts val="0"/>
+              </a:spcAft>
+              <a:defRPr sz="3400" b="1">
+                <a:solidFill>
+                  <a:srgbClr val="181817"/>
+                </a:solidFill>
+                <a:latin typeface="Arial"/>
+              </a:defRPr>
+            </a:pPr>
+            <a:r>
+              <a:t>Malý displej je výchozí.</a:t>
+            </a:r>
+          </a:p>
+        </p:txBody>
+      </p:sp>
+      <p:sp>
+        <p:nvSpPr>
+          <p:cNvPr id="9" name="Rectangle 8"/>
           <p:cNvSpPr/>
           <p:nvPr/>
         </p:nvSpPr>
         <p:spPr>
           <a:xfrm>
-            <a:off x="533400" y="1155700"/>
-            <a:ext cx="11125200" cy="25400"/>
+            <a:off x="533400" y="2768600"/>
+            <a:ext cx="5448300" cy="2603500"/>
           </a:xfrm>
           <a:prstGeom prst="rect">
             <a:avLst/>
@@ -6044,48 +6000,6 @@
       </p:sp>
       <p:sp>
         <p:nvSpPr>
-          <p:cNvPr id="9" name="TextBox 8"/>
-          <p:cNvSpPr txBox="1"/>
-          <p:nvPr/>
-        </p:nvSpPr>
-        <p:spPr>
-          <a:xfrm>
-            <a:off x="508000" y="1422400"/>
-            <a:ext cx="11176000" cy="1079500"/>
-          </a:xfrm>
-          <a:prstGeom prst="rect">
-            <a:avLst/>
-          </a:prstGeom>
-          <a:noFill/>
-        </p:spPr>
-        <p:txBody>
-          <a:bodyPr wrap="none" lIns="0" rIns="0" tIns="0" bIns="0">
-            <a:spAutoFit/>
-          </a:bodyPr>
-          <a:lstStyle/>
-          <a:p>
-            <a:pPr>
-              <a:lnSpc>
-                <a:spcPts val="3740"/>
-              </a:lnSpc>
-              <a:spcAft>
-                <a:spcPts val="0"/>
-              </a:spcAft>
-              <a:defRPr sz="3400" b="1">
-                <a:solidFill>
-                  <a:srgbClr val="181817"/>
-                </a:solidFill>
-                <a:latin typeface="Arial"/>
-              </a:defRPr>
-            </a:pPr>
-            <a:r>
-              <a:t>Malý displej je výchozí.</a:t>
-            </a:r>
-          </a:p>
-        </p:txBody>
-      </p:sp>
-      <p:sp>
-        <p:nvSpPr>
           <p:cNvPr id="10" name="Rectangle 9"/>
           <p:cNvSpPr/>
           <p:nvPr/>
@@ -6093,13 +6007,13 @@
         <p:spPr>
           <a:xfrm>
             <a:off x="533400" y="2768600"/>
-            <a:ext cx="5448300" cy="2603500"/>
+            <a:ext cx="5448300" cy="76200"/>
           </a:xfrm>
           <a:prstGeom prst="rect">
             <a:avLst/>
           </a:prstGeom>
           <a:solidFill>
-            <a:srgbClr val="181817"/>
+            <a:srgbClr val="F45E2B"/>
           </a:solidFill>
           <a:ln>
             <a:noFill/>
@@ -6129,20 +6043,139 @@
       </p:sp>
       <p:sp>
         <p:nvSpPr>
-          <p:cNvPr id="11" name="Rectangle 10"/>
+          <p:cNvPr id="11" name="TextBox 10"/>
+          <p:cNvSpPr txBox="1"/>
+          <p:nvPr/>
+        </p:nvSpPr>
+        <p:spPr>
+          <a:xfrm>
+            <a:off x="749300" y="3035300"/>
+            <a:ext cx="5016500" cy="685800"/>
+          </a:xfrm>
+          <a:prstGeom prst="rect">
+            <a:avLst/>
+          </a:prstGeom>
+          <a:noFill/>
+        </p:spPr>
+        <p:txBody>
+          <a:bodyPr wrap="none" lIns="0" rIns="0" tIns="0" bIns="0">
+            <a:spAutoFit/>
+          </a:bodyPr>
+          <a:lstStyle/>
+          <a:p>
+            <a:pPr>
+              <a:lnSpc>
+                <a:spcPts val="2200"/>
+              </a:lnSpc>
+              <a:spcAft>
+                <a:spcPts val="0"/>
+              </a:spcAft>
+              <a:defRPr sz="2000" b="1">
+                <a:solidFill>
+                  <a:srgbClr val="F4F0E7"/>
+                </a:solidFill>
+                <a:latin typeface="Arial"/>
+              </a:defRPr>
+            </a:pPr>
+            <a:r>
+              <a:t>Mobil</a:t>
+            </a:r>
+          </a:p>
+        </p:txBody>
+      </p:sp>
+      <p:sp>
+        <p:nvSpPr>
+          <p:cNvPr id="12" name="TextBox 11"/>
+          <p:cNvSpPr txBox="1"/>
+          <p:nvPr/>
+        </p:nvSpPr>
+        <p:spPr>
+          <a:xfrm>
+            <a:off x="749300" y="3733800"/>
+            <a:ext cx="5016500" cy="1511300"/>
+          </a:xfrm>
+          <a:prstGeom prst="rect">
+            <a:avLst/>
+          </a:prstGeom>
+          <a:noFill/>
+        </p:spPr>
+        <p:txBody>
+          <a:bodyPr wrap="none" lIns="0" rIns="0" tIns="0" bIns="0">
+            <a:spAutoFit/>
+          </a:bodyPr>
+          <a:lstStyle/>
+          <a:p>
+            <a:pPr>
+              <a:lnSpc>
+                <a:spcPts val="1689"/>
+              </a:lnSpc>
+              <a:spcAft>
+                <a:spcPts val="0"/>
+              </a:spcAft>
+              <a:defRPr sz="1420" b="0">
+                <a:solidFill>
+                  <a:srgbClr val="F4F0E7"/>
+                </a:solidFill>
+                <a:latin typeface="Arial"/>
+              </a:defRPr>
+            </a:pPr>
+            <a:r>
+              <a:t>Jeden sloupec, zalamovaná navigace a filtry.</a:t>
+            </a:r>
+          </a:p>
+          <a:p>
+            <a:pPr>
+              <a:lnSpc>
+                <a:spcPts val="1689"/>
+              </a:lnSpc>
+              <a:spcAft>
+                <a:spcPts val="0"/>
+              </a:spcAft>
+              <a:defRPr sz="1420" b="0">
+                <a:solidFill>
+                  <a:srgbClr val="F4F0E7"/>
+                </a:solidFill>
+                <a:latin typeface="Arial"/>
+              </a:defRPr>
+            </a:pPr>
+          </a:p>
+          <a:p>
+            <a:pPr>
+              <a:lnSpc>
+                <a:spcPts val="1689"/>
+              </a:lnSpc>
+              <a:spcAft>
+                <a:spcPts val="0"/>
+              </a:spcAft>
+              <a:defRPr sz="1420" b="0">
+                <a:solidFill>
+                  <a:srgbClr val="F4F0E7"/>
+                </a:solidFill>
+                <a:latin typeface="Arial"/>
+              </a:defRPr>
+            </a:pPr>
+            <a:r>
+              <a:t>Název a hlavní akce před delším obsahem.</a:t>
+            </a:r>
+          </a:p>
+        </p:txBody>
+      </p:sp>
+      <p:sp>
+        <p:nvSpPr>
+          <p:cNvPr id="13" name="Rectangle 12"/>
           <p:cNvSpPr/>
           <p:nvPr/>
         </p:nvSpPr>
         <p:spPr>
           <a:xfrm>
-            <a:off x="533400" y="2768600"/>
-            <a:ext cx="5448300" cy="76200"/>
+            <a:off x="6210300" y="2768600"/>
+            <a:ext cx="5448300" cy="2603500"/>
           </a:xfrm>
           <a:prstGeom prst="rect">
             <a:avLst/>
           </a:prstGeom>
           <a:solidFill>
-            <a:srgbClr val="F45E2B"/>
+            <a:srgbClr val="E7E0D5"/>
           </a:solidFill>
           <a:ln>
             <a:noFill/>
@@ -6172,125 +6205,6 @@
       </p:sp>
       <p:sp>
         <p:nvSpPr>
-          <p:cNvPr id="12" name="TextBox 11"/>
-          <p:cNvSpPr txBox="1"/>
-          <p:nvPr/>
-        </p:nvSpPr>
-        <p:spPr>
-          <a:xfrm>
-            <a:off x="749300" y="3035300"/>
-            <a:ext cx="5016500" cy="685800"/>
-          </a:xfrm>
-          <a:prstGeom prst="rect">
-            <a:avLst/>
-          </a:prstGeom>
-          <a:noFill/>
-        </p:spPr>
-        <p:txBody>
-          <a:bodyPr wrap="none" lIns="0" rIns="0" tIns="0" bIns="0">
-            <a:spAutoFit/>
-          </a:bodyPr>
-          <a:lstStyle/>
-          <a:p>
-            <a:pPr>
-              <a:lnSpc>
-                <a:spcPts val="2200"/>
-              </a:lnSpc>
-              <a:spcAft>
-                <a:spcPts val="0"/>
-              </a:spcAft>
-              <a:defRPr sz="2000" b="1">
-                <a:solidFill>
-                  <a:srgbClr val="F4F0E7"/>
-                </a:solidFill>
-                <a:latin typeface="Arial"/>
-              </a:defRPr>
-            </a:pPr>
-            <a:r>
-              <a:t>Mobil</a:t>
-            </a:r>
-          </a:p>
-        </p:txBody>
-      </p:sp>
-      <p:sp>
-        <p:nvSpPr>
-          <p:cNvPr id="13" name="TextBox 12"/>
-          <p:cNvSpPr txBox="1"/>
-          <p:nvPr/>
-        </p:nvSpPr>
-        <p:spPr>
-          <a:xfrm>
-            <a:off x="749300" y="3733800"/>
-            <a:ext cx="5016500" cy="1511300"/>
-          </a:xfrm>
-          <a:prstGeom prst="rect">
-            <a:avLst/>
-          </a:prstGeom>
-          <a:noFill/>
-        </p:spPr>
-        <p:txBody>
-          <a:bodyPr wrap="none" lIns="0" rIns="0" tIns="0" bIns="0">
-            <a:spAutoFit/>
-          </a:bodyPr>
-          <a:lstStyle/>
-          <a:p>
-            <a:pPr>
-              <a:lnSpc>
-                <a:spcPts val="1689"/>
-              </a:lnSpc>
-              <a:spcAft>
-                <a:spcPts val="0"/>
-              </a:spcAft>
-              <a:defRPr sz="1420" b="0">
-                <a:solidFill>
-                  <a:srgbClr val="F4F0E7"/>
-                </a:solidFill>
-                <a:latin typeface="Arial"/>
-              </a:defRPr>
-            </a:pPr>
-            <a:r>
-              <a:t>Jeden sloupec, zalamovaná navigace a filtry.</a:t>
-            </a:r>
-          </a:p>
-          <a:p>
-            <a:pPr>
-              <a:lnSpc>
-                <a:spcPts val="1689"/>
-              </a:lnSpc>
-              <a:spcAft>
-                <a:spcPts val="0"/>
-              </a:spcAft>
-              <a:defRPr sz="1420" b="0">
-                <a:solidFill>
-                  <a:srgbClr val="F4F0E7"/>
-                </a:solidFill>
-                <a:latin typeface="Arial"/>
-              </a:defRPr>
-            </a:pPr>
-          </a:p>
-          <a:p>
-            <a:pPr>
-              <a:lnSpc>
-                <a:spcPts val="1689"/>
-              </a:lnSpc>
-              <a:spcAft>
-                <a:spcPts val="0"/>
-              </a:spcAft>
-              <a:defRPr sz="1420" b="0">
-                <a:solidFill>
-                  <a:srgbClr val="F4F0E7"/>
-                </a:solidFill>
-                <a:latin typeface="Arial"/>
-              </a:defRPr>
-            </a:pPr>
-            <a:r>
-              <a:t>Název a hlavní akce před delším obsahem.</a:t>
-            </a:r>
-          </a:p>
-        </p:txBody>
-      </p:sp>
-      <p:sp>
-        <p:nvSpPr>
           <p:cNvPr id="14" name="Rectangle 13"/>
           <p:cNvSpPr/>
           <p:nvPr/>
@@ -6298,13 +6212,13 @@
         <p:spPr>
           <a:xfrm>
             <a:off x="6210300" y="2768600"/>
-            <a:ext cx="5448300" cy="2603500"/>
+            <a:ext cx="5448300" cy="76200"/>
           </a:xfrm>
           <a:prstGeom prst="rect">
             <a:avLst/>
           </a:prstGeom>
           <a:solidFill>
-            <a:srgbClr val="E7E0D5"/>
+            <a:srgbClr val="F45E2B"/>
           </a:solidFill>
           <a:ln>
             <a:noFill/>
@@ -6334,50 +6248,7 @@
       </p:sp>
       <p:sp>
         <p:nvSpPr>
-          <p:cNvPr id="15" name="Rectangle 14"/>
-          <p:cNvSpPr/>
-          <p:nvPr/>
-        </p:nvSpPr>
-        <p:spPr>
-          <a:xfrm>
-            <a:off x="6210300" y="2768600"/>
-            <a:ext cx="5448300" cy="76200"/>
-          </a:xfrm>
-          <a:prstGeom prst="rect">
-            <a:avLst/>
-          </a:prstGeom>
-          <a:solidFill>
-            <a:srgbClr val="F45E2B"/>
-          </a:solidFill>
-          <a:ln>
-            <a:noFill/>
-          </a:ln>
-        </p:spPr>
-        <p:style>
-          <a:lnRef idx="1">
-            <a:schemeClr val="accent1"/>
-          </a:lnRef>
-          <a:fillRef idx="3">
-            <a:schemeClr val="accent1"/>
-          </a:fillRef>
-          <a:effectRef idx="2">
-            <a:schemeClr val="accent1"/>
-          </a:effectRef>
-          <a:fontRef idx="minor">
-            <a:schemeClr val="lt1"/>
-          </a:fontRef>
-        </p:style>
-        <p:txBody>
-          <a:bodyPr rtlCol="0" anchor="ctr"/>
-          <a:lstStyle/>
-          <a:p>
-            <a:pPr algn="ctr"/>
-          </a:p>
-        </p:txBody>
-      </p:sp>
-      <p:sp>
-        <p:nvSpPr>
-          <p:cNvPr id="16" name="TextBox 15"/>
+          <p:cNvPr id="15" name="TextBox 14"/>
           <p:cNvSpPr txBox="1"/>
           <p:nvPr/>
         </p:nvSpPr>
@@ -6419,7 +6290,7 @@
       </p:sp>
       <p:sp>
         <p:nvSpPr>
-          <p:cNvPr id="17" name="TextBox 16"/>
+          <p:cNvPr id="16" name="TextBox 15"/>
           <p:cNvSpPr txBox="1"/>
           <p:nvPr/>
         </p:nvSpPr>
@@ -6515,7 +6386,7 @@
       </p:sp>
       <p:sp>
         <p:nvSpPr>
-          <p:cNvPr id="18" name="TextBox 17"/>
+          <p:cNvPr id="17" name="TextBox 16"/>
           <p:cNvSpPr txBox="1"/>
           <p:nvPr/>
         </p:nvSpPr>
@@ -6557,7 +6428,7 @@
       </p:sp>
       <p:sp>
         <p:nvSpPr>
-          <p:cNvPr id="19" name="TextBox 18"/>
+          <p:cNvPr id="18" name="TextBox 17"/>
           <p:cNvSpPr txBox="1"/>
           <p:nvPr/>
         </p:nvSpPr>
@@ -6599,7 +6470,7 @@
       </p:sp>
       <p:sp>
         <p:nvSpPr>
-          <p:cNvPr id="20" name="TextBox 19"/>
+          <p:cNvPr id="19" name="TextBox 18"/>
           <p:cNvSpPr txBox="1"/>
           <p:nvPr/>
         </p:nvSpPr>
@@ -6828,20 +6699,62 @@
       </p:sp>
       <p:sp>
         <p:nvSpPr>
-          <p:cNvPr id="6" name="Rectangle 5"/>
+          <p:cNvPr id="6" name="TextBox 5"/>
+          <p:cNvSpPr txBox="1"/>
+          <p:nvPr/>
+        </p:nvSpPr>
+        <p:spPr>
+          <a:xfrm>
+            <a:off x="5588000" y="533400"/>
+            <a:ext cx="6070600" cy="220979"/>
+          </a:xfrm>
+          <a:prstGeom prst="rect">
+            <a:avLst/>
+          </a:prstGeom>
+          <a:noFill/>
+        </p:spPr>
+        <p:txBody>
+          <a:bodyPr wrap="none" lIns="0" rIns="0" tIns="0" bIns="0">
+            <a:spAutoFit/>
+          </a:bodyPr>
+          <a:lstStyle/>
+          <a:p>
+            <a:pPr>
+              <a:lnSpc>
+                <a:spcPts val="1240"/>
+              </a:lnSpc>
+              <a:spcAft>
+                <a:spcPts val="0"/>
+              </a:spcAft>
+              <a:defRPr sz="1000" b="1">
+                <a:solidFill>
+                  <a:srgbClr val="68635B"/>
+                </a:solidFill>
+                <a:latin typeface="Arial"/>
+              </a:defRPr>
+            </a:pPr>
+            <a:r>
+              <a:t>ŽIVÝ PRŮCHOD PROGRAMEM</a:t>
+            </a:r>
+          </a:p>
+        </p:txBody>
+      </p:sp>
+      <p:sp>
+        <p:nvSpPr>
+          <p:cNvPr id="7" name="Rectangle 6"/>
           <p:cNvSpPr/>
           <p:nvPr/>
         </p:nvSpPr>
         <p:spPr>
           <a:xfrm>
-            <a:off x="1866900" y="368300"/>
-            <a:ext cx="88900" cy="431800"/>
+            <a:off x="533400" y="1155700"/>
+            <a:ext cx="11125200" cy="25400"/>
           </a:xfrm>
           <a:prstGeom prst="rect">
             <a:avLst/>
           </a:prstGeom>
           <a:solidFill>
-            <a:srgbClr val="F45E2B"/>
+            <a:srgbClr val="181817"/>
           </a:solidFill>
           <a:ln>
             <a:noFill/>
@@ -6871,14 +6784,14 @@
       </p:sp>
       <p:sp>
         <p:nvSpPr>
-          <p:cNvPr id="7" name="TextBox 6"/>
+          <p:cNvPr id="8" name="TextBox 7"/>
           <p:cNvSpPr txBox="1"/>
           <p:nvPr/>
         </p:nvSpPr>
         <p:spPr>
           <a:xfrm>
-            <a:off x="5588000" y="533400"/>
-            <a:ext cx="6070600" cy="220979"/>
+            <a:off x="508000" y="1422400"/>
+            <a:ext cx="11176000" cy="1079500"/>
           </a:xfrm>
           <a:prstGeom prst="rect">
             <a:avLst/>
@@ -6893,34 +6806,34 @@
           <a:p>
             <a:pPr>
               <a:lnSpc>
-                <a:spcPts val="1240"/>
-              </a:lnSpc>
-              <a:spcAft>
-                <a:spcPts val="0"/>
-              </a:spcAft>
-              <a:defRPr sz="1000" b="1">
-                <a:solidFill>
-                  <a:srgbClr val="68635B"/>
-                </a:solidFill>
-                <a:latin typeface="Arial"/>
-              </a:defRPr>
-            </a:pPr>
-            <a:r>
-              <a:t>ŽIVÝ PRŮCHOD PROGRAMEM</a:t>
-            </a:r>
-          </a:p>
-        </p:txBody>
-      </p:sp>
-      <p:sp>
-        <p:nvSpPr>
-          <p:cNvPr id="8" name="Rectangle 7"/>
+                <a:spcPts val="3740"/>
+              </a:lnSpc>
+              <a:spcAft>
+                <a:spcPts val="0"/>
+              </a:spcAft>
+              <a:defRPr sz="3400" b="1">
+                <a:solidFill>
+                  <a:srgbClr val="181817"/>
+                </a:solidFill>
+                <a:latin typeface="Arial"/>
+              </a:defRPr>
+            </a:pPr>
+            <a:r>
+              <a:t>S1 / Od přehledu k výběru.</a:t>
+            </a:r>
+          </a:p>
+        </p:txBody>
+      </p:sp>
+      <p:sp>
+        <p:nvSpPr>
+          <p:cNvPr id="9" name="Rectangle 8"/>
           <p:cNvSpPr/>
           <p:nvPr/>
         </p:nvSpPr>
         <p:spPr>
           <a:xfrm>
-            <a:off x="533400" y="1155700"/>
-            <a:ext cx="11125200" cy="25400"/>
+            <a:off x="533400" y="2946400"/>
+            <a:ext cx="2552700" cy="1765300"/>
           </a:xfrm>
           <a:prstGeom prst="rect">
             <a:avLst/>
@@ -6956,14 +6869,14 @@
       </p:sp>
       <p:sp>
         <p:nvSpPr>
-          <p:cNvPr id="9" name="TextBox 8"/>
+          <p:cNvPr id="10" name="TextBox 9"/>
           <p:cNvSpPr txBox="1"/>
           <p:nvPr/>
         </p:nvSpPr>
         <p:spPr>
           <a:xfrm>
-            <a:off x="508000" y="1422400"/>
-            <a:ext cx="11176000" cy="1079500"/>
+            <a:off x="723900" y="3162300"/>
+            <a:ext cx="2133600" cy="236728"/>
           </a:xfrm>
           <a:prstGeom prst="rect">
             <a:avLst/>
@@ -6978,12 +6891,138 @@
           <a:p>
             <a:pPr>
               <a:lnSpc>
-                <a:spcPts val="3740"/>
-              </a:lnSpc>
-              <a:spcAft>
-                <a:spcPts val="0"/>
-              </a:spcAft>
-              <a:defRPr sz="3400" b="1">
+                <a:spcPts val="1364"/>
+              </a:lnSpc>
+              <a:spcAft>
+                <a:spcPts val="0"/>
+              </a:spcAft>
+              <a:defRPr sz="1100" b="1">
+                <a:solidFill>
+                  <a:srgbClr val="F45E2B"/>
+                </a:solidFill>
+                <a:latin typeface="Arial"/>
+              </a:defRPr>
+            </a:pPr>
+            <a:r>
+              <a:t>01</a:t>
+            </a:r>
+          </a:p>
+        </p:txBody>
+      </p:sp>
+      <p:sp>
+        <p:nvSpPr>
+          <p:cNvPr id="11" name="TextBox 10"/>
+          <p:cNvSpPr txBox="1"/>
+          <p:nvPr/>
+        </p:nvSpPr>
+        <p:spPr>
+          <a:xfrm>
+            <a:off x="723900" y="3568700"/>
+            <a:ext cx="2133600" cy="444500"/>
+          </a:xfrm>
+          <a:prstGeom prst="rect">
+            <a:avLst/>
+          </a:prstGeom>
+          <a:noFill/>
+        </p:spPr>
+        <p:txBody>
+          <a:bodyPr wrap="none" lIns="0" rIns="0" tIns="0" bIns="0">
+            <a:spAutoFit/>
+          </a:bodyPr>
+          <a:lstStyle/>
+          <a:p>
+            <a:pPr>
+              <a:lnSpc>
+                <a:spcPts val="2728"/>
+              </a:lnSpc>
+              <a:spcAft>
+                <a:spcPts val="0"/>
+              </a:spcAft>
+              <a:defRPr sz="2200" b="1">
+                <a:solidFill>
+                  <a:srgbClr val="F4F0E7"/>
+                </a:solidFill>
+                <a:latin typeface="Arial"/>
+              </a:defRPr>
+            </a:pPr>
+            <a:r>
+              <a:t>Program</a:t>
+            </a:r>
+          </a:p>
+        </p:txBody>
+      </p:sp>
+      <p:sp>
+        <p:nvSpPr>
+          <p:cNvPr id="12" name="TextBox 11"/>
+          <p:cNvSpPr txBox="1"/>
+          <p:nvPr/>
+        </p:nvSpPr>
+        <p:spPr>
+          <a:xfrm>
+            <a:off x="723900" y="4140200"/>
+            <a:ext cx="2133600" cy="406400"/>
+          </a:xfrm>
+          <a:prstGeom prst="rect">
+            <a:avLst/>
+          </a:prstGeom>
+          <a:noFill/>
+        </p:spPr>
+        <p:txBody>
+          <a:bodyPr wrap="none" lIns="0" rIns="0" tIns="0" bIns="0">
+            <a:spAutoFit/>
+          </a:bodyPr>
+          <a:lstStyle/>
+          <a:p>
+            <a:pPr>
+              <a:lnSpc>
+                <a:spcPts val="1488"/>
+              </a:lnSpc>
+              <a:spcAft>
+                <a:spcPts val="0"/>
+              </a:spcAft>
+              <a:defRPr sz="1200" b="0">
+                <a:solidFill>
+                  <a:srgbClr val="F4F0E7"/>
+                </a:solidFill>
+                <a:latin typeface="Arial"/>
+              </a:defRPr>
+            </a:pPr>
+            <a:r>
+              <a:t>Otevřít přehled</a:t>
+            </a:r>
+          </a:p>
+        </p:txBody>
+      </p:sp>
+      <p:sp>
+        <p:nvSpPr>
+          <p:cNvPr id="13" name="TextBox 12"/>
+          <p:cNvSpPr txBox="1"/>
+          <p:nvPr/>
+        </p:nvSpPr>
+        <p:spPr>
+          <a:xfrm>
+            <a:off x="3098800" y="3657600"/>
+            <a:ext cx="292100" cy="394208"/>
+          </a:xfrm>
+          <a:prstGeom prst="rect">
+            <a:avLst/>
+          </a:prstGeom>
+          <a:noFill/>
+        </p:spPr>
+        <p:txBody>
+          <a:bodyPr wrap="none" lIns="0" rIns="0" tIns="0" bIns="0">
+            <a:spAutoFit/>
+          </a:bodyPr>
+          <a:lstStyle/>
+          <a:p>
+            <a:pPr>
+              <a:lnSpc>
+                <a:spcPts val="2604"/>
+              </a:lnSpc>
+              <a:spcAft>
+                <a:spcPts val="0"/>
+              </a:spcAft>
+              <a:defRPr sz="2100" b="1">
                 <a:solidFill>
                   <a:srgbClr val="181817"/>
                 </a:solidFill>
@@ -6991,27 +7030,27 @@
               </a:defRPr>
             </a:pPr>
             <a:r>
-              <a:t>S1 / Od přehledu k výběru.</a:t>
-            </a:r>
-          </a:p>
-        </p:txBody>
-      </p:sp>
-      <p:sp>
-        <p:nvSpPr>
-          <p:cNvPr id="10" name="Rectangle 9"/>
+              <a:t>›</a:t>
+            </a:r>
+          </a:p>
+        </p:txBody>
+      </p:sp>
+      <p:sp>
+        <p:nvSpPr>
+          <p:cNvPr id="14" name="Rectangle 13"/>
           <p:cNvSpPr/>
           <p:nvPr/>
         </p:nvSpPr>
         <p:spPr>
           <a:xfrm>
-            <a:off x="533400" y="2946400"/>
+            <a:off x="3390900" y="2946400"/>
             <a:ext cx="2552700" cy="1765300"/>
           </a:xfrm>
           <a:prstGeom prst="rect">
             <a:avLst/>
           </a:prstGeom>
           <a:solidFill>
-            <a:srgbClr val="181817"/>
+            <a:srgbClr val="E7E0D5"/>
           </a:solidFill>
           <a:ln>
             <a:noFill/>
@@ -7041,13 +7080,13 @@
       </p:sp>
       <p:sp>
         <p:nvSpPr>
-          <p:cNvPr id="11" name="TextBox 10"/>
+          <p:cNvPr id="15" name="TextBox 14"/>
           <p:cNvSpPr txBox="1"/>
           <p:nvPr/>
         </p:nvSpPr>
         <p:spPr>
           <a:xfrm>
-            <a:off x="723900" y="3162300"/>
+            <a:off x="3581400" y="3162300"/>
             <a:ext cx="2133600" cy="236728"/>
           </a:xfrm>
           <a:prstGeom prst="rect">
@@ -7076,20 +7115,20 @@
               </a:defRPr>
             </a:pPr>
             <a:r>
-              <a:t>01</a:t>
-            </a:r>
-          </a:p>
-        </p:txBody>
-      </p:sp>
-      <p:sp>
-        <p:nvSpPr>
-          <p:cNvPr id="12" name="TextBox 11"/>
+              <a:t>02</a:t>
+            </a:r>
+          </a:p>
+        </p:txBody>
+      </p:sp>
+      <p:sp>
+        <p:nvSpPr>
+          <p:cNvPr id="16" name="TextBox 15"/>
           <p:cNvSpPr txBox="1"/>
           <p:nvPr/>
         </p:nvSpPr>
         <p:spPr>
           <a:xfrm>
-            <a:off x="723900" y="3568700"/>
+            <a:off x="3581400" y="3568700"/>
             <a:ext cx="2133600" cy="444500"/>
           </a:xfrm>
           <a:prstGeom prst="rect">
@@ -7112,26 +7151,26 @@
               </a:spcAft>
               <a:defRPr sz="2200" b="1">
                 <a:solidFill>
-                  <a:srgbClr val="F4F0E7"/>
-                </a:solidFill>
-                <a:latin typeface="Arial"/>
-              </a:defRPr>
-            </a:pPr>
-            <a:r>
-              <a:t>Program</a:t>
-            </a:r>
-          </a:p>
-        </p:txBody>
-      </p:sp>
-      <p:sp>
-        <p:nvSpPr>
-          <p:cNvPr id="13" name="TextBox 12"/>
+                  <a:srgbClr val="181817"/>
+                </a:solidFill>
+                <a:latin typeface="Arial"/>
+              </a:defRPr>
+            </a:pPr>
+            <a:r>
+              <a:t>1. srpna</a:t>
+            </a:r>
+          </a:p>
+        </p:txBody>
+      </p:sp>
+      <p:sp>
+        <p:nvSpPr>
+          <p:cNvPr id="17" name="TextBox 16"/>
           <p:cNvSpPr txBox="1"/>
           <p:nvPr/>
         </p:nvSpPr>
         <p:spPr>
           <a:xfrm>
-            <a:off x="723900" y="4140200"/>
+            <a:off x="3581400" y="4140200"/>
             <a:ext cx="2133600" cy="406400"/>
           </a:xfrm>
           <a:prstGeom prst="rect">
@@ -7154,26 +7193,26 @@
               </a:spcAft>
               <a:defRPr sz="1200" b="0">
                 <a:solidFill>
-                  <a:srgbClr val="F4F0E7"/>
-                </a:solidFill>
-                <a:latin typeface="Arial"/>
-              </a:defRPr>
-            </a:pPr>
-            <a:r>
-              <a:t>Otevřít přehled</a:t>
-            </a:r>
-          </a:p>
-        </p:txBody>
-      </p:sp>
-      <p:sp>
-        <p:nvSpPr>
-          <p:cNvPr id="14" name="TextBox 13"/>
+                  <a:srgbClr val="181817"/>
+                </a:solidFill>
+                <a:latin typeface="Arial"/>
+              </a:defRPr>
+            </a:pPr>
+            <a:r>
+              <a:t>Vybrat den</a:t>
+            </a:r>
+          </a:p>
+        </p:txBody>
+      </p:sp>
+      <p:sp>
+        <p:nvSpPr>
+          <p:cNvPr id="18" name="TextBox 17"/>
           <p:cNvSpPr txBox="1"/>
           <p:nvPr/>
         </p:nvSpPr>
         <p:spPr>
           <a:xfrm>
-            <a:off x="3098800" y="3657600"/>
+            <a:off x="5956300" y="3657600"/>
             <a:ext cx="292100" cy="394208"/>
           </a:xfrm>
           <a:prstGeom prst="rect">
@@ -7209,13 +7248,13 @@
       </p:sp>
       <p:sp>
         <p:nvSpPr>
-          <p:cNvPr id="15" name="Rectangle 14"/>
+          <p:cNvPr id="19" name="Rectangle 18"/>
           <p:cNvSpPr/>
           <p:nvPr/>
         </p:nvSpPr>
         <p:spPr>
           <a:xfrm>
-            <a:off x="3390900" y="2946400"/>
+            <a:off x="6248400" y="2946400"/>
             <a:ext cx="2552700" cy="1765300"/>
           </a:xfrm>
           <a:prstGeom prst="rect">
@@ -7252,13 +7291,13 @@
       </p:sp>
       <p:sp>
         <p:nvSpPr>
-          <p:cNvPr id="16" name="TextBox 15"/>
+          <p:cNvPr id="20" name="TextBox 19"/>
           <p:cNvSpPr txBox="1"/>
           <p:nvPr/>
         </p:nvSpPr>
         <p:spPr>
           <a:xfrm>
-            <a:off x="3581400" y="3162300"/>
+            <a:off x="6438900" y="3162300"/>
             <a:ext cx="2133600" cy="236728"/>
           </a:xfrm>
           <a:prstGeom prst="rect">
@@ -7287,20 +7326,20 @@
               </a:defRPr>
             </a:pPr>
             <a:r>
-              <a:t>02</a:t>
-            </a:r>
-          </a:p>
-        </p:txBody>
-      </p:sp>
-      <p:sp>
-        <p:nvSpPr>
-          <p:cNvPr id="17" name="TextBox 16"/>
+              <a:t>03</a:t>
+            </a:r>
+          </a:p>
+        </p:txBody>
+      </p:sp>
+      <p:sp>
+        <p:nvSpPr>
+          <p:cNvPr id="21" name="TextBox 20"/>
           <p:cNvSpPr txBox="1"/>
           <p:nvPr/>
         </p:nvSpPr>
         <p:spPr>
           <a:xfrm>
-            <a:off x="3581400" y="3568700"/>
+            <a:off x="6438900" y="3568700"/>
             <a:ext cx="2133600" cy="444500"/>
           </a:xfrm>
           <a:prstGeom prst="rect">
@@ -7329,20 +7368,20 @@
               </a:defRPr>
             </a:pPr>
             <a:r>
-              <a:t>1. srpna</a:t>
-            </a:r>
-          </a:p>
-        </p:txBody>
-      </p:sp>
-      <p:sp>
-        <p:nvSpPr>
-          <p:cNvPr id="18" name="TextBox 17"/>
+              <a:t>River Stage</a:t>
+            </a:r>
+          </a:p>
+        </p:txBody>
+      </p:sp>
+      <p:sp>
+        <p:nvSpPr>
+          <p:cNvPr id="22" name="TextBox 21"/>
           <p:cNvSpPr txBox="1"/>
           <p:nvPr/>
         </p:nvSpPr>
         <p:spPr>
           <a:xfrm>
-            <a:off x="3581400" y="4140200"/>
+            <a:off x="6438900" y="4140200"/>
             <a:ext cx="2133600" cy="406400"/>
           </a:xfrm>
           <a:prstGeom prst="rect">
@@ -7371,20 +7410,20 @@
               </a:defRPr>
             </a:pPr>
             <a:r>
-              <a:t>Vybrat den</a:t>
-            </a:r>
-          </a:p>
-        </p:txBody>
-      </p:sp>
-      <p:sp>
-        <p:nvSpPr>
-          <p:cNvPr id="19" name="TextBox 18"/>
+              <a:t>Zvolit scénu</a:t>
+            </a:r>
+          </a:p>
+        </p:txBody>
+      </p:sp>
+      <p:sp>
+        <p:nvSpPr>
+          <p:cNvPr id="23" name="TextBox 22"/>
           <p:cNvSpPr txBox="1"/>
           <p:nvPr/>
         </p:nvSpPr>
         <p:spPr>
           <a:xfrm>
-            <a:off x="5956300" y="3657600"/>
+            <a:off x="8813800" y="3657600"/>
             <a:ext cx="292100" cy="394208"/>
           </a:xfrm>
           <a:prstGeom prst="rect">
@@ -7420,13 +7459,13 @@
       </p:sp>
       <p:sp>
         <p:nvSpPr>
-          <p:cNvPr id="20" name="Rectangle 19"/>
+          <p:cNvPr id="24" name="Rectangle 23"/>
           <p:cNvSpPr/>
           <p:nvPr/>
         </p:nvSpPr>
         <p:spPr>
           <a:xfrm>
-            <a:off x="6248400" y="2946400"/>
+            <a:off x="9105900" y="2946400"/>
             <a:ext cx="2552700" cy="1765300"/>
           </a:xfrm>
           <a:prstGeom prst="rect">
@@ -7463,13 +7502,13 @@
       </p:sp>
       <p:sp>
         <p:nvSpPr>
-          <p:cNvPr id="21" name="TextBox 20"/>
+          <p:cNvPr id="25" name="TextBox 24"/>
           <p:cNvSpPr txBox="1"/>
           <p:nvPr/>
         </p:nvSpPr>
         <p:spPr>
           <a:xfrm>
-            <a:off x="6438900" y="3162300"/>
+            <a:off x="9296400" y="3162300"/>
             <a:ext cx="2133600" cy="236728"/>
           </a:xfrm>
           <a:prstGeom prst="rect">
@@ -7498,20 +7537,20 @@
               </a:defRPr>
             </a:pPr>
             <a:r>
-              <a:t>03</a:t>
-            </a:r>
-          </a:p>
-        </p:txBody>
-      </p:sp>
-      <p:sp>
-        <p:nvSpPr>
-          <p:cNvPr id="22" name="TextBox 21"/>
+              <a:t>04</a:t>
+            </a:r>
+          </a:p>
+        </p:txBody>
+      </p:sp>
+      <p:sp>
+        <p:nvSpPr>
+          <p:cNvPr id="26" name="TextBox 25"/>
           <p:cNvSpPr txBox="1"/>
           <p:nvPr/>
         </p:nvSpPr>
         <p:spPr>
           <a:xfrm>
-            <a:off x="6438900" y="3568700"/>
+            <a:off x="9296400" y="3568700"/>
             <a:ext cx="2133600" cy="444500"/>
           </a:xfrm>
           <a:prstGeom prst="rect">
@@ -7540,20 +7579,20 @@
               </a:defRPr>
             </a:pPr>
             <a:r>
-              <a:t>River Stage</a:t>
-            </a:r>
-          </a:p>
-        </p:txBody>
-      </p:sp>
-      <p:sp>
-        <p:nvSpPr>
-          <p:cNvPr id="23" name="TextBox 22"/>
+              <a:t>Uloženo</a:t>
+            </a:r>
+          </a:p>
+        </p:txBody>
+      </p:sp>
+      <p:sp>
+        <p:nvSpPr>
+          <p:cNvPr id="27" name="TextBox 26"/>
           <p:cNvSpPr txBox="1"/>
           <p:nvPr/>
         </p:nvSpPr>
         <p:spPr>
           <a:xfrm>
-            <a:off x="6438900" y="4140200"/>
+            <a:off x="9296400" y="4140200"/>
             <a:ext cx="2133600" cy="406400"/>
           </a:xfrm>
           <a:prstGeom prst="rect">
@@ -7582,21 +7621,21 @@
               </a:defRPr>
             </a:pPr>
             <a:r>
-              <a:t>Zvolit scénu</a:t>
-            </a:r>
-          </a:p>
-        </p:txBody>
-      </p:sp>
-      <p:sp>
-        <p:nvSpPr>
-          <p:cNvPr id="24" name="TextBox 23"/>
+              <a:t>Obnovit stránku</a:t>
+            </a:r>
+          </a:p>
+        </p:txBody>
+      </p:sp>
+      <p:sp>
+        <p:nvSpPr>
+          <p:cNvPr id="28" name="TextBox 27"/>
           <p:cNvSpPr txBox="1"/>
           <p:nvPr/>
         </p:nvSpPr>
         <p:spPr>
           <a:xfrm>
-            <a:off x="8813800" y="3657600"/>
-            <a:ext cx="292100" cy="394208"/>
+            <a:off x="533400" y="5207000"/>
+            <a:ext cx="11125200" cy="1016000"/>
           </a:xfrm>
           <a:prstGeom prst="rect">
             <a:avLst/>
@@ -7611,12 +7650,12 @@
           <a:p>
             <a:pPr>
               <a:lnSpc>
-                <a:spcPts val="2604"/>
-              </a:lnSpc>
-              <a:spcAft>
-                <a:spcPts val="0"/>
-              </a:spcAft>
-              <a:defRPr sz="2100" b="1">
+                <a:spcPts val="2108"/>
+              </a:lnSpc>
+              <a:spcAft>
+                <a:spcPts val="0"/>
+              </a:spcAft>
+              <a:defRPr sz="1700" b="0">
                 <a:solidFill>
                   <a:srgbClr val="181817"/>
                 </a:solidFill>
@@ -7624,64 +7663,40 @@
               </a:defRPr>
             </a:pPr>
             <a:r>
-              <a:t>›</a:t>
-            </a:r>
-          </a:p>
-        </p:txBody>
-      </p:sp>
-      <p:sp>
-        <p:nvSpPr>
-          <p:cNvPr id="25" name="Rectangle 24"/>
-          <p:cNvSpPr/>
-          <p:nvPr/>
-        </p:nvSpPr>
-        <p:spPr>
-          <a:xfrm>
-            <a:off x="9105900" y="2946400"/>
-            <a:ext cx="2552700" cy="1765300"/>
-          </a:xfrm>
-          <a:prstGeom prst="rect">
-            <a:avLst/>
-          </a:prstGeom>
-          <a:solidFill>
-            <a:srgbClr val="E7E0D5"/>
-          </a:solidFill>
-          <a:ln>
-            <a:noFill/>
-          </a:ln>
-        </p:spPr>
-        <p:style>
-          <a:lnRef idx="1">
-            <a:schemeClr val="accent1"/>
-          </a:lnRef>
-          <a:fillRef idx="3">
-            <a:schemeClr val="accent1"/>
-          </a:fillRef>
-          <a:effectRef idx="2">
-            <a:schemeClr val="accent1"/>
-          </a:effectRef>
-          <a:fontRef idx="minor">
-            <a:schemeClr val="lt1"/>
-          </a:fontRef>
-        </p:style>
-        <p:txBody>
-          <a:bodyPr rtlCol="0" anchor="ctr"/>
-          <a:lstStyle/>
-          <a:p>
-            <a:pPr algn="ctr"/>
-          </a:p>
-        </p:txBody>
-      </p:sp>
-      <p:sp>
-        <p:nvSpPr>
-          <p:cNvPr id="26" name="TextBox 25"/>
+              <a:t>Zkontrolovat správný den, scénu a zachování oblíbené akce.</a:t>
+            </a:r>
+          </a:p>
+          <a:p>
+            <a:pPr>
+              <a:lnSpc>
+                <a:spcPts val="2108"/>
+              </a:lnSpc>
+              <a:spcAft>
+                <a:spcPts val="0"/>
+              </a:spcAft>
+              <a:defRPr sz="1700" b="0">
+                <a:solidFill>
+                  <a:srgbClr val="181817"/>
+                </a:solidFill>
+                <a:latin typeface="Arial"/>
+              </a:defRPr>
+            </a:pPr>
+            <a:r>
+              <a:t>Prázdný výběr má srozumitelnou cestu zpět.</a:t>
+            </a:r>
+          </a:p>
+        </p:txBody>
+      </p:sp>
+      <p:sp>
+        <p:nvSpPr>
+          <p:cNvPr id="29" name="TextBox 28"/>
           <p:cNvSpPr txBox="1"/>
           <p:nvPr/>
         </p:nvSpPr>
         <p:spPr>
           <a:xfrm>
-            <a:off x="9296400" y="3162300"/>
-            <a:ext cx="2133600" cy="236728"/>
+            <a:off x="533400" y="6413500"/>
+            <a:ext cx="10033000" cy="181610"/>
           </a:xfrm>
           <a:prstGeom prst="rect">
             <a:avLst/>
@@ -7696,165 +7711,20 @@
           <a:p>
             <a:pPr>
               <a:lnSpc>
-                <a:spcPts val="1364"/>
-              </a:lnSpc>
-              <a:spcAft>
-                <a:spcPts val="0"/>
-              </a:spcAft>
-              <a:defRPr sz="1100" b="1">
-                <a:solidFill>
-                  <a:srgbClr val="F45E2B"/>
-                </a:solidFill>
-                <a:latin typeface="Arial"/>
-              </a:defRPr>
-            </a:pPr>
-            <a:r>
-              <a:t>04</a:t>
-            </a:r>
-          </a:p>
-        </p:txBody>
-      </p:sp>
-      <p:sp>
-        <p:nvSpPr>
-          <p:cNvPr id="27" name="TextBox 26"/>
-          <p:cNvSpPr txBox="1"/>
-          <p:nvPr/>
-        </p:nvSpPr>
-        <p:spPr>
-          <a:xfrm>
-            <a:off x="9296400" y="3568700"/>
-            <a:ext cx="2133600" cy="444500"/>
-          </a:xfrm>
-          <a:prstGeom prst="rect">
-            <a:avLst/>
-          </a:prstGeom>
-          <a:noFill/>
-        </p:spPr>
-        <p:txBody>
-          <a:bodyPr wrap="none" lIns="0" rIns="0" tIns="0" bIns="0">
-            <a:spAutoFit/>
-          </a:bodyPr>
-          <a:lstStyle/>
-          <a:p>
-            <a:pPr>
-              <a:lnSpc>
-                <a:spcPts val="2728"/>
-              </a:lnSpc>
-              <a:spcAft>
-                <a:spcPts val="0"/>
-              </a:spcAft>
-              <a:defRPr sz="2200" b="1">
-                <a:solidFill>
-                  <a:srgbClr val="181817"/>
-                </a:solidFill>
-                <a:latin typeface="Arial"/>
-              </a:defRPr>
-            </a:pPr>
-            <a:r>
-              <a:t>Uloženo</a:t>
-            </a:r>
-          </a:p>
-        </p:txBody>
-      </p:sp>
-      <p:sp>
-        <p:nvSpPr>
-          <p:cNvPr id="28" name="TextBox 27"/>
-          <p:cNvSpPr txBox="1"/>
-          <p:nvPr/>
-        </p:nvSpPr>
-        <p:spPr>
-          <a:xfrm>
-            <a:off x="9296400" y="4140200"/>
-            <a:ext cx="2133600" cy="406400"/>
-          </a:xfrm>
-          <a:prstGeom prst="rect">
-            <a:avLst/>
-          </a:prstGeom>
-          <a:noFill/>
-        </p:spPr>
-        <p:txBody>
-          <a:bodyPr wrap="none" lIns="0" rIns="0" tIns="0" bIns="0">
-            <a:spAutoFit/>
-          </a:bodyPr>
-          <a:lstStyle/>
-          <a:p>
-            <a:pPr>
-              <a:lnSpc>
-                <a:spcPts val="1488"/>
-              </a:lnSpc>
-              <a:spcAft>
-                <a:spcPts val="0"/>
-              </a:spcAft>
-              <a:defRPr sz="1200" b="0">
-                <a:solidFill>
-                  <a:srgbClr val="181817"/>
-                </a:solidFill>
-                <a:latin typeface="Arial"/>
-              </a:defRPr>
-            </a:pPr>
-            <a:r>
-              <a:t>Obnovit stránku</a:t>
-            </a:r>
-          </a:p>
-        </p:txBody>
-      </p:sp>
-      <p:sp>
-        <p:nvSpPr>
-          <p:cNvPr id="29" name="TextBox 28"/>
-          <p:cNvSpPr txBox="1"/>
-          <p:nvPr/>
-        </p:nvSpPr>
-        <p:spPr>
-          <a:xfrm>
-            <a:off x="533400" y="5207000"/>
-            <a:ext cx="11125200" cy="1016000"/>
-          </a:xfrm>
-          <a:prstGeom prst="rect">
-            <a:avLst/>
-          </a:prstGeom>
-          <a:noFill/>
-        </p:spPr>
-        <p:txBody>
-          <a:bodyPr wrap="none" lIns="0" rIns="0" tIns="0" bIns="0">
-            <a:spAutoFit/>
-          </a:bodyPr>
-          <a:lstStyle/>
-          <a:p>
-            <a:pPr>
-              <a:lnSpc>
-                <a:spcPts val="2108"/>
-              </a:lnSpc>
-              <a:spcAft>
-                <a:spcPts val="0"/>
-              </a:spcAft>
-              <a:defRPr sz="1700" b="0">
-                <a:solidFill>
-                  <a:srgbClr val="181817"/>
-                </a:solidFill>
-                <a:latin typeface="Arial"/>
-              </a:defRPr>
-            </a:pPr>
-            <a:r>
-              <a:t>Zkontrolovat správný den, scénu a zachování oblíbené akce.</a:t>
-            </a:r>
-          </a:p>
-          <a:p>
-            <a:pPr>
-              <a:lnSpc>
-                <a:spcPts val="2108"/>
-              </a:lnSpc>
-              <a:spcAft>
-                <a:spcPts val="0"/>
-              </a:spcAft>
-              <a:defRPr sz="1700" b="0">
-                <a:solidFill>
-                  <a:srgbClr val="181817"/>
-                </a:solidFill>
-                <a:latin typeface="Arial"/>
-              </a:defRPr>
-            </a:pPr>
-            <a:r>
-              <a:t>Prázdný výběr má srozumitelnou cestu zpět.</a:t>
+                <a:spcPts val="930"/>
+              </a:lnSpc>
+              <a:spcAft>
+                <a:spcPts val="0"/>
+              </a:spcAft>
+              <a:defRPr sz="750" b="0">
+                <a:solidFill>
+                  <a:srgbClr val="68635B"/>
+                </a:solidFill>
+                <a:latin typeface="Arial"/>
+              </a:defRPr>
+            </a:pPr>
+            <a:r>
+              <a:t>DODATEČNĚ PŘIPRAVENÝ PODKLAD K MILNÍKU</a:t>
             </a:r>
           </a:p>
         </p:txBody>
@@ -7862,48 +7732,6 @@
       <p:sp>
         <p:nvSpPr>
           <p:cNvPr id="30" name="TextBox 29"/>
-          <p:cNvSpPr txBox="1"/>
-          <p:nvPr/>
-        </p:nvSpPr>
-        <p:spPr>
-          <a:xfrm>
-            <a:off x="533400" y="6413500"/>
-            <a:ext cx="10033000" cy="181610"/>
-          </a:xfrm>
-          <a:prstGeom prst="rect">
-            <a:avLst/>
-          </a:prstGeom>
-          <a:noFill/>
-        </p:spPr>
-        <p:txBody>
-          <a:bodyPr wrap="none" lIns="0" rIns="0" tIns="0" bIns="0">
-            <a:spAutoFit/>
-          </a:bodyPr>
-          <a:lstStyle/>
-          <a:p>
-            <a:pPr>
-              <a:lnSpc>
-                <a:spcPts val="930"/>
-              </a:lnSpc>
-              <a:spcAft>
-                <a:spcPts val="0"/>
-              </a:spcAft>
-              <a:defRPr sz="750" b="0">
-                <a:solidFill>
-                  <a:srgbClr val="68635B"/>
-                </a:solidFill>
-                <a:latin typeface="Arial"/>
-              </a:defRPr>
-            </a:pPr>
-            <a:r>
-              <a:t>DODATEČNĚ PŘIPRAVENÝ PODKLAD K MILNÍKU</a:t>
-            </a:r>
-          </a:p>
-        </p:txBody>
-      </p:sp>
-      <p:sp>
-        <p:nvSpPr>
-          <p:cNvPr id="31" name="TextBox 30"/>
           <p:cNvSpPr txBox="1"/>
           <p:nvPr/>
         </p:nvSpPr>
@@ -8132,20 +7960,62 @@
       </p:sp>
       <p:sp>
         <p:nvSpPr>
-          <p:cNvPr id="6" name="Rectangle 5"/>
+          <p:cNvPr id="6" name="TextBox 5"/>
+          <p:cNvSpPr txBox="1"/>
+          <p:nvPr/>
+        </p:nvSpPr>
+        <p:spPr>
+          <a:xfrm>
+            <a:off x="5588000" y="533400"/>
+            <a:ext cx="6070600" cy="220979"/>
+          </a:xfrm>
+          <a:prstGeom prst="rect">
+            <a:avLst/>
+          </a:prstGeom>
+          <a:noFill/>
+        </p:spPr>
+        <p:txBody>
+          <a:bodyPr wrap="none" lIns="0" rIns="0" tIns="0" bIns="0">
+            <a:spAutoFit/>
+          </a:bodyPr>
+          <a:lstStyle/>
+          <a:p>
+            <a:pPr>
+              <a:lnSpc>
+                <a:spcPts val="1240"/>
+              </a:lnSpc>
+              <a:spcAft>
+                <a:spcPts val="0"/>
+              </a:spcAft>
+              <a:defRPr sz="1000" b="1">
+                <a:solidFill>
+                  <a:srgbClr val="68635B"/>
+                </a:solidFill>
+                <a:latin typeface="Arial"/>
+              </a:defRPr>
+            </a:pPr>
+            <a:r>
+              <a:t>ŽIVÝ PRŮCHOD HLEDÁNÍM</a:t>
+            </a:r>
+          </a:p>
+        </p:txBody>
+      </p:sp>
+      <p:sp>
+        <p:nvSpPr>
+          <p:cNvPr id="7" name="Rectangle 6"/>
           <p:cNvSpPr/>
           <p:nvPr/>
         </p:nvSpPr>
         <p:spPr>
           <a:xfrm>
-            <a:off x="1866900" y="368300"/>
-            <a:ext cx="88900" cy="431800"/>
+            <a:off x="533400" y="1155700"/>
+            <a:ext cx="11125200" cy="25400"/>
           </a:xfrm>
           <a:prstGeom prst="rect">
             <a:avLst/>
           </a:prstGeom>
           <a:solidFill>
-            <a:srgbClr val="F45E2B"/>
+            <a:srgbClr val="181817"/>
           </a:solidFill>
           <a:ln>
             <a:noFill/>
@@ -8175,14 +8045,14 @@
       </p:sp>
       <p:sp>
         <p:nvSpPr>
-          <p:cNvPr id="7" name="TextBox 6"/>
+          <p:cNvPr id="8" name="TextBox 7"/>
           <p:cNvSpPr txBox="1"/>
           <p:nvPr/>
         </p:nvSpPr>
         <p:spPr>
           <a:xfrm>
-            <a:off x="5588000" y="533400"/>
-            <a:ext cx="6070600" cy="220979"/>
+            <a:off x="508000" y="1422400"/>
+            <a:ext cx="11176000" cy="1079500"/>
           </a:xfrm>
           <a:prstGeom prst="rect">
             <a:avLst/>
@@ -8197,34 +8067,34 @@
           <a:p>
             <a:pPr>
               <a:lnSpc>
-                <a:spcPts val="1240"/>
-              </a:lnSpc>
-              <a:spcAft>
-                <a:spcPts val="0"/>
-              </a:spcAft>
-              <a:defRPr sz="1000" b="1">
-                <a:solidFill>
-                  <a:srgbClr val="68635B"/>
-                </a:solidFill>
-                <a:latin typeface="Arial"/>
-              </a:defRPr>
-            </a:pPr>
-            <a:r>
-              <a:t>ŽIVÝ PRŮCHOD HLEDÁNÍM</a:t>
-            </a:r>
-          </a:p>
-        </p:txBody>
-      </p:sp>
-      <p:sp>
-        <p:nvSpPr>
-          <p:cNvPr id="8" name="Rectangle 7"/>
+                <a:spcPts val="3740"/>
+              </a:lnSpc>
+              <a:spcAft>
+                <a:spcPts val="0"/>
+              </a:spcAft>
+              <a:defRPr sz="3400" b="1">
+                <a:solidFill>
+                  <a:srgbClr val="181817"/>
+                </a:solidFill>
+                <a:latin typeface="Arial"/>
+              </a:defRPr>
+            </a:pPr>
+            <a:r>
+              <a:t>S2 / Od hledání ke koncertu.</a:t>
+            </a:r>
+          </a:p>
+        </p:txBody>
+      </p:sp>
+      <p:sp>
+        <p:nvSpPr>
+          <p:cNvPr id="9" name="Rectangle 8"/>
           <p:cNvSpPr/>
           <p:nvPr/>
         </p:nvSpPr>
         <p:spPr>
           <a:xfrm>
-            <a:off x="533400" y="1155700"/>
-            <a:ext cx="11125200" cy="25400"/>
+            <a:off x="533400" y="2946400"/>
+            <a:ext cx="2552700" cy="1765300"/>
           </a:xfrm>
           <a:prstGeom prst="rect">
             <a:avLst/>
@@ -8260,14 +8130,14 @@
       </p:sp>
       <p:sp>
         <p:nvSpPr>
-          <p:cNvPr id="9" name="TextBox 8"/>
+          <p:cNvPr id="10" name="TextBox 9"/>
           <p:cNvSpPr txBox="1"/>
           <p:nvPr/>
         </p:nvSpPr>
         <p:spPr>
           <a:xfrm>
-            <a:off x="508000" y="1422400"/>
-            <a:ext cx="11176000" cy="1079500"/>
+            <a:off x="723900" y="3162300"/>
+            <a:ext cx="2133600" cy="236728"/>
           </a:xfrm>
           <a:prstGeom prst="rect">
             <a:avLst/>
@@ -8282,12 +8152,138 @@
           <a:p>
             <a:pPr>
               <a:lnSpc>
-                <a:spcPts val="3740"/>
-              </a:lnSpc>
-              <a:spcAft>
-                <a:spcPts val="0"/>
-              </a:spcAft>
-              <a:defRPr sz="3400" b="1">
+                <a:spcPts val="1364"/>
+              </a:lnSpc>
+              <a:spcAft>
+                <a:spcPts val="0"/>
+              </a:spcAft>
+              <a:defRPr sz="1100" b="1">
+                <a:solidFill>
+                  <a:srgbClr val="F45E2B"/>
+                </a:solidFill>
+                <a:latin typeface="Arial"/>
+              </a:defRPr>
+            </a:pPr>
+            <a:r>
+              <a:t>01</a:t>
+            </a:r>
+          </a:p>
+        </p:txBody>
+      </p:sp>
+      <p:sp>
+        <p:nvSpPr>
+          <p:cNvPr id="11" name="TextBox 10"/>
+          <p:cNvSpPr txBox="1"/>
+          <p:nvPr/>
+        </p:nvSpPr>
+        <p:spPr>
+          <a:xfrm>
+            <a:off x="723900" y="3568700"/>
+            <a:ext cx="2133600" cy="444500"/>
+          </a:xfrm>
+          <a:prstGeom prst="rect">
+            <a:avLst/>
+          </a:prstGeom>
+          <a:noFill/>
+        </p:spPr>
+        <p:txBody>
+          <a:bodyPr wrap="none" lIns="0" rIns="0" tIns="0" bIns="0">
+            <a:spAutoFit/>
+          </a:bodyPr>
+          <a:lstStyle/>
+          <a:p>
+            <a:pPr>
+              <a:lnSpc>
+                <a:spcPts val="2728"/>
+              </a:lnSpc>
+              <a:spcAft>
+                <a:spcPts val="0"/>
+              </a:spcAft>
+              <a:defRPr sz="2200" b="1">
+                <a:solidFill>
+                  <a:srgbClr val="F4F0E7"/>
+                </a:solidFill>
+                <a:latin typeface="Arial"/>
+              </a:defRPr>
+            </a:pPr>
+            <a:r>
+              <a:t>DARKZY</a:t>
+            </a:r>
+          </a:p>
+        </p:txBody>
+      </p:sp>
+      <p:sp>
+        <p:nvSpPr>
+          <p:cNvPr id="12" name="TextBox 11"/>
+          <p:cNvSpPr txBox="1"/>
+          <p:nvPr/>
+        </p:nvSpPr>
+        <p:spPr>
+          <a:xfrm>
+            <a:off x="723900" y="4140200"/>
+            <a:ext cx="2133600" cy="406400"/>
+          </a:xfrm>
+          <a:prstGeom prst="rect">
+            <a:avLst/>
+          </a:prstGeom>
+          <a:noFill/>
+        </p:spPr>
+        <p:txBody>
+          <a:bodyPr wrap="none" lIns="0" rIns="0" tIns="0" bIns="0">
+            <a:spAutoFit/>
+          </a:bodyPr>
+          <a:lstStyle/>
+          <a:p>
+            <a:pPr>
+              <a:lnSpc>
+                <a:spcPts val="1488"/>
+              </a:lnSpc>
+              <a:spcAft>
+                <a:spcPts val="0"/>
+              </a:spcAft>
+              <a:defRPr sz="1200" b="0">
+                <a:solidFill>
+                  <a:srgbClr val="F4F0E7"/>
+                </a:solidFill>
+                <a:latin typeface="Arial"/>
+              </a:defRPr>
+            </a:pPr>
+            <a:r>
+              <a:t>Zadat dotaz</a:t>
+            </a:r>
+          </a:p>
+        </p:txBody>
+      </p:sp>
+      <p:sp>
+        <p:nvSpPr>
+          <p:cNvPr id="13" name="TextBox 12"/>
+          <p:cNvSpPr txBox="1"/>
+          <p:nvPr/>
+        </p:nvSpPr>
+        <p:spPr>
+          <a:xfrm>
+            <a:off x="3098800" y="3657600"/>
+            <a:ext cx="292100" cy="394208"/>
+          </a:xfrm>
+          <a:prstGeom prst="rect">
+            <a:avLst/>
+          </a:prstGeom>
+          <a:noFill/>
+        </p:spPr>
+        <p:txBody>
+          <a:bodyPr wrap="none" lIns="0" rIns="0" tIns="0" bIns="0">
+            <a:spAutoFit/>
+          </a:bodyPr>
+          <a:lstStyle/>
+          <a:p>
+            <a:pPr>
+              <a:lnSpc>
+                <a:spcPts val="2604"/>
+              </a:lnSpc>
+              <a:spcAft>
+                <a:spcPts val="0"/>
+              </a:spcAft>
+              <a:defRPr sz="2100" b="1">
                 <a:solidFill>
                   <a:srgbClr val="181817"/>
                 </a:solidFill>
@@ -8295,27 +8291,27 @@
               </a:defRPr>
             </a:pPr>
             <a:r>
-              <a:t>S2 / Od části názvu ke koncertu.</a:t>
-            </a:r>
-          </a:p>
-        </p:txBody>
-      </p:sp>
-      <p:sp>
-        <p:nvSpPr>
-          <p:cNvPr id="10" name="Rectangle 9"/>
+              <a:t>›</a:t>
+            </a:r>
+          </a:p>
+        </p:txBody>
+      </p:sp>
+      <p:sp>
+        <p:nvSpPr>
+          <p:cNvPr id="14" name="Rectangle 13"/>
           <p:cNvSpPr/>
           <p:nvPr/>
         </p:nvSpPr>
         <p:spPr>
           <a:xfrm>
-            <a:off x="533400" y="2946400"/>
+            <a:off x="3390900" y="2946400"/>
             <a:ext cx="2552700" cy="1765300"/>
           </a:xfrm>
           <a:prstGeom prst="rect">
             <a:avLst/>
           </a:prstGeom>
           <a:solidFill>
-            <a:srgbClr val="181817"/>
+            <a:srgbClr val="E7E0D5"/>
           </a:solidFill>
           <a:ln>
             <a:noFill/>
@@ -8345,13 +8341,13 @@
       </p:sp>
       <p:sp>
         <p:nvSpPr>
-          <p:cNvPr id="11" name="TextBox 10"/>
+          <p:cNvPr id="15" name="TextBox 14"/>
           <p:cNvSpPr txBox="1"/>
           <p:nvPr/>
         </p:nvSpPr>
         <p:spPr>
           <a:xfrm>
-            <a:off x="723900" y="3162300"/>
+            <a:off x="3581400" y="3162300"/>
             <a:ext cx="2133600" cy="236728"/>
           </a:xfrm>
           <a:prstGeom prst="rect">
@@ -8380,20 +8376,20 @@
               </a:defRPr>
             </a:pPr>
             <a:r>
-              <a:t>01</a:t>
-            </a:r>
-          </a:p>
-        </p:txBody>
-      </p:sp>
-      <p:sp>
-        <p:nvSpPr>
-          <p:cNvPr id="12" name="TextBox 11"/>
+              <a:t>02</a:t>
+            </a:r>
+          </a:p>
+        </p:txBody>
+      </p:sp>
+      <p:sp>
+        <p:nvSpPr>
+          <p:cNvPr id="16" name="TextBox 15"/>
           <p:cNvSpPr txBox="1"/>
           <p:nvPr/>
         </p:nvSpPr>
         <p:spPr>
           <a:xfrm>
-            <a:off x="723900" y="3568700"/>
+            <a:off x="3581400" y="3568700"/>
             <a:ext cx="2133600" cy="444500"/>
           </a:xfrm>
           <a:prstGeom prst="rect">
@@ -8416,26 +8412,26 @@
               </a:spcAft>
               <a:defRPr sz="2200" b="1">
                 <a:solidFill>
-                  <a:srgbClr val="F4F0E7"/>
-                </a:solidFill>
-                <a:latin typeface="Arial"/>
-              </a:defRPr>
-            </a:pPr>
-            <a:r>
-              <a:t>Atlas</a:t>
-            </a:r>
-          </a:p>
-        </p:txBody>
-      </p:sp>
-      <p:sp>
-        <p:nvSpPr>
-          <p:cNvPr id="13" name="TextBox 12"/>
+                  <a:srgbClr val="181817"/>
+                </a:solidFill>
+                <a:latin typeface="Arial"/>
+              </a:defRPr>
+            </a:pPr>
+            <a:r>
+              <a:t>Výsledky</a:t>
+            </a:r>
+          </a:p>
+        </p:txBody>
+      </p:sp>
+      <p:sp>
+        <p:nvSpPr>
+          <p:cNvPr id="17" name="TextBox 16"/>
           <p:cNvSpPr txBox="1"/>
           <p:nvPr/>
         </p:nvSpPr>
         <p:spPr>
           <a:xfrm>
-            <a:off x="723900" y="4140200"/>
+            <a:off x="3581400" y="4140200"/>
             <a:ext cx="2133600" cy="406400"/>
           </a:xfrm>
           <a:prstGeom prst="rect">
@@ -8458,26 +8454,26 @@
               </a:spcAft>
               <a:defRPr sz="1200" b="0">
                 <a:solidFill>
-                  <a:srgbClr val="F4F0E7"/>
-                </a:solidFill>
-                <a:latin typeface="Arial"/>
-              </a:defRPr>
-            </a:pPr>
-            <a:r>
-              <a:t>Zadat část názvu</a:t>
-            </a:r>
-          </a:p>
-        </p:txBody>
-      </p:sp>
-      <p:sp>
-        <p:nvSpPr>
-          <p:cNvPr id="14" name="TextBox 13"/>
+                  <a:srgbClr val="181817"/>
+                </a:solidFill>
+                <a:latin typeface="Arial"/>
+              </a:defRPr>
+            </a:pPr>
+            <a:r>
+              <a:t>Najít interpreta</a:t>
+            </a:r>
+          </a:p>
+        </p:txBody>
+      </p:sp>
+      <p:sp>
+        <p:nvSpPr>
+          <p:cNvPr id="18" name="TextBox 17"/>
           <p:cNvSpPr txBox="1"/>
           <p:nvPr/>
         </p:nvSpPr>
         <p:spPr>
           <a:xfrm>
-            <a:off x="3098800" y="3657600"/>
+            <a:off x="5956300" y="3657600"/>
             <a:ext cx="292100" cy="394208"/>
           </a:xfrm>
           <a:prstGeom prst="rect">
@@ -8513,13 +8509,13 @@
       </p:sp>
       <p:sp>
         <p:nvSpPr>
-          <p:cNvPr id="15" name="Rectangle 14"/>
+          <p:cNvPr id="19" name="Rectangle 18"/>
           <p:cNvSpPr/>
           <p:nvPr/>
         </p:nvSpPr>
         <p:spPr>
           <a:xfrm>
-            <a:off x="3390900" y="2946400"/>
+            <a:off x="6248400" y="2946400"/>
             <a:ext cx="2552700" cy="1765300"/>
           </a:xfrm>
           <a:prstGeom prst="rect">
@@ -8556,13 +8552,13 @@
       </p:sp>
       <p:sp>
         <p:nvSpPr>
-          <p:cNvPr id="16" name="TextBox 15"/>
+          <p:cNvPr id="20" name="TextBox 19"/>
           <p:cNvSpPr txBox="1"/>
           <p:nvPr/>
         </p:nvSpPr>
         <p:spPr>
           <a:xfrm>
-            <a:off x="3581400" y="3162300"/>
+            <a:off x="6438900" y="3162300"/>
             <a:ext cx="2133600" cy="236728"/>
           </a:xfrm>
           <a:prstGeom prst="rect">
@@ -8591,20 +8587,20 @@
               </a:defRPr>
             </a:pPr>
             <a:r>
-              <a:t>02</a:t>
-            </a:r>
-          </a:p>
-        </p:txBody>
-      </p:sp>
-      <p:sp>
-        <p:nvSpPr>
-          <p:cNvPr id="17" name="TextBox 16"/>
+              <a:t>03</a:t>
+            </a:r>
+          </a:p>
+        </p:txBody>
+      </p:sp>
+      <p:sp>
+        <p:nvSpPr>
+          <p:cNvPr id="21" name="TextBox 20"/>
           <p:cNvSpPr txBox="1"/>
           <p:nvPr/>
         </p:nvSpPr>
         <p:spPr>
           <a:xfrm>
-            <a:off x="3581400" y="3568700"/>
+            <a:off x="6438900" y="3568700"/>
             <a:ext cx="2133600" cy="444500"/>
           </a:xfrm>
           <a:prstGeom prst="rect">
@@ -8633,20 +8629,20 @@
               </a:defRPr>
             </a:pPr>
             <a:r>
-              <a:t>Výsledky</a:t>
-            </a:r>
-          </a:p>
-        </p:txBody>
-      </p:sp>
-      <p:sp>
-        <p:nvSpPr>
-          <p:cNvPr id="18" name="TextBox 17"/>
+              <a:t>DARKZY</a:t>
+            </a:r>
+          </a:p>
+        </p:txBody>
+      </p:sp>
+      <p:sp>
+        <p:nvSpPr>
+          <p:cNvPr id="22" name="TextBox 21"/>
           <p:cNvSpPr txBox="1"/>
           <p:nvPr/>
         </p:nvSpPr>
         <p:spPr>
           <a:xfrm>
-            <a:off x="3581400" y="4140200"/>
+            <a:off x="6438900" y="4140200"/>
             <a:ext cx="2133600" cy="406400"/>
           </a:xfrm>
           <a:prstGeom prst="rect">
@@ -8675,20 +8671,20 @@
               </a:defRPr>
             </a:pPr>
             <a:r>
-              <a:t>Najít interpreta</a:t>
-            </a:r>
-          </a:p>
-        </p:txBody>
-      </p:sp>
-      <p:sp>
-        <p:nvSpPr>
-          <p:cNvPr id="19" name="TextBox 18"/>
+              <a:t>Otevřít detail</a:t>
+            </a:r>
+          </a:p>
+        </p:txBody>
+      </p:sp>
+      <p:sp>
+        <p:nvSpPr>
+          <p:cNvPr id="23" name="TextBox 22"/>
           <p:cNvSpPr txBox="1"/>
           <p:nvPr/>
         </p:nvSpPr>
         <p:spPr>
           <a:xfrm>
-            <a:off x="5956300" y="3657600"/>
+            <a:off x="8813800" y="3657600"/>
             <a:ext cx="292100" cy="394208"/>
           </a:xfrm>
           <a:prstGeom prst="rect">
@@ -8724,13 +8720,13 @@
       </p:sp>
       <p:sp>
         <p:nvSpPr>
-          <p:cNvPr id="20" name="Rectangle 19"/>
+          <p:cNvPr id="24" name="Rectangle 23"/>
           <p:cNvSpPr/>
           <p:nvPr/>
         </p:nvSpPr>
         <p:spPr>
           <a:xfrm>
-            <a:off x="6248400" y="2946400"/>
+            <a:off x="9105900" y="2946400"/>
             <a:ext cx="2552700" cy="1765300"/>
           </a:xfrm>
           <a:prstGeom prst="rect">
@@ -8767,13 +8763,13 @@
       </p:sp>
       <p:sp>
         <p:nvSpPr>
-          <p:cNvPr id="21" name="TextBox 20"/>
+          <p:cNvPr id="25" name="TextBox 24"/>
           <p:cNvSpPr txBox="1"/>
           <p:nvPr/>
         </p:nvSpPr>
         <p:spPr>
           <a:xfrm>
-            <a:off x="6438900" y="3162300"/>
+            <a:off x="9296400" y="3162300"/>
             <a:ext cx="2133600" cy="236728"/>
           </a:xfrm>
           <a:prstGeom prst="rect">
@@ -8802,20 +8798,20 @@
               </a:defRPr>
             </a:pPr>
             <a:r>
-              <a:t>03</a:t>
-            </a:r>
-          </a:p>
-        </p:txBody>
-      </p:sp>
-      <p:sp>
-        <p:nvSpPr>
-          <p:cNvPr id="22" name="TextBox 21"/>
+              <a:t>04</a:t>
+            </a:r>
+          </a:p>
+        </p:txBody>
+      </p:sp>
+      <p:sp>
+        <p:nvSpPr>
+          <p:cNvPr id="26" name="TextBox 25"/>
           <p:cNvSpPr txBox="1"/>
           <p:nvPr/>
         </p:nvSpPr>
         <p:spPr>
           <a:xfrm>
-            <a:off x="6438900" y="3568700"/>
+            <a:off x="9296400" y="3568700"/>
             <a:ext cx="2133600" cy="444500"/>
           </a:xfrm>
           <a:prstGeom prst="rect">
@@ -8844,20 +8840,20 @@
               </a:defRPr>
             </a:pPr>
             <a:r>
-              <a:t>Atlas Motel</a:t>
-            </a:r>
-          </a:p>
-        </p:txBody>
-      </p:sp>
-      <p:sp>
-        <p:nvSpPr>
-          <p:cNvPr id="23" name="TextBox 22"/>
+              <a:t>Program</a:t>
+            </a:r>
+          </a:p>
+        </p:txBody>
+      </p:sp>
+      <p:sp>
+        <p:nvSpPr>
+          <p:cNvPr id="27" name="TextBox 26"/>
           <p:cNvSpPr txBox="1"/>
           <p:nvPr/>
         </p:nvSpPr>
         <p:spPr>
           <a:xfrm>
-            <a:off x="6438900" y="4140200"/>
+            <a:off x="9296400" y="4140200"/>
             <a:ext cx="2133600" cy="406400"/>
           </a:xfrm>
           <a:prstGeom prst="rect">
@@ -8886,21 +8882,21 @@
               </a:defRPr>
             </a:pPr>
             <a:r>
-              <a:t>Otevřít detail</a:t>
-            </a:r>
-          </a:p>
-        </p:txBody>
-      </p:sp>
-      <p:sp>
-        <p:nvSpPr>
-          <p:cNvPr id="24" name="TextBox 23"/>
+              <a:t>Zjistit čas</a:t>
+            </a:r>
+          </a:p>
+        </p:txBody>
+      </p:sp>
+      <p:sp>
+        <p:nvSpPr>
+          <p:cNvPr id="28" name="TextBox 27"/>
           <p:cNvSpPr txBox="1"/>
           <p:nvPr/>
         </p:nvSpPr>
         <p:spPr>
           <a:xfrm>
-            <a:off x="8813800" y="3657600"/>
-            <a:ext cx="292100" cy="394208"/>
+            <a:off x="533400" y="5207000"/>
+            <a:ext cx="11125200" cy="1016000"/>
           </a:xfrm>
           <a:prstGeom prst="rect">
             <a:avLst/>
@@ -8915,12 +8911,12 @@
           <a:p>
             <a:pPr>
               <a:lnSpc>
-                <a:spcPts val="2604"/>
-              </a:lnSpc>
-              <a:spcAft>
-                <a:spcPts val="0"/>
-              </a:spcAft>
-              <a:defRPr sz="2100" b="1">
+                <a:spcPts val="2108"/>
+              </a:lnSpc>
+              <a:spcAft>
+                <a:spcPts val="0"/>
+              </a:spcAft>
+              <a:defRPr sz="1700" b="0">
                 <a:solidFill>
                   <a:srgbClr val="181817"/>
                 </a:solidFill>
@@ -8928,64 +8924,40 @@
               </a:defRPr>
             </a:pPr>
             <a:r>
-              <a:t>›</a:t>
-            </a:r>
-          </a:p>
-        </p:txBody>
-      </p:sp>
-      <p:sp>
-        <p:nvSpPr>
-          <p:cNvPr id="25" name="Rectangle 24"/>
-          <p:cNvSpPr/>
-          <p:nvPr/>
-        </p:nvSpPr>
-        <p:spPr>
-          <a:xfrm>
-            <a:off x="9105900" y="2946400"/>
-            <a:ext cx="2552700" cy="1765300"/>
-          </a:xfrm>
-          <a:prstGeom prst="rect">
-            <a:avLst/>
-          </a:prstGeom>
-          <a:solidFill>
-            <a:srgbClr val="E7E0D5"/>
-          </a:solidFill>
-          <a:ln>
-            <a:noFill/>
-          </a:ln>
-        </p:spPr>
-        <p:style>
-          <a:lnRef idx="1">
-            <a:schemeClr val="accent1"/>
-          </a:lnRef>
-          <a:fillRef idx="3">
-            <a:schemeClr val="accent1"/>
-          </a:fillRef>
-          <a:effectRef idx="2">
-            <a:schemeClr val="accent1"/>
-          </a:effectRef>
-          <a:fontRef idx="minor">
-            <a:schemeClr val="lt1"/>
-          </a:fontRef>
-        </p:style>
-        <p:txBody>
-          <a:bodyPr rtlCol="0" anchor="ctr"/>
-          <a:lstStyle/>
-          <a:p>
-            <a:pPr algn="ctr"/>
-          </a:p>
-        </p:txBody>
-      </p:sp>
-      <p:sp>
-        <p:nvSpPr>
-          <p:cNvPr id="26" name="TextBox 25"/>
+              <a:t>Hledaný text se zobrazuje jako text.</a:t>
+            </a:r>
+          </a:p>
+          <a:p>
+            <a:pPr>
+              <a:lnSpc>
+                <a:spcPts val="2108"/>
+              </a:lnSpc>
+              <a:spcAft>
+                <a:spcPts val="0"/>
+              </a:spcAft>
+              <a:defRPr sz="1700" b="0">
+                <a:solidFill>
+                  <a:srgbClr val="181817"/>
+                </a:solidFill>
+                <a:latin typeface="Arial"/>
+              </a:defRPr>
+            </a:pPr>
+            <a:r>
+              <a:t>Detail a vystoupení používají stejné datové vazby.</a:t>
+            </a:r>
+          </a:p>
+        </p:txBody>
+      </p:sp>
+      <p:sp>
+        <p:nvSpPr>
+          <p:cNvPr id="29" name="TextBox 28"/>
           <p:cNvSpPr txBox="1"/>
           <p:nvPr/>
         </p:nvSpPr>
         <p:spPr>
           <a:xfrm>
-            <a:off x="9296400" y="3162300"/>
-            <a:ext cx="2133600" cy="236728"/>
+            <a:off x="533400" y="6413500"/>
+            <a:ext cx="10033000" cy="181610"/>
           </a:xfrm>
           <a:prstGeom prst="rect">
             <a:avLst/>
@@ -9000,165 +8972,20 @@
           <a:p>
             <a:pPr>
               <a:lnSpc>
-                <a:spcPts val="1364"/>
-              </a:lnSpc>
-              <a:spcAft>
-                <a:spcPts val="0"/>
-              </a:spcAft>
-              <a:defRPr sz="1100" b="1">
-                <a:solidFill>
-                  <a:srgbClr val="F45E2B"/>
-                </a:solidFill>
-                <a:latin typeface="Arial"/>
-              </a:defRPr>
-            </a:pPr>
-            <a:r>
-              <a:t>04</a:t>
-            </a:r>
-          </a:p>
-        </p:txBody>
-      </p:sp>
-      <p:sp>
-        <p:nvSpPr>
-          <p:cNvPr id="27" name="TextBox 26"/>
-          <p:cNvSpPr txBox="1"/>
-          <p:nvPr/>
-        </p:nvSpPr>
-        <p:spPr>
-          <a:xfrm>
-            <a:off x="9296400" y="3568700"/>
-            <a:ext cx="2133600" cy="444500"/>
-          </a:xfrm>
-          <a:prstGeom prst="rect">
-            <a:avLst/>
-          </a:prstGeom>
-          <a:noFill/>
-        </p:spPr>
-        <p:txBody>
-          <a:bodyPr wrap="none" lIns="0" rIns="0" tIns="0" bIns="0">
-            <a:spAutoFit/>
-          </a:bodyPr>
-          <a:lstStyle/>
-          <a:p>
-            <a:pPr>
-              <a:lnSpc>
-                <a:spcPts val="2728"/>
-              </a:lnSpc>
-              <a:spcAft>
-                <a:spcPts val="0"/>
-              </a:spcAft>
-              <a:defRPr sz="2200" b="1">
-                <a:solidFill>
-                  <a:srgbClr val="181817"/>
-                </a:solidFill>
-                <a:latin typeface="Arial"/>
-              </a:defRPr>
-            </a:pPr>
-            <a:r>
-              <a:t>Program</a:t>
-            </a:r>
-          </a:p>
-        </p:txBody>
-      </p:sp>
-      <p:sp>
-        <p:nvSpPr>
-          <p:cNvPr id="28" name="TextBox 27"/>
-          <p:cNvSpPr txBox="1"/>
-          <p:nvPr/>
-        </p:nvSpPr>
-        <p:spPr>
-          <a:xfrm>
-            <a:off x="9296400" y="4140200"/>
-            <a:ext cx="2133600" cy="406400"/>
-          </a:xfrm>
-          <a:prstGeom prst="rect">
-            <a:avLst/>
-          </a:prstGeom>
-          <a:noFill/>
-        </p:spPr>
-        <p:txBody>
-          <a:bodyPr wrap="none" lIns="0" rIns="0" tIns="0" bIns="0">
-            <a:spAutoFit/>
-          </a:bodyPr>
-          <a:lstStyle/>
-          <a:p>
-            <a:pPr>
-              <a:lnSpc>
-                <a:spcPts val="1488"/>
-              </a:lnSpc>
-              <a:spcAft>
-                <a:spcPts val="0"/>
-              </a:spcAft>
-              <a:defRPr sz="1200" b="0">
-                <a:solidFill>
-                  <a:srgbClr val="181817"/>
-                </a:solidFill>
-                <a:latin typeface="Arial"/>
-              </a:defRPr>
-            </a:pPr>
-            <a:r>
-              <a:t>Zjistit čas</a:t>
-            </a:r>
-          </a:p>
-        </p:txBody>
-      </p:sp>
-      <p:sp>
-        <p:nvSpPr>
-          <p:cNvPr id="29" name="TextBox 28"/>
-          <p:cNvSpPr txBox="1"/>
-          <p:nvPr/>
-        </p:nvSpPr>
-        <p:spPr>
-          <a:xfrm>
-            <a:off x="533400" y="5207000"/>
-            <a:ext cx="11125200" cy="1016000"/>
-          </a:xfrm>
-          <a:prstGeom prst="rect">
-            <a:avLst/>
-          </a:prstGeom>
-          <a:noFill/>
-        </p:spPr>
-        <p:txBody>
-          <a:bodyPr wrap="none" lIns="0" rIns="0" tIns="0" bIns="0">
-            <a:spAutoFit/>
-          </a:bodyPr>
-          <a:lstStyle/>
-          <a:p>
-            <a:pPr>
-              <a:lnSpc>
-                <a:spcPts val="2108"/>
-              </a:lnSpc>
-              <a:spcAft>
-                <a:spcPts val="0"/>
-              </a:spcAft>
-              <a:defRPr sz="1700" b="0">
-                <a:solidFill>
-                  <a:srgbClr val="181817"/>
-                </a:solidFill>
-                <a:latin typeface="Arial"/>
-              </a:defRPr>
-            </a:pPr>
-            <a:r>
-              <a:t>Hledaný text se zobrazuje jako text.</a:t>
-            </a:r>
-          </a:p>
-          <a:p>
-            <a:pPr>
-              <a:lnSpc>
-                <a:spcPts val="2108"/>
-              </a:lnSpc>
-              <a:spcAft>
-                <a:spcPts val="0"/>
-              </a:spcAft>
-              <a:defRPr sz="1700" b="0">
-                <a:solidFill>
-                  <a:srgbClr val="181817"/>
-                </a:solidFill>
-                <a:latin typeface="Arial"/>
-              </a:defRPr>
-            </a:pPr>
-            <a:r>
-              <a:t>Detail a vystoupení používají stejné datové vazby.</a:t>
+                <a:spcPts val="930"/>
+              </a:lnSpc>
+              <a:spcAft>
+                <a:spcPts val="0"/>
+              </a:spcAft>
+              <a:defRPr sz="750" b="0">
+                <a:solidFill>
+                  <a:srgbClr val="68635B"/>
+                </a:solidFill>
+                <a:latin typeface="Arial"/>
+              </a:defRPr>
+            </a:pPr>
+            <a:r>
+              <a:t>DODATEČNĚ PŘIPRAVENÝ PODKLAD K MILNÍKU</a:t>
             </a:r>
           </a:p>
         </p:txBody>
@@ -9166,48 +8993,6 @@
       <p:sp>
         <p:nvSpPr>
           <p:cNvPr id="30" name="TextBox 29"/>
-          <p:cNvSpPr txBox="1"/>
-          <p:nvPr/>
-        </p:nvSpPr>
-        <p:spPr>
-          <a:xfrm>
-            <a:off x="533400" y="6413500"/>
-            <a:ext cx="10033000" cy="181610"/>
-          </a:xfrm>
-          <a:prstGeom prst="rect">
-            <a:avLst/>
-          </a:prstGeom>
-          <a:noFill/>
-        </p:spPr>
-        <p:txBody>
-          <a:bodyPr wrap="none" lIns="0" rIns="0" tIns="0" bIns="0">
-            <a:spAutoFit/>
-          </a:bodyPr>
-          <a:lstStyle/>
-          <a:p>
-            <a:pPr>
-              <a:lnSpc>
-                <a:spcPts val="930"/>
-              </a:lnSpc>
-              <a:spcAft>
-                <a:spcPts val="0"/>
-              </a:spcAft>
-              <a:defRPr sz="750" b="0">
-                <a:solidFill>
-                  <a:srgbClr val="68635B"/>
-                </a:solidFill>
-                <a:latin typeface="Arial"/>
-              </a:defRPr>
-            </a:pPr>
-            <a:r>
-              <a:t>DODATEČNĚ PŘIPRAVENÝ PODKLAD K MILNÍKU</a:t>
-            </a:r>
-          </a:p>
-        </p:txBody>
-      </p:sp>
-      <p:sp>
-        <p:nvSpPr>
-          <p:cNvPr id="31" name="TextBox 30"/>
           <p:cNvSpPr txBox="1"/>
           <p:nvPr/>
         </p:nvSpPr>
@@ -9436,20 +9221,62 @@
       </p:sp>
       <p:sp>
         <p:nvSpPr>
-          <p:cNvPr id="6" name="Rectangle 5"/>
+          <p:cNvPr id="6" name="TextBox 5"/>
+          <p:cNvSpPr txBox="1"/>
+          <p:nvPr/>
+        </p:nvSpPr>
+        <p:spPr>
+          <a:xfrm>
+            <a:off x="5588000" y="533400"/>
+            <a:ext cx="6070600" cy="220979"/>
+          </a:xfrm>
+          <a:prstGeom prst="rect">
+            <a:avLst/>
+          </a:prstGeom>
+          <a:noFill/>
+        </p:spPr>
+        <p:txBody>
+          <a:bodyPr wrap="none" lIns="0" rIns="0" tIns="0" bIns="0">
+            <a:spAutoFit/>
+          </a:bodyPr>
+          <a:lstStyle/>
+          <a:p>
+            <a:pPr>
+              <a:lnSpc>
+                <a:spcPts val="1240"/>
+              </a:lnSpc>
+              <a:spcAft>
+                <a:spcPts val="0"/>
+              </a:spcAft>
+              <a:defRPr sz="1000" b="1">
+                <a:solidFill>
+                  <a:srgbClr val="68635B"/>
+                </a:solidFill>
+                <a:latin typeface="Arial"/>
+              </a:defRPr>
+            </a:pPr>
+            <a:r>
+              <a:t>AI / VALIDACE / DALŠÍ KROK</a:t>
+            </a:r>
+          </a:p>
+        </p:txBody>
+      </p:sp>
+      <p:sp>
+        <p:nvSpPr>
+          <p:cNvPr id="7" name="Rectangle 6"/>
           <p:cNvSpPr/>
           <p:nvPr/>
         </p:nvSpPr>
         <p:spPr>
           <a:xfrm>
-            <a:off x="1866900" y="368300"/>
-            <a:ext cx="88900" cy="431800"/>
+            <a:off x="533400" y="1155700"/>
+            <a:ext cx="11125200" cy="25400"/>
           </a:xfrm>
           <a:prstGeom prst="rect">
             <a:avLst/>
           </a:prstGeom>
           <a:solidFill>
-            <a:srgbClr val="F45E2B"/>
+            <a:srgbClr val="181817"/>
           </a:solidFill>
           <a:ln>
             <a:noFill/>
@@ -9479,14 +9306,14 @@
       </p:sp>
       <p:sp>
         <p:nvSpPr>
-          <p:cNvPr id="7" name="TextBox 6"/>
+          <p:cNvPr id="8" name="TextBox 7"/>
           <p:cNvSpPr txBox="1"/>
           <p:nvPr/>
         </p:nvSpPr>
         <p:spPr>
           <a:xfrm>
-            <a:off x="5588000" y="533400"/>
-            <a:ext cx="6070600" cy="220979"/>
+            <a:off x="508000" y="1422400"/>
+            <a:ext cx="11176000" cy="1079500"/>
           </a:xfrm>
           <a:prstGeom prst="rect">
             <a:avLst/>
@@ -9501,34 +9328,34 @@
           <a:p>
             <a:pPr>
               <a:lnSpc>
-                <a:spcPts val="1240"/>
-              </a:lnSpc>
-              <a:spcAft>
-                <a:spcPts val="0"/>
-              </a:spcAft>
-              <a:defRPr sz="1000" b="1">
-                <a:solidFill>
-                  <a:srgbClr val="68635B"/>
-                </a:solidFill>
-                <a:latin typeface="Arial"/>
-              </a:defRPr>
-            </a:pPr>
-            <a:r>
-              <a:t>AI / VALIDACE / DALŠÍ KROK</a:t>
-            </a:r>
-          </a:p>
-        </p:txBody>
-      </p:sp>
-      <p:sp>
-        <p:nvSpPr>
-          <p:cNvPr id="8" name="Rectangle 7"/>
+                <a:spcPts val="3740"/>
+              </a:lnSpc>
+              <a:spcAft>
+                <a:spcPts val="0"/>
+              </a:spcAft>
+              <a:defRPr sz="3400" b="1">
+                <a:solidFill>
+                  <a:srgbClr val="181817"/>
+                </a:solidFill>
+                <a:latin typeface="Arial"/>
+              </a:defRPr>
+            </a:pPr>
+            <a:r>
+              <a:t>Co prototyp ověřuje?</a:t>
+            </a:r>
+          </a:p>
+        </p:txBody>
+      </p:sp>
+      <p:sp>
+        <p:nvSpPr>
+          <p:cNvPr id="9" name="Rectangle 8"/>
           <p:cNvSpPr/>
           <p:nvPr/>
         </p:nvSpPr>
         <p:spPr>
           <a:xfrm>
-            <a:off x="533400" y="1155700"/>
-            <a:ext cx="11125200" cy="25400"/>
+            <a:off x="533400" y="2768600"/>
+            <a:ext cx="5448300" cy="2603500"/>
           </a:xfrm>
           <a:prstGeom prst="rect">
             <a:avLst/>
@@ -9564,48 +9391,6 @@
       </p:sp>
       <p:sp>
         <p:nvSpPr>
-          <p:cNvPr id="9" name="TextBox 8"/>
-          <p:cNvSpPr txBox="1"/>
-          <p:nvPr/>
-        </p:nvSpPr>
-        <p:spPr>
-          <a:xfrm>
-            <a:off x="508000" y="1422400"/>
-            <a:ext cx="11176000" cy="1079500"/>
-          </a:xfrm>
-          <a:prstGeom prst="rect">
-            <a:avLst/>
-          </a:prstGeom>
-          <a:noFill/>
-        </p:spPr>
-        <p:txBody>
-          <a:bodyPr wrap="none" lIns="0" rIns="0" tIns="0" bIns="0">
-            <a:spAutoFit/>
-          </a:bodyPr>
-          <a:lstStyle/>
-          <a:p>
-            <a:pPr>
-              <a:lnSpc>
-                <a:spcPts val="3740"/>
-              </a:lnSpc>
-              <a:spcAft>
-                <a:spcPts val="0"/>
-              </a:spcAft>
-              <a:defRPr sz="3400" b="1">
-                <a:solidFill>
-                  <a:srgbClr val="181817"/>
-                </a:solidFill>
-                <a:latin typeface="Arial"/>
-              </a:defRPr>
-            </a:pPr>
-            <a:r>
-              <a:t>Co prototyp ověřuje?</a:t>
-            </a:r>
-          </a:p>
-        </p:txBody>
-      </p:sp>
-      <p:sp>
-        <p:nvSpPr>
           <p:cNvPr id="10" name="Rectangle 9"/>
           <p:cNvSpPr/>
           <p:nvPr/>
@@ -9613,13 +9398,13 @@
         <p:spPr>
           <a:xfrm>
             <a:off x="533400" y="2768600"/>
-            <a:ext cx="5448300" cy="2603500"/>
+            <a:ext cx="5448300" cy="76200"/>
           </a:xfrm>
           <a:prstGeom prst="rect">
             <a:avLst/>
           </a:prstGeom>
           <a:solidFill>
-            <a:srgbClr val="181817"/>
+            <a:srgbClr val="F45E2B"/>
           </a:solidFill>
           <a:ln>
             <a:noFill/>
@@ -9649,20 +9434,158 @@
       </p:sp>
       <p:sp>
         <p:nvSpPr>
-          <p:cNvPr id="11" name="Rectangle 10"/>
+          <p:cNvPr id="11" name="TextBox 10"/>
+          <p:cNvSpPr txBox="1"/>
+          <p:nvPr/>
+        </p:nvSpPr>
+        <p:spPr>
+          <a:xfrm>
+            <a:off x="749300" y="3035300"/>
+            <a:ext cx="5016500" cy="685800"/>
+          </a:xfrm>
+          <a:prstGeom prst="rect">
+            <a:avLst/>
+          </a:prstGeom>
+          <a:noFill/>
+        </p:spPr>
+        <p:txBody>
+          <a:bodyPr wrap="none" lIns="0" rIns="0" tIns="0" bIns="0">
+            <a:spAutoFit/>
+          </a:bodyPr>
+          <a:lstStyle/>
+          <a:p>
+            <a:pPr>
+              <a:lnSpc>
+                <a:spcPts val="2200"/>
+              </a:lnSpc>
+              <a:spcAft>
+                <a:spcPts val="0"/>
+              </a:spcAft>
+              <a:defRPr sz="2000" b="1">
+                <a:solidFill>
+                  <a:srgbClr val="F4F0E7"/>
+                </a:solidFill>
+                <a:latin typeface="Arial"/>
+              </a:defRPr>
+            </a:pPr>
+            <a:r>
+              <a:t>Ověřené hranice</a:t>
+            </a:r>
+          </a:p>
+        </p:txBody>
+      </p:sp>
+      <p:sp>
+        <p:nvSpPr>
+          <p:cNvPr id="12" name="TextBox 11"/>
+          <p:cNvSpPr txBox="1"/>
+          <p:nvPr/>
+        </p:nvSpPr>
+        <p:spPr>
+          <a:xfrm>
+            <a:off x="749300" y="3733800"/>
+            <a:ext cx="5016500" cy="1511300"/>
+          </a:xfrm>
+          <a:prstGeom prst="rect">
+            <a:avLst/>
+          </a:prstGeom>
+          <a:noFill/>
+        </p:spPr>
+        <p:txBody>
+          <a:bodyPr wrap="none" lIns="0" rIns="0" tIns="0" bIns="0">
+            <a:spAutoFit/>
+          </a:bodyPr>
+          <a:lstStyle/>
+          <a:p>
+            <a:pPr>
+              <a:lnSpc>
+                <a:spcPts val="1689"/>
+              </a:lnSpc>
+              <a:spcAft>
+                <a:spcPts val="0"/>
+              </a:spcAft>
+              <a:defRPr sz="1420" b="0">
+                <a:solidFill>
+                  <a:srgbClr val="F4F0E7"/>
+                </a:solidFill>
+                <a:latin typeface="Arial"/>
+              </a:defRPr>
+            </a:pPr>
+            <a:r>
+              <a:t>Data a reference; funkční filtry; oblíbené; hledání;</a:t>
+            </a:r>
+          </a:p>
+          <a:p>
+            <a:pPr>
+              <a:lnSpc>
+                <a:spcPts val="1689"/>
+              </a:lnSpc>
+              <a:spcAft>
+                <a:spcPts val="0"/>
+              </a:spcAft>
+              <a:defRPr sz="1420" b="0">
+                <a:solidFill>
+                  <a:srgbClr val="F4F0E7"/>
+                </a:solidFill>
+                <a:latin typeface="Arial"/>
+              </a:defRPr>
+            </a:pPr>
+            <a:r>
+              <a:t>dialog.</a:t>
+            </a:r>
+          </a:p>
+          <a:p>
+            <a:pPr>
+              <a:lnSpc>
+                <a:spcPts val="1689"/>
+              </a:lnSpc>
+              <a:spcAft>
+                <a:spcPts val="0"/>
+              </a:spcAft>
+              <a:defRPr sz="1420" b="0">
+                <a:solidFill>
+                  <a:srgbClr val="F4F0E7"/>
+                </a:solidFill>
+                <a:latin typeface="Arial"/>
+              </a:defRPr>
+            </a:pPr>
+          </a:p>
+          <a:p>
+            <a:pPr>
+              <a:lnSpc>
+                <a:spcPts val="1689"/>
+              </a:lnSpc>
+              <a:spcAft>
+                <a:spcPts val="0"/>
+              </a:spcAft>
+              <a:defRPr sz="1420" b="0">
+                <a:solidFill>
+                  <a:srgbClr val="F4F0E7"/>
+                </a:solidFill>
+                <a:latin typeface="Arial"/>
+              </a:defRPr>
+            </a:pPr>
+            <a:r>
+              <a:t>Záznam: prototype-validation.md.</a:t>
+            </a:r>
+          </a:p>
+        </p:txBody>
+      </p:sp>
+      <p:sp>
+        <p:nvSpPr>
+          <p:cNvPr id="13" name="Rectangle 12"/>
           <p:cNvSpPr/>
           <p:nvPr/>
         </p:nvSpPr>
         <p:spPr>
           <a:xfrm>
-            <a:off x="533400" y="2768600"/>
-            <a:ext cx="5448300" cy="76200"/>
+            <a:off x="6210300" y="2768600"/>
+            <a:ext cx="5448300" cy="2603500"/>
           </a:xfrm>
           <a:prstGeom prst="rect">
             <a:avLst/>
           </a:prstGeom>
           <a:solidFill>
-            <a:srgbClr val="F45E2B"/>
+            <a:srgbClr val="E7E0D5"/>
           </a:solidFill>
           <a:ln>
             <a:noFill/>
@@ -9692,144 +9615,6 @@
       </p:sp>
       <p:sp>
         <p:nvSpPr>
-          <p:cNvPr id="12" name="TextBox 11"/>
-          <p:cNvSpPr txBox="1"/>
-          <p:nvPr/>
-        </p:nvSpPr>
-        <p:spPr>
-          <a:xfrm>
-            <a:off x="749300" y="3035300"/>
-            <a:ext cx="5016500" cy="685800"/>
-          </a:xfrm>
-          <a:prstGeom prst="rect">
-            <a:avLst/>
-          </a:prstGeom>
-          <a:noFill/>
-        </p:spPr>
-        <p:txBody>
-          <a:bodyPr wrap="none" lIns="0" rIns="0" tIns="0" bIns="0">
-            <a:spAutoFit/>
-          </a:bodyPr>
-          <a:lstStyle/>
-          <a:p>
-            <a:pPr>
-              <a:lnSpc>
-                <a:spcPts val="2200"/>
-              </a:lnSpc>
-              <a:spcAft>
-                <a:spcPts val="0"/>
-              </a:spcAft>
-              <a:defRPr sz="2000" b="1">
-                <a:solidFill>
-                  <a:srgbClr val="F4F0E7"/>
-                </a:solidFill>
-                <a:latin typeface="Arial"/>
-              </a:defRPr>
-            </a:pPr>
-            <a:r>
-              <a:t>Ověřené hranice</a:t>
-            </a:r>
-          </a:p>
-        </p:txBody>
-      </p:sp>
-      <p:sp>
-        <p:nvSpPr>
-          <p:cNvPr id="13" name="TextBox 12"/>
-          <p:cNvSpPr txBox="1"/>
-          <p:nvPr/>
-        </p:nvSpPr>
-        <p:spPr>
-          <a:xfrm>
-            <a:off x="749300" y="3733800"/>
-            <a:ext cx="5016500" cy="1511300"/>
-          </a:xfrm>
-          <a:prstGeom prst="rect">
-            <a:avLst/>
-          </a:prstGeom>
-          <a:noFill/>
-        </p:spPr>
-        <p:txBody>
-          <a:bodyPr wrap="none" lIns="0" rIns="0" tIns="0" bIns="0">
-            <a:spAutoFit/>
-          </a:bodyPr>
-          <a:lstStyle/>
-          <a:p>
-            <a:pPr>
-              <a:lnSpc>
-                <a:spcPts val="1689"/>
-              </a:lnSpc>
-              <a:spcAft>
-                <a:spcPts val="0"/>
-              </a:spcAft>
-              <a:defRPr sz="1420" b="0">
-                <a:solidFill>
-                  <a:srgbClr val="F4F0E7"/>
-                </a:solidFill>
-                <a:latin typeface="Arial"/>
-              </a:defRPr>
-            </a:pPr>
-            <a:r>
-              <a:t>Data a reference; funkční filtry; oblíbené; hledání;</a:t>
-            </a:r>
-          </a:p>
-          <a:p>
-            <a:pPr>
-              <a:lnSpc>
-                <a:spcPts val="1689"/>
-              </a:lnSpc>
-              <a:spcAft>
-                <a:spcPts val="0"/>
-              </a:spcAft>
-              <a:defRPr sz="1420" b="0">
-                <a:solidFill>
-                  <a:srgbClr val="F4F0E7"/>
-                </a:solidFill>
-                <a:latin typeface="Arial"/>
-              </a:defRPr>
-            </a:pPr>
-            <a:r>
-              <a:t>dialog.</a:t>
-            </a:r>
-          </a:p>
-          <a:p>
-            <a:pPr>
-              <a:lnSpc>
-                <a:spcPts val="1689"/>
-              </a:lnSpc>
-              <a:spcAft>
-                <a:spcPts val="0"/>
-              </a:spcAft>
-              <a:defRPr sz="1420" b="0">
-                <a:solidFill>
-                  <a:srgbClr val="F4F0E7"/>
-                </a:solidFill>
-                <a:latin typeface="Arial"/>
-              </a:defRPr>
-            </a:pPr>
-          </a:p>
-          <a:p>
-            <a:pPr>
-              <a:lnSpc>
-                <a:spcPts val="1689"/>
-              </a:lnSpc>
-              <a:spcAft>
-                <a:spcPts val="0"/>
-              </a:spcAft>
-              <a:defRPr sz="1420" b="0">
-                <a:solidFill>
-                  <a:srgbClr val="F4F0E7"/>
-                </a:solidFill>
-                <a:latin typeface="Arial"/>
-              </a:defRPr>
-            </a:pPr>
-            <a:r>
-              <a:t>Záznam: prototype-validation.md.</a:t>
-            </a:r>
-          </a:p>
-        </p:txBody>
-      </p:sp>
-      <p:sp>
-        <p:nvSpPr>
           <p:cNvPr id="14" name="Rectangle 13"/>
           <p:cNvSpPr/>
           <p:nvPr/>
@@ -9837,13 +9622,13 @@
         <p:spPr>
           <a:xfrm>
             <a:off x="6210300" y="2768600"/>
-            <a:ext cx="5448300" cy="2603500"/>
+            <a:ext cx="5448300" cy="76200"/>
           </a:xfrm>
           <a:prstGeom prst="rect">
             <a:avLst/>
           </a:prstGeom>
           <a:solidFill>
-            <a:srgbClr val="E7E0D5"/>
+            <a:srgbClr val="F45E2B"/>
           </a:solidFill>
           <a:ln>
             <a:noFill/>
@@ -9873,50 +9658,7 @@
       </p:sp>
       <p:sp>
         <p:nvSpPr>
-          <p:cNvPr id="15" name="Rectangle 14"/>
-          <p:cNvSpPr/>
-          <p:nvPr/>
-        </p:nvSpPr>
-        <p:spPr>
-          <a:xfrm>
-            <a:off x="6210300" y="2768600"/>
-            <a:ext cx="5448300" cy="76200"/>
-          </a:xfrm>
-          <a:prstGeom prst="rect">
-            <a:avLst/>
-          </a:prstGeom>
-          <a:solidFill>
-            <a:srgbClr val="F45E2B"/>
-          </a:solidFill>
-          <a:ln>
-            <a:noFill/>
-          </a:ln>
-        </p:spPr>
-        <p:style>
-          <a:lnRef idx="1">
-            <a:schemeClr val="accent1"/>
-          </a:lnRef>
-          <a:fillRef idx="3">
-            <a:schemeClr val="accent1"/>
-          </a:fillRef>
-          <a:effectRef idx="2">
-            <a:schemeClr val="accent1"/>
-          </a:effectRef>
-          <a:fontRef idx="minor">
-            <a:schemeClr val="lt1"/>
-          </a:fontRef>
-        </p:style>
-        <p:txBody>
-          <a:bodyPr rtlCol="0" anchor="ctr"/>
-          <a:lstStyle/>
-          <a:p>
-            <a:pPr algn="ctr"/>
-          </a:p>
-        </p:txBody>
-      </p:sp>
-      <p:sp>
-        <p:nvSpPr>
-          <p:cNvPr id="16" name="TextBox 15"/>
+          <p:cNvPr id="15" name="TextBox 14"/>
           <p:cNvSpPr txBox="1"/>
           <p:nvPr/>
         </p:nvSpPr>
@@ -9958,7 +9700,7 @@
       </p:sp>
       <p:sp>
         <p:nvSpPr>
-          <p:cNvPr id="17" name="TextBox 16"/>
+          <p:cNvPr id="16" name="TextBox 15"/>
           <p:cNvSpPr txBox="1"/>
           <p:nvPr/>
         </p:nvSpPr>
@@ -10035,7 +9777,7 @@
       </p:sp>
       <p:sp>
         <p:nvSpPr>
-          <p:cNvPr id="18" name="TextBox 17"/>
+          <p:cNvPr id="17" name="TextBox 16"/>
           <p:cNvSpPr txBox="1"/>
           <p:nvPr/>
         </p:nvSpPr>
@@ -10077,7 +9819,7 @@
       </p:sp>
       <p:sp>
         <p:nvSpPr>
-          <p:cNvPr id="19" name="TextBox 18"/>
+          <p:cNvPr id="18" name="TextBox 17"/>
           <p:cNvSpPr txBox="1"/>
           <p:nvPr/>
         </p:nvSpPr>
@@ -10119,7 +9861,7 @@
       </p:sp>
       <p:sp>
         <p:nvSpPr>
-          <p:cNvPr id="20" name="TextBox 19"/>
+          <p:cNvPr id="19" name="TextBox 18"/>
           <p:cNvSpPr txBox="1"/>
           <p:nvPr/>
         </p:nvSpPr>

--- a/odevzdani/cviceni-03-prototyp/prezentace.pptx
+++ b/odevzdani/cviceni-03-prototyp/prezentace.pptx
@@ -507,7 +507,7 @@
           <a:lstStyle/>
           <a:p>
             <a:r>
-              <a:t>Připravili jsme interaktivní wireframe, který lze otevřít přímo v prohlížeči. Záměrně je jednodušší než finální vizuální návrh, abychom mohli hodnotit navigaci a práci s programem. Nejde o skutečně archivovanou dřívější verzi, ale o nově sestavený reprezentativní milník. Oproti specifikaci jsou nyní přímo průchozí dva scénáře: sestavení programu a vyhledání interpreta. Používáme stejná obsahová data, takže prototyp není jen několik vymyšlených karet.</a:t>
+              <a:t>[30 s] Oproti specifikaci máme spustitelný HTML wireframe. Otevře se bez instalace a používá stejnou datovou základnu jako web. Záměrně má jednoduchou grafiku: ověřujeme pořadí obsahu, navigaci a dva klíčové scénáře. Prototyp není šablona, kterou by hotový web při spuštění načítal; je to samostatná návrhová ukázka. Nynější prototyp byl sestaven pro tyto podklady, nepředstavujeme ho jako doložený historický export ze semestru.</a:t>
             </a:r>
           </a:p>
         </p:txBody>
@@ -577,7 +577,7 @@
           <a:lstStyle/>
           <a:p>
             <a:r>
-              <a:t>Navržené funkce navazují přímo na potřeby ze specifikace. Kombinace dne a scény zkracuje program na relevantní část. Oblíbené umožní vrátit se k rozhodnutí a jsou uchované v prohlížeči. Hledání funguje podle části názvu bez ohledu na velikost písmen a diakritiku. Kontextový detail přidává další smysluplnou interakci: z interpreta vede ke koncertu. Samotnou navigaci ani dekorativní pohyb nepočítáme jako jednu ze tří požadovaných funkcí.</a:t>
+              <a:t>[35 s] Mobile-first zde znamená navrhnout použitelný úzký základ, ne pouze zmenšit desktop. Návštěvník nejprve vidí hledání a důležitý obsah, podrobnosti následují. Filtry zůstávají dostupné bez vodorovného posouvání celé stránky. Na desktopu se seznam rozšíří do více sloupců, význam tlačítek ale zůstává stejný. Flexbox obsluhuje navigaci a Grid obsahové karty. Už ve wireframu kontrolujeme popisky a klávesnici, abychom problémy neodkládali až na finální grafiku.</a:t>
             </a:r>
           </a:p>
         </p:txBody>
@@ -647,7 +647,7 @@
           <a:lstStyle/>
           <a:p>
             <a:r>
-              <a:t>Pro mobil nezačínáme zmenšeným desktopem. Základ tvoří jeden sloupec, krátká navigace a jasné pořadí: identita, hledání, obsah. Filtry i tlačítka se mají zalamovat bez horizontálního posouvání celé stránky. Desktop používá tentýž obsah, jen nabízí více karet vedle sebe. Grid řeší obsahové seznamy a Flexbox navigaci. Už ve wireframu mají formuláře popisky a ovládání viditelný focus. To je levnější ověřit před dopracováním grafiky.</a:t>
+              <a:t>[35 s] První funkce kombinuje den a scénu; seznam musí splnit obě podmínky současně. Druhá ukládá vybraná vystoupení a umožní zobrazit pouze osobní program. Třetí hledá podle části názvu a propojuje detail s koncertem. Hledání nerozlišuje velikost písmen ani diakritiku. Menu nebo slideshow nepovažujeme za samostatnou požadovanou interakci. Každá zde uvedená funkce mění obsah nebo uchovává uživatelovo rozhodnutí a navazuje na potřebu ze specifikace.</a:t>
             </a:r>
           </a:p>
         </p:txBody>
@@ -717,7 +717,7 @@
           <a:lstStyle/>
           <a:p>
             <a:r>
-              <a:t>V první krátké ukázce otevřeme Program, vybereme první srpen a River Stage. Na výsledku ověříme datum a scénu, ne pouze počet karet. Jeden koncert uložíme a zapneme filtr Jen uložené. Po obnovení je uložený výběr znovu k dispozici. Projdeme také stav bez výsledků, aby bylo jasné, jak filtr změnit. Konkrétní průchod a jeho výsledek popisuje přiložený prototypový validační záznam; test ve vývojovém prohlížeči neznamená test na všech zařízeních.</a:t>
+              <a:t>[45 s včetně ukázky] Otevřeme prototyp, přejdeme na Program a zvolíme první srpen s River Stage. Ověříme datum a scénu výsledků, ne jen počet karet. Vybraný koncert uložíme a zapneme Jen uložené. Po obnovení stránky se k výběru vrátíme. Pokud není žádný výsledek, rozhraní má nabídnout pochopitelnou cestu ke změně filtrů. Tento průchod je součástí browserového ověření prototypu; není to výzkum s reprezentativním vzorkem uživatelů.</a:t>
             </a:r>
           </a:p>
         </p:txBody>
@@ -787,7 +787,7 @@
           <a:lstStyle/>
           <a:p>
             <a:r>
-              <a:t>Ve druhé ukázce zadáme DARKZY do globálního hledání. Výsledky oddělují účinkující od souvisejících vystoupení. U DARKZY otevřeme dialog s žánrem, popisem a programem. Odkaz do programu zachová kontext interpreta. Kontrolujeme, že údaje pocházejí ze stejné základny a dialog lze zavřít klávesou Escape. Hledaný text se nevkládá jako spustitelné HTML. Návštěvník dostane srozumitelnou zprávu i tehdy, když hledání nic nenajde.</a:t>
+              <a:t>[45 s včetně ukázky] Do hledání zadáme DARKZY a otevřeme detail stejnojmenného interpreta. Z detailu přejdeme do jeho programu. Ukážeme správný čas a scénu a zavření dialogu klávesou Escape. Vyzkoušíme také dotaz bez výsledku. Přesné vazby porovnáváme s daty, nikoli s tím, zda výsledek vypadá věrohodně. Zadaný text musí být vykreslený jako text, proto kontrolujeme i vstup připomínající HTML. Výsledky jsou zaznamenané v prototype-validation.md.</a:t>
             </a:r>
           </a:p>
         </p:txBody>
@@ -857,7 +857,7 @@
           <a:lstStyle/>
           <a:p>
             <a:r>
-              <a:t>Prototyp ověřuje informační architekturu a dva klíčové průchody. Jeho datové minimum kontroluje builder a browserový test prochází filtry, hledání, uložení i dialog. AI pomohla s návrhem a kódem, ale nepovažujeme její návrh za důkaz použitelnosti. Přijali jsme jednoduché bloky, propojení dat a funkční stavy. Odmítli jsme předstírat nákup v nehotovém wireframu. Skutečné rozhovory s návštěvníky ani testování na fyzickém telefonu nebyly dodány. Další milník ukazuje finální vzhled a širší funkce.</a:t>
+              <a:t>[40 s] AI vytvořila návrh rozložení a část kódu. Přijali jsme propojení filtrů a detailů, upravili pořadí obsahu pro malé displeje a odmítli pouhou slideshow jako důkaz interaktivity. Samostatný test prochází dva scénáře, obnovu uloženého programu, vyhledávání a dialog. V určených šířkách kontroluje přetékání. Konkrétní výstup je přiložen, samotný návrh AI není validace. Prototyp zatím nezahrnuje objednávku, PDF ani jazykové mutace; ty ukazuje následující implementační milník. Přiložený test prošel bez chyb běhu a potvrdil zachování uloženého programu.</a:t>
             </a:r>
           </a:p>
         </p:txBody>
@@ -3878,7 +3878,7 @@
             <a:avLst/>
           </a:prstGeom>
           <a:solidFill>
-            <a:srgbClr val="181817"/>
+            <a:srgbClr val="FFFFFF"/>
           </a:solidFill>
           <a:ln>
             <a:noFill/>
@@ -3914,14 +3914,14 @@
         </p:nvSpPr>
         <p:spPr>
           <a:xfrm>
-            <a:off x="8851900" y="0"/>
-            <a:ext cx="3340100" cy="6858000"/>
+            <a:off x="711200" y="609600"/>
+            <a:ext cx="76200" cy="381000"/>
           </a:xfrm>
           <a:prstGeom prst="rect">
             <a:avLst/>
           </a:prstGeom>
           <a:solidFill>
-            <a:srgbClr val="F45E2B"/>
+            <a:srgbClr val="E55024"/>
           </a:solidFill>
           <a:ln>
             <a:noFill/>
@@ -3957,8 +3957,8 @@
         </p:nvSpPr>
         <p:spPr>
           <a:xfrm>
-            <a:off x="533400" y="381000"/>
-            <a:ext cx="2476500" cy="350113"/>
+            <a:off x="977900" y="647700"/>
+            <a:ext cx="10502900" cy="317500"/>
           </a:xfrm>
           <a:prstGeom prst="rect">
             <a:avLst/>
@@ -3967,26 +3967,26 @@
         </p:spPr>
         <p:txBody>
           <a:bodyPr wrap="none" lIns="0" rIns="0" tIns="0" bIns="0">
-            <a:spAutoFit/>
+            <a:noAutofit/>
           </a:bodyPr>
           <a:lstStyle/>
           <a:p>
             <a:pPr>
               <a:lnSpc>
-                <a:spcPts val="2256"/>
+                <a:spcPts val="2360"/>
               </a:lnSpc>
               <a:spcAft>
                 <a:spcPts val="0"/>
               </a:spcAft>
-              <a:defRPr sz="1820" b="1">
+              <a:defRPr sz="2000" b="1">
                 <a:solidFill>
-                  <a:srgbClr val="F4F0E7"/>
+                  <a:srgbClr val="191B20"/>
                 </a:solidFill>
                 <a:latin typeface="Arial"/>
               </a:defRPr>
             </a:pPr>
             <a:r>
-              <a:t>PRAGUE</a:t>
+              <a:t>PRAGUE PULSE FEST</a:t>
             </a:r>
           </a:p>
         </p:txBody>
@@ -3999,8 +3999,8 @@
         </p:nvSpPr>
         <p:spPr>
           <a:xfrm>
-            <a:off x="533400" y="628650"/>
-            <a:ext cx="2476500" cy="513892"/>
+            <a:off x="711200" y="1600200"/>
+            <a:ext cx="10769600" cy="241300"/>
           </a:xfrm>
           <a:prstGeom prst="rect">
             <a:avLst/>
@@ -4009,26 +4009,26 @@
         </p:spPr>
         <p:txBody>
           <a:bodyPr wrap="none" lIns="0" rIns="0" tIns="0" bIns="0">
-            <a:spAutoFit/>
+            <a:noAutofit/>
           </a:bodyPr>
           <a:lstStyle/>
           <a:p>
             <a:pPr>
               <a:lnSpc>
-                <a:spcPts val="3546"/>
+                <a:spcPts val="1652"/>
               </a:lnSpc>
               <a:spcAft>
                 <a:spcPts val="0"/>
               </a:spcAft>
-              <a:defRPr sz="2860" b="1">
+              <a:defRPr sz="1400" b="1">
                 <a:solidFill>
-                  <a:srgbClr val="F4F0E7"/>
+                  <a:srgbClr val="E55024"/>
                 </a:solidFill>
                 <a:latin typeface="Arial"/>
               </a:defRPr>
             </a:pPr>
             <a:r>
-              <a:t>PULSE</a:t>
+              <a:t>CVIČENÍ 03</a:t>
             </a:r>
           </a:p>
         </p:txBody>
@@ -4041,8 +4041,8 @@
         </p:nvSpPr>
         <p:spPr>
           <a:xfrm>
-            <a:off x="533400" y="1041400"/>
-            <a:ext cx="2641600" cy="196570"/>
+            <a:off x="685800" y="2146300"/>
+            <a:ext cx="10795000" cy="1816100"/>
           </a:xfrm>
           <a:prstGeom prst="rect">
             <a:avLst/>
@@ -4051,26 +4051,26 @@
         </p:spPr>
         <p:txBody>
           <a:bodyPr wrap="none" lIns="0" rIns="0" tIns="0" bIns="0">
-            <a:spAutoFit/>
+            <a:noAutofit/>
           </a:bodyPr>
           <a:lstStyle/>
           <a:p>
             <a:pPr>
               <a:lnSpc>
-                <a:spcPts val="1047"/>
+                <a:spcPts val="5376"/>
               </a:lnSpc>
               <a:spcAft>
                 <a:spcPts val="0"/>
               </a:spcAft>
-              <a:defRPr sz="845" b="1">
+              <a:defRPr sz="4800" b="1">
                 <a:solidFill>
-                  <a:srgbClr val="F4F0E7"/>
+                  <a:srgbClr val="191B20"/>
                 </a:solidFill>
                 <a:latin typeface="Arial"/>
               </a:defRPr>
             </a:pPr>
             <a:r>
-              <a:t>FEST / 2027</a:t>
+              <a:t>UX návrh a prototyp</a:t>
             </a:r>
           </a:p>
         </p:txBody>
@@ -4083,8 +4083,8 @@
         </p:nvSpPr>
         <p:spPr>
           <a:xfrm>
-            <a:off x="533400" y="1536700"/>
-            <a:ext cx="7874000" cy="236728"/>
+            <a:off x="711200" y="4191000"/>
+            <a:ext cx="10769600" cy="1016000"/>
           </a:xfrm>
           <a:prstGeom prst="rect">
             <a:avLst/>
@@ -4093,162 +4093,186 @@
         </p:spPr>
         <p:txBody>
           <a:bodyPr wrap="none" lIns="0" rIns="0" tIns="0" bIns="0">
-            <a:spAutoFit/>
+            <a:noAutofit/>
           </a:bodyPr>
           <a:lstStyle/>
           <a:p>
             <a:pPr>
               <a:lnSpc>
-                <a:spcPts val="1364"/>
+                <a:spcPts val="2713"/>
               </a:lnSpc>
               <a:spcAft>
                 <a:spcPts val="0"/>
               </a:spcAft>
-              <a:defRPr sz="1100" b="1">
+              <a:defRPr sz="2300" b="0">
                 <a:solidFill>
-                  <a:srgbClr val="F4F0E7"/>
+                  <a:srgbClr val="626773"/>
                 </a:solidFill>
                 <a:latin typeface="Arial"/>
               </a:defRPr>
             </a:pPr>
             <a:r>
-              <a:t>CVIČENÍ 03 / PROTOTYP</a:t>
-            </a:r>
-          </a:p>
-        </p:txBody>
-      </p:sp>
-      <p:sp>
-        <p:nvSpPr>
-          <p:cNvPr id="8" name="TextBox 7"/>
-          <p:cNvSpPr txBox="1"/>
-          <p:nvPr/>
-        </p:nvSpPr>
-        <p:spPr>
-          <a:xfrm>
-            <a:off x="482600" y="2133600"/>
-            <a:ext cx="8001000" cy="2095500"/>
-          </a:xfrm>
-          <a:prstGeom prst="rect">
-            <a:avLst/>
-          </a:prstGeom>
-          <a:noFill/>
-        </p:spPr>
-        <p:txBody>
-          <a:bodyPr wrap="none" lIns="0" rIns="0" tIns="0" bIns="0">
-            <a:spAutoFit/>
-          </a:bodyPr>
-          <a:lstStyle/>
+              <a:t>Prague Pulse Fest · 1.–3. srpna 2027</a:t>
+            </a:r>
+          </a:p>
           <a:p>
             <a:pPr>
               <a:lnSpc>
-                <a:spcPts val="5830"/>
+                <a:spcPts val="2713"/>
               </a:lnSpc>
               <a:spcAft>
                 <a:spcPts val="0"/>
               </a:spcAft>
-              <a:defRPr sz="5500" b="1">
+              <a:defRPr sz="2300" b="0">
                 <a:solidFill>
-                  <a:srgbClr val="F4F0E7"/>
+                  <a:srgbClr val="626773"/>
                 </a:solidFill>
                 <a:latin typeface="Arial"/>
               </a:defRPr>
             </a:pPr>
             <a:r>
-              <a:t>Nejdřív cesta.</a:t>
-            </a:r>
-          </a:p>
+              <a:t>Výstaviště Praha · fiktivní festival</a:t>
+            </a:r>
+          </a:p>
+        </p:txBody>
+      </p:sp>
+      <p:sp>
+        <p:nvSpPr>
+          <p:cNvPr id="8" name="TextBox 7"/>
+          <p:cNvSpPr txBox="1"/>
+          <p:nvPr/>
+        </p:nvSpPr>
+        <p:spPr>
+          <a:xfrm>
+            <a:off x="711200" y="5600700"/>
+            <a:ext cx="10769600" cy="304800"/>
+          </a:xfrm>
+          <a:prstGeom prst="rect">
+            <a:avLst/>
+          </a:prstGeom>
+          <a:noFill/>
+        </p:spPr>
+        <p:txBody>
+          <a:bodyPr wrap="none" lIns="0" rIns="0" tIns="0" bIns="0">
+            <a:noAutofit/>
+          </a:bodyPr>
+          <a:lstStyle/>
           <a:p>
             <a:pPr>
               <a:lnSpc>
-                <a:spcPts val="5830"/>
-              </a:lnSpc>
-              <a:spcAft>
-                <a:spcPts val="0"/>
-              </a:spcAft>
-              <a:defRPr sz="5500" b="1">
-                <a:solidFill>
-                  <a:srgbClr val="F4F0E7"/>
-                </a:solidFill>
-                <a:latin typeface="Arial"/>
-              </a:defRPr>
-            </a:pPr>
-            <a:r>
-              <a:t>Potom grafika.</a:t>
-            </a:r>
-          </a:p>
-        </p:txBody>
-      </p:sp>
-      <p:sp>
-        <p:nvSpPr>
-          <p:cNvPr id="9" name="TextBox 8"/>
-          <p:cNvSpPr txBox="1"/>
-          <p:nvPr/>
-        </p:nvSpPr>
-        <p:spPr>
-          <a:xfrm>
-            <a:off x="533400" y="4724400"/>
-            <a:ext cx="7747000" cy="1104900"/>
-          </a:xfrm>
-          <a:prstGeom prst="rect">
-            <a:avLst/>
-          </a:prstGeom>
-          <a:noFill/>
-        </p:spPr>
-        <p:txBody>
-          <a:bodyPr wrap="none" lIns="0" rIns="0" tIns="0" bIns="0">
-            <a:spAutoFit/>
-          </a:bodyPr>
-          <a:lstStyle/>
-          <a:p>
-            <a:pPr>
-              <a:lnSpc>
-                <a:spcPts val="2356"/>
+                <a:spcPts val="2242"/>
               </a:lnSpc>
               <a:spcAft>
                 <a:spcPts val="0"/>
               </a:spcAft>
               <a:defRPr sz="1900" b="0">
                 <a:solidFill>
-                  <a:srgbClr val="F4F0E7"/>
+                  <a:srgbClr val="191B20"/>
                 </a:solidFill>
                 <a:latin typeface="Arial"/>
               </a:defRPr>
             </a:pPr>
             <a:r>
-              <a:t>Spustitelný wireframe bez instalace.</a:t>
-            </a:r>
-          </a:p>
+              <a:t>Michal Ladra · Matěj Mlejnek · Jan Martínek</a:t>
+            </a:r>
+          </a:p>
+        </p:txBody>
+      </p:sp>
+      <p:sp>
+        <p:nvSpPr>
+          <p:cNvPr id="9" name="Rectangle 8"/>
+          <p:cNvSpPr/>
+          <p:nvPr/>
+        </p:nvSpPr>
+        <p:spPr>
+          <a:xfrm>
+            <a:off x="711200" y="6248400"/>
+            <a:ext cx="10769600" cy="12700"/>
+          </a:xfrm>
+          <a:prstGeom prst="rect">
+            <a:avLst/>
+          </a:prstGeom>
+          <a:solidFill>
+            <a:srgbClr val="DFE2E7"/>
+          </a:solidFill>
+          <a:ln>
+            <a:noFill/>
+          </a:ln>
+        </p:spPr>
+        <p:style>
+          <a:lnRef idx="1">
+            <a:schemeClr val="accent1"/>
+          </a:lnRef>
+          <a:fillRef idx="3">
+            <a:schemeClr val="accent1"/>
+          </a:fillRef>
+          <a:effectRef idx="2">
+            <a:schemeClr val="accent1"/>
+          </a:effectRef>
+          <a:fontRef idx="minor">
+            <a:schemeClr val="lt1"/>
+          </a:fontRef>
+        </p:style>
+        <p:txBody>
+          <a:bodyPr rtlCol="0" anchor="ctr"/>
+          <a:lstStyle/>
+          <a:p>
+            <a:pPr algn="ctr"/>
+          </a:p>
+        </p:txBody>
+      </p:sp>
+      <p:sp>
+        <p:nvSpPr>
+          <p:cNvPr id="10" name="TextBox 9"/>
+          <p:cNvSpPr txBox="1"/>
+          <p:nvPr/>
+        </p:nvSpPr>
+        <p:spPr>
+          <a:xfrm>
+            <a:off x="711200" y="6438900"/>
+            <a:ext cx="9652000" cy="203200"/>
+          </a:xfrm>
+          <a:prstGeom prst="rect">
+            <a:avLst/>
+          </a:prstGeom>
+          <a:noFill/>
+        </p:spPr>
+        <p:txBody>
+          <a:bodyPr wrap="none" lIns="0" rIns="0" tIns="0" bIns="0">
+            <a:noAutofit/>
+          </a:bodyPr>
+          <a:lstStyle/>
           <a:p>
             <a:pPr>
               <a:lnSpc>
-                <a:spcPts val="2356"/>
+                <a:spcPts val="1297"/>
               </a:lnSpc>
               <a:spcAft>
                 <a:spcPts val="0"/>
               </a:spcAft>
-              <a:defRPr sz="1900" b="0">
+              <a:defRPr sz="1100" b="0">
                 <a:solidFill>
-                  <a:srgbClr val="F4F0E7"/>
+                  <a:srgbClr val="626773"/>
                 </a:solidFill>
                 <a:latin typeface="Arial"/>
               </a:defRPr>
             </a:pPr>
             <a:r>
-              <a:t>Dva scénáře, čtyři obsahové části.</a:t>
-            </a:r>
-          </a:p>
-        </p:txBody>
-      </p:sp>
-      <p:sp>
-        <p:nvSpPr>
-          <p:cNvPr id="10" name="TextBox 9"/>
+              <a:t>Prague Pulse Fest · Výstaviště Praha · 2027</a:t>
+            </a:r>
+          </a:p>
+        </p:txBody>
+      </p:sp>
+      <p:sp>
+        <p:nvSpPr>
+          <p:cNvPr id="11" name="TextBox 10"/>
           <p:cNvSpPr txBox="1"/>
           <p:nvPr/>
         </p:nvSpPr>
         <p:spPr>
           <a:xfrm>
-            <a:off x="9220200" y="889000"/>
-            <a:ext cx="2667000" cy="961135"/>
+            <a:off x="10807700" y="6413500"/>
+            <a:ext cx="673100" cy="215900"/>
           </a:xfrm>
           <a:prstGeom prst="rect">
             <a:avLst/>
@@ -4257,316 +4281,26 @@
         </p:spPr>
         <p:txBody>
           <a:bodyPr wrap="none" lIns="0" rIns="0" tIns="0" bIns="0">
-            <a:spAutoFit/>
+            <a:noAutofit/>
           </a:bodyPr>
           <a:lstStyle/>
           <a:p>
             <a:pPr>
               <a:lnSpc>
-                <a:spcPts val="7067"/>
+                <a:spcPts val="1416"/>
               </a:lnSpc>
               <a:spcAft>
                 <a:spcPts val="0"/>
               </a:spcAft>
-              <a:defRPr sz="5700" b="1">
+              <a:defRPr sz="1200" b="0">
                 <a:solidFill>
-                  <a:srgbClr val="181817"/>
+                  <a:srgbClr val="626773"/>
                 </a:solidFill>
                 <a:latin typeface="Arial"/>
               </a:defRPr>
             </a:pPr>
             <a:r>
-              <a:t>1—3</a:t>
-            </a:r>
-          </a:p>
-        </p:txBody>
-      </p:sp>
-      <p:sp>
-        <p:nvSpPr>
-          <p:cNvPr id="11" name="TextBox 10"/>
-          <p:cNvSpPr txBox="1"/>
-          <p:nvPr/>
-        </p:nvSpPr>
-        <p:spPr>
-          <a:xfrm>
-            <a:off x="9220200" y="1765300"/>
-            <a:ext cx="2667000" cy="551688"/>
-          </a:xfrm>
-          <a:prstGeom prst="rect">
-            <a:avLst/>
-          </a:prstGeom>
-          <a:noFill/>
-        </p:spPr>
-        <p:txBody>
-          <a:bodyPr wrap="none" lIns="0" rIns="0" tIns="0" bIns="0">
-            <a:spAutoFit/>
-          </a:bodyPr>
-          <a:lstStyle/>
-          <a:p>
-            <a:pPr>
-              <a:lnSpc>
-                <a:spcPts val="3844"/>
-              </a:lnSpc>
-              <a:spcAft>
-                <a:spcPts val="0"/>
-              </a:spcAft>
-              <a:defRPr sz="3100" b="1">
-                <a:solidFill>
-                  <a:srgbClr val="181817"/>
-                </a:solidFill>
-                <a:latin typeface="Arial"/>
-              </a:defRPr>
-            </a:pPr>
-            <a:r>
-              <a:t>SRPEN</a:t>
-            </a:r>
-          </a:p>
-        </p:txBody>
-      </p:sp>
-      <p:sp>
-        <p:nvSpPr>
-          <p:cNvPr id="12" name="TextBox 11"/>
-          <p:cNvSpPr txBox="1"/>
-          <p:nvPr/>
-        </p:nvSpPr>
-        <p:spPr>
-          <a:xfrm>
-            <a:off x="9220200" y="2247900"/>
-            <a:ext cx="2667000" cy="724916"/>
-          </a:xfrm>
-          <a:prstGeom prst="rect">
-            <a:avLst/>
-          </a:prstGeom>
-          <a:noFill/>
-        </p:spPr>
-        <p:txBody>
-          <a:bodyPr wrap="none" lIns="0" rIns="0" tIns="0" bIns="0">
-            <a:spAutoFit/>
-          </a:bodyPr>
-          <a:lstStyle/>
-          <a:p>
-            <a:pPr>
-              <a:lnSpc>
-                <a:spcPts val="5208"/>
-              </a:lnSpc>
-              <a:spcAft>
-                <a:spcPts val="0"/>
-              </a:spcAft>
-              <a:defRPr sz="4200" b="1">
-                <a:solidFill>
-                  <a:srgbClr val="181817"/>
-                </a:solidFill>
-                <a:latin typeface="Arial"/>
-              </a:defRPr>
-            </a:pPr>
-            <a:r>
-              <a:t>2027</a:t>
-            </a:r>
-          </a:p>
-        </p:txBody>
-      </p:sp>
-      <p:sp>
-        <p:nvSpPr>
-          <p:cNvPr id="13" name="TextBox 12"/>
-          <p:cNvSpPr txBox="1"/>
-          <p:nvPr/>
-        </p:nvSpPr>
-        <p:spPr>
-          <a:xfrm>
-            <a:off x="9220200" y="3619500"/>
-            <a:ext cx="2540000" cy="598932"/>
-          </a:xfrm>
-          <a:prstGeom prst="rect">
-            <a:avLst/>
-          </a:prstGeom>
-          <a:noFill/>
-        </p:spPr>
-        <p:txBody>
-          <a:bodyPr wrap="none" lIns="0" rIns="0" tIns="0" bIns="0">
-            <a:spAutoFit/>
-          </a:bodyPr>
-          <a:lstStyle/>
-          <a:p>
-            <a:pPr>
-              <a:lnSpc>
-                <a:spcPts val="2108"/>
-              </a:lnSpc>
-              <a:spcAft>
-                <a:spcPts val="0"/>
-              </a:spcAft>
-              <a:defRPr sz="1700" b="1">
-                <a:solidFill>
-                  <a:srgbClr val="181817"/>
-                </a:solidFill>
-                <a:latin typeface="Arial"/>
-              </a:defRPr>
-            </a:pPr>
-            <a:r>
-              <a:t>PRAHA</a:t>
-            </a:r>
-          </a:p>
-          <a:p>
-            <a:pPr>
-              <a:lnSpc>
-                <a:spcPts val="2108"/>
-              </a:lnSpc>
-              <a:spcAft>
-                <a:spcPts val="0"/>
-              </a:spcAft>
-              <a:defRPr sz="1700" b="1">
-                <a:solidFill>
-                  <a:srgbClr val="181817"/>
-                </a:solidFill>
-                <a:latin typeface="Arial"/>
-              </a:defRPr>
-            </a:pPr>
-            <a:r>
-              <a:t>VLTAVA PARK</a:t>
-            </a:r>
-          </a:p>
-        </p:txBody>
-      </p:sp>
-      <p:sp>
-        <p:nvSpPr>
-          <p:cNvPr id="14" name="TextBox 13"/>
-          <p:cNvSpPr txBox="1"/>
-          <p:nvPr/>
-        </p:nvSpPr>
-        <p:spPr>
-          <a:xfrm>
-            <a:off x="9220200" y="5054600"/>
-            <a:ext cx="2540000" cy="882396"/>
-          </a:xfrm>
-          <a:prstGeom prst="rect">
-            <a:avLst/>
-          </a:prstGeom>
-          <a:noFill/>
-        </p:spPr>
-        <p:txBody>
-          <a:bodyPr wrap="none" lIns="0" rIns="0" tIns="0" bIns="0">
-            <a:spAutoFit/>
-          </a:bodyPr>
-          <a:lstStyle/>
-          <a:p>
-            <a:pPr>
-              <a:lnSpc>
-                <a:spcPts val="3224"/>
-              </a:lnSpc>
-              <a:spcAft>
-                <a:spcPts val="0"/>
-              </a:spcAft>
-              <a:defRPr sz="2600" b="1">
-                <a:solidFill>
-                  <a:srgbClr val="181817"/>
-                </a:solidFill>
-                <a:latin typeface="Arial"/>
-              </a:defRPr>
-            </a:pPr>
-            <a:r>
-              <a:t>CVIČENÍ</a:t>
-            </a:r>
-          </a:p>
-          <a:p>
-            <a:pPr>
-              <a:lnSpc>
-                <a:spcPts val="3224"/>
-              </a:lnSpc>
-              <a:spcAft>
-                <a:spcPts val="0"/>
-              </a:spcAft>
-              <a:defRPr sz="2600" b="1">
-                <a:solidFill>
-                  <a:srgbClr val="181817"/>
-                </a:solidFill>
-                <a:latin typeface="Arial"/>
-              </a:defRPr>
-            </a:pPr>
-            <a:r>
-              <a:t>03</a:t>
-            </a:r>
-          </a:p>
-        </p:txBody>
-      </p:sp>
-      <p:sp>
-        <p:nvSpPr>
-          <p:cNvPr id="15" name="TextBox 14"/>
-          <p:cNvSpPr txBox="1"/>
-          <p:nvPr/>
-        </p:nvSpPr>
-        <p:spPr>
-          <a:xfrm>
-            <a:off x="533400" y="6413500"/>
-            <a:ext cx="10033000" cy="181610"/>
-          </a:xfrm>
-          <a:prstGeom prst="rect">
-            <a:avLst/>
-          </a:prstGeom>
-          <a:noFill/>
-        </p:spPr>
-        <p:txBody>
-          <a:bodyPr wrap="none" lIns="0" rIns="0" tIns="0" bIns="0">
-            <a:spAutoFit/>
-          </a:bodyPr>
-          <a:lstStyle/>
-          <a:p>
-            <a:pPr>
-              <a:lnSpc>
-                <a:spcPts val="930"/>
-              </a:lnSpc>
-              <a:spcAft>
-                <a:spcPts val="0"/>
-              </a:spcAft>
-              <a:defRPr sz="750" b="0">
-                <a:solidFill>
-                  <a:srgbClr val="F4F0E7"/>
-                </a:solidFill>
-                <a:latin typeface="Arial"/>
-              </a:defRPr>
-            </a:pPr>
-            <a:r>
-              <a:t>DODATEČNĚ PŘIPRAVENÝ PODKLAD K MILNÍKU</a:t>
-            </a:r>
-          </a:p>
-        </p:txBody>
-      </p:sp>
-      <p:sp>
-        <p:nvSpPr>
-          <p:cNvPr id="16" name="TextBox 15"/>
-          <p:cNvSpPr txBox="1"/>
-          <p:nvPr/>
-        </p:nvSpPr>
-        <p:spPr>
-          <a:xfrm>
-            <a:off x="10947400" y="6350000"/>
-            <a:ext cx="825500" cy="220979"/>
-          </a:xfrm>
-          <a:prstGeom prst="rect">
-            <a:avLst/>
-          </a:prstGeom>
-          <a:noFill/>
-        </p:spPr>
-        <p:txBody>
-          <a:bodyPr wrap="none" lIns="0" rIns="0" tIns="0" bIns="0">
-            <a:spAutoFit/>
-          </a:bodyPr>
-          <a:lstStyle/>
-          <a:p>
-            <a:pPr>
-              <a:lnSpc>
-                <a:spcPts val="1240"/>
-              </a:lnSpc>
-              <a:spcAft>
-                <a:spcPts val="0"/>
-              </a:spcAft>
-              <a:defRPr sz="1000" b="1">
-                <a:solidFill>
-                  <a:srgbClr val="F4F0E7"/>
-                </a:solidFill>
-                <a:latin typeface="Arial"/>
-              </a:defRPr>
-            </a:pPr>
-            <a:r>
-              <a:t>03 / 01</a:t>
+              <a:t>1 / 6</a:t>
             </a:r>
           </a:p>
         </p:txBody>
@@ -4604,7 +4338,7 @@
             <a:avLst/>
           </a:prstGeom>
           <a:solidFill>
-            <a:srgbClr val="F4F0E7"/>
+            <a:srgbClr val="FFFFFF"/>
           </a:solidFill>
           <a:ln>
             <a:noFill/>
@@ -4640,8 +4374,8 @@
         </p:nvSpPr>
         <p:spPr>
           <a:xfrm>
-            <a:off x="533400" y="304800"/>
-            <a:ext cx="1905000" cy="283972"/>
+            <a:off x="711200" y="457200"/>
+            <a:ext cx="10769600" cy="228600"/>
           </a:xfrm>
           <a:prstGeom prst="rect">
             <a:avLst/>
@@ -4650,172 +4384,46 @@
         </p:spPr>
         <p:txBody>
           <a:bodyPr wrap="none" lIns="0" rIns="0" tIns="0" bIns="0">
-            <a:spAutoFit/>
+            <a:noAutofit/>
           </a:bodyPr>
           <a:lstStyle/>
           <a:p>
             <a:pPr>
               <a:lnSpc>
-                <a:spcPts val="1736"/>
+                <a:spcPts val="1534"/>
               </a:lnSpc>
               <a:spcAft>
                 <a:spcPts val="0"/>
               </a:spcAft>
-              <a:defRPr sz="1400" b="1">
+              <a:defRPr sz="1300" b="1">
                 <a:solidFill>
-                  <a:srgbClr val="181817"/>
+                  <a:srgbClr val="626773"/>
                 </a:solidFill>
                 <a:latin typeface="Arial"/>
               </a:defRPr>
             </a:pPr>
             <a:r>
-              <a:t>PRAGUE</a:t>
-            </a:r>
-          </a:p>
-        </p:txBody>
-      </p:sp>
-      <p:sp>
-        <p:nvSpPr>
-          <p:cNvPr id="4" name="TextBox 3"/>
-          <p:cNvSpPr txBox="1"/>
-          <p:nvPr/>
-        </p:nvSpPr>
-        <p:spPr>
-          <a:xfrm>
-            <a:off x="533400" y="495300"/>
-            <a:ext cx="1905000" cy="409956"/>
-          </a:xfrm>
-          <a:prstGeom prst="rect">
-            <a:avLst/>
-          </a:prstGeom>
-          <a:noFill/>
-        </p:spPr>
-        <p:txBody>
-          <a:bodyPr wrap="none" lIns="0" rIns="0" tIns="0" bIns="0">
-            <a:spAutoFit/>
-          </a:bodyPr>
-          <a:lstStyle/>
-          <a:p>
-            <a:pPr>
-              <a:lnSpc>
-                <a:spcPts val="2728"/>
-              </a:lnSpc>
-              <a:spcAft>
-                <a:spcPts val="0"/>
-              </a:spcAft>
-              <a:defRPr sz="2200" b="1">
-                <a:solidFill>
-                  <a:srgbClr val="181817"/>
-                </a:solidFill>
-                <a:latin typeface="Arial"/>
-              </a:defRPr>
-            </a:pPr>
-            <a:r>
-              <a:t>PULSE</a:t>
-            </a:r>
-          </a:p>
-        </p:txBody>
-      </p:sp>
-      <p:sp>
-        <p:nvSpPr>
-          <p:cNvPr id="5" name="TextBox 4"/>
-          <p:cNvSpPr txBox="1"/>
-          <p:nvPr/>
-        </p:nvSpPr>
-        <p:spPr>
-          <a:xfrm>
-            <a:off x="533400" y="812800"/>
-            <a:ext cx="2032000" cy="165862"/>
-          </a:xfrm>
-          <a:prstGeom prst="rect">
-            <a:avLst/>
-          </a:prstGeom>
-          <a:noFill/>
-        </p:spPr>
-        <p:txBody>
-          <a:bodyPr wrap="none" lIns="0" rIns="0" tIns="0" bIns="0">
-            <a:spAutoFit/>
-          </a:bodyPr>
-          <a:lstStyle/>
-          <a:p>
-            <a:pPr>
-              <a:lnSpc>
-                <a:spcPts val="806"/>
-              </a:lnSpc>
-              <a:spcAft>
-                <a:spcPts val="0"/>
-              </a:spcAft>
-              <a:defRPr sz="650" b="1">
-                <a:solidFill>
-                  <a:srgbClr val="181817"/>
-                </a:solidFill>
-                <a:latin typeface="Arial"/>
-              </a:defRPr>
-            </a:pPr>
-            <a:r>
-              <a:t>FEST / 2027</a:t>
-            </a:r>
-          </a:p>
-        </p:txBody>
-      </p:sp>
-      <p:sp>
-        <p:nvSpPr>
-          <p:cNvPr id="6" name="TextBox 5"/>
-          <p:cNvSpPr txBox="1"/>
-          <p:nvPr/>
-        </p:nvSpPr>
-        <p:spPr>
-          <a:xfrm>
-            <a:off x="5588000" y="533400"/>
-            <a:ext cx="6070600" cy="220979"/>
-          </a:xfrm>
-          <a:prstGeom prst="rect">
-            <a:avLst/>
-          </a:prstGeom>
-          <a:noFill/>
-        </p:spPr>
-        <p:txBody>
-          <a:bodyPr wrap="none" lIns="0" rIns="0" tIns="0" bIns="0">
-            <a:spAutoFit/>
-          </a:bodyPr>
-          <a:lstStyle/>
-          <a:p>
-            <a:pPr>
-              <a:lnSpc>
-                <a:spcPts val="1240"/>
-              </a:lnSpc>
-              <a:spcAft>
-                <a:spcPts val="0"/>
-              </a:spcAft>
-              <a:defRPr sz="1000" b="1">
-                <a:solidFill>
-                  <a:srgbClr val="68635B"/>
-                </a:solidFill>
-                <a:latin typeface="Arial"/>
-              </a:defRPr>
-            </a:pPr>
-            <a:r>
-              <a:t>ČTYŘI FUNKCE, NE SLIDESHOW</a:t>
-            </a:r>
-          </a:p>
-        </p:txBody>
-      </p:sp>
-      <p:sp>
-        <p:nvSpPr>
-          <p:cNvPr id="7" name="Rectangle 6"/>
+              <a:t>HLAVNÍ NÁVRHOVÁ ROZHODNUTÍ</a:t>
+            </a:r>
+          </a:p>
+        </p:txBody>
+      </p:sp>
+      <p:sp>
+        <p:nvSpPr>
+          <p:cNvPr id="4" name="Rectangle 3"/>
           <p:cNvSpPr/>
           <p:nvPr/>
         </p:nvSpPr>
         <p:spPr>
           <a:xfrm>
-            <a:off x="533400" y="1155700"/>
-            <a:ext cx="11125200" cy="25400"/>
+            <a:off x="711200" y="876300"/>
+            <a:ext cx="622300" cy="50800"/>
           </a:xfrm>
           <a:prstGeom prst="rect">
             <a:avLst/>
           </a:prstGeom>
           <a:solidFill>
-            <a:srgbClr val="181817"/>
+            <a:srgbClr val="E55024"/>
           </a:solidFill>
           <a:ln>
             <a:noFill/>
@@ -4845,14 +4453,14 @@
       </p:sp>
       <p:sp>
         <p:nvSpPr>
-          <p:cNvPr id="8" name="TextBox 7"/>
+          <p:cNvPr id="5" name="TextBox 4"/>
           <p:cNvSpPr txBox="1"/>
           <p:nvPr/>
         </p:nvSpPr>
         <p:spPr>
           <a:xfrm>
-            <a:off x="508000" y="1422400"/>
-            <a:ext cx="11176000" cy="1079500"/>
+            <a:off x="685800" y="1257300"/>
+            <a:ext cx="10795000" cy="1168400"/>
           </a:xfrm>
           <a:prstGeom prst="rect">
             <a:avLst/>
@@ -4861,46 +4469,46 @@
         </p:spPr>
         <p:txBody>
           <a:bodyPr wrap="none" lIns="0" rIns="0" tIns="0" bIns="0">
-            <a:spAutoFit/>
+            <a:noAutofit/>
           </a:bodyPr>
           <a:lstStyle/>
           <a:p>
             <a:pPr>
               <a:lnSpc>
-                <a:spcPts val="3740"/>
+                <a:spcPts val="4032"/>
               </a:lnSpc>
               <a:spcAft>
                 <a:spcPts val="0"/>
               </a:spcAft>
-              <a:defRPr sz="3400" b="1">
+              <a:defRPr sz="3600" b="1">
                 <a:solidFill>
-                  <a:srgbClr val="181817"/>
+                  <a:srgbClr val="191B20"/>
                 </a:solidFill>
                 <a:latin typeface="Arial"/>
               </a:defRPr>
             </a:pPr>
             <a:r>
-              <a:t>Interaktivita řeší potřebu.</a:t>
-            </a:r>
-          </a:p>
-        </p:txBody>
-      </p:sp>
-      <p:sp>
-        <p:nvSpPr>
-          <p:cNvPr id="9" name="Rectangle 8"/>
+              <a:t>Od specifikace k wireframu</a:t>
+            </a:r>
+          </a:p>
+        </p:txBody>
+      </p:sp>
+      <p:sp>
+        <p:nvSpPr>
+          <p:cNvPr id="6" name="Rectangle 5"/>
           <p:cNvSpPr/>
           <p:nvPr/>
         </p:nvSpPr>
         <p:spPr>
           <a:xfrm>
-            <a:off x="533400" y="2768600"/>
-            <a:ext cx="3556000" cy="2603500"/>
+            <a:off x="723900" y="2273300"/>
+            <a:ext cx="101600" cy="101600"/>
           </a:xfrm>
           <a:prstGeom prst="rect">
             <a:avLst/>
           </a:prstGeom>
           <a:solidFill>
-            <a:srgbClr val="181817"/>
+            <a:srgbClr val="E55024"/>
           </a:solidFill>
           <a:ln>
             <a:noFill/>
@@ -4930,20 +4538,62 @@
       </p:sp>
       <p:sp>
         <p:nvSpPr>
-          <p:cNvPr id="10" name="Rectangle 9"/>
+          <p:cNvPr id="7" name="TextBox 6"/>
+          <p:cNvSpPr txBox="1"/>
+          <p:nvPr/>
+        </p:nvSpPr>
+        <p:spPr>
+          <a:xfrm>
+            <a:off x="1066800" y="2146300"/>
+            <a:ext cx="10160000" cy="419100"/>
+          </a:xfrm>
+          <a:prstGeom prst="rect">
+            <a:avLst/>
+          </a:prstGeom>
+          <a:noFill/>
+        </p:spPr>
+        <p:txBody>
+          <a:bodyPr wrap="none" lIns="0" rIns="0" tIns="0" bIns="0">
+            <a:noAutofit/>
+          </a:bodyPr>
+          <a:lstStyle/>
+          <a:p>
+            <a:pPr>
+              <a:lnSpc>
+                <a:spcPts val="3360"/>
+              </a:lnSpc>
+              <a:spcAft>
+                <a:spcPts val="0"/>
+              </a:spcAft>
+              <a:defRPr sz="2800" b="0">
+                <a:solidFill>
+                  <a:srgbClr val="191B20"/>
+                </a:solidFill>
+                <a:latin typeface="Arial"/>
+              </a:defRPr>
+            </a:pPr>
+            <a:r>
+              <a:t>Nově: spustitelný wireframe a dva průchozí scénáře.</a:t>
+            </a:r>
+          </a:p>
+        </p:txBody>
+      </p:sp>
+      <p:sp>
+        <p:nvSpPr>
+          <p:cNvPr id="8" name="Rectangle 7"/>
           <p:cNvSpPr/>
           <p:nvPr/>
         </p:nvSpPr>
         <p:spPr>
           <a:xfrm>
-            <a:off x="533400" y="2768600"/>
-            <a:ext cx="3556000" cy="76200"/>
+            <a:off x="723900" y="2971800"/>
+            <a:ext cx="101600" cy="101600"/>
           </a:xfrm>
           <a:prstGeom prst="rect">
             <a:avLst/>
           </a:prstGeom>
           <a:solidFill>
-            <a:srgbClr val="F45E2B"/>
+            <a:srgbClr val="E55024"/>
           </a:solidFill>
           <a:ln>
             <a:noFill/>
@@ -4973,14 +4623,14 @@
       </p:sp>
       <p:sp>
         <p:nvSpPr>
-          <p:cNvPr id="11" name="TextBox 10"/>
+          <p:cNvPr id="9" name="TextBox 8"/>
           <p:cNvSpPr txBox="1"/>
           <p:nvPr/>
         </p:nvSpPr>
         <p:spPr>
           <a:xfrm>
-            <a:off x="749300" y="3035300"/>
-            <a:ext cx="3124200" cy="685800"/>
+            <a:off x="1066800" y="2844800"/>
+            <a:ext cx="10160000" cy="419100"/>
           </a:xfrm>
           <a:prstGeom prst="rect">
             <a:avLst/>
@@ -4989,142 +4639,46 @@
         </p:spPr>
         <p:txBody>
           <a:bodyPr wrap="none" lIns="0" rIns="0" tIns="0" bIns="0">
-            <a:spAutoFit/>
+            <a:noAutofit/>
           </a:bodyPr>
           <a:lstStyle/>
           <a:p>
             <a:pPr>
               <a:lnSpc>
-                <a:spcPts val="2200"/>
+                <a:spcPts val="3360"/>
               </a:lnSpc>
               <a:spcAft>
                 <a:spcPts val="0"/>
               </a:spcAft>
-              <a:defRPr sz="2000" b="1">
+              <a:defRPr sz="2800" b="0">
                 <a:solidFill>
-                  <a:srgbClr val="F4F0E7"/>
+                  <a:srgbClr val="191B20"/>
                 </a:solidFill>
                 <a:latin typeface="Arial"/>
               </a:defRPr>
             </a:pPr>
             <a:r>
-              <a:t>Zúžit program</a:t>
-            </a:r>
-          </a:p>
-        </p:txBody>
-      </p:sp>
-      <p:sp>
-        <p:nvSpPr>
-          <p:cNvPr id="12" name="TextBox 11"/>
-          <p:cNvSpPr txBox="1"/>
-          <p:nvPr/>
-        </p:nvSpPr>
-        <p:spPr>
-          <a:xfrm>
-            <a:off x="749300" y="3733800"/>
-            <a:ext cx="3124200" cy="1511300"/>
-          </a:xfrm>
-          <a:prstGeom prst="rect">
-            <a:avLst/>
-          </a:prstGeom>
-          <a:noFill/>
-        </p:spPr>
-        <p:txBody>
-          <a:bodyPr wrap="none" lIns="0" rIns="0" tIns="0" bIns="0">
-            <a:spAutoFit/>
-          </a:bodyPr>
-          <a:lstStyle/>
-          <a:p>
-            <a:pPr>
-              <a:lnSpc>
-                <a:spcPts val="1689"/>
-              </a:lnSpc>
-              <a:spcAft>
-                <a:spcPts val="0"/>
-              </a:spcAft>
-              <a:defRPr sz="1420" b="0">
-                <a:solidFill>
-                  <a:srgbClr val="F4F0E7"/>
-                </a:solidFill>
-                <a:latin typeface="Arial"/>
-              </a:defRPr>
-            </a:pPr>
-            <a:r>
-              <a:t>Den + scéna společně mění</a:t>
-            </a:r>
-          </a:p>
-          <a:p>
-            <a:pPr>
-              <a:lnSpc>
-                <a:spcPts val="1689"/>
-              </a:lnSpc>
-              <a:spcAft>
-                <a:spcPts val="0"/>
-              </a:spcAft>
-              <a:defRPr sz="1420" b="0">
-                <a:solidFill>
-                  <a:srgbClr val="F4F0E7"/>
-                </a:solidFill>
-                <a:latin typeface="Arial"/>
-              </a:defRPr>
-            </a:pPr>
-            <a:r>
-              <a:t>skutečný seznam vystoupení.</a:t>
-            </a:r>
-          </a:p>
-          <a:p>
-            <a:pPr>
-              <a:lnSpc>
-                <a:spcPts val="1689"/>
-              </a:lnSpc>
-              <a:spcAft>
-                <a:spcPts val="0"/>
-              </a:spcAft>
-              <a:defRPr sz="1420" b="0">
-                <a:solidFill>
-                  <a:srgbClr val="F4F0E7"/>
-                </a:solidFill>
-                <a:latin typeface="Arial"/>
-              </a:defRPr>
-            </a:pPr>
-          </a:p>
-          <a:p>
-            <a:pPr>
-              <a:lnSpc>
-                <a:spcPts val="1689"/>
-              </a:lnSpc>
-              <a:spcAft>
-                <a:spcPts val="0"/>
-              </a:spcAft>
-              <a:defRPr sz="1420" b="0">
-                <a:solidFill>
-                  <a:srgbClr val="F4F0E7"/>
-                </a:solidFill>
-                <a:latin typeface="Arial"/>
-              </a:defRPr>
-            </a:pPr>
-            <a:r>
-              <a:t>Méně nesouvisejících výsledků.</a:t>
-            </a:r>
-          </a:p>
-        </p:txBody>
-      </p:sp>
-      <p:sp>
-        <p:nvSpPr>
-          <p:cNvPr id="13" name="Rectangle 12"/>
+              <a:t>Mobil: jeden sloupec, hlavní úkol před doplňujícím obsahem.</a:t>
+            </a:r>
+          </a:p>
+        </p:txBody>
+      </p:sp>
+      <p:sp>
+        <p:nvSpPr>
+          <p:cNvPr id="10" name="Rectangle 9"/>
           <p:cNvSpPr/>
           <p:nvPr/>
         </p:nvSpPr>
         <p:spPr>
           <a:xfrm>
-            <a:off x="4318000" y="2768600"/>
-            <a:ext cx="3556000" cy="2603500"/>
+            <a:off x="723900" y="3670300"/>
+            <a:ext cx="101600" cy="101600"/>
           </a:xfrm>
           <a:prstGeom prst="rect">
             <a:avLst/>
           </a:prstGeom>
           <a:solidFill>
-            <a:srgbClr val="E7E0D5"/>
+            <a:srgbClr val="E55024"/>
           </a:solidFill>
           <a:ln>
             <a:noFill/>
@@ -5154,20 +4708,62 @@
       </p:sp>
       <p:sp>
         <p:nvSpPr>
-          <p:cNvPr id="14" name="Rectangle 13"/>
+          <p:cNvPr id="11" name="TextBox 10"/>
+          <p:cNvSpPr txBox="1"/>
+          <p:nvPr/>
+        </p:nvSpPr>
+        <p:spPr>
+          <a:xfrm>
+            <a:off x="1066800" y="3543300"/>
+            <a:ext cx="10160000" cy="419100"/>
+          </a:xfrm>
+          <a:prstGeom prst="rect">
+            <a:avLst/>
+          </a:prstGeom>
+          <a:noFill/>
+        </p:spPr>
+        <p:txBody>
+          <a:bodyPr wrap="none" lIns="0" rIns="0" tIns="0" bIns="0">
+            <a:noAutofit/>
+          </a:bodyPr>
+          <a:lstStyle/>
+          <a:p>
+            <a:pPr>
+              <a:lnSpc>
+                <a:spcPts val="3360"/>
+              </a:lnSpc>
+              <a:spcAft>
+                <a:spcPts val="0"/>
+              </a:spcAft>
+              <a:defRPr sz="2800" b="0">
+                <a:solidFill>
+                  <a:srgbClr val="191B20"/>
+                </a:solidFill>
+                <a:latin typeface="Arial"/>
+              </a:defRPr>
+            </a:pPr>
+            <a:r>
+              <a:t>Desktop: stejné funkce, více karet podle šířky.</a:t>
+            </a:r>
+          </a:p>
+        </p:txBody>
+      </p:sp>
+      <p:sp>
+        <p:nvSpPr>
+          <p:cNvPr id="12" name="Rectangle 11"/>
           <p:cNvSpPr/>
           <p:nvPr/>
         </p:nvSpPr>
         <p:spPr>
           <a:xfrm>
-            <a:off x="4318000" y="2768600"/>
-            <a:ext cx="3556000" cy="76200"/>
+            <a:off x="723900" y="4368800"/>
+            <a:ext cx="101600" cy="101600"/>
           </a:xfrm>
           <a:prstGeom prst="rect">
             <a:avLst/>
           </a:prstGeom>
           <a:solidFill>
-            <a:srgbClr val="F45E2B"/>
+            <a:srgbClr val="E55024"/>
           </a:solidFill>
           <a:ln>
             <a:noFill/>
@@ -5197,14 +4793,14 @@
       </p:sp>
       <p:sp>
         <p:nvSpPr>
-          <p:cNvPr id="15" name="TextBox 14"/>
+          <p:cNvPr id="13" name="TextBox 12"/>
           <p:cNvSpPr txBox="1"/>
           <p:nvPr/>
         </p:nvSpPr>
         <p:spPr>
           <a:xfrm>
-            <a:off x="4533900" y="3035300"/>
-            <a:ext cx="3124200" cy="685800"/>
+            <a:off x="1066800" y="4241800"/>
+            <a:ext cx="10160000" cy="419100"/>
           </a:xfrm>
           <a:prstGeom prst="rect">
             <a:avLst/>
@@ -5213,142 +4809,46 @@
         </p:spPr>
         <p:txBody>
           <a:bodyPr wrap="none" lIns="0" rIns="0" tIns="0" bIns="0">
-            <a:spAutoFit/>
+            <a:noAutofit/>
           </a:bodyPr>
           <a:lstStyle/>
           <a:p>
             <a:pPr>
               <a:lnSpc>
-                <a:spcPts val="2200"/>
+                <a:spcPts val="3360"/>
               </a:lnSpc>
               <a:spcAft>
                 <a:spcPts val="0"/>
               </a:spcAft>
-              <a:defRPr sz="2000" b="1">
+              <a:defRPr sz="2800" b="0">
                 <a:solidFill>
-                  <a:srgbClr val="181817"/>
+                  <a:srgbClr val="191B20"/>
                 </a:solidFill>
                 <a:latin typeface="Arial"/>
               </a:defRPr>
             </a:pPr>
             <a:r>
-              <a:t>Uchovat výběr</a:t>
-            </a:r>
-          </a:p>
-        </p:txBody>
-      </p:sp>
-      <p:sp>
-        <p:nvSpPr>
-          <p:cNvPr id="16" name="TextBox 15"/>
-          <p:cNvSpPr txBox="1"/>
-          <p:nvPr/>
-        </p:nvSpPr>
-        <p:spPr>
-          <a:xfrm>
-            <a:off x="4533900" y="3733800"/>
-            <a:ext cx="3124200" cy="1511300"/>
-          </a:xfrm>
-          <a:prstGeom prst="rect">
-            <a:avLst/>
-          </a:prstGeom>
-          <a:noFill/>
-        </p:spPr>
-        <p:txBody>
-          <a:bodyPr wrap="none" lIns="0" rIns="0" tIns="0" bIns="0">
-            <a:spAutoFit/>
-          </a:bodyPr>
-          <a:lstStyle/>
-          <a:p>
-            <a:pPr>
-              <a:lnSpc>
-                <a:spcPts val="1689"/>
-              </a:lnSpc>
-              <a:spcAft>
-                <a:spcPts val="0"/>
-              </a:spcAft>
-              <a:defRPr sz="1420" b="0">
-                <a:solidFill>
-                  <a:srgbClr val="181817"/>
-                </a:solidFill>
-                <a:latin typeface="Arial"/>
-              </a:defRPr>
-            </a:pPr>
-            <a:r>
-              <a:t>Přidání do osobního programu a</a:t>
-            </a:r>
-          </a:p>
-          <a:p>
-            <a:pPr>
-              <a:lnSpc>
-                <a:spcPts val="1689"/>
-              </a:lnSpc>
-              <a:spcAft>
-                <a:spcPts val="0"/>
-              </a:spcAft>
-              <a:defRPr sz="1420" b="0">
-                <a:solidFill>
-                  <a:srgbClr val="181817"/>
-                </a:solidFill>
-                <a:latin typeface="Arial"/>
-              </a:defRPr>
-            </a:pPr>
-            <a:r>
-              <a:t>filtr „Jen uložené“.</a:t>
-            </a:r>
-          </a:p>
-          <a:p>
-            <a:pPr>
-              <a:lnSpc>
-                <a:spcPts val="1689"/>
-              </a:lnSpc>
-              <a:spcAft>
-                <a:spcPts val="0"/>
-              </a:spcAft>
-              <a:defRPr sz="1420" b="0">
-                <a:solidFill>
-                  <a:srgbClr val="181817"/>
-                </a:solidFill>
-                <a:latin typeface="Arial"/>
-              </a:defRPr>
-            </a:pPr>
-          </a:p>
-          <a:p>
-            <a:pPr>
-              <a:lnSpc>
-                <a:spcPts val="1689"/>
-              </a:lnSpc>
-              <a:spcAft>
-                <a:spcPts val="0"/>
-              </a:spcAft>
-              <a:defRPr sz="1420" b="0">
-                <a:solidFill>
-                  <a:srgbClr val="181817"/>
-                </a:solidFill>
-                <a:latin typeface="Arial"/>
-              </a:defRPr>
-            </a:pPr>
-            <a:r>
-              <a:t>Výběr zůstává po obnovení.</a:t>
-            </a:r>
-          </a:p>
-        </p:txBody>
-      </p:sp>
-      <p:sp>
-        <p:nvSpPr>
-          <p:cNvPr id="17" name="Rectangle 16"/>
+              <a:t>Popisky, viditelný focus a zalamování navigace i filtrů.</a:t>
+            </a:r>
+          </a:p>
+        </p:txBody>
+      </p:sp>
+      <p:sp>
+        <p:nvSpPr>
+          <p:cNvPr id="14" name="Rectangle 13"/>
           <p:cNvSpPr/>
           <p:nvPr/>
         </p:nvSpPr>
         <p:spPr>
           <a:xfrm>
-            <a:off x="8102600" y="2768600"/>
-            <a:ext cx="3556000" cy="2603500"/>
+            <a:off x="711200" y="6248400"/>
+            <a:ext cx="10769600" cy="12700"/>
           </a:xfrm>
           <a:prstGeom prst="rect">
             <a:avLst/>
           </a:prstGeom>
           <a:solidFill>
-            <a:srgbClr val="E7E0D5"/>
+            <a:srgbClr val="DFE2E7"/>
           </a:solidFill>
           <a:ln>
             <a:noFill/>
@@ -5378,57 +4878,14 @@
       </p:sp>
       <p:sp>
         <p:nvSpPr>
-          <p:cNvPr id="18" name="Rectangle 17"/>
-          <p:cNvSpPr/>
-          <p:nvPr/>
-        </p:nvSpPr>
-        <p:spPr>
-          <a:xfrm>
-            <a:off x="8102600" y="2768600"/>
-            <a:ext cx="3556000" cy="76200"/>
-          </a:xfrm>
-          <a:prstGeom prst="rect">
-            <a:avLst/>
-          </a:prstGeom>
-          <a:solidFill>
-            <a:srgbClr val="F45E2B"/>
-          </a:solidFill>
-          <a:ln>
-            <a:noFill/>
-          </a:ln>
-        </p:spPr>
-        <p:style>
-          <a:lnRef idx="1">
-            <a:schemeClr val="accent1"/>
-          </a:lnRef>
-          <a:fillRef idx="3">
-            <a:schemeClr val="accent1"/>
-          </a:fillRef>
-          <a:effectRef idx="2">
-            <a:schemeClr val="accent1"/>
-          </a:effectRef>
-          <a:fontRef idx="minor">
-            <a:schemeClr val="lt1"/>
-          </a:fontRef>
-        </p:style>
-        <p:txBody>
-          <a:bodyPr rtlCol="0" anchor="ctr"/>
-          <a:lstStyle/>
-          <a:p>
-            <a:pPr algn="ctr"/>
-          </a:p>
-        </p:txBody>
-      </p:sp>
-      <p:sp>
-        <p:nvSpPr>
-          <p:cNvPr id="19" name="TextBox 18"/>
+          <p:cNvPr id="15" name="TextBox 14"/>
           <p:cNvSpPr txBox="1"/>
           <p:nvPr/>
         </p:nvSpPr>
         <p:spPr>
           <a:xfrm>
-            <a:off x="8318500" y="3035300"/>
-            <a:ext cx="3124200" cy="685800"/>
+            <a:off x="711200" y="6438900"/>
+            <a:ext cx="9652000" cy="203200"/>
           </a:xfrm>
           <a:prstGeom prst="rect">
             <a:avLst/>
@@ -5437,40 +4894,40 @@
         </p:spPr>
         <p:txBody>
           <a:bodyPr wrap="none" lIns="0" rIns="0" tIns="0" bIns="0">
-            <a:spAutoFit/>
+            <a:noAutofit/>
           </a:bodyPr>
           <a:lstStyle/>
           <a:p>
             <a:pPr>
               <a:lnSpc>
-                <a:spcPts val="2200"/>
+                <a:spcPts val="1297"/>
               </a:lnSpc>
               <a:spcAft>
                 <a:spcPts val="0"/>
               </a:spcAft>
-              <a:defRPr sz="2000" b="1">
+              <a:defRPr sz="1100" b="0">
                 <a:solidFill>
-                  <a:srgbClr val="181817"/>
+                  <a:srgbClr val="626773"/>
                 </a:solidFill>
                 <a:latin typeface="Arial"/>
               </a:defRPr>
             </a:pPr>
             <a:r>
-              <a:t>Najít souvislosti</a:t>
-            </a:r>
-          </a:p>
-        </p:txBody>
-      </p:sp>
-      <p:sp>
-        <p:nvSpPr>
-          <p:cNvPr id="20" name="TextBox 19"/>
+              <a:t>Prague Pulse Fest · Výstaviště Praha · 2027</a:t>
+            </a:r>
+          </a:p>
+        </p:txBody>
+      </p:sp>
+      <p:sp>
+        <p:nvSpPr>
+          <p:cNvPr id="16" name="TextBox 15"/>
           <p:cNvSpPr txBox="1"/>
           <p:nvPr/>
         </p:nvSpPr>
         <p:spPr>
           <a:xfrm>
-            <a:off x="8318500" y="3733800"/>
-            <a:ext cx="3124200" cy="1511300"/>
+            <a:off x="10807700" y="6413500"/>
+            <a:ext cx="673100" cy="215900"/>
           </a:xfrm>
           <a:prstGeom prst="rect">
             <a:avLst/>
@@ -5479,164 +4936,26 @@
         </p:spPr>
         <p:txBody>
           <a:bodyPr wrap="none" lIns="0" rIns="0" tIns="0" bIns="0">
-            <a:spAutoFit/>
+            <a:noAutofit/>
           </a:bodyPr>
           <a:lstStyle/>
           <a:p>
             <a:pPr>
               <a:lnSpc>
-                <a:spcPts val="1689"/>
+                <a:spcPts val="1416"/>
               </a:lnSpc>
               <a:spcAft>
                 <a:spcPts val="0"/>
               </a:spcAft>
-              <a:defRPr sz="1420" b="0">
+              <a:defRPr sz="1200" b="0">
                 <a:solidFill>
-                  <a:srgbClr val="181817"/>
+                  <a:srgbClr val="626773"/>
                 </a:solidFill>
                 <a:latin typeface="Arial"/>
               </a:defRPr>
             </a:pPr>
             <a:r>
-              <a:t>Contains hledání + detail</a:t>
-            </a:r>
-          </a:p>
-          <a:p>
-            <a:pPr>
-              <a:lnSpc>
-                <a:spcPts val="1689"/>
-              </a:lnSpc>
-              <a:spcAft>
-                <a:spcPts val="0"/>
-              </a:spcAft>
-              <a:defRPr sz="1420" b="0">
-                <a:solidFill>
-                  <a:srgbClr val="181817"/>
-                </a:solidFill>
-                <a:latin typeface="Arial"/>
-              </a:defRPr>
-            </a:pPr>
-            <a:r>
-              <a:t>interpreta + návazné koncerty.</a:t>
-            </a:r>
-          </a:p>
-          <a:p>
-            <a:pPr>
-              <a:lnSpc>
-                <a:spcPts val="1689"/>
-              </a:lnSpc>
-              <a:spcAft>
-                <a:spcPts val="0"/>
-              </a:spcAft>
-              <a:defRPr sz="1420" b="0">
-                <a:solidFill>
-                  <a:srgbClr val="181817"/>
-                </a:solidFill>
-                <a:latin typeface="Arial"/>
-              </a:defRPr>
-            </a:pPr>
-          </a:p>
-          <a:p>
-            <a:pPr>
-              <a:lnSpc>
-                <a:spcPts val="1689"/>
-              </a:lnSpc>
-              <a:spcAft>
-                <a:spcPts val="0"/>
-              </a:spcAft>
-              <a:defRPr sz="1420" b="0">
-                <a:solidFill>
-                  <a:srgbClr val="181817"/>
-                </a:solidFill>
-                <a:latin typeface="Arial"/>
-              </a:defRPr>
-            </a:pPr>
-            <a:r>
-              <a:t>Od názvu až k času a scéně.</a:t>
-            </a:r>
-          </a:p>
-        </p:txBody>
-      </p:sp>
-      <p:sp>
-        <p:nvSpPr>
-          <p:cNvPr id="21" name="TextBox 20"/>
-          <p:cNvSpPr txBox="1"/>
-          <p:nvPr/>
-        </p:nvSpPr>
-        <p:spPr>
-          <a:xfrm>
-            <a:off x="533400" y="6413500"/>
-            <a:ext cx="10033000" cy="181610"/>
-          </a:xfrm>
-          <a:prstGeom prst="rect">
-            <a:avLst/>
-          </a:prstGeom>
-          <a:noFill/>
-        </p:spPr>
-        <p:txBody>
-          <a:bodyPr wrap="none" lIns="0" rIns="0" tIns="0" bIns="0">
-            <a:spAutoFit/>
-          </a:bodyPr>
-          <a:lstStyle/>
-          <a:p>
-            <a:pPr>
-              <a:lnSpc>
-                <a:spcPts val="930"/>
-              </a:lnSpc>
-              <a:spcAft>
-                <a:spcPts val="0"/>
-              </a:spcAft>
-              <a:defRPr sz="750" b="0">
-                <a:solidFill>
-                  <a:srgbClr val="68635B"/>
-                </a:solidFill>
-                <a:latin typeface="Arial"/>
-              </a:defRPr>
-            </a:pPr>
-            <a:r>
-              <a:t>DODATEČNĚ PŘIPRAVENÝ PODKLAD K MILNÍKU</a:t>
-            </a:r>
-          </a:p>
-        </p:txBody>
-      </p:sp>
-      <p:sp>
-        <p:nvSpPr>
-          <p:cNvPr id="22" name="TextBox 21"/>
-          <p:cNvSpPr txBox="1"/>
-          <p:nvPr/>
-        </p:nvSpPr>
-        <p:spPr>
-          <a:xfrm>
-            <a:off x="10947400" y="6350000"/>
-            <a:ext cx="825500" cy="220979"/>
-          </a:xfrm>
-          <a:prstGeom prst="rect">
-            <a:avLst/>
-          </a:prstGeom>
-          <a:noFill/>
-        </p:spPr>
-        <p:txBody>
-          <a:bodyPr wrap="none" lIns="0" rIns="0" tIns="0" bIns="0">
-            <a:spAutoFit/>
-          </a:bodyPr>
-          <a:lstStyle/>
-          <a:p>
-            <a:pPr>
-              <a:lnSpc>
-                <a:spcPts val="1240"/>
-              </a:lnSpc>
-              <a:spcAft>
-                <a:spcPts val="0"/>
-              </a:spcAft>
-              <a:defRPr sz="1000" b="1">
-                <a:solidFill>
-                  <a:srgbClr val="68635B"/>
-                </a:solidFill>
-                <a:latin typeface="Arial"/>
-              </a:defRPr>
-            </a:pPr>
-            <a:r>
-              <a:t>03 / 02</a:t>
+              <a:t>2 / 6</a:t>
             </a:r>
           </a:p>
         </p:txBody>
@@ -5674,7 +4993,7 @@
             <a:avLst/>
           </a:prstGeom>
           <a:solidFill>
-            <a:srgbClr val="F4F0E7"/>
+            <a:srgbClr val="FFFFFF"/>
           </a:solidFill>
           <a:ln>
             <a:noFill/>
@@ -5710,8 +5029,8 @@
         </p:nvSpPr>
         <p:spPr>
           <a:xfrm>
-            <a:off x="533400" y="304800"/>
-            <a:ext cx="1905000" cy="283972"/>
+            <a:off x="711200" y="457200"/>
+            <a:ext cx="10769600" cy="228600"/>
           </a:xfrm>
           <a:prstGeom prst="rect">
             <a:avLst/>
@@ -5720,172 +5039,46 @@
         </p:spPr>
         <p:txBody>
           <a:bodyPr wrap="none" lIns="0" rIns="0" tIns="0" bIns="0">
-            <a:spAutoFit/>
+            <a:noAutofit/>
           </a:bodyPr>
           <a:lstStyle/>
           <a:p>
             <a:pPr>
               <a:lnSpc>
-                <a:spcPts val="1736"/>
+                <a:spcPts val="1534"/>
               </a:lnSpc>
               <a:spcAft>
                 <a:spcPts val="0"/>
               </a:spcAft>
-              <a:defRPr sz="1400" b="1">
+              <a:defRPr sz="1300" b="1">
                 <a:solidFill>
-                  <a:srgbClr val="181817"/>
+                  <a:srgbClr val="626773"/>
                 </a:solidFill>
                 <a:latin typeface="Arial"/>
               </a:defRPr>
             </a:pPr>
             <a:r>
-              <a:t>PRAGUE</a:t>
-            </a:r>
-          </a:p>
-        </p:txBody>
-      </p:sp>
-      <p:sp>
-        <p:nvSpPr>
-          <p:cNvPr id="4" name="TextBox 3"/>
-          <p:cNvSpPr txBox="1"/>
-          <p:nvPr/>
-        </p:nvSpPr>
-        <p:spPr>
-          <a:xfrm>
-            <a:off x="533400" y="495300"/>
-            <a:ext cx="1905000" cy="409956"/>
-          </a:xfrm>
-          <a:prstGeom prst="rect">
-            <a:avLst/>
-          </a:prstGeom>
-          <a:noFill/>
-        </p:spPr>
-        <p:txBody>
-          <a:bodyPr wrap="none" lIns="0" rIns="0" tIns="0" bIns="0">
-            <a:spAutoFit/>
-          </a:bodyPr>
-          <a:lstStyle/>
-          <a:p>
-            <a:pPr>
-              <a:lnSpc>
-                <a:spcPts val="2728"/>
-              </a:lnSpc>
-              <a:spcAft>
-                <a:spcPts val="0"/>
-              </a:spcAft>
-              <a:defRPr sz="2200" b="1">
-                <a:solidFill>
-                  <a:srgbClr val="181817"/>
-                </a:solidFill>
-                <a:latin typeface="Arial"/>
-              </a:defRPr>
-            </a:pPr>
-            <a:r>
-              <a:t>PULSE</a:t>
-            </a:r>
-          </a:p>
-        </p:txBody>
-      </p:sp>
-      <p:sp>
-        <p:nvSpPr>
-          <p:cNvPr id="5" name="TextBox 4"/>
-          <p:cNvSpPr txBox="1"/>
-          <p:nvPr/>
-        </p:nvSpPr>
-        <p:spPr>
-          <a:xfrm>
-            <a:off x="533400" y="812800"/>
-            <a:ext cx="2032000" cy="165862"/>
-          </a:xfrm>
-          <a:prstGeom prst="rect">
-            <a:avLst/>
-          </a:prstGeom>
-          <a:noFill/>
-        </p:spPr>
-        <p:txBody>
-          <a:bodyPr wrap="none" lIns="0" rIns="0" tIns="0" bIns="0">
-            <a:spAutoFit/>
-          </a:bodyPr>
-          <a:lstStyle/>
-          <a:p>
-            <a:pPr>
-              <a:lnSpc>
-                <a:spcPts val="806"/>
-              </a:lnSpc>
-              <a:spcAft>
-                <a:spcPts val="0"/>
-              </a:spcAft>
-              <a:defRPr sz="650" b="1">
-                <a:solidFill>
-                  <a:srgbClr val="181817"/>
-                </a:solidFill>
-                <a:latin typeface="Arial"/>
-              </a:defRPr>
-            </a:pPr>
-            <a:r>
-              <a:t>FEST / 2027</a:t>
-            </a:r>
-          </a:p>
-        </p:txBody>
-      </p:sp>
-      <p:sp>
-        <p:nvSpPr>
-          <p:cNvPr id="6" name="TextBox 5"/>
-          <p:cNvSpPr txBox="1"/>
-          <p:nvPr/>
-        </p:nvSpPr>
-        <p:spPr>
-          <a:xfrm>
-            <a:off x="5588000" y="533400"/>
-            <a:ext cx="6070600" cy="220979"/>
-          </a:xfrm>
-          <a:prstGeom prst="rect">
-            <a:avLst/>
-          </a:prstGeom>
-          <a:noFill/>
-        </p:spPr>
-        <p:txBody>
-          <a:bodyPr wrap="none" lIns="0" rIns="0" tIns="0" bIns="0">
-            <a:spAutoFit/>
-          </a:bodyPr>
-          <a:lstStyle/>
-          <a:p>
-            <a:pPr>
-              <a:lnSpc>
-                <a:spcPts val="1240"/>
-              </a:lnSpc>
-              <a:spcAft>
-                <a:spcPts val="0"/>
-              </a:spcAft>
-              <a:defRPr sz="1000" b="1">
-                <a:solidFill>
-                  <a:srgbClr val="68635B"/>
-                </a:solidFill>
-                <a:latin typeface="Arial"/>
-              </a:defRPr>
-            </a:pPr>
-            <a:r>
-              <a:t>RESPONZIVNÍ HIERARCHIE</a:t>
-            </a:r>
-          </a:p>
-        </p:txBody>
-      </p:sp>
-      <p:sp>
-        <p:nvSpPr>
-          <p:cNvPr id="7" name="Rectangle 6"/>
+              <a:t>INTERAKTIVITA</a:t>
+            </a:r>
+          </a:p>
+        </p:txBody>
+      </p:sp>
+      <p:sp>
+        <p:nvSpPr>
+          <p:cNvPr id="4" name="Rectangle 3"/>
           <p:cNvSpPr/>
           <p:nvPr/>
         </p:nvSpPr>
         <p:spPr>
           <a:xfrm>
-            <a:off x="533400" y="1155700"/>
-            <a:ext cx="11125200" cy="25400"/>
+            <a:off x="711200" y="876300"/>
+            <a:ext cx="622300" cy="50800"/>
           </a:xfrm>
           <a:prstGeom prst="rect">
             <a:avLst/>
           </a:prstGeom>
           <a:solidFill>
-            <a:srgbClr val="181817"/>
+            <a:srgbClr val="E55024"/>
           </a:solidFill>
           <a:ln>
             <a:noFill/>
@@ -5915,14 +5108,14 @@
       </p:sp>
       <p:sp>
         <p:nvSpPr>
-          <p:cNvPr id="8" name="TextBox 7"/>
+          <p:cNvPr id="5" name="TextBox 4"/>
           <p:cNvSpPr txBox="1"/>
           <p:nvPr/>
         </p:nvSpPr>
         <p:spPr>
           <a:xfrm>
-            <a:off x="508000" y="1422400"/>
-            <a:ext cx="11176000" cy="1079500"/>
+            <a:off x="685800" y="1257300"/>
+            <a:ext cx="10795000" cy="1168400"/>
           </a:xfrm>
           <a:prstGeom prst="rect">
             <a:avLst/>
@@ -5931,46 +5124,46 @@
         </p:spPr>
         <p:txBody>
           <a:bodyPr wrap="none" lIns="0" rIns="0" tIns="0" bIns="0">
-            <a:spAutoFit/>
+            <a:noAutofit/>
           </a:bodyPr>
           <a:lstStyle/>
           <a:p>
             <a:pPr>
               <a:lnSpc>
-                <a:spcPts val="3740"/>
+                <a:spcPts val="4032"/>
               </a:lnSpc>
               <a:spcAft>
                 <a:spcPts val="0"/>
               </a:spcAft>
-              <a:defRPr sz="3400" b="1">
+              <a:defRPr sz="3600" b="1">
                 <a:solidFill>
-                  <a:srgbClr val="181817"/>
+                  <a:srgbClr val="191B20"/>
                 </a:solidFill>
                 <a:latin typeface="Arial"/>
               </a:defRPr>
             </a:pPr>
             <a:r>
-              <a:t>Malý displej je výchozí.</a:t>
-            </a:r>
-          </a:p>
-        </p:txBody>
-      </p:sp>
-      <p:sp>
-        <p:nvSpPr>
-          <p:cNvPr id="9" name="Rectangle 8"/>
+              <a:t>Tři funkce řeší konkrétní potřeby</a:t>
+            </a:r>
+          </a:p>
+        </p:txBody>
+      </p:sp>
+      <p:sp>
+        <p:nvSpPr>
+          <p:cNvPr id="6" name="Rectangle 5"/>
           <p:cNvSpPr/>
           <p:nvPr/>
         </p:nvSpPr>
         <p:spPr>
           <a:xfrm>
-            <a:off x="533400" y="2768600"/>
-            <a:ext cx="5448300" cy="2603500"/>
+            <a:off x="723900" y="2273300"/>
+            <a:ext cx="101600" cy="101600"/>
           </a:xfrm>
           <a:prstGeom prst="rect">
             <a:avLst/>
           </a:prstGeom>
           <a:solidFill>
-            <a:srgbClr val="181817"/>
+            <a:srgbClr val="E55024"/>
           </a:solidFill>
           <a:ln>
             <a:noFill/>
@@ -6000,20 +5193,62 @@
       </p:sp>
       <p:sp>
         <p:nvSpPr>
-          <p:cNvPr id="10" name="Rectangle 9"/>
+          <p:cNvPr id="7" name="TextBox 6"/>
+          <p:cNvSpPr txBox="1"/>
+          <p:nvPr/>
+        </p:nvSpPr>
+        <p:spPr>
+          <a:xfrm>
+            <a:off x="1066800" y="2146300"/>
+            <a:ext cx="10160000" cy="419100"/>
+          </a:xfrm>
+          <a:prstGeom prst="rect">
+            <a:avLst/>
+          </a:prstGeom>
+          <a:noFill/>
+        </p:spPr>
+        <p:txBody>
+          <a:bodyPr wrap="none" lIns="0" rIns="0" tIns="0" bIns="0">
+            <a:noAutofit/>
+          </a:bodyPr>
+          <a:lstStyle/>
+          <a:p>
+            <a:pPr>
+              <a:lnSpc>
+                <a:spcPts val="3360"/>
+              </a:lnSpc>
+              <a:spcAft>
+                <a:spcPts val="0"/>
+              </a:spcAft>
+              <a:defRPr sz="2800" b="0">
+                <a:solidFill>
+                  <a:srgbClr val="191B20"/>
+                </a:solidFill>
+                <a:latin typeface="Arial"/>
+              </a:defRPr>
+            </a:pPr>
+            <a:r>
+              <a:t>Filtr dne a scény → najít relevantní část programu.</a:t>
+            </a:r>
+          </a:p>
+        </p:txBody>
+      </p:sp>
+      <p:sp>
+        <p:nvSpPr>
+          <p:cNvPr id="8" name="Rectangle 7"/>
           <p:cNvSpPr/>
           <p:nvPr/>
         </p:nvSpPr>
         <p:spPr>
           <a:xfrm>
-            <a:off x="533400" y="2768600"/>
-            <a:ext cx="5448300" cy="76200"/>
+            <a:off x="723900" y="2971800"/>
+            <a:ext cx="101600" cy="101600"/>
           </a:xfrm>
           <a:prstGeom prst="rect">
             <a:avLst/>
           </a:prstGeom>
           <a:solidFill>
-            <a:srgbClr val="F45E2B"/>
+            <a:srgbClr val="E55024"/>
           </a:solidFill>
           <a:ln>
             <a:noFill/>
@@ -6043,14 +5278,14 @@
       </p:sp>
       <p:sp>
         <p:nvSpPr>
-          <p:cNvPr id="11" name="TextBox 10"/>
+          <p:cNvPr id="9" name="TextBox 8"/>
           <p:cNvSpPr txBox="1"/>
           <p:nvPr/>
         </p:nvSpPr>
         <p:spPr>
           <a:xfrm>
-            <a:off x="749300" y="3035300"/>
-            <a:ext cx="5016500" cy="685800"/>
+            <a:off x="1066800" y="2844800"/>
+            <a:ext cx="10160000" cy="419100"/>
           </a:xfrm>
           <a:prstGeom prst="rect">
             <a:avLst/>
@@ -6059,123 +5294,46 @@
         </p:spPr>
         <p:txBody>
           <a:bodyPr wrap="none" lIns="0" rIns="0" tIns="0" bIns="0">
-            <a:spAutoFit/>
+            <a:noAutofit/>
           </a:bodyPr>
           <a:lstStyle/>
           <a:p>
             <a:pPr>
               <a:lnSpc>
-                <a:spcPts val="2200"/>
+                <a:spcPts val="3360"/>
               </a:lnSpc>
               <a:spcAft>
                 <a:spcPts val="0"/>
               </a:spcAft>
-              <a:defRPr sz="2000" b="1">
+              <a:defRPr sz="2800" b="0">
                 <a:solidFill>
-                  <a:srgbClr val="F4F0E7"/>
+                  <a:srgbClr val="191B20"/>
                 </a:solidFill>
                 <a:latin typeface="Arial"/>
               </a:defRPr>
             </a:pPr>
             <a:r>
-              <a:t>Mobil</a:t>
-            </a:r>
-          </a:p>
-        </p:txBody>
-      </p:sp>
-      <p:sp>
-        <p:nvSpPr>
-          <p:cNvPr id="12" name="TextBox 11"/>
-          <p:cNvSpPr txBox="1"/>
-          <p:nvPr/>
-        </p:nvSpPr>
-        <p:spPr>
-          <a:xfrm>
-            <a:off x="749300" y="3733800"/>
-            <a:ext cx="5016500" cy="1511300"/>
-          </a:xfrm>
-          <a:prstGeom prst="rect">
-            <a:avLst/>
-          </a:prstGeom>
-          <a:noFill/>
-        </p:spPr>
-        <p:txBody>
-          <a:bodyPr wrap="none" lIns="0" rIns="0" tIns="0" bIns="0">
-            <a:spAutoFit/>
-          </a:bodyPr>
-          <a:lstStyle/>
-          <a:p>
-            <a:pPr>
-              <a:lnSpc>
-                <a:spcPts val="1689"/>
-              </a:lnSpc>
-              <a:spcAft>
-                <a:spcPts val="0"/>
-              </a:spcAft>
-              <a:defRPr sz="1420" b="0">
-                <a:solidFill>
-                  <a:srgbClr val="F4F0E7"/>
-                </a:solidFill>
-                <a:latin typeface="Arial"/>
-              </a:defRPr>
-            </a:pPr>
-            <a:r>
-              <a:t>Jeden sloupec, zalamovaná navigace a filtry.</a:t>
-            </a:r>
-          </a:p>
-          <a:p>
-            <a:pPr>
-              <a:lnSpc>
-                <a:spcPts val="1689"/>
-              </a:lnSpc>
-              <a:spcAft>
-                <a:spcPts val="0"/>
-              </a:spcAft>
-              <a:defRPr sz="1420" b="0">
-                <a:solidFill>
-                  <a:srgbClr val="F4F0E7"/>
-                </a:solidFill>
-                <a:latin typeface="Arial"/>
-              </a:defRPr>
-            </a:pPr>
-          </a:p>
-          <a:p>
-            <a:pPr>
-              <a:lnSpc>
-                <a:spcPts val="1689"/>
-              </a:lnSpc>
-              <a:spcAft>
-                <a:spcPts val="0"/>
-              </a:spcAft>
-              <a:defRPr sz="1420" b="0">
-                <a:solidFill>
-                  <a:srgbClr val="F4F0E7"/>
-                </a:solidFill>
-                <a:latin typeface="Arial"/>
-              </a:defRPr>
-            </a:pPr>
-            <a:r>
-              <a:t>Název a hlavní akce před delším obsahem.</a:t>
-            </a:r>
-          </a:p>
-        </p:txBody>
-      </p:sp>
-      <p:sp>
-        <p:nvSpPr>
-          <p:cNvPr id="13" name="Rectangle 12"/>
+              <a:t>Osobní program → uložit výběr a vrátit se k němu.</a:t>
+            </a:r>
+          </a:p>
+        </p:txBody>
+      </p:sp>
+      <p:sp>
+        <p:nvSpPr>
+          <p:cNvPr id="10" name="Rectangle 9"/>
           <p:cNvSpPr/>
           <p:nvPr/>
         </p:nvSpPr>
         <p:spPr>
           <a:xfrm>
-            <a:off x="6210300" y="2768600"/>
-            <a:ext cx="5448300" cy="2603500"/>
+            <a:off x="723900" y="3670300"/>
+            <a:ext cx="101600" cy="101600"/>
           </a:xfrm>
           <a:prstGeom prst="rect">
             <a:avLst/>
           </a:prstGeom>
           <a:solidFill>
-            <a:srgbClr val="E7E0D5"/>
+            <a:srgbClr val="E55024"/>
           </a:solidFill>
           <a:ln>
             <a:noFill/>
@@ -6205,20 +5363,62 @@
       </p:sp>
       <p:sp>
         <p:nvSpPr>
-          <p:cNvPr id="14" name="Rectangle 13"/>
+          <p:cNvPr id="11" name="TextBox 10"/>
+          <p:cNvSpPr txBox="1"/>
+          <p:nvPr/>
+        </p:nvSpPr>
+        <p:spPr>
+          <a:xfrm>
+            <a:off x="1066800" y="3543300"/>
+            <a:ext cx="10160000" cy="419100"/>
+          </a:xfrm>
+          <a:prstGeom prst="rect">
+            <a:avLst/>
+          </a:prstGeom>
+          <a:noFill/>
+        </p:spPr>
+        <p:txBody>
+          <a:bodyPr wrap="none" lIns="0" rIns="0" tIns="0" bIns="0">
+            <a:noAutofit/>
+          </a:bodyPr>
+          <a:lstStyle/>
+          <a:p>
+            <a:pPr>
+              <a:lnSpc>
+                <a:spcPts val="3360"/>
+              </a:lnSpc>
+              <a:spcAft>
+                <a:spcPts val="0"/>
+              </a:spcAft>
+              <a:defRPr sz="2800" b="0">
+                <a:solidFill>
+                  <a:srgbClr val="191B20"/>
+                </a:solidFill>
+                <a:latin typeface="Arial"/>
+              </a:defRPr>
+            </a:pPr>
+            <a:r>
+              <a:t>Hledání a detail → přejít od jména ke konkrétnímu koncertu.</a:t>
+            </a:r>
+          </a:p>
+        </p:txBody>
+      </p:sp>
+      <p:sp>
+        <p:nvSpPr>
+          <p:cNvPr id="12" name="Rectangle 11"/>
           <p:cNvSpPr/>
           <p:nvPr/>
         </p:nvSpPr>
         <p:spPr>
           <a:xfrm>
-            <a:off x="6210300" y="2768600"/>
-            <a:ext cx="5448300" cy="76200"/>
+            <a:off x="711200" y="6248400"/>
+            <a:ext cx="10769600" cy="12700"/>
           </a:xfrm>
           <a:prstGeom prst="rect">
             <a:avLst/>
           </a:prstGeom>
           <a:solidFill>
-            <a:srgbClr val="F45E2B"/>
+            <a:srgbClr val="DFE2E7"/>
           </a:solidFill>
           <a:ln>
             <a:noFill/>
@@ -6248,14 +5448,14 @@
       </p:sp>
       <p:sp>
         <p:nvSpPr>
-          <p:cNvPr id="15" name="TextBox 14"/>
+          <p:cNvPr id="13" name="TextBox 12"/>
           <p:cNvSpPr txBox="1"/>
           <p:nvPr/>
         </p:nvSpPr>
         <p:spPr>
           <a:xfrm>
-            <a:off x="6426200" y="3035300"/>
-            <a:ext cx="5016500" cy="685800"/>
+            <a:off x="711200" y="6438900"/>
+            <a:ext cx="9652000" cy="203200"/>
           </a:xfrm>
           <a:prstGeom prst="rect">
             <a:avLst/>
@@ -6264,40 +5464,40 @@
         </p:spPr>
         <p:txBody>
           <a:bodyPr wrap="none" lIns="0" rIns="0" tIns="0" bIns="0">
-            <a:spAutoFit/>
+            <a:noAutofit/>
           </a:bodyPr>
           <a:lstStyle/>
           <a:p>
             <a:pPr>
               <a:lnSpc>
-                <a:spcPts val="2200"/>
+                <a:spcPts val="1297"/>
               </a:lnSpc>
               <a:spcAft>
                 <a:spcPts val="0"/>
               </a:spcAft>
-              <a:defRPr sz="2000" b="1">
+              <a:defRPr sz="1100" b="0">
                 <a:solidFill>
-                  <a:srgbClr val="181817"/>
+                  <a:srgbClr val="626773"/>
                 </a:solidFill>
                 <a:latin typeface="Arial"/>
               </a:defRPr>
             </a:pPr>
             <a:r>
-              <a:t>Desktop</a:t>
-            </a:r>
-          </a:p>
-        </p:txBody>
-      </p:sp>
-      <p:sp>
-        <p:nvSpPr>
-          <p:cNvPr id="16" name="TextBox 15"/>
+              <a:t>Prague Pulse Fest · Výstaviště Praha · 2027</a:t>
+            </a:r>
+          </a:p>
+        </p:txBody>
+      </p:sp>
+      <p:sp>
+        <p:nvSpPr>
+          <p:cNvPr id="14" name="TextBox 13"/>
           <p:cNvSpPr txBox="1"/>
           <p:nvPr/>
         </p:nvSpPr>
         <p:spPr>
           <a:xfrm>
-            <a:off x="6426200" y="3733800"/>
-            <a:ext cx="5016500" cy="1511300"/>
+            <a:off x="10807700" y="6413500"/>
+            <a:ext cx="673100" cy="215900"/>
           </a:xfrm>
           <a:prstGeom prst="rect">
             <a:avLst/>
@@ -6306,206 +5506,26 @@
         </p:spPr>
         <p:txBody>
           <a:bodyPr wrap="none" lIns="0" rIns="0" tIns="0" bIns="0">
-            <a:spAutoFit/>
+            <a:noAutofit/>
           </a:bodyPr>
           <a:lstStyle/>
           <a:p>
             <a:pPr>
               <a:lnSpc>
-                <a:spcPts val="1689"/>
+                <a:spcPts val="1416"/>
               </a:lnSpc>
               <a:spcAft>
                 <a:spcPts val="0"/>
               </a:spcAft>
-              <a:defRPr sz="1420" b="0">
+              <a:defRPr sz="1200" b="0">
                 <a:solidFill>
-                  <a:srgbClr val="181817"/>
+                  <a:srgbClr val="626773"/>
                 </a:solidFill>
                 <a:latin typeface="Arial"/>
               </a:defRPr>
             </a:pPr>
             <a:r>
-              <a:t>Grid rozšíří seznam podle volného prostoru.</a:t>
-            </a:r>
-          </a:p>
-          <a:p>
-            <a:pPr>
-              <a:lnSpc>
-                <a:spcPts val="1689"/>
-              </a:lnSpc>
-              <a:spcAft>
-                <a:spcPts val="0"/>
-              </a:spcAft>
-              <a:defRPr sz="1420" b="0">
-                <a:solidFill>
-                  <a:srgbClr val="181817"/>
-                </a:solidFill>
-                <a:latin typeface="Arial"/>
-              </a:defRPr>
-            </a:pPr>
-          </a:p>
-          <a:p>
-            <a:pPr>
-              <a:lnSpc>
-                <a:spcPts val="1689"/>
-              </a:lnSpc>
-              <a:spcAft>
-                <a:spcPts val="0"/>
-              </a:spcAft>
-              <a:defRPr sz="1420" b="0">
-                <a:solidFill>
-                  <a:srgbClr val="181817"/>
-                </a:solidFill>
-                <a:latin typeface="Arial"/>
-              </a:defRPr>
-            </a:pPr>
-            <a:r>
-              <a:t>Stejná cesta a význam ovládání, více obsahu vedle</a:t>
-            </a:r>
-          </a:p>
-          <a:p>
-            <a:pPr>
-              <a:lnSpc>
-                <a:spcPts val="1689"/>
-              </a:lnSpc>
-              <a:spcAft>
-                <a:spcPts val="0"/>
-              </a:spcAft>
-              <a:defRPr sz="1420" b="0">
-                <a:solidFill>
-                  <a:srgbClr val="181817"/>
-                </a:solidFill>
-                <a:latin typeface="Arial"/>
-              </a:defRPr>
-            </a:pPr>
-            <a:r>
-              <a:t>sebe.</a:t>
-            </a:r>
-          </a:p>
-        </p:txBody>
-      </p:sp>
-      <p:sp>
-        <p:nvSpPr>
-          <p:cNvPr id="17" name="TextBox 16"/>
-          <p:cNvSpPr txBox="1"/>
-          <p:nvPr/>
-        </p:nvSpPr>
-        <p:spPr>
-          <a:xfrm>
-            <a:off x="533400" y="5676900"/>
-            <a:ext cx="11125200" cy="546100"/>
-          </a:xfrm>
-          <a:prstGeom prst="rect">
-            <a:avLst/>
-          </a:prstGeom>
-          <a:noFill/>
-        </p:spPr>
-        <p:txBody>
-          <a:bodyPr wrap="none" lIns="0" rIns="0" tIns="0" bIns="0">
-            <a:spAutoFit/>
-          </a:bodyPr>
-          <a:lstStyle/>
-          <a:p>
-            <a:pPr>
-              <a:lnSpc>
-                <a:spcPts val="1583"/>
-              </a:lnSpc>
-              <a:spcAft>
-                <a:spcPts val="0"/>
-              </a:spcAft>
-              <a:defRPr sz="1320" b="0">
-                <a:solidFill>
-                  <a:srgbClr val="68635B"/>
-                </a:solidFill>
-                <a:latin typeface="Arial"/>
-              </a:defRPr>
-            </a:pPr>
-            <a:r>
-              <a:t>Pružné rozměry; popisky formulářů; viditelný focus; klávesnice.</a:t>
-            </a:r>
-          </a:p>
-        </p:txBody>
-      </p:sp>
-      <p:sp>
-        <p:nvSpPr>
-          <p:cNvPr id="18" name="TextBox 17"/>
-          <p:cNvSpPr txBox="1"/>
-          <p:nvPr/>
-        </p:nvSpPr>
-        <p:spPr>
-          <a:xfrm>
-            <a:off x="533400" y="6413500"/>
-            <a:ext cx="10033000" cy="181610"/>
-          </a:xfrm>
-          <a:prstGeom prst="rect">
-            <a:avLst/>
-          </a:prstGeom>
-          <a:noFill/>
-        </p:spPr>
-        <p:txBody>
-          <a:bodyPr wrap="none" lIns="0" rIns="0" tIns="0" bIns="0">
-            <a:spAutoFit/>
-          </a:bodyPr>
-          <a:lstStyle/>
-          <a:p>
-            <a:pPr>
-              <a:lnSpc>
-                <a:spcPts val="930"/>
-              </a:lnSpc>
-              <a:spcAft>
-                <a:spcPts val="0"/>
-              </a:spcAft>
-              <a:defRPr sz="750" b="0">
-                <a:solidFill>
-                  <a:srgbClr val="68635B"/>
-                </a:solidFill>
-                <a:latin typeface="Arial"/>
-              </a:defRPr>
-            </a:pPr>
-            <a:r>
-              <a:t>DODATEČNĚ PŘIPRAVENÝ PODKLAD K MILNÍKU</a:t>
-            </a:r>
-          </a:p>
-        </p:txBody>
-      </p:sp>
-      <p:sp>
-        <p:nvSpPr>
-          <p:cNvPr id="19" name="TextBox 18"/>
-          <p:cNvSpPr txBox="1"/>
-          <p:nvPr/>
-        </p:nvSpPr>
-        <p:spPr>
-          <a:xfrm>
-            <a:off x="10947400" y="6350000"/>
-            <a:ext cx="825500" cy="220979"/>
-          </a:xfrm>
-          <a:prstGeom prst="rect">
-            <a:avLst/>
-          </a:prstGeom>
-          <a:noFill/>
-        </p:spPr>
-        <p:txBody>
-          <a:bodyPr wrap="none" lIns="0" rIns="0" tIns="0" bIns="0">
-            <a:spAutoFit/>
-          </a:bodyPr>
-          <a:lstStyle/>
-          <a:p>
-            <a:pPr>
-              <a:lnSpc>
-                <a:spcPts val="1240"/>
-              </a:lnSpc>
-              <a:spcAft>
-                <a:spcPts val="0"/>
-              </a:spcAft>
-              <a:defRPr sz="1000" b="1">
-                <a:solidFill>
-                  <a:srgbClr val="68635B"/>
-                </a:solidFill>
-                <a:latin typeface="Arial"/>
-              </a:defRPr>
-            </a:pPr>
-            <a:r>
-              <a:t>03 / 03</a:t>
+              <a:t>3 / 6</a:t>
             </a:r>
           </a:p>
         </p:txBody>
@@ -6543,7 +5563,7 @@
             <a:avLst/>
           </a:prstGeom>
           <a:solidFill>
-            <a:srgbClr val="F4F0E7"/>
+            <a:srgbClr val="FFFFFF"/>
           </a:solidFill>
           <a:ln>
             <a:noFill/>
@@ -6579,8 +5599,8 @@
         </p:nvSpPr>
         <p:spPr>
           <a:xfrm>
-            <a:off x="533400" y="304800"/>
-            <a:ext cx="1905000" cy="283972"/>
+            <a:off x="711200" y="457200"/>
+            <a:ext cx="10769600" cy="228600"/>
           </a:xfrm>
           <a:prstGeom prst="rect">
             <a:avLst/>
@@ -6589,172 +5609,46 @@
         </p:spPr>
         <p:txBody>
           <a:bodyPr wrap="none" lIns="0" rIns="0" tIns="0" bIns="0">
-            <a:spAutoFit/>
+            <a:noAutofit/>
           </a:bodyPr>
           <a:lstStyle/>
           <a:p>
             <a:pPr>
               <a:lnSpc>
-                <a:spcPts val="1736"/>
+                <a:spcPts val="1534"/>
               </a:lnSpc>
               <a:spcAft>
                 <a:spcPts val="0"/>
               </a:spcAft>
-              <a:defRPr sz="1400" b="1">
+              <a:defRPr sz="1300" b="1">
                 <a:solidFill>
-                  <a:srgbClr val="181817"/>
+                  <a:srgbClr val="626773"/>
                 </a:solidFill>
                 <a:latin typeface="Arial"/>
               </a:defRPr>
             </a:pPr>
             <a:r>
-              <a:t>PRAGUE</a:t>
-            </a:r>
-          </a:p>
-        </p:txBody>
-      </p:sp>
-      <p:sp>
-        <p:nvSpPr>
-          <p:cNvPr id="4" name="TextBox 3"/>
-          <p:cNvSpPr txBox="1"/>
-          <p:nvPr/>
-        </p:nvSpPr>
-        <p:spPr>
-          <a:xfrm>
-            <a:off x="533400" y="495300"/>
-            <a:ext cx="1905000" cy="409956"/>
-          </a:xfrm>
-          <a:prstGeom prst="rect">
-            <a:avLst/>
-          </a:prstGeom>
-          <a:noFill/>
-        </p:spPr>
-        <p:txBody>
-          <a:bodyPr wrap="none" lIns="0" rIns="0" tIns="0" bIns="0">
-            <a:spAutoFit/>
-          </a:bodyPr>
-          <a:lstStyle/>
-          <a:p>
-            <a:pPr>
-              <a:lnSpc>
-                <a:spcPts val="2728"/>
-              </a:lnSpc>
-              <a:spcAft>
-                <a:spcPts val="0"/>
-              </a:spcAft>
-              <a:defRPr sz="2200" b="1">
-                <a:solidFill>
-                  <a:srgbClr val="181817"/>
-                </a:solidFill>
-                <a:latin typeface="Arial"/>
-              </a:defRPr>
-            </a:pPr>
-            <a:r>
-              <a:t>PULSE</a:t>
-            </a:r>
-          </a:p>
-        </p:txBody>
-      </p:sp>
-      <p:sp>
-        <p:nvSpPr>
-          <p:cNvPr id="5" name="TextBox 4"/>
-          <p:cNvSpPr txBox="1"/>
-          <p:nvPr/>
-        </p:nvSpPr>
-        <p:spPr>
-          <a:xfrm>
-            <a:off x="533400" y="812800"/>
-            <a:ext cx="2032000" cy="165862"/>
-          </a:xfrm>
-          <a:prstGeom prst="rect">
-            <a:avLst/>
-          </a:prstGeom>
-          <a:noFill/>
-        </p:spPr>
-        <p:txBody>
-          <a:bodyPr wrap="none" lIns="0" rIns="0" tIns="0" bIns="0">
-            <a:spAutoFit/>
-          </a:bodyPr>
-          <a:lstStyle/>
-          <a:p>
-            <a:pPr>
-              <a:lnSpc>
-                <a:spcPts val="806"/>
-              </a:lnSpc>
-              <a:spcAft>
-                <a:spcPts val="0"/>
-              </a:spcAft>
-              <a:defRPr sz="650" b="1">
-                <a:solidFill>
-                  <a:srgbClr val="181817"/>
-                </a:solidFill>
-                <a:latin typeface="Arial"/>
-              </a:defRPr>
-            </a:pPr>
-            <a:r>
-              <a:t>FEST / 2027</a:t>
-            </a:r>
-          </a:p>
-        </p:txBody>
-      </p:sp>
-      <p:sp>
-        <p:nvSpPr>
-          <p:cNvPr id="6" name="TextBox 5"/>
-          <p:cNvSpPr txBox="1"/>
-          <p:nvPr/>
-        </p:nvSpPr>
-        <p:spPr>
-          <a:xfrm>
-            <a:off x="5588000" y="533400"/>
-            <a:ext cx="6070600" cy="220979"/>
-          </a:xfrm>
-          <a:prstGeom prst="rect">
-            <a:avLst/>
-          </a:prstGeom>
-          <a:noFill/>
-        </p:spPr>
-        <p:txBody>
-          <a:bodyPr wrap="none" lIns="0" rIns="0" tIns="0" bIns="0">
-            <a:spAutoFit/>
-          </a:bodyPr>
-          <a:lstStyle/>
-          <a:p>
-            <a:pPr>
-              <a:lnSpc>
-                <a:spcPts val="1240"/>
-              </a:lnSpc>
-              <a:spcAft>
-                <a:spcPts val="0"/>
-              </a:spcAft>
-              <a:defRPr sz="1000" b="1">
-                <a:solidFill>
-                  <a:srgbClr val="68635B"/>
-                </a:solidFill>
-                <a:latin typeface="Arial"/>
-              </a:defRPr>
-            </a:pPr>
-            <a:r>
-              <a:t>ŽIVÝ PRŮCHOD PROGRAMEM</a:t>
-            </a:r>
-          </a:p>
-        </p:txBody>
-      </p:sp>
-      <p:sp>
-        <p:nvSpPr>
-          <p:cNvPr id="7" name="Rectangle 6"/>
+              <a:t>UKÁZKA V PROTOTYPU</a:t>
+            </a:r>
+          </a:p>
+        </p:txBody>
+      </p:sp>
+      <p:sp>
+        <p:nvSpPr>
+          <p:cNvPr id="4" name="Rectangle 3"/>
           <p:cNvSpPr/>
           <p:nvPr/>
         </p:nvSpPr>
         <p:spPr>
           <a:xfrm>
-            <a:off x="533400" y="1155700"/>
-            <a:ext cx="11125200" cy="25400"/>
+            <a:off x="711200" y="876300"/>
+            <a:ext cx="622300" cy="50800"/>
           </a:xfrm>
           <a:prstGeom prst="rect">
             <a:avLst/>
           </a:prstGeom>
           <a:solidFill>
-            <a:srgbClr val="181817"/>
+            <a:srgbClr val="E55024"/>
           </a:solidFill>
           <a:ln>
             <a:noFill/>
@@ -6784,14 +5678,14 @@
       </p:sp>
       <p:sp>
         <p:nvSpPr>
-          <p:cNvPr id="8" name="TextBox 7"/>
+          <p:cNvPr id="5" name="TextBox 4"/>
           <p:cNvSpPr txBox="1"/>
           <p:nvPr/>
         </p:nvSpPr>
         <p:spPr>
           <a:xfrm>
-            <a:off x="508000" y="1422400"/>
-            <a:ext cx="11176000" cy="1079500"/>
+            <a:off x="685800" y="1257300"/>
+            <a:ext cx="10795000" cy="1168400"/>
           </a:xfrm>
           <a:prstGeom prst="rect">
             <a:avLst/>
@@ -6800,46 +5694,592 @@
         </p:spPr>
         <p:txBody>
           <a:bodyPr wrap="none" lIns="0" rIns="0" tIns="0" bIns="0">
-            <a:spAutoFit/>
+            <a:noAutofit/>
           </a:bodyPr>
           <a:lstStyle/>
           <a:p>
             <a:pPr>
               <a:lnSpc>
-                <a:spcPts val="3740"/>
+                <a:spcPts val="4032"/>
               </a:lnSpc>
               <a:spcAft>
                 <a:spcPts val="0"/>
               </a:spcAft>
-              <a:defRPr sz="3400" b="1">
+              <a:defRPr sz="3600" b="1">
                 <a:solidFill>
-                  <a:srgbClr val="181817"/>
+                  <a:srgbClr val="191B20"/>
                 </a:solidFill>
                 <a:latin typeface="Arial"/>
               </a:defRPr>
             </a:pPr>
             <a:r>
-              <a:t>S1 / Od přehledu k výběru.</a:t>
-            </a:r>
-          </a:p>
-        </p:txBody>
-      </p:sp>
-      <p:sp>
-        <p:nvSpPr>
-          <p:cNvPr id="9" name="Rectangle 8"/>
+              <a:t>S1: sestavení osobního programu</a:t>
+            </a:r>
+          </a:p>
+        </p:txBody>
+      </p:sp>
+      <p:sp>
+        <p:nvSpPr>
+          <p:cNvPr id="6" name="TextBox 5"/>
+          <p:cNvSpPr txBox="1"/>
+          <p:nvPr/>
+        </p:nvSpPr>
+        <p:spPr>
+          <a:xfrm>
+            <a:off x="711200" y="2146300"/>
+            <a:ext cx="482600" cy="355600"/>
+          </a:xfrm>
+          <a:prstGeom prst="rect">
+            <a:avLst/>
+          </a:prstGeom>
+          <a:noFill/>
+        </p:spPr>
+        <p:txBody>
+          <a:bodyPr wrap="none" lIns="0" rIns="0" tIns="0" bIns="0">
+            <a:noAutofit/>
+          </a:bodyPr>
+          <a:lstStyle/>
+          <a:p>
+            <a:pPr>
+              <a:lnSpc>
+                <a:spcPts val="2713"/>
+              </a:lnSpc>
+              <a:spcAft>
+                <a:spcPts val="0"/>
+              </a:spcAft>
+              <a:defRPr sz="2300" b="1">
+                <a:solidFill>
+                  <a:srgbClr val="E55024"/>
+                </a:solidFill>
+                <a:latin typeface="Arial"/>
+              </a:defRPr>
+            </a:pPr>
+            <a:r>
+              <a:t>01</a:t>
+            </a:r>
+          </a:p>
+        </p:txBody>
+      </p:sp>
+      <p:sp>
+        <p:nvSpPr>
+          <p:cNvPr id="7" name="TextBox 6"/>
+          <p:cNvSpPr txBox="1"/>
+          <p:nvPr/>
+        </p:nvSpPr>
+        <p:spPr>
+          <a:xfrm>
+            <a:off x="1346200" y="2146300"/>
+            <a:ext cx="3479800" cy="685800"/>
+          </a:xfrm>
+          <a:prstGeom prst="rect">
+            <a:avLst/>
+          </a:prstGeom>
+          <a:noFill/>
+        </p:spPr>
+        <p:txBody>
+          <a:bodyPr wrap="none" lIns="0" rIns="0" tIns="0" bIns="0">
+            <a:noAutofit/>
+          </a:bodyPr>
+          <a:lstStyle/>
+          <a:p>
+            <a:pPr>
+              <a:lnSpc>
+                <a:spcPts val="2832"/>
+              </a:lnSpc>
+              <a:spcAft>
+                <a:spcPts val="0"/>
+              </a:spcAft>
+              <a:defRPr sz="2400" b="1">
+                <a:solidFill>
+                  <a:srgbClr val="191B20"/>
+                </a:solidFill>
+                <a:latin typeface="Arial"/>
+              </a:defRPr>
+            </a:pPr>
+            <a:r>
+              <a:t>Program</a:t>
+            </a:r>
+          </a:p>
+        </p:txBody>
+      </p:sp>
+      <p:sp>
+        <p:nvSpPr>
+          <p:cNvPr id="8" name="TextBox 7"/>
+          <p:cNvSpPr txBox="1"/>
+          <p:nvPr/>
+        </p:nvSpPr>
+        <p:spPr>
+          <a:xfrm>
+            <a:off x="4965700" y="2171700"/>
+            <a:ext cx="6515100" cy="698500"/>
+          </a:xfrm>
+          <a:prstGeom prst="rect">
+            <a:avLst/>
+          </a:prstGeom>
+          <a:noFill/>
+        </p:spPr>
+        <p:txBody>
+          <a:bodyPr wrap="none" lIns="0" rIns="0" tIns="0" bIns="0">
+            <a:noAutofit/>
+          </a:bodyPr>
+          <a:lstStyle/>
+          <a:p>
+            <a:pPr>
+              <a:lnSpc>
+                <a:spcPts val="2713"/>
+              </a:lnSpc>
+              <a:spcAft>
+                <a:spcPts val="0"/>
+              </a:spcAft>
+              <a:defRPr sz="2300" b="0">
+                <a:solidFill>
+                  <a:srgbClr val="626773"/>
+                </a:solidFill>
+                <a:latin typeface="Arial"/>
+              </a:defRPr>
+            </a:pPr>
+            <a:r>
+              <a:t>Otevřít seznam</a:t>
+            </a:r>
+          </a:p>
+        </p:txBody>
+      </p:sp>
+      <p:sp>
+        <p:nvSpPr>
+          <p:cNvPr id="9" name="TextBox 8"/>
+          <p:cNvSpPr txBox="1"/>
+          <p:nvPr/>
+        </p:nvSpPr>
+        <p:spPr>
+          <a:xfrm>
+            <a:off x="711200" y="2971800"/>
+            <a:ext cx="482600" cy="355600"/>
+          </a:xfrm>
+          <a:prstGeom prst="rect">
+            <a:avLst/>
+          </a:prstGeom>
+          <a:noFill/>
+        </p:spPr>
+        <p:txBody>
+          <a:bodyPr wrap="none" lIns="0" rIns="0" tIns="0" bIns="0">
+            <a:noAutofit/>
+          </a:bodyPr>
+          <a:lstStyle/>
+          <a:p>
+            <a:pPr>
+              <a:lnSpc>
+                <a:spcPts val="2713"/>
+              </a:lnSpc>
+              <a:spcAft>
+                <a:spcPts val="0"/>
+              </a:spcAft>
+              <a:defRPr sz="2300" b="1">
+                <a:solidFill>
+                  <a:srgbClr val="E55024"/>
+                </a:solidFill>
+                <a:latin typeface="Arial"/>
+              </a:defRPr>
+            </a:pPr>
+            <a:r>
+              <a:t>02</a:t>
+            </a:r>
+          </a:p>
+        </p:txBody>
+      </p:sp>
+      <p:sp>
+        <p:nvSpPr>
+          <p:cNvPr id="10" name="TextBox 9"/>
+          <p:cNvSpPr txBox="1"/>
+          <p:nvPr/>
+        </p:nvSpPr>
+        <p:spPr>
+          <a:xfrm>
+            <a:off x="1346200" y="2971800"/>
+            <a:ext cx="3479800" cy="685800"/>
+          </a:xfrm>
+          <a:prstGeom prst="rect">
+            <a:avLst/>
+          </a:prstGeom>
+          <a:noFill/>
+        </p:spPr>
+        <p:txBody>
+          <a:bodyPr wrap="none" lIns="0" rIns="0" tIns="0" bIns="0">
+            <a:noAutofit/>
+          </a:bodyPr>
+          <a:lstStyle/>
+          <a:p>
+            <a:pPr>
+              <a:lnSpc>
+                <a:spcPts val="2832"/>
+              </a:lnSpc>
+              <a:spcAft>
+                <a:spcPts val="0"/>
+              </a:spcAft>
+              <a:defRPr sz="2400" b="1">
+                <a:solidFill>
+                  <a:srgbClr val="191B20"/>
+                </a:solidFill>
+                <a:latin typeface="Arial"/>
+              </a:defRPr>
+            </a:pPr>
+            <a:r>
+              <a:t>Den a scéna</a:t>
+            </a:r>
+          </a:p>
+        </p:txBody>
+      </p:sp>
+      <p:sp>
+        <p:nvSpPr>
+          <p:cNvPr id="11" name="TextBox 10"/>
+          <p:cNvSpPr txBox="1"/>
+          <p:nvPr/>
+        </p:nvSpPr>
+        <p:spPr>
+          <a:xfrm>
+            <a:off x="4965700" y="2997200"/>
+            <a:ext cx="6515100" cy="698500"/>
+          </a:xfrm>
+          <a:prstGeom prst="rect">
+            <a:avLst/>
+          </a:prstGeom>
+          <a:noFill/>
+        </p:spPr>
+        <p:txBody>
+          <a:bodyPr wrap="none" lIns="0" rIns="0" tIns="0" bIns="0">
+            <a:noAutofit/>
+          </a:bodyPr>
+          <a:lstStyle/>
+          <a:p>
+            <a:pPr>
+              <a:lnSpc>
+                <a:spcPts val="2713"/>
+              </a:lnSpc>
+              <a:spcAft>
+                <a:spcPts val="0"/>
+              </a:spcAft>
+              <a:defRPr sz="2300" b="0">
+                <a:solidFill>
+                  <a:srgbClr val="626773"/>
+                </a:solidFill>
+                <a:latin typeface="Arial"/>
+              </a:defRPr>
+            </a:pPr>
+            <a:r>
+              <a:t>1. 8. / River Stage</a:t>
+            </a:r>
+          </a:p>
+        </p:txBody>
+      </p:sp>
+      <p:sp>
+        <p:nvSpPr>
+          <p:cNvPr id="12" name="TextBox 11"/>
+          <p:cNvSpPr txBox="1"/>
+          <p:nvPr/>
+        </p:nvSpPr>
+        <p:spPr>
+          <a:xfrm>
+            <a:off x="711200" y="3797300"/>
+            <a:ext cx="482600" cy="355600"/>
+          </a:xfrm>
+          <a:prstGeom prst="rect">
+            <a:avLst/>
+          </a:prstGeom>
+          <a:noFill/>
+        </p:spPr>
+        <p:txBody>
+          <a:bodyPr wrap="none" lIns="0" rIns="0" tIns="0" bIns="0">
+            <a:noAutofit/>
+          </a:bodyPr>
+          <a:lstStyle/>
+          <a:p>
+            <a:pPr>
+              <a:lnSpc>
+                <a:spcPts val="2713"/>
+              </a:lnSpc>
+              <a:spcAft>
+                <a:spcPts val="0"/>
+              </a:spcAft>
+              <a:defRPr sz="2300" b="1">
+                <a:solidFill>
+                  <a:srgbClr val="E55024"/>
+                </a:solidFill>
+                <a:latin typeface="Arial"/>
+              </a:defRPr>
+            </a:pPr>
+            <a:r>
+              <a:t>03</a:t>
+            </a:r>
+          </a:p>
+        </p:txBody>
+      </p:sp>
+      <p:sp>
+        <p:nvSpPr>
+          <p:cNvPr id="13" name="TextBox 12"/>
+          <p:cNvSpPr txBox="1"/>
+          <p:nvPr/>
+        </p:nvSpPr>
+        <p:spPr>
+          <a:xfrm>
+            <a:off x="1346200" y="3797300"/>
+            <a:ext cx="3479800" cy="685800"/>
+          </a:xfrm>
+          <a:prstGeom prst="rect">
+            <a:avLst/>
+          </a:prstGeom>
+          <a:noFill/>
+        </p:spPr>
+        <p:txBody>
+          <a:bodyPr wrap="none" lIns="0" rIns="0" tIns="0" bIns="0">
+            <a:noAutofit/>
+          </a:bodyPr>
+          <a:lstStyle/>
+          <a:p>
+            <a:pPr>
+              <a:lnSpc>
+                <a:spcPts val="2832"/>
+              </a:lnSpc>
+              <a:spcAft>
+                <a:spcPts val="0"/>
+              </a:spcAft>
+              <a:defRPr sz="2400" b="1">
+                <a:solidFill>
+                  <a:srgbClr val="191B20"/>
+                </a:solidFill>
+                <a:latin typeface="Arial"/>
+              </a:defRPr>
+            </a:pPr>
+            <a:r>
+              <a:t>Uložit</a:t>
+            </a:r>
+          </a:p>
+        </p:txBody>
+      </p:sp>
+      <p:sp>
+        <p:nvSpPr>
+          <p:cNvPr id="14" name="TextBox 13"/>
+          <p:cNvSpPr txBox="1"/>
+          <p:nvPr/>
+        </p:nvSpPr>
+        <p:spPr>
+          <a:xfrm>
+            <a:off x="4965700" y="3822700"/>
+            <a:ext cx="6515100" cy="698500"/>
+          </a:xfrm>
+          <a:prstGeom prst="rect">
+            <a:avLst/>
+          </a:prstGeom>
+          <a:noFill/>
+        </p:spPr>
+        <p:txBody>
+          <a:bodyPr wrap="none" lIns="0" rIns="0" tIns="0" bIns="0">
+            <a:noAutofit/>
+          </a:bodyPr>
+          <a:lstStyle/>
+          <a:p>
+            <a:pPr>
+              <a:lnSpc>
+                <a:spcPts val="2713"/>
+              </a:lnSpc>
+              <a:spcAft>
+                <a:spcPts val="0"/>
+              </a:spcAft>
+              <a:defRPr sz="2300" b="0">
+                <a:solidFill>
+                  <a:srgbClr val="626773"/>
+                </a:solidFill>
+                <a:latin typeface="Arial"/>
+              </a:defRPr>
+            </a:pPr>
+            <a:r>
+              <a:t>Vybrat koncert</a:t>
+            </a:r>
+          </a:p>
+        </p:txBody>
+      </p:sp>
+      <p:sp>
+        <p:nvSpPr>
+          <p:cNvPr id="15" name="TextBox 14"/>
+          <p:cNvSpPr txBox="1"/>
+          <p:nvPr/>
+        </p:nvSpPr>
+        <p:spPr>
+          <a:xfrm>
+            <a:off x="711200" y="4622800"/>
+            <a:ext cx="482600" cy="355600"/>
+          </a:xfrm>
+          <a:prstGeom prst="rect">
+            <a:avLst/>
+          </a:prstGeom>
+          <a:noFill/>
+        </p:spPr>
+        <p:txBody>
+          <a:bodyPr wrap="none" lIns="0" rIns="0" tIns="0" bIns="0">
+            <a:noAutofit/>
+          </a:bodyPr>
+          <a:lstStyle/>
+          <a:p>
+            <a:pPr>
+              <a:lnSpc>
+                <a:spcPts val="2713"/>
+              </a:lnSpc>
+              <a:spcAft>
+                <a:spcPts val="0"/>
+              </a:spcAft>
+              <a:defRPr sz="2300" b="1">
+                <a:solidFill>
+                  <a:srgbClr val="E55024"/>
+                </a:solidFill>
+                <a:latin typeface="Arial"/>
+              </a:defRPr>
+            </a:pPr>
+            <a:r>
+              <a:t>04</a:t>
+            </a:r>
+          </a:p>
+        </p:txBody>
+      </p:sp>
+      <p:sp>
+        <p:nvSpPr>
+          <p:cNvPr id="16" name="TextBox 15"/>
+          <p:cNvSpPr txBox="1"/>
+          <p:nvPr/>
+        </p:nvSpPr>
+        <p:spPr>
+          <a:xfrm>
+            <a:off x="1346200" y="4622800"/>
+            <a:ext cx="3479800" cy="685800"/>
+          </a:xfrm>
+          <a:prstGeom prst="rect">
+            <a:avLst/>
+          </a:prstGeom>
+          <a:noFill/>
+        </p:spPr>
+        <p:txBody>
+          <a:bodyPr wrap="none" lIns="0" rIns="0" tIns="0" bIns="0">
+            <a:noAutofit/>
+          </a:bodyPr>
+          <a:lstStyle/>
+          <a:p>
+            <a:pPr>
+              <a:lnSpc>
+                <a:spcPts val="2832"/>
+              </a:lnSpc>
+              <a:spcAft>
+                <a:spcPts val="0"/>
+              </a:spcAft>
+              <a:defRPr sz="2400" b="1">
+                <a:solidFill>
+                  <a:srgbClr val="191B20"/>
+                </a:solidFill>
+                <a:latin typeface="Arial"/>
+              </a:defRPr>
+            </a:pPr>
+            <a:r>
+              <a:t>Můj výběr</a:t>
+            </a:r>
+          </a:p>
+        </p:txBody>
+      </p:sp>
+      <p:sp>
+        <p:nvSpPr>
+          <p:cNvPr id="17" name="TextBox 16"/>
+          <p:cNvSpPr txBox="1"/>
+          <p:nvPr/>
+        </p:nvSpPr>
+        <p:spPr>
+          <a:xfrm>
+            <a:off x="4965700" y="4648200"/>
+            <a:ext cx="6515100" cy="698500"/>
+          </a:xfrm>
+          <a:prstGeom prst="rect">
+            <a:avLst/>
+          </a:prstGeom>
+          <a:noFill/>
+        </p:spPr>
+        <p:txBody>
+          <a:bodyPr wrap="none" lIns="0" rIns="0" tIns="0" bIns="0">
+            <a:noAutofit/>
+          </a:bodyPr>
+          <a:lstStyle/>
+          <a:p>
+            <a:pPr>
+              <a:lnSpc>
+                <a:spcPts val="2713"/>
+              </a:lnSpc>
+              <a:spcAft>
+                <a:spcPts val="0"/>
+              </a:spcAft>
+              <a:defRPr sz="2300" b="0">
+                <a:solidFill>
+                  <a:srgbClr val="626773"/>
+                </a:solidFill>
+                <a:latin typeface="Arial"/>
+              </a:defRPr>
+            </a:pPr>
+            <a:r>
+              <a:t>Obnovit stránku</a:t>
+            </a:r>
+          </a:p>
+        </p:txBody>
+      </p:sp>
+      <p:sp>
+        <p:nvSpPr>
+          <p:cNvPr id="18" name="TextBox 17"/>
+          <p:cNvSpPr txBox="1"/>
+          <p:nvPr/>
+        </p:nvSpPr>
+        <p:spPr>
+          <a:xfrm>
+            <a:off x="711200" y="5473700"/>
+            <a:ext cx="10769600" cy="596900"/>
+          </a:xfrm>
+          <a:prstGeom prst="rect">
+            <a:avLst/>
+          </a:prstGeom>
+          <a:noFill/>
+        </p:spPr>
+        <p:txBody>
+          <a:bodyPr wrap="none" lIns="0" rIns="0" tIns="0" bIns="0">
+            <a:noAutofit/>
+          </a:bodyPr>
+          <a:lstStyle/>
+          <a:p>
+            <a:pPr>
+              <a:lnSpc>
+                <a:spcPts val="2124"/>
+              </a:lnSpc>
+              <a:spcAft>
+                <a:spcPts val="0"/>
+              </a:spcAft>
+              <a:defRPr sz="1800" b="0">
+                <a:solidFill>
+                  <a:srgbClr val="626773"/>
+                </a:solidFill>
+                <a:latin typeface="Arial"/>
+              </a:defRPr>
+            </a:pPr>
+            <a:r>
+              <a:t>Očekávaný výsledek: správný filtr a zachovaný výběr.</a:t>
+            </a:r>
+          </a:p>
+        </p:txBody>
+      </p:sp>
+      <p:sp>
+        <p:nvSpPr>
+          <p:cNvPr id="19" name="Rectangle 18"/>
           <p:cNvSpPr/>
           <p:nvPr/>
         </p:nvSpPr>
         <p:spPr>
           <a:xfrm>
-            <a:off x="533400" y="2946400"/>
-            <a:ext cx="2552700" cy="1765300"/>
+            <a:off x="711200" y="6248400"/>
+            <a:ext cx="10769600" cy="12700"/>
           </a:xfrm>
           <a:prstGeom prst="rect">
             <a:avLst/>
           </a:prstGeom>
           <a:solidFill>
-            <a:srgbClr val="181817"/>
+            <a:srgbClr val="DFE2E7"/>
           </a:solidFill>
           <a:ln>
             <a:noFill/>
@@ -6869,14 +6309,14 @@
       </p:sp>
       <p:sp>
         <p:nvSpPr>
-          <p:cNvPr id="10" name="TextBox 9"/>
+          <p:cNvPr id="20" name="TextBox 19"/>
           <p:cNvSpPr txBox="1"/>
           <p:nvPr/>
         </p:nvSpPr>
         <p:spPr>
           <a:xfrm>
-            <a:off x="723900" y="3162300"/>
-            <a:ext cx="2133600" cy="236728"/>
+            <a:off x="711200" y="6438900"/>
+            <a:ext cx="9652000" cy="203200"/>
           </a:xfrm>
           <a:prstGeom prst="rect">
             <a:avLst/>
@@ -6885,40 +6325,40 @@
         </p:spPr>
         <p:txBody>
           <a:bodyPr wrap="none" lIns="0" rIns="0" tIns="0" bIns="0">
-            <a:spAutoFit/>
+            <a:noAutofit/>
           </a:bodyPr>
           <a:lstStyle/>
           <a:p>
             <a:pPr>
               <a:lnSpc>
-                <a:spcPts val="1364"/>
+                <a:spcPts val="1297"/>
               </a:lnSpc>
               <a:spcAft>
                 <a:spcPts val="0"/>
               </a:spcAft>
-              <a:defRPr sz="1100" b="1">
+              <a:defRPr sz="1100" b="0">
                 <a:solidFill>
-                  <a:srgbClr val="F45E2B"/>
+                  <a:srgbClr val="626773"/>
                 </a:solidFill>
                 <a:latin typeface="Arial"/>
               </a:defRPr>
             </a:pPr>
             <a:r>
-              <a:t>01</a:t>
-            </a:r>
-          </a:p>
-        </p:txBody>
-      </p:sp>
-      <p:sp>
-        <p:nvSpPr>
-          <p:cNvPr id="11" name="TextBox 10"/>
+              <a:t>Prague Pulse Fest · Výstaviště Praha · 2027</a:t>
+            </a:r>
+          </a:p>
+        </p:txBody>
+      </p:sp>
+      <p:sp>
+        <p:nvSpPr>
+          <p:cNvPr id="21" name="TextBox 20"/>
           <p:cNvSpPr txBox="1"/>
           <p:nvPr/>
         </p:nvSpPr>
         <p:spPr>
           <a:xfrm>
-            <a:off x="723900" y="3568700"/>
-            <a:ext cx="2133600" cy="444500"/>
+            <a:off x="10807700" y="6413500"/>
+            <a:ext cx="673100" cy="215900"/>
           </a:xfrm>
           <a:prstGeom prst="rect">
             <a:avLst/>
@@ -6927,846 +6367,26 @@
         </p:spPr>
         <p:txBody>
           <a:bodyPr wrap="none" lIns="0" rIns="0" tIns="0" bIns="0">
-            <a:spAutoFit/>
+            <a:noAutofit/>
           </a:bodyPr>
           <a:lstStyle/>
           <a:p>
             <a:pPr>
               <a:lnSpc>
-                <a:spcPts val="2728"/>
-              </a:lnSpc>
-              <a:spcAft>
-                <a:spcPts val="0"/>
-              </a:spcAft>
-              <a:defRPr sz="2200" b="1">
-                <a:solidFill>
-                  <a:srgbClr val="F4F0E7"/>
-                </a:solidFill>
-                <a:latin typeface="Arial"/>
-              </a:defRPr>
-            </a:pPr>
-            <a:r>
-              <a:t>Program</a:t>
-            </a:r>
-          </a:p>
-        </p:txBody>
-      </p:sp>
-      <p:sp>
-        <p:nvSpPr>
-          <p:cNvPr id="12" name="TextBox 11"/>
-          <p:cNvSpPr txBox="1"/>
-          <p:nvPr/>
-        </p:nvSpPr>
-        <p:spPr>
-          <a:xfrm>
-            <a:off x="723900" y="4140200"/>
-            <a:ext cx="2133600" cy="406400"/>
-          </a:xfrm>
-          <a:prstGeom prst="rect">
-            <a:avLst/>
-          </a:prstGeom>
-          <a:noFill/>
-        </p:spPr>
-        <p:txBody>
-          <a:bodyPr wrap="none" lIns="0" rIns="0" tIns="0" bIns="0">
-            <a:spAutoFit/>
-          </a:bodyPr>
-          <a:lstStyle/>
-          <a:p>
-            <a:pPr>
-              <a:lnSpc>
-                <a:spcPts val="1488"/>
+                <a:spcPts val="1416"/>
               </a:lnSpc>
               <a:spcAft>
                 <a:spcPts val="0"/>
               </a:spcAft>
               <a:defRPr sz="1200" b="0">
                 <a:solidFill>
-                  <a:srgbClr val="F4F0E7"/>
+                  <a:srgbClr val="626773"/>
                 </a:solidFill>
                 <a:latin typeface="Arial"/>
               </a:defRPr>
             </a:pPr>
             <a:r>
-              <a:t>Otevřít přehled</a:t>
-            </a:r>
-          </a:p>
-        </p:txBody>
-      </p:sp>
-      <p:sp>
-        <p:nvSpPr>
-          <p:cNvPr id="13" name="TextBox 12"/>
-          <p:cNvSpPr txBox="1"/>
-          <p:nvPr/>
-        </p:nvSpPr>
-        <p:spPr>
-          <a:xfrm>
-            <a:off x="3098800" y="3657600"/>
-            <a:ext cx="292100" cy="394208"/>
-          </a:xfrm>
-          <a:prstGeom prst="rect">
-            <a:avLst/>
-          </a:prstGeom>
-          <a:noFill/>
-        </p:spPr>
-        <p:txBody>
-          <a:bodyPr wrap="none" lIns="0" rIns="0" tIns="0" bIns="0">
-            <a:spAutoFit/>
-          </a:bodyPr>
-          <a:lstStyle/>
-          <a:p>
-            <a:pPr>
-              <a:lnSpc>
-                <a:spcPts val="2604"/>
-              </a:lnSpc>
-              <a:spcAft>
-                <a:spcPts val="0"/>
-              </a:spcAft>
-              <a:defRPr sz="2100" b="1">
-                <a:solidFill>
-                  <a:srgbClr val="181817"/>
-                </a:solidFill>
-                <a:latin typeface="Arial"/>
-              </a:defRPr>
-            </a:pPr>
-            <a:r>
-              <a:t>›</a:t>
-            </a:r>
-          </a:p>
-        </p:txBody>
-      </p:sp>
-      <p:sp>
-        <p:nvSpPr>
-          <p:cNvPr id="14" name="Rectangle 13"/>
-          <p:cNvSpPr/>
-          <p:nvPr/>
-        </p:nvSpPr>
-        <p:spPr>
-          <a:xfrm>
-            <a:off x="3390900" y="2946400"/>
-            <a:ext cx="2552700" cy="1765300"/>
-          </a:xfrm>
-          <a:prstGeom prst="rect">
-            <a:avLst/>
-          </a:prstGeom>
-          <a:solidFill>
-            <a:srgbClr val="E7E0D5"/>
-          </a:solidFill>
-          <a:ln>
-            <a:noFill/>
-          </a:ln>
-        </p:spPr>
-        <p:style>
-          <a:lnRef idx="1">
-            <a:schemeClr val="accent1"/>
-          </a:lnRef>
-          <a:fillRef idx="3">
-            <a:schemeClr val="accent1"/>
-          </a:fillRef>
-          <a:effectRef idx="2">
-            <a:schemeClr val="accent1"/>
-          </a:effectRef>
-          <a:fontRef idx="minor">
-            <a:schemeClr val="lt1"/>
-          </a:fontRef>
-        </p:style>
-        <p:txBody>
-          <a:bodyPr rtlCol="0" anchor="ctr"/>
-          <a:lstStyle/>
-          <a:p>
-            <a:pPr algn="ctr"/>
-          </a:p>
-        </p:txBody>
-      </p:sp>
-      <p:sp>
-        <p:nvSpPr>
-          <p:cNvPr id="15" name="TextBox 14"/>
-          <p:cNvSpPr txBox="1"/>
-          <p:nvPr/>
-        </p:nvSpPr>
-        <p:spPr>
-          <a:xfrm>
-            <a:off x="3581400" y="3162300"/>
-            <a:ext cx="2133600" cy="236728"/>
-          </a:xfrm>
-          <a:prstGeom prst="rect">
-            <a:avLst/>
-          </a:prstGeom>
-          <a:noFill/>
-        </p:spPr>
-        <p:txBody>
-          <a:bodyPr wrap="none" lIns="0" rIns="0" tIns="0" bIns="0">
-            <a:spAutoFit/>
-          </a:bodyPr>
-          <a:lstStyle/>
-          <a:p>
-            <a:pPr>
-              <a:lnSpc>
-                <a:spcPts val="1364"/>
-              </a:lnSpc>
-              <a:spcAft>
-                <a:spcPts val="0"/>
-              </a:spcAft>
-              <a:defRPr sz="1100" b="1">
-                <a:solidFill>
-                  <a:srgbClr val="F45E2B"/>
-                </a:solidFill>
-                <a:latin typeface="Arial"/>
-              </a:defRPr>
-            </a:pPr>
-            <a:r>
-              <a:t>02</a:t>
-            </a:r>
-          </a:p>
-        </p:txBody>
-      </p:sp>
-      <p:sp>
-        <p:nvSpPr>
-          <p:cNvPr id="16" name="TextBox 15"/>
-          <p:cNvSpPr txBox="1"/>
-          <p:nvPr/>
-        </p:nvSpPr>
-        <p:spPr>
-          <a:xfrm>
-            <a:off x="3581400" y="3568700"/>
-            <a:ext cx="2133600" cy="444500"/>
-          </a:xfrm>
-          <a:prstGeom prst="rect">
-            <a:avLst/>
-          </a:prstGeom>
-          <a:noFill/>
-        </p:spPr>
-        <p:txBody>
-          <a:bodyPr wrap="none" lIns="0" rIns="0" tIns="0" bIns="0">
-            <a:spAutoFit/>
-          </a:bodyPr>
-          <a:lstStyle/>
-          <a:p>
-            <a:pPr>
-              <a:lnSpc>
-                <a:spcPts val="2728"/>
-              </a:lnSpc>
-              <a:spcAft>
-                <a:spcPts val="0"/>
-              </a:spcAft>
-              <a:defRPr sz="2200" b="1">
-                <a:solidFill>
-                  <a:srgbClr val="181817"/>
-                </a:solidFill>
-                <a:latin typeface="Arial"/>
-              </a:defRPr>
-            </a:pPr>
-            <a:r>
-              <a:t>1. srpna</a:t>
-            </a:r>
-          </a:p>
-        </p:txBody>
-      </p:sp>
-      <p:sp>
-        <p:nvSpPr>
-          <p:cNvPr id="17" name="TextBox 16"/>
-          <p:cNvSpPr txBox="1"/>
-          <p:nvPr/>
-        </p:nvSpPr>
-        <p:spPr>
-          <a:xfrm>
-            <a:off x="3581400" y="4140200"/>
-            <a:ext cx="2133600" cy="406400"/>
-          </a:xfrm>
-          <a:prstGeom prst="rect">
-            <a:avLst/>
-          </a:prstGeom>
-          <a:noFill/>
-        </p:spPr>
-        <p:txBody>
-          <a:bodyPr wrap="none" lIns="0" rIns="0" tIns="0" bIns="0">
-            <a:spAutoFit/>
-          </a:bodyPr>
-          <a:lstStyle/>
-          <a:p>
-            <a:pPr>
-              <a:lnSpc>
-                <a:spcPts val="1488"/>
-              </a:lnSpc>
-              <a:spcAft>
-                <a:spcPts val="0"/>
-              </a:spcAft>
-              <a:defRPr sz="1200" b="0">
-                <a:solidFill>
-                  <a:srgbClr val="181817"/>
-                </a:solidFill>
-                <a:latin typeface="Arial"/>
-              </a:defRPr>
-            </a:pPr>
-            <a:r>
-              <a:t>Vybrat den</a:t>
-            </a:r>
-          </a:p>
-        </p:txBody>
-      </p:sp>
-      <p:sp>
-        <p:nvSpPr>
-          <p:cNvPr id="18" name="TextBox 17"/>
-          <p:cNvSpPr txBox="1"/>
-          <p:nvPr/>
-        </p:nvSpPr>
-        <p:spPr>
-          <a:xfrm>
-            <a:off x="5956300" y="3657600"/>
-            <a:ext cx="292100" cy="394208"/>
-          </a:xfrm>
-          <a:prstGeom prst="rect">
-            <a:avLst/>
-          </a:prstGeom>
-          <a:noFill/>
-        </p:spPr>
-        <p:txBody>
-          <a:bodyPr wrap="none" lIns="0" rIns="0" tIns="0" bIns="0">
-            <a:spAutoFit/>
-          </a:bodyPr>
-          <a:lstStyle/>
-          <a:p>
-            <a:pPr>
-              <a:lnSpc>
-                <a:spcPts val="2604"/>
-              </a:lnSpc>
-              <a:spcAft>
-                <a:spcPts val="0"/>
-              </a:spcAft>
-              <a:defRPr sz="2100" b="1">
-                <a:solidFill>
-                  <a:srgbClr val="181817"/>
-                </a:solidFill>
-                <a:latin typeface="Arial"/>
-              </a:defRPr>
-            </a:pPr>
-            <a:r>
-              <a:t>›</a:t>
-            </a:r>
-          </a:p>
-        </p:txBody>
-      </p:sp>
-      <p:sp>
-        <p:nvSpPr>
-          <p:cNvPr id="19" name="Rectangle 18"/>
-          <p:cNvSpPr/>
-          <p:nvPr/>
-        </p:nvSpPr>
-        <p:spPr>
-          <a:xfrm>
-            <a:off x="6248400" y="2946400"/>
-            <a:ext cx="2552700" cy="1765300"/>
-          </a:xfrm>
-          <a:prstGeom prst="rect">
-            <a:avLst/>
-          </a:prstGeom>
-          <a:solidFill>
-            <a:srgbClr val="E7E0D5"/>
-          </a:solidFill>
-          <a:ln>
-            <a:noFill/>
-          </a:ln>
-        </p:spPr>
-        <p:style>
-          <a:lnRef idx="1">
-            <a:schemeClr val="accent1"/>
-          </a:lnRef>
-          <a:fillRef idx="3">
-            <a:schemeClr val="accent1"/>
-          </a:fillRef>
-          <a:effectRef idx="2">
-            <a:schemeClr val="accent1"/>
-          </a:effectRef>
-          <a:fontRef idx="minor">
-            <a:schemeClr val="lt1"/>
-          </a:fontRef>
-        </p:style>
-        <p:txBody>
-          <a:bodyPr rtlCol="0" anchor="ctr"/>
-          <a:lstStyle/>
-          <a:p>
-            <a:pPr algn="ctr"/>
-          </a:p>
-        </p:txBody>
-      </p:sp>
-      <p:sp>
-        <p:nvSpPr>
-          <p:cNvPr id="20" name="TextBox 19"/>
-          <p:cNvSpPr txBox="1"/>
-          <p:nvPr/>
-        </p:nvSpPr>
-        <p:spPr>
-          <a:xfrm>
-            <a:off x="6438900" y="3162300"/>
-            <a:ext cx="2133600" cy="236728"/>
-          </a:xfrm>
-          <a:prstGeom prst="rect">
-            <a:avLst/>
-          </a:prstGeom>
-          <a:noFill/>
-        </p:spPr>
-        <p:txBody>
-          <a:bodyPr wrap="none" lIns="0" rIns="0" tIns="0" bIns="0">
-            <a:spAutoFit/>
-          </a:bodyPr>
-          <a:lstStyle/>
-          <a:p>
-            <a:pPr>
-              <a:lnSpc>
-                <a:spcPts val="1364"/>
-              </a:lnSpc>
-              <a:spcAft>
-                <a:spcPts val="0"/>
-              </a:spcAft>
-              <a:defRPr sz="1100" b="1">
-                <a:solidFill>
-                  <a:srgbClr val="F45E2B"/>
-                </a:solidFill>
-                <a:latin typeface="Arial"/>
-              </a:defRPr>
-            </a:pPr>
-            <a:r>
-              <a:t>03</a:t>
-            </a:r>
-          </a:p>
-        </p:txBody>
-      </p:sp>
-      <p:sp>
-        <p:nvSpPr>
-          <p:cNvPr id="21" name="TextBox 20"/>
-          <p:cNvSpPr txBox="1"/>
-          <p:nvPr/>
-        </p:nvSpPr>
-        <p:spPr>
-          <a:xfrm>
-            <a:off x="6438900" y="3568700"/>
-            <a:ext cx="2133600" cy="444500"/>
-          </a:xfrm>
-          <a:prstGeom prst="rect">
-            <a:avLst/>
-          </a:prstGeom>
-          <a:noFill/>
-        </p:spPr>
-        <p:txBody>
-          <a:bodyPr wrap="none" lIns="0" rIns="0" tIns="0" bIns="0">
-            <a:spAutoFit/>
-          </a:bodyPr>
-          <a:lstStyle/>
-          <a:p>
-            <a:pPr>
-              <a:lnSpc>
-                <a:spcPts val="2728"/>
-              </a:lnSpc>
-              <a:spcAft>
-                <a:spcPts val="0"/>
-              </a:spcAft>
-              <a:defRPr sz="2200" b="1">
-                <a:solidFill>
-                  <a:srgbClr val="181817"/>
-                </a:solidFill>
-                <a:latin typeface="Arial"/>
-              </a:defRPr>
-            </a:pPr>
-            <a:r>
-              <a:t>River Stage</a:t>
-            </a:r>
-          </a:p>
-        </p:txBody>
-      </p:sp>
-      <p:sp>
-        <p:nvSpPr>
-          <p:cNvPr id="22" name="TextBox 21"/>
-          <p:cNvSpPr txBox="1"/>
-          <p:nvPr/>
-        </p:nvSpPr>
-        <p:spPr>
-          <a:xfrm>
-            <a:off x="6438900" y="4140200"/>
-            <a:ext cx="2133600" cy="406400"/>
-          </a:xfrm>
-          <a:prstGeom prst="rect">
-            <a:avLst/>
-          </a:prstGeom>
-          <a:noFill/>
-        </p:spPr>
-        <p:txBody>
-          <a:bodyPr wrap="none" lIns="0" rIns="0" tIns="0" bIns="0">
-            <a:spAutoFit/>
-          </a:bodyPr>
-          <a:lstStyle/>
-          <a:p>
-            <a:pPr>
-              <a:lnSpc>
-                <a:spcPts val="1488"/>
-              </a:lnSpc>
-              <a:spcAft>
-                <a:spcPts val="0"/>
-              </a:spcAft>
-              <a:defRPr sz="1200" b="0">
-                <a:solidFill>
-                  <a:srgbClr val="181817"/>
-                </a:solidFill>
-                <a:latin typeface="Arial"/>
-              </a:defRPr>
-            </a:pPr>
-            <a:r>
-              <a:t>Zvolit scénu</a:t>
-            </a:r>
-          </a:p>
-        </p:txBody>
-      </p:sp>
-      <p:sp>
-        <p:nvSpPr>
-          <p:cNvPr id="23" name="TextBox 22"/>
-          <p:cNvSpPr txBox="1"/>
-          <p:nvPr/>
-        </p:nvSpPr>
-        <p:spPr>
-          <a:xfrm>
-            <a:off x="8813800" y="3657600"/>
-            <a:ext cx="292100" cy="394208"/>
-          </a:xfrm>
-          <a:prstGeom prst="rect">
-            <a:avLst/>
-          </a:prstGeom>
-          <a:noFill/>
-        </p:spPr>
-        <p:txBody>
-          <a:bodyPr wrap="none" lIns="0" rIns="0" tIns="0" bIns="0">
-            <a:spAutoFit/>
-          </a:bodyPr>
-          <a:lstStyle/>
-          <a:p>
-            <a:pPr>
-              <a:lnSpc>
-                <a:spcPts val="2604"/>
-              </a:lnSpc>
-              <a:spcAft>
-                <a:spcPts val="0"/>
-              </a:spcAft>
-              <a:defRPr sz="2100" b="1">
-                <a:solidFill>
-                  <a:srgbClr val="181817"/>
-                </a:solidFill>
-                <a:latin typeface="Arial"/>
-              </a:defRPr>
-            </a:pPr>
-            <a:r>
-              <a:t>›</a:t>
-            </a:r>
-          </a:p>
-        </p:txBody>
-      </p:sp>
-      <p:sp>
-        <p:nvSpPr>
-          <p:cNvPr id="24" name="Rectangle 23"/>
-          <p:cNvSpPr/>
-          <p:nvPr/>
-        </p:nvSpPr>
-        <p:spPr>
-          <a:xfrm>
-            <a:off x="9105900" y="2946400"/>
-            <a:ext cx="2552700" cy="1765300"/>
-          </a:xfrm>
-          <a:prstGeom prst="rect">
-            <a:avLst/>
-          </a:prstGeom>
-          <a:solidFill>
-            <a:srgbClr val="E7E0D5"/>
-          </a:solidFill>
-          <a:ln>
-            <a:noFill/>
-          </a:ln>
-        </p:spPr>
-        <p:style>
-          <a:lnRef idx="1">
-            <a:schemeClr val="accent1"/>
-          </a:lnRef>
-          <a:fillRef idx="3">
-            <a:schemeClr val="accent1"/>
-          </a:fillRef>
-          <a:effectRef idx="2">
-            <a:schemeClr val="accent1"/>
-          </a:effectRef>
-          <a:fontRef idx="minor">
-            <a:schemeClr val="lt1"/>
-          </a:fontRef>
-        </p:style>
-        <p:txBody>
-          <a:bodyPr rtlCol="0" anchor="ctr"/>
-          <a:lstStyle/>
-          <a:p>
-            <a:pPr algn="ctr"/>
-          </a:p>
-        </p:txBody>
-      </p:sp>
-      <p:sp>
-        <p:nvSpPr>
-          <p:cNvPr id="25" name="TextBox 24"/>
-          <p:cNvSpPr txBox="1"/>
-          <p:nvPr/>
-        </p:nvSpPr>
-        <p:spPr>
-          <a:xfrm>
-            <a:off x="9296400" y="3162300"/>
-            <a:ext cx="2133600" cy="236728"/>
-          </a:xfrm>
-          <a:prstGeom prst="rect">
-            <a:avLst/>
-          </a:prstGeom>
-          <a:noFill/>
-        </p:spPr>
-        <p:txBody>
-          <a:bodyPr wrap="none" lIns="0" rIns="0" tIns="0" bIns="0">
-            <a:spAutoFit/>
-          </a:bodyPr>
-          <a:lstStyle/>
-          <a:p>
-            <a:pPr>
-              <a:lnSpc>
-                <a:spcPts val="1364"/>
-              </a:lnSpc>
-              <a:spcAft>
-                <a:spcPts val="0"/>
-              </a:spcAft>
-              <a:defRPr sz="1100" b="1">
-                <a:solidFill>
-                  <a:srgbClr val="F45E2B"/>
-                </a:solidFill>
-                <a:latin typeface="Arial"/>
-              </a:defRPr>
-            </a:pPr>
-            <a:r>
-              <a:t>04</a:t>
-            </a:r>
-          </a:p>
-        </p:txBody>
-      </p:sp>
-      <p:sp>
-        <p:nvSpPr>
-          <p:cNvPr id="26" name="TextBox 25"/>
-          <p:cNvSpPr txBox="1"/>
-          <p:nvPr/>
-        </p:nvSpPr>
-        <p:spPr>
-          <a:xfrm>
-            <a:off x="9296400" y="3568700"/>
-            <a:ext cx="2133600" cy="444500"/>
-          </a:xfrm>
-          <a:prstGeom prst="rect">
-            <a:avLst/>
-          </a:prstGeom>
-          <a:noFill/>
-        </p:spPr>
-        <p:txBody>
-          <a:bodyPr wrap="none" lIns="0" rIns="0" tIns="0" bIns="0">
-            <a:spAutoFit/>
-          </a:bodyPr>
-          <a:lstStyle/>
-          <a:p>
-            <a:pPr>
-              <a:lnSpc>
-                <a:spcPts val="2728"/>
-              </a:lnSpc>
-              <a:spcAft>
-                <a:spcPts val="0"/>
-              </a:spcAft>
-              <a:defRPr sz="2200" b="1">
-                <a:solidFill>
-                  <a:srgbClr val="181817"/>
-                </a:solidFill>
-                <a:latin typeface="Arial"/>
-              </a:defRPr>
-            </a:pPr>
-            <a:r>
-              <a:t>Uloženo</a:t>
-            </a:r>
-          </a:p>
-        </p:txBody>
-      </p:sp>
-      <p:sp>
-        <p:nvSpPr>
-          <p:cNvPr id="27" name="TextBox 26"/>
-          <p:cNvSpPr txBox="1"/>
-          <p:nvPr/>
-        </p:nvSpPr>
-        <p:spPr>
-          <a:xfrm>
-            <a:off x="9296400" y="4140200"/>
-            <a:ext cx="2133600" cy="406400"/>
-          </a:xfrm>
-          <a:prstGeom prst="rect">
-            <a:avLst/>
-          </a:prstGeom>
-          <a:noFill/>
-        </p:spPr>
-        <p:txBody>
-          <a:bodyPr wrap="none" lIns="0" rIns="0" tIns="0" bIns="0">
-            <a:spAutoFit/>
-          </a:bodyPr>
-          <a:lstStyle/>
-          <a:p>
-            <a:pPr>
-              <a:lnSpc>
-                <a:spcPts val="1488"/>
-              </a:lnSpc>
-              <a:spcAft>
-                <a:spcPts val="0"/>
-              </a:spcAft>
-              <a:defRPr sz="1200" b="0">
-                <a:solidFill>
-                  <a:srgbClr val="181817"/>
-                </a:solidFill>
-                <a:latin typeface="Arial"/>
-              </a:defRPr>
-            </a:pPr>
-            <a:r>
-              <a:t>Obnovit stránku</a:t>
-            </a:r>
-          </a:p>
-        </p:txBody>
-      </p:sp>
-      <p:sp>
-        <p:nvSpPr>
-          <p:cNvPr id="28" name="TextBox 27"/>
-          <p:cNvSpPr txBox="1"/>
-          <p:nvPr/>
-        </p:nvSpPr>
-        <p:spPr>
-          <a:xfrm>
-            <a:off x="533400" y="5207000"/>
-            <a:ext cx="11125200" cy="1016000"/>
-          </a:xfrm>
-          <a:prstGeom prst="rect">
-            <a:avLst/>
-          </a:prstGeom>
-          <a:noFill/>
-        </p:spPr>
-        <p:txBody>
-          <a:bodyPr wrap="none" lIns="0" rIns="0" tIns="0" bIns="0">
-            <a:spAutoFit/>
-          </a:bodyPr>
-          <a:lstStyle/>
-          <a:p>
-            <a:pPr>
-              <a:lnSpc>
-                <a:spcPts val="2108"/>
-              </a:lnSpc>
-              <a:spcAft>
-                <a:spcPts val="0"/>
-              </a:spcAft>
-              <a:defRPr sz="1700" b="0">
-                <a:solidFill>
-                  <a:srgbClr val="181817"/>
-                </a:solidFill>
-                <a:latin typeface="Arial"/>
-              </a:defRPr>
-            </a:pPr>
-            <a:r>
-              <a:t>Zkontrolovat správný den, scénu a zachování oblíbené akce.</a:t>
-            </a:r>
-          </a:p>
-          <a:p>
-            <a:pPr>
-              <a:lnSpc>
-                <a:spcPts val="2108"/>
-              </a:lnSpc>
-              <a:spcAft>
-                <a:spcPts val="0"/>
-              </a:spcAft>
-              <a:defRPr sz="1700" b="0">
-                <a:solidFill>
-                  <a:srgbClr val="181817"/>
-                </a:solidFill>
-                <a:latin typeface="Arial"/>
-              </a:defRPr>
-            </a:pPr>
-            <a:r>
-              <a:t>Prázdný výběr má srozumitelnou cestu zpět.</a:t>
-            </a:r>
-          </a:p>
-        </p:txBody>
-      </p:sp>
-      <p:sp>
-        <p:nvSpPr>
-          <p:cNvPr id="29" name="TextBox 28"/>
-          <p:cNvSpPr txBox="1"/>
-          <p:nvPr/>
-        </p:nvSpPr>
-        <p:spPr>
-          <a:xfrm>
-            <a:off x="533400" y="6413500"/>
-            <a:ext cx="10033000" cy="181610"/>
-          </a:xfrm>
-          <a:prstGeom prst="rect">
-            <a:avLst/>
-          </a:prstGeom>
-          <a:noFill/>
-        </p:spPr>
-        <p:txBody>
-          <a:bodyPr wrap="none" lIns="0" rIns="0" tIns="0" bIns="0">
-            <a:spAutoFit/>
-          </a:bodyPr>
-          <a:lstStyle/>
-          <a:p>
-            <a:pPr>
-              <a:lnSpc>
-                <a:spcPts val="930"/>
-              </a:lnSpc>
-              <a:spcAft>
-                <a:spcPts val="0"/>
-              </a:spcAft>
-              <a:defRPr sz="750" b="0">
-                <a:solidFill>
-                  <a:srgbClr val="68635B"/>
-                </a:solidFill>
-                <a:latin typeface="Arial"/>
-              </a:defRPr>
-            </a:pPr>
-            <a:r>
-              <a:t>DODATEČNĚ PŘIPRAVENÝ PODKLAD K MILNÍKU</a:t>
-            </a:r>
-          </a:p>
-        </p:txBody>
-      </p:sp>
-      <p:sp>
-        <p:nvSpPr>
-          <p:cNvPr id="30" name="TextBox 29"/>
-          <p:cNvSpPr txBox="1"/>
-          <p:nvPr/>
-        </p:nvSpPr>
-        <p:spPr>
-          <a:xfrm>
-            <a:off x="10947400" y="6350000"/>
-            <a:ext cx="825500" cy="220979"/>
-          </a:xfrm>
-          <a:prstGeom prst="rect">
-            <a:avLst/>
-          </a:prstGeom>
-          <a:noFill/>
-        </p:spPr>
-        <p:txBody>
-          <a:bodyPr wrap="none" lIns="0" rIns="0" tIns="0" bIns="0">
-            <a:spAutoFit/>
-          </a:bodyPr>
-          <a:lstStyle/>
-          <a:p>
-            <a:pPr>
-              <a:lnSpc>
-                <a:spcPts val="1240"/>
-              </a:lnSpc>
-              <a:spcAft>
-                <a:spcPts val="0"/>
-              </a:spcAft>
-              <a:defRPr sz="1000" b="1">
-                <a:solidFill>
-                  <a:srgbClr val="68635B"/>
-                </a:solidFill>
-                <a:latin typeface="Arial"/>
-              </a:defRPr>
-            </a:pPr>
-            <a:r>
-              <a:t>03 / 04</a:t>
+              <a:t>4 / 6</a:t>
             </a:r>
           </a:p>
         </p:txBody>
@@ -7804,7 +6424,7 @@
             <a:avLst/>
           </a:prstGeom>
           <a:solidFill>
-            <a:srgbClr val="F4F0E7"/>
+            <a:srgbClr val="FFFFFF"/>
           </a:solidFill>
           <a:ln>
             <a:noFill/>
@@ -7840,8 +6460,8 @@
         </p:nvSpPr>
         <p:spPr>
           <a:xfrm>
-            <a:off x="533400" y="304800"/>
-            <a:ext cx="1905000" cy="283972"/>
+            <a:off x="711200" y="457200"/>
+            <a:ext cx="10769600" cy="228600"/>
           </a:xfrm>
           <a:prstGeom prst="rect">
             <a:avLst/>
@@ -7850,172 +6470,46 @@
         </p:spPr>
         <p:txBody>
           <a:bodyPr wrap="none" lIns="0" rIns="0" tIns="0" bIns="0">
-            <a:spAutoFit/>
+            <a:noAutofit/>
           </a:bodyPr>
           <a:lstStyle/>
           <a:p>
             <a:pPr>
               <a:lnSpc>
-                <a:spcPts val="1736"/>
+                <a:spcPts val="1534"/>
               </a:lnSpc>
               <a:spcAft>
                 <a:spcPts val="0"/>
               </a:spcAft>
-              <a:defRPr sz="1400" b="1">
+              <a:defRPr sz="1300" b="1">
                 <a:solidFill>
-                  <a:srgbClr val="181817"/>
+                  <a:srgbClr val="626773"/>
                 </a:solidFill>
                 <a:latin typeface="Arial"/>
               </a:defRPr>
             </a:pPr>
             <a:r>
-              <a:t>PRAGUE</a:t>
-            </a:r>
-          </a:p>
-        </p:txBody>
-      </p:sp>
-      <p:sp>
-        <p:nvSpPr>
-          <p:cNvPr id="4" name="TextBox 3"/>
-          <p:cNvSpPr txBox="1"/>
-          <p:nvPr/>
-        </p:nvSpPr>
-        <p:spPr>
-          <a:xfrm>
-            <a:off x="533400" y="495300"/>
-            <a:ext cx="1905000" cy="409956"/>
-          </a:xfrm>
-          <a:prstGeom prst="rect">
-            <a:avLst/>
-          </a:prstGeom>
-          <a:noFill/>
-        </p:spPr>
-        <p:txBody>
-          <a:bodyPr wrap="none" lIns="0" rIns="0" tIns="0" bIns="0">
-            <a:spAutoFit/>
-          </a:bodyPr>
-          <a:lstStyle/>
-          <a:p>
-            <a:pPr>
-              <a:lnSpc>
-                <a:spcPts val="2728"/>
-              </a:lnSpc>
-              <a:spcAft>
-                <a:spcPts val="0"/>
-              </a:spcAft>
-              <a:defRPr sz="2200" b="1">
-                <a:solidFill>
-                  <a:srgbClr val="181817"/>
-                </a:solidFill>
-                <a:latin typeface="Arial"/>
-              </a:defRPr>
-            </a:pPr>
-            <a:r>
-              <a:t>PULSE</a:t>
-            </a:r>
-          </a:p>
-        </p:txBody>
-      </p:sp>
-      <p:sp>
-        <p:nvSpPr>
-          <p:cNvPr id="5" name="TextBox 4"/>
-          <p:cNvSpPr txBox="1"/>
-          <p:nvPr/>
-        </p:nvSpPr>
-        <p:spPr>
-          <a:xfrm>
-            <a:off x="533400" y="812800"/>
-            <a:ext cx="2032000" cy="165862"/>
-          </a:xfrm>
-          <a:prstGeom prst="rect">
-            <a:avLst/>
-          </a:prstGeom>
-          <a:noFill/>
-        </p:spPr>
-        <p:txBody>
-          <a:bodyPr wrap="none" lIns="0" rIns="0" tIns="0" bIns="0">
-            <a:spAutoFit/>
-          </a:bodyPr>
-          <a:lstStyle/>
-          <a:p>
-            <a:pPr>
-              <a:lnSpc>
-                <a:spcPts val="806"/>
-              </a:lnSpc>
-              <a:spcAft>
-                <a:spcPts val="0"/>
-              </a:spcAft>
-              <a:defRPr sz="650" b="1">
-                <a:solidFill>
-                  <a:srgbClr val="181817"/>
-                </a:solidFill>
-                <a:latin typeface="Arial"/>
-              </a:defRPr>
-            </a:pPr>
-            <a:r>
-              <a:t>FEST / 2027</a:t>
-            </a:r>
-          </a:p>
-        </p:txBody>
-      </p:sp>
-      <p:sp>
-        <p:nvSpPr>
-          <p:cNvPr id="6" name="TextBox 5"/>
-          <p:cNvSpPr txBox="1"/>
-          <p:nvPr/>
-        </p:nvSpPr>
-        <p:spPr>
-          <a:xfrm>
-            <a:off x="5588000" y="533400"/>
-            <a:ext cx="6070600" cy="220979"/>
-          </a:xfrm>
-          <a:prstGeom prst="rect">
-            <a:avLst/>
-          </a:prstGeom>
-          <a:noFill/>
-        </p:spPr>
-        <p:txBody>
-          <a:bodyPr wrap="none" lIns="0" rIns="0" tIns="0" bIns="0">
-            <a:spAutoFit/>
-          </a:bodyPr>
-          <a:lstStyle/>
-          <a:p>
-            <a:pPr>
-              <a:lnSpc>
-                <a:spcPts val="1240"/>
-              </a:lnSpc>
-              <a:spcAft>
-                <a:spcPts val="0"/>
-              </a:spcAft>
-              <a:defRPr sz="1000" b="1">
-                <a:solidFill>
-                  <a:srgbClr val="68635B"/>
-                </a:solidFill>
-                <a:latin typeface="Arial"/>
-              </a:defRPr>
-            </a:pPr>
-            <a:r>
-              <a:t>ŽIVÝ PRŮCHOD HLEDÁNÍM</a:t>
-            </a:r>
-          </a:p>
-        </p:txBody>
-      </p:sp>
-      <p:sp>
-        <p:nvSpPr>
-          <p:cNvPr id="7" name="Rectangle 6"/>
+              <a:t>UKÁZKA V PROTOTYPU</a:t>
+            </a:r>
+          </a:p>
+        </p:txBody>
+      </p:sp>
+      <p:sp>
+        <p:nvSpPr>
+          <p:cNvPr id="4" name="Rectangle 3"/>
           <p:cNvSpPr/>
           <p:nvPr/>
         </p:nvSpPr>
         <p:spPr>
           <a:xfrm>
-            <a:off x="533400" y="1155700"/>
-            <a:ext cx="11125200" cy="25400"/>
+            <a:off x="711200" y="876300"/>
+            <a:ext cx="622300" cy="50800"/>
           </a:xfrm>
           <a:prstGeom prst="rect">
             <a:avLst/>
           </a:prstGeom>
           <a:solidFill>
-            <a:srgbClr val="181817"/>
+            <a:srgbClr val="E55024"/>
           </a:solidFill>
           <a:ln>
             <a:noFill/>
@@ -8045,14 +6539,14 @@
       </p:sp>
       <p:sp>
         <p:nvSpPr>
-          <p:cNvPr id="8" name="TextBox 7"/>
+          <p:cNvPr id="5" name="TextBox 4"/>
           <p:cNvSpPr txBox="1"/>
           <p:nvPr/>
         </p:nvSpPr>
         <p:spPr>
           <a:xfrm>
-            <a:off x="508000" y="1422400"/>
-            <a:ext cx="11176000" cy="1079500"/>
+            <a:off x="685800" y="1257300"/>
+            <a:ext cx="10795000" cy="1168400"/>
           </a:xfrm>
           <a:prstGeom prst="rect">
             <a:avLst/>
@@ -8061,46 +6555,592 @@
         </p:spPr>
         <p:txBody>
           <a:bodyPr wrap="none" lIns="0" rIns="0" tIns="0" bIns="0">
-            <a:spAutoFit/>
+            <a:noAutofit/>
           </a:bodyPr>
           <a:lstStyle/>
           <a:p>
             <a:pPr>
               <a:lnSpc>
-                <a:spcPts val="3740"/>
+                <a:spcPts val="4032"/>
               </a:lnSpc>
               <a:spcAft>
                 <a:spcPts val="0"/>
               </a:spcAft>
-              <a:defRPr sz="3400" b="1">
+              <a:defRPr sz="3600" b="1">
                 <a:solidFill>
-                  <a:srgbClr val="181817"/>
+                  <a:srgbClr val="191B20"/>
                 </a:solidFill>
                 <a:latin typeface="Arial"/>
               </a:defRPr>
             </a:pPr>
             <a:r>
-              <a:t>S2 / Od hledání ke koncertu.</a:t>
-            </a:r>
-          </a:p>
-        </p:txBody>
-      </p:sp>
-      <p:sp>
-        <p:nvSpPr>
-          <p:cNvPr id="9" name="Rectangle 8"/>
+              <a:t>S2: od hledání ke koncertu</a:t>
+            </a:r>
+          </a:p>
+        </p:txBody>
+      </p:sp>
+      <p:sp>
+        <p:nvSpPr>
+          <p:cNvPr id="6" name="TextBox 5"/>
+          <p:cNvSpPr txBox="1"/>
+          <p:nvPr/>
+        </p:nvSpPr>
+        <p:spPr>
+          <a:xfrm>
+            <a:off x="711200" y="2146300"/>
+            <a:ext cx="482600" cy="355600"/>
+          </a:xfrm>
+          <a:prstGeom prst="rect">
+            <a:avLst/>
+          </a:prstGeom>
+          <a:noFill/>
+        </p:spPr>
+        <p:txBody>
+          <a:bodyPr wrap="none" lIns="0" rIns="0" tIns="0" bIns="0">
+            <a:noAutofit/>
+          </a:bodyPr>
+          <a:lstStyle/>
+          <a:p>
+            <a:pPr>
+              <a:lnSpc>
+                <a:spcPts val="2713"/>
+              </a:lnSpc>
+              <a:spcAft>
+                <a:spcPts val="0"/>
+              </a:spcAft>
+              <a:defRPr sz="2300" b="1">
+                <a:solidFill>
+                  <a:srgbClr val="E55024"/>
+                </a:solidFill>
+                <a:latin typeface="Arial"/>
+              </a:defRPr>
+            </a:pPr>
+            <a:r>
+              <a:t>01</a:t>
+            </a:r>
+          </a:p>
+        </p:txBody>
+      </p:sp>
+      <p:sp>
+        <p:nvSpPr>
+          <p:cNvPr id="7" name="TextBox 6"/>
+          <p:cNvSpPr txBox="1"/>
+          <p:nvPr/>
+        </p:nvSpPr>
+        <p:spPr>
+          <a:xfrm>
+            <a:off x="1346200" y="2146300"/>
+            <a:ext cx="3479800" cy="685800"/>
+          </a:xfrm>
+          <a:prstGeom prst="rect">
+            <a:avLst/>
+          </a:prstGeom>
+          <a:noFill/>
+        </p:spPr>
+        <p:txBody>
+          <a:bodyPr wrap="none" lIns="0" rIns="0" tIns="0" bIns="0">
+            <a:noAutofit/>
+          </a:bodyPr>
+          <a:lstStyle/>
+          <a:p>
+            <a:pPr>
+              <a:lnSpc>
+                <a:spcPts val="2832"/>
+              </a:lnSpc>
+              <a:spcAft>
+                <a:spcPts val="0"/>
+              </a:spcAft>
+              <a:defRPr sz="2400" b="1">
+                <a:solidFill>
+                  <a:srgbClr val="191B20"/>
+                </a:solidFill>
+                <a:latin typeface="Arial"/>
+              </a:defRPr>
+            </a:pPr>
+            <a:r>
+              <a:t>DARKZY</a:t>
+            </a:r>
+          </a:p>
+        </p:txBody>
+      </p:sp>
+      <p:sp>
+        <p:nvSpPr>
+          <p:cNvPr id="8" name="TextBox 7"/>
+          <p:cNvSpPr txBox="1"/>
+          <p:nvPr/>
+        </p:nvSpPr>
+        <p:spPr>
+          <a:xfrm>
+            <a:off x="4965700" y="2171700"/>
+            <a:ext cx="6515100" cy="698500"/>
+          </a:xfrm>
+          <a:prstGeom prst="rect">
+            <a:avLst/>
+          </a:prstGeom>
+          <a:noFill/>
+        </p:spPr>
+        <p:txBody>
+          <a:bodyPr wrap="none" lIns="0" rIns="0" tIns="0" bIns="0">
+            <a:noAutofit/>
+          </a:bodyPr>
+          <a:lstStyle/>
+          <a:p>
+            <a:pPr>
+              <a:lnSpc>
+                <a:spcPts val="2713"/>
+              </a:lnSpc>
+              <a:spcAft>
+                <a:spcPts val="0"/>
+              </a:spcAft>
+              <a:defRPr sz="2300" b="0">
+                <a:solidFill>
+                  <a:srgbClr val="626773"/>
+                </a:solidFill>
+                <a:latin typeface="Arial"/>
+              </a:defRPr>
+            </a:pPr>
+            <a:r>
+              <a:t>Zadat dotaz</a:t>
+            </a:r>
+          </a:p>
+        </p:txBody>
+      </p:sp>
+      <p:sp>
+        <p:nvSpPr>
+          <p:cNvPr id="9" name="TextBox 8"/>
+          <p:cNvSpPr txBox="1"/>
+          <p:nvPr/>
+        </p:nvSpPr>
+        <p:spPr>
+          <a:xfrm>
+            <a:off x="711200" y="2971800"/>
+            <a:ext cx="482600" cy="355600"/>
+          </a:xfrm>
+          <a:prstGeom prst="rect">
+            <a:avLst/>
+          </a:prstGeom>
+          <a:noFill/>
+        </p:spPr>
+        <p:txBody>
+          <a:bodyPr wrap="none" lIns="0" rIns="0" tIns="0" bIns="0">
+            <a:noAutofit/>
+          </a:bodyPr>
+          <a:lstStyle/>
+          <a:p>
+            <a:pPr>
+              <a:lnSpc>
+                <a:spcPts val="2713"/>
+              </a:lnSpc>
+              <a:spcAft>
+                <a:spcPts val="0"/>
+              </a:spcAft>
+              <a:defRPr sz="2300" b="1">
+                <a:solidFill>
+                  <a:srgbClr val="E55024"/>
+                </a:solidFill>
+                <a:latin typeface="Arial"/>
+              </a:defRPr>
+            </a:pPr>
+            <a:r>
+              <a:t>02</a:t>
+            </a:r>
+          </a:p>
+        </p:txBody>
+      </p:sp>
+      <p:sp>
+        <p:nvSpPr>
+          <p:cNvPr id="10" name="TextBox 9"/>
+          <p:cNvSpPr txBox="1"/>
+          <p:nvPr/>
+        </p:nvSpPr>
+        <p:spPr>
+          <a:xfrm>
+            <a:off x="1346200" y="2971800"/>
+            <a:ext cx="3479800" cy="685800"/>
+          </a:xfrm>
+          <a:prstGeom prst="rect">
+            <a:avLst/>
+          </a:prstGeom>
+          <a:noFill/>
+        </p:spPr>
+        <p:txBody>
+          <a:bodyPr wrap="none" lIns="0" rIns="0" tIns="0" bIns="0">
+            <a:noAutofit/>
+          </a:bodyPr>
+          <a:lstStyle/>
+          <a:p>
+            <a:pPr>
+              <a:lnSpc>
+                <a:spcPts val="2832"/>
+              </a:lnSpc>
+              <a:spcAft>
+                <a:spcPts val="0"/>
+              </a:spcAft>
+              <a:defRPr sz="2400" b="1">
+                <a:solidFill>
+                  <a:srgbClr val="191B20"/>
+                </a:solidFill>
+                <a:latin typeface="Arial"/>
+              </a:defRPr>
+            </a:pPr>
+            <a:r>
+              <a:t>Výsledek</a:t>
+            </a:r>
+          </a:p>
+        </p:txBody>
+      </p:sp>
+      <p:sp>
+        <p:nvSpPr>
+          <p:cNvPr id="11" name="TextBox 10"/>
+          <p:cNvSpPr txBox="1"/>
+          <p:nvPr/>
+        </p:nvSpPr>
+        <p:spPr>
+          <a:xfrm>
+            <a:off x="4965700" y="2997200"/>
+            <a:ext cx="6515100" cy="698500"/>
+          </a:xfrm>
+          <a:prstGeom prst="rect">
+            <a:avLst/>
+          </a:prstGeom>
+          <a:noFill/>
+        </p:spPr>
+        <p:txBody>
+          <a:bodyPr wrap="none" lIns="0" rIns="0" tIns="0" bIns="0">
+            <a:noAutofit/>
+          </a:bodyPr>
+          <a:lstStyle/>
+          <a:p>
+            <a:pPr>
+              <a:lnSpc>
+                <a:spcPts val="2713"/>
+              </a:lnSpc>
+              <a:spcAft>
+                <a:spcPts val="0"/>
+              </a:spcAft>
+              <a:defRPr sz="2300" b="0">
+                <a:solidFill>
+                  <a:srgbClr val="626773"/>
+                </a:solidFill>
+                <a:latin typeface="Arial"/>
+              </a:defRPr>
+            </a:pPr>
+            <a:r>
+              <a:t>Vybrat interpreta</a:t>
+            </a:r>
+          </a:p>
+        </p:txBody>
+      </p:sp>
+      <p:sp>
+        <p:nvSpPr>
+          <p:cNvPr id="12" name="TextBox 11"/>
+          <p:cNvSpPr txBox="1"/>
+          <p:nvPr/>
+        </p:nvSpPr>
+        <p:spPr>
+          <a:xfrm>
+            <a:off x="711200" y="3797300"/>
+            <a:ext cx="482600" cy="355600"/>
+          </a:xfrm>
+          <a:prstGeom prst="rect">
+            <a:avLst/>
+          </a:prstGeom>
+          <a:noFill/>
+        </p:spPr>
+        <p:txBody>
+          <a:bodyPr wrap="none" lIns="0" rIns="0" tIns="0" bIns="0">
+            <a:noAutofit/>
+          </a:bodyPr>
+          <a:lstStyle/>
+          <a:p>
+            <a:pPr>
+              <a:lnSpc>
+                <a:spcPts val="2713"/>
+              </a:lnSpc>
+              <a:spcAft>
+                <a:spcPts val="0"/>
+              </a:spcAft>
+              <a:defRPr sz="2300" b="1">
+                <a:solidFill>
+                  <a:srgbClr val="E55024"/>
+                </a:solidFill>
+                <a:latin typeface="Arial"/>
+              </a:defRPr>
+            </a:pPr>
+            <a:r>
+              <a:t>03</a:t>
+            </a:r>
+          </a:p>
+        </p:txBody>
+      </p:sp>
+      <p:sp>
+        <p:nvSpPr>
+          <p:cNvPr id="13" name="TextBox 12"/>
+          <p:cNvSpPr txBox="1"/>
+          <p:nvPr/>
+        </p:nvSpPr>
+        <p:spPr>
+          <a:xfrm>
+            <a:off x="1346200" y="3797300"/>
+            <a:ext cx="3479800" cy="685800"/>
+          </a:xfrm>
+          <a:prstGeom prst="rect">
+            <a:avLst/>
+          </a:prstGeom>
+          <a:noFill/>
+        </p:spPr>
+        <p:txBody>
+          <a:bodyPr wrap="none" lIns="0" rIns="0" tIns="0" bIns="0">
+            <a:noAutofit/>
+          </a:bodyPr>
+          <a:lstStyle/>
+          <a:p>
+            <a:pPr>
+              <a:lnSpc>
+                <a:spcPts val="2832"/>
+              </a:lnSpc>
+              <a:spcAft>
+                <a:spcPts val="0"/>
+              </a:spcAft>
+              <a:defRPr sz="2400" b="1">
+                <a:solidFill>
+                  <a:srgbClr val="191B20"/>
+                </a:solidFill>
+                <a:latin typeface="Arial"/>
+              </a:defRPr>
+            </a:pPr>
+            <a:r>
+              <a:t>Detail</a:t>
+            </a:r>
+          </a:p>
+        </p:txBody>
+      </p:sp>
+      <p:sp>
+        <p:nvSpPr>
+          <p:cNvPr id="14" name="TextBox 13"/>
+          <p:cNvSpPr txBox="1"/>
+          <p:nvPr/>
+        </p:nvSpPr>
+        <p:spPr>
+          <a:xfrm>
+            <a:off x="4965700" y="3822700"/>
+            <a:ext cx="6515100" cy="698500"/>
+          </a:xfrm>
+          <a:prstGeom prst="rect">
+            <a:avLst/>
+          </a:prstGeom>
+          <a:noFill/>
+        </p:spPr>
+        <p:txBody>
+          <a:bodyPr wrap="none" lIns="0" rIns="0" tIns="0" bIns="0">
+            <a:noAutofit/>
+          </a:bodyPr>
+          <a:lstStyle/>
+          <a:p>
+            <a:pPr>
+              <a:lnSpc>
+                <a:spcPts val="2713"/>
+              </a:lnSpc>
+              <a:spcAft>
+                <a:spcPts val="0"/>
+              </a:spcAft>
+              <a:defRPr sz="2300" b="0">
+                <a:solidFill>
+                  <a:srgbClr val="626773"/>
+                </a:solidFill>
+                <a:latin typeface="Arial"/>
+              </a:defRPr>
+            </a:pPr>
+            <a:r>
+              <a:t>Jméno a popis</a:t>
+            </a:r>
+          </a:p>
+        </p:txBody>
+      </p:sp>
+      <p:sp>
+        <p:nvSpPr>
+          <p:cNvPr id="15" name="TextBox 14"/>
+          <p:cNvSpPr txBox="1"/>
+          <p:nvPr/>
+        </p:nvSpPr>
+        <p:spPr>
+          <a:xfrm>
+            <a:off x="711200" y="4622800"/>
+            <a:ext cx="482600" cy="355600"/>
+          </a:xfrm>
+          <a:prstGeom prst="rect">
+            <a:avLst/>
+          </a:prstGeom>
+          <a:noFill/>
+        </p:spPr>
+        <p:txBody>
+          <a:bodyPr wrap="none" lIns="0" rIns="0" tIns="0" bIns="0">
+            <a:noAutofit/>
+          </a:bodyPr>
+          <a:lstStyle/>
+          <a:p>
+            <a:pPr>
+              <a:lnSpc>
+                <a:spcPts val="2713"/>
+              </a:lnSpc>
+              <a:spcAft>
+                <a:spcPts val="0"/>
+              </a:spcAft>
+              <a:defRPr sz="2300" b="1">
+                <a:solidFill>
+                  <a:srgbClr val="E55024"/>
+                </a:solidFill>
+                <a:latin typeface="Arial"/>
+              </a:defRPr>
+            </a:pPr>
+            <a:r>
+              <a:t>04</a:t>
+            </a:r>
+          </a:p>
+        </p:txBody>
+      </p:sp>
+      <p:sp>
+        <p:nvSpPr>
+          <p:cNvPr id="16" name="TextBox 15"/>
+          <p:cNvSpPr txBox="1"/>
+          <p:nvPr/>
+        </p:nvSpPr>
+        <p:spPr>
+          <a:xfrm>
+            <a:off x="1346200" y="4622800"/>
+            <a:ext cx="3479800" cy="685800"/>
+          </a:xfrm>
+          <a:prstGeom prst="rect">
+            <a:avLst/>
+          </a:prstGeom>
+          <a:noFill/>
+        </p:spPr>
+        <p:txBody>
+          <a:bodyPr wrap="none" lIns="0" rIns="0" tIns="0" bIns="0">
+            <a:noAutofit/>
+          </a:bodyPr>
+          <a:lstStyle/>
+          <a:p>
+            <a:pPr>
+              <a:lnSpc>
+                <a:spcPts val="2832"/>
+              </a:lnSpc>
+              <a:spcAft>
+                <a:spcPts val="0"/>
+              </a:spcAft>
+              <a:defRPr sz="2400" b="1">
+                <a:solidFill>
+                  <a:srgbClr val="191B20"/>
+                </a:solidFill>
+                <a:latin typeface="Arial"/>
+              </a:defRPr>
+            </a:pPr>
+            <a:r>
+              <a:t>Koncert</a:t>
+            </a:r>
+          </a:p>
+        </p:txBody>
+      </p:sp>
+      <p:sp>
+        <p:nvSpPr>
+          <p:cNvPr id="17" name="TextBox 16"/>
+          <p:cNvSpPr txBox="1"/>
+          <p:nvPr/>
+        </p:nvSpPr>
+        <p:spPr>
+          <a:xfrm>
+            <a:off x="4965700" y="4648200"/>
+            <a:ext cx="6515100" cy="698500"/>
+          </a:xfrm>
+          <a:prstGeom prst="rect">
+            <a:avLst/>
+          </a:prstGeom>
+          <a:noFill/>
+        </p:spPr>
+        <p:txBody>
+          <a:bodyPr wrap="none" lIns="0" rIns="0" tIns="0" bIns="0">
+            <a:noAutofit/>
+          </a:bodyPr>
+          <a:lstStyle/>
+          <a:p>
+            <a:pPr>
+              <a:lnSpc>
+                <a:spcPts val="2713"/>
+              </a:lnSpc>
+              <a:spcAft>
+                <a:spcPts val="0"/>
+              </a:spcAft>
+              <a:defRPr sz="2300" b="0">
+                <a:solidFill>
+                  <a:srgbClr val="626773"/>
+                </a:solidFill>
+                <a:latin typeface="Arial"/>
+              </a:defRPr>
+            </a:pPr>
+            <a:r>
+              <a:t>Datum, čas a scéna</a:t>
+            </a:r>
+          </a:p>
+        </p:txBody>
+      </p:sp>
+      <p:sp>
+        <p:nvSpPr>
+          <p:cNvPr id="18" name="TextBox 17"/>
+          <p:cNvSpPr txBox="1"/>
+          <p:nvPr/>
+        </p:nvSpPr>
+        <p:spPr>
+          <a:xfrm>
+            <a:off x="711200" y="5473700"/>
+            <a:ext cx="10769600" cy="596900"/>
+          </a:xfrm>
+          <a:prstGeom prst="rect">
+            <a:avLst/>
+          </a:prstGeom>
+          <a:noFill/>
+        </p:spPr>
+        <p:txBody>
+          <a:bodyPr wrap="none" lIns="0" rIns="0" tIns="0" bIns="0">
+            <a:noAutofit/>
+          </a:bodyPr>
+          <a:lstStyle/>
+          <a:p>
+            <a:pPr>
+              <a:lnSpc>
+                <a:spcPts val="2124"/>
+              </a:lnSpc>
+              <a:spcAft>
+                <a:spcPts val="0"/>
+              </a:spcAft>
+              <a:defRPr sz="1800" b="0">
+                <a:solidFill>
+                  <a:srgbClr val="626773"/>
+                </a:solidFill>
+                <a:latin typeface="Arial"/>
+              </a:defRPr>
+            </a:pPr>
+            <a:r>
+              <a:t>Očekávaný výsledek: detail a program používají stejná data.</a:t>
+            </a:r>
+          </a:p>
+        </p:txBody>
+      </p:sp>
+      <p:sp>
+        <p:nvSpPr>
+          <p:cNvPr id="19" name="Rectangle 18"/>
           <p:cNvSpPr/>
           <p:nvPr/>
         </p:nvSpPr>
         <p:spPr>
           <a:xfrm>
-            <a:off x="533400" y="2946400"/>
-            <a:ext cx="2552700" cy="1765300"/>
+            <a:off x="711200" y="6248400"/>
+            <a:ext cx="10769600" cy="12700"/>
           </a:xfrm>
           <a:prstGeom prst="rect">
             <a:avLst/>
           </a:prstGeom>
           <a:solidFill>
-            <a:srgbClr val="181817"/>
+            <a:srgbClr val="DFE2E7"/>
           </a:solidFill>
           <a:ln>
             <a:noFill/>
@@ -8130,14 +7170,14 @@
       </p:sp>
       <p:sp>
         <p:nvSpPr>
-          <p:cNvPr id="10" name="TextBox 9"/>
+          <p:cNvPr id="20" name="TextBox 19"/>
           <p:cNvSpPr txBox="1"/>
           <p:nvPr/>
         </p:nvSpPr>
         <p:spPr>
           <a:xfrm>
-            <a:off x="723900" y="3162300"/>
-            <a:ext cx="2133600" cy="236728"/>
+            <a:off x="711200" y="6438900"/>
+            <a:ext cx="9652000" cy="203200"/>
           </a:xfrm>
           <a:prstGeom prst="rect">
             <a:avLst/>
@@ -8146,40 +7186,40 @@
         </p:spPr>
         <p:txBody>
           <a:bodyPr wrap="none" lIns="0" rIns="0" tIns="0" bIns="0">
-            <a:spAutoFit/>
+            <a:noAutofit/>
           </a:bodyPr>
           <a:lstStyle/>
           <a:p>
             <a:pPr>
               <a:lnSpc>
-                <a:spcPts val="1364"/>
+                <a:spcPts val="1297"/>
               </a:lnSpc>
               <a:spcAft>
                 <a:spcPts val="0"/>
               </a:spcAft>
-              <a:defRPr sz="1100" b="1">
+              <a:defRPr sz="1100" b="0">
                 <a:solidFill>
-                  <a:srgbClr val="F45E2B"/>
+                  <a:srgbClr val="626773"/>
                 </a:solidFill>
                 <a:latin typeface="Arial"/>
               </a:defRPr>
             </a:pPr>
             <a:r>
-              <a:t>01</a:t>
-            </a:r>
-          </a:p>
-        </p:txBody>
-      </p:sp>
-      <p:sp>
-        <p:nvSpPr>
-          <p:cNvPr id="11" name="TextBox 10"/>
+              <a:t>Prague Pulse Fest · Výstaviště Praha · 2027</a:t>
+            </a:r>
+          </a:p>
+        </p:txBody>
+      </p:sp>
+      <p:sp>
+        <p:nvSpPr>
+          <p:cNvPr id="21" name="TextBox 20"/>
           <p:cNvSpPr txBox="1"/>
           <p:nvPr/>
         </p:nvSpPr>
         <p:spPr>
           <a:xfrm>
-            <a:off x="723900" y="3568700"/>
-            <a:ext cx="2133600" cy="444500"/>
+            <a:off x="10807700" y="6413500"/>
+            <a:ext cx="673100" cy="215900"/>
           </a:xfrm>
           <a:prstGeom prst="rect">
             <a:avLst/>
@@ -8188,846 +7228,26 @@
         </p:spPr>
         <p:txBody>
           <a:bodyPr wrap="none" lIns="0" rIns="0" tIns="0" bIns="0">
-            <a:spAutoFit/>
+            <a:noAutofit/>
           </a:bodyPr>
           <a:lstStyle/>
           <a:p>
             <a:pPr>
               <a:lnSpc>
-                <a:spcPts val="2728"/>
-              </a:lnSpc>
-              <a:spcAft>
-                <a:spcPts val="0"/>
-              </a:spcAft>
-              <a:defRPr sz="2200" b="1">
-                <a:solidFill>
-                  <a:srgbClr val="F4F0E7"/>
-                </a:solidFill>
-                <a:latin typeface="Arial"/>
-              </a:defRPr>
-            </a:pPr>
-            <a:r>
-              <a:t>DARKZY</a:t>
-            </a:r>
-          </a:p>
-        </p:txBody>
-      </p:sp>
-      <p:sp>
-        <p:nvSpPr>
-          <p:cNvPr id="12" name="TextBox 11"/>
-          <p:cNvSpPr txBox="1"/>
-          <p:nvPr/>
-        </p:nvSpPr>
-        <p:spPr>
-          <a:xfrm>
-            <a:off x="723900" y="4140200"/>
-            <a:ext cx="2133600" cy="406400"/>
-          </a:xfrm>
-          <a:prstGeom prst="rect">
-            <a:avLst/>
-          </a:prstGeom>
-          <a:noFill/>
-        </p:spPr>
-        <p:txBody>
-          <a:bodyPr wrap="none" lIns="0" rIns="0" tIns="0" bIns="0">
-            <a:spAutoFit/>
-          </a:bodyPr>
-          <a:lstStyle/>
-          <a:p>
-            <a:pPr>
-              <a:lnSpc>
-                <a:spcPts val="1488"/>
+                <a:spcPts val="1416"/>
               </a:lnSpc>
               <a:spcAft>
                 <a:spcPts val="0"/>
               </a:spcAft>
               <a:defRPr sz="1200" b="0">
                 <a:solidFill>
-                  <a:srgbClr val="F4F0E7"/>
+                  <a:srgbClr val="626773"/>
                 </a:solidFill>
                 <a:latin typeface="Arial"/>
               </a:defRPr>
             </a:pPr>
             <a:r>
-              <a:t>Zadat dotaz</a:t>
-            </a:r>
-          </a:p>
-        </p:txBody>
-      </p:sp>
-      <p:sp>
-        <p:nvSpPr>
-          <p:cNvPr id="13" name="TextBox 12"/>
-          <p:cNvSpPr txBox="1"/>
-          <p:nvPr/>
-        </p:nvSpPr>
-        <p:spPr>
-          <a:xfrm>
-            <a:off x="3098800" y="3657600"/>
-            <a:ext cx="292100" cy="394208"/>
-          </a:xfrm>
-          <a:prstGeom prst="rect">
-            <a:avLst/>
-          </a:prstGeom>
-          <a:noFill/>
-        </p:spPr>
-        <p:txBody>
-          <a:bodyPr wrap="none" lIns="0" rIns="0" tIns="0" bIns="0">
-            <a:spAutoFit/>
-          </a:bodyPr>
-          <a:lstStyle/>
-          <a:p>
-            <a:pPr>
-              <a:lnSpc>
-                <a:spcPts val="2604"/>
-              </a:lnSpc>
-              <a:spcAft>
-                <a:spcPts val="0"/>
-              </a:spcAft>
-              <a:defRPr sz="2100" b="1">
-                <a:solidFill>
-                  <a:srgbClr val="181817"/>
-                </a:solidFill>
-                <a:latin typeface="Arial"/>
-              </a:defRPr>
-            </a:pPr>
-            <a:r>
-              <a:t>›</a:t>
-            </a:r>
-          </a:p>
-        </p:txBody>
-      </p:sp>
-      <p:sp>
-        <p:nvSpPr>
-          <p:cNvPr id="14" name="Rectangle 13"/>
-          <p:cNvSpPr/>
-          <p:nvPr/>
-        </p:nvSpPr>
-        <p:spPr>
-          <a:xfrm>
-            <a:off x="3390900" y="2946400"/>
-            <a:ext cx="2552700" cy="1765300"/>
-          </a:xfrm>
-          <a:prstGeom prst="rect">
-            <a:avLst/>
-          </a:prstGeom>
-          <a:solidFill>
-            <a:srgbClr val="E7E0D5"/>
-          </a:solidFill>
-          <a:ln>
-            <a:noFill/>
-          </a:ln>
-        </p:spPr>
-        <p:style>
-          <a:lnRef idx="1">
-            <a:schemeClr val="accent1"/>
-          </a:lnRef>
-          <a:fillRef idx="3">
-            <a:schemeClr val="accent1"/>
-          </a:fillRef>
-          <a:effectRef idx="2">
-            <a:schemeClr val="accent1"/>
-          </a:effectRef>
-          <a:fontRef idx="minor">
-            <a:schemeClr val="lt1"/>
-          </a:fontRef>
-        </p:style>
-        <p:txBody>
-          <a:bodyPr rtlCol="0" anchor="ctr"/>
-          <a:lstStyle/>
-          <a:p>
-            <a:pPr algn="ctr"/>
-          </a:p>
-        </p:txBody>
-      </p:sp>
-      <p:sp>
-        <p:nvSpPr>
-          <p:cNvPr id="15" name="TextBox 14"/>
-          <p:cNvSpPr txBox="1"/>
-          <p:nvPr/>
-        </p:nvSpPr>
-        <p:spPr>
-          <a:xfrm>
-            <a:off x="3581400" y="3162300"/>
-            <a:ext cx="2133600" cy="236728"/>
-          </a:xfrm>
-          <a:prstGeom prst="rect">
-            <a:avLst/>
-          </a:prstGeom>
-          <a:noFill/>
-        </p:spPr>
-        <p:txBody>
-          <a:bodyPr wrap="none" lIns="0" rIns="0" tIns="0" bIns="0">
-            <a:spAutoFit/>
-          </a:bodyPr>
-          <a:lstStyle/>
-          <a:p>
-            <a:pPr>
-              <a:lnSpc>
-                <a:spcPts val="1364"/>
-              </a:lnSpc>
-              <a:spcAft>
-                <a:spcPts val="0"/>
-              </a:spcAft>
-              <a:defRPr sz="1100" b="1">
-                <a:solidFill>
-                  <a:srgbClr val="F45E2B"/>
-                </a:solidFill>
-                <a:latin typeface="Arial"/>
-              </a:defRPr>
-            </a:pPr>
-            <a:r>
-              <a:t>02</a:t>
-            </a:r>
-          </a:p>
-        </p:txBody>
-      </p:sp>
-      <p:sp>
-        <p:nvSpPr>
-          <p:cNvPr id="16" name="TextBox 15"/>
-          <p:cNvSpPr txBox="1"/>
-          <p:nvPr/>
-        </p:nvSpPr>
-        <p:spPr>
-          <a:xfrm>
-            <a:off x="3581400" y="3568700"/>
-            <a:ext cx="2133600" cy="444500"/>
-          </a:xfrm>
-          <a:prstGeom prst="rect">
-            <a:avLst/>
-          </a:prstGeom>
-          <a:noFill/>
-        </p:spPr>
-        <p:txBody>
-          <a:bodyPr wrap="none" lIns="0" rIns="0" tIns="0" bIns="0">
-            <a:spAutoFit/>
-          </a:bodyPr>
-          <a:lstStyle/>
-          <a:p>
-            <a:pPr>
-              <a:lnSpc>
-                <a:spcPts val="2728"/>
-              </a:lnSpc>
-              <a:spcAft>
-                <a:spcPts val="0"/>
-              </a:spcAft>
-              <a:defRPr sz="2200" b="1">
-                <a:solidFill>
-                  <a:srgbClr val="181817"/>
-                </a:solidFill>
-                <a:latin typeface="Arial"/>
-              </a:defRPr>
-            </a:pPr>
-            <a:r>
-              <a:t>Výsledky</a:t>
-            </a:r>
-          </a:p>
-        </p:txBody>
-      </p:sp>
-      <p:sp>
-        <p:nvSpPr>
-          <p:cNvPr id="17" name="TextBox 16"/>
-          <p:cNvSpPr txBox="1"/>
-          <p:nvPr/>
-        </p:nvSpPr>
-        <p:spPr>
-          <a:xfrm>
-            <a:off x="3581400" y="4140200"/>
-            <a:ext cx="2133600" cy="406400"/>
-          </a:xfrm>
-          <a:prstGeom prst="rect">
-            <a:avLst/>
-          </a:prstGeom>
-          <a:noFill/>
-        </p:spPr>
-        <p:txBody>
-          <a:bodyPr wrap="none" lIns="0" rIns="0" tIns="0" bIns="0">
-            <a:spAutoFit/>
-          </a:bodyPr>
-          <a:lstStyle/>
-          <a:p>
-            <a:pPr>
-              <a:lnSpc>
-                <a:spcPts val="1488"/>
-              </a:lnSpc>
-              <a:spcAft>
-                <a:spcPts val="0"/>
-              </a:spcAft>
-              <a:defRPr sz="1200" b="0">
-                <a:solidFill>
-                  <a:srgbClr val="181817"/>
-                </a:solidFill>
-                <a:latin typeface="Arial"/>
-              </a:defRPr>
-            </a:pPr>
-            <a:r>
-              <a:t>Najít interpreta</a:t>
-            </a:r>
-          </a:p>
-        </p:txBody>
-      </p:sp>
-      <p:sp>
-        <p:nvSpPr>
-          <p:cNvPr id="18" name="TextBox 17"/>
-          <p:cNvSpPr txBox="1"/>
-          <p:nvPr/>
-        </p:nvSpPr>
-        <p:spPr>
-          <a:xfrm>
-            <a:off x="5956300" y="3657600"/>
-            <a:ext cx="292100" cy="394208"/>
-          </a:xfrm>
-          <a:prstGeom prst="rect">
-            <a:avLst/>
-          </a:prstGeom>
-          <a:noFill/>
-        </p:spPr>
-        <p:txBody>
-          <a:bodyPr wrap="none" lIns="0" rIns="0" tIns="0" bIns="0">
-            <a:spAutoFit/>
-          </a:bodyPr>
-          <a:lstStyle/>
-          <a:p>
-            <a:pPr>
-              <a:lnSpc>
-                <a:spcPts val="2604"/>
-              </a:lnSpc>
-              <a:spcAft>
-                <a:spcPts val="0"/>
-              </a:spcAft>
-              <a:defRPr sz="2100" b="1">
-                <a:solidFill>
-                  <a:srgbClr val="181817"/>
-                </a:solidFill>
-                <a:latin typeface="Arial"/>
-              </a:defRPr>
-            </a:pPr>
-            <a:r>
-              <a:t>›</a:t>
-            </a:r>
-          </a:p>
-        </p:txBody>
-      </p:sp>
-      <p:sp>
-        <p:nvSpPr>
-          <p:cNvPr id="19" name="Rectangle 18"/>
-          <p:cNvSpPr/>
-          <p:nvPr/>
-        </p:nvSpPr>
-        <p:spPr>
-          <a:xfrm>
-            <a:off x="6248400" y="2946400"/>
-            <a:ext cx="2552700" cy="1765300"/>
-          </a:xfrm>
-          <a:prstGeom prst="rect">
-            <a:avLst/>
-          </a:prstGeom>
-          <a:solidFill>
-            <a:srgbClr val="E7E0D5"/>
-          </a:solidFill>
-          <a:ln>
-            <a:noFill/>
-          </a:ln>
-        </p:spPr>
-        <p:style>
-          <a:lnRef idx="1">
-            <a:schemeClr val="accent1"/>
-          </a:lnRef>
-          <a:fillRef idx="3">
-            <a:schemeClr val="accent1"/>
-          </a:fillRef>
-          <a:effectRef idx="2">
-            <a:schemeClr val="accent1"/>
-          </a:effectRef>
-          <a:fontRef idx="minor">
-            <a:schemeClr val="lt1"/>
-          </a:fontRef>
-        </p:style>
-        <p:txBody>
-          <a:bodyPr rtlCol="0" anchor="ctr"/>
-          <a:lstStyle/>
-          <a:p>
-            <a:pPr algn="ctr"/>
-          </a:p>
-        </p:txBody>
-      </p:sp>
-      <p:sp>
-        <p:nvSpPr>
-          <p:cNvPr id="20" name="TextBox 19"/>
-          <p:cNvSpPr txBox="1"/>
-          <p:nvPr/>
-        </p:nvSpPr>
-        <p:spPr>
-          <a:xfrm>
-            <a:off x="6438900" y="3162300"/>
-            <a:ext cx="2133600" cy="236728"/>
-          </a:xfrm>
-          <a:prstGeom prst="rect">
-            <a:avLst/>
-          </a:prstGeom>
-          <a:noFill/>
-        </p:spPr>
-        <p:txBody>
-          <a:bodyPr wrap="none" lIns="0" rIns="0" tIns="0" bIns="0">
-            <a:spAutoFit/>
-          </a:bodyPr>
-          <a:lstStyle/>
-          <a:p>
-            <a:pPr>
-              <a:lnSpc>
-                <a:spcPts val="1364"/>
-              </a:lnSpc>
-              <a:spcAft>
-                <a:spcPts val="0"/>
-              </a:spcAft>
-              <a:defRPr sz="1100" b="1">
-                <a:solidFill>
-                  <a:srgbClr val="F45E2B"/>
-                </a:solidFill>
-                <a:latin typeface="Arial"/>
-              </a:defRPr>
-            </a:pPr>
-            <a:r>
-              <a:t>03</a:t>
-            </a:r>
-          </a:p>
-        </p:txBody>
-      </p:sp>
-      <p:sp>
-        <p:nvSpPr>
-          <p:cNvPr id="21" name="TextBox 20"/>
-          <p:cNvSpPr txBox="1"/>
-          <p:nvPr/>
-        </p:nvSpPr>
-        <p:spPr>
-          <a:xfrm>
-            <a:off x="6438900" y="3568700"/>
-            <a:ext cx="2133600" cy="444500"/>
-          </a:xfrm>
-          <a:prstGeom prst="rect">
-            <a:avLst/>
-          </a:prstGeom>
-          <a:noFill/>
-        </p:spPr>
-        <p:txBody>
-          <a:bodyPr wrap="none" lIns="0" rIns="0" tIns="0" bIns="0">
-            <a:spAutoFit/>
-          </a:bodyPr>
-          <a:lstStyle/>
-          <a:p>
-            <a:pPr>
-              <a:lnSpc>
-                <a:spcPts val="2728"/>
-              </a:lnSpc>
-              <a:spcAft>
-                <a:spcPts val="0"/>
-              </a:spcAft>
-              <a:defRPr sz="2200" b="1">
-                <a:solidFill>
-                  <a:srgbClr val="181817"/>
-                </a:solidFill>
-                <a:latin typeface="Arial"/>
-              </a:defRPr>
-            </a:pPr>
-            <a:r>
-              <a:t>DARKZY</a:t>
-            </a:r>
-          </a:p>
-        </p:txBody>
-      </p:sp>
-      <p:sp>
-        <p:nvSpPr>
-          <p:cNvPr id="22" name="TextBox 21"/>
-          <p:cNvSpPr txBox="1"/>
-          <p:nvPr/>
-        </p:nvSpPr>
-        <p:spPr>
-          <a:xfrm>
-            <a:off x="6438900" y="4140200"/>
-            <a:ext cx="2133600" cy="406400"/>
-          </a:xfrm>
-          <a:prstGeom prst="rect">
-            <a:avLst/>
-          </a:prstGeom>
-          <a:noFill/>
-        </p:spPr>
-        <p:txBody>
-          <a:bodyPr wrap="none" lIns="0" rIns="0" tIns="0" bIns="0">
-            <a:spAutoFit/>
-          </a:bodyPr>
-          <a:lstStyle/>
-          <a:p>
-            <a:pPr>
-              <a:lnSpc>
-                <a:spcPts val="1488"/>
-              </a:lnSpc>
-              <a:spcAft>
-                <a:spcPts val="0"/>
-              </a:spcAft>
-              <a:defRPr sz="1200" b="0">
-                <a:solidFill>
-                  <a:srgbClr val="181817"/>
-                </a:solidFill>
-                <a:latin typeface="Arial"/>
-              </a:defRPr>
-            </a:pPr>
-            <a:r>
-              <a:t>Otevřít detail</a:t>
-            </a:r>
-          </a:p>
-        </p:txBody>
-      </p:sp>
-      <p:sp>
-        <p:nvSpPr>
-          <p:cNvPr id="23" name="TextBox 22"/>
-          <p:cNvSpPr txBox="1"/>
-          <p:nvPr/>
-        </p:nvSpPr>
-        <p:spPr>
-          <a:xfrm>
-            <a:off x="8813800" y="3657600"/>
-            <a:ext cx="292100" cy="394208"/>
-          </a:xfrm>
-          <a:prstGeom prst="rect">
-            <a:avLst/>
-          </a:prstGeom>
-          <a:noFill/>
-        </p:spPr>
-        <p:txBody>
-          <a:bodyPr wrap="none" lIns="0" rIns="0" tIns="0" bIns="0">
-            <a:spAutoFit/>
-          </a:bodyPr>
-          <a:lstStyle/>
-          <a:p>
-            <a:pPr>
-              <a:lnSpc>
-                <a:spcPts val="2604"/>
-              </a:lnSpc>
-              <a:spcAft>
-                <a:spcPts val="0"/>
-              </a:spcAft>
-              <a:defRPr sz="2100" b="1">
-                <a:solidFill>
-                  <a:srgbClr val="181817"/>
-                </a:solidFill>
-                <a:latin typeface="Arial"/>
-              </a:defRPr>
-            </a:pPr>
-            <a:r>
-              <a:t>›</a:t>
-            </a:r>
-          </a:p>
-        </p:txBody>
-      </p:sp>
-      <p:sp>
-        <p:nvSpPr>
-          <p:cNvPr id="24" name="Rectangle 23"/>
-          <p:cNvSpPr/>
-          <p:nvPr/>
-        </p:nvSpPr>
-        <p:spPr>
-          <a:xfrm>
-            <a:off x="9105900" y="2946400"/>
-            <a:ext cx="2552700" cy="1765300"/>
-          </a:xfrm>
-          <a:prstGeom prst="rect">
-            <a:avLst/>
-          </a:prstGeom>
-          <a:solidFill>
-            <a:srgbClr val="E7E0D5"/>
-          </a:solidFill>
-          <a:ln>
-            <a:noFill/>
-          </a:ln>
-        </p:spPr>
-        <p:style>
-          <a:lnRef idx="1">
-            <a:schemeClr val="accent1"/>
-          </a:lnRef>
-          <a:fillRef idx="3">
-            <a:schemeClr val="accent1"/>
-          </a:fillRef>
-          <a:effectRef idx="2">
-            <a:schemeClr val="accent1"/>
-          </a:effectRef>
-          <a:fontRef idx="minor">
-            <a:schemeClr val="lt1"/>
-          </a:fontRef>
-        </p:style>
-        <p:txBody>
-          <a:bodyPr rtlCol="0" anchor="ctr"/>
-          <a:lstStyle/>
-          <a:p>
-            <a:pPr algn="ctr"/>
-          </a:p>
-        </p:txBody>
-      </p:sp>
-      <p:sp>
-        <p:nvSpPr>
-          <p:cNvPr id="25" name="TextBox 24"/>
-          <p:cNvSpPr txBox="1"/>
-          <p:nvPr/>
-        </p:nvSpPr>
-        <p:spPr>
-          <a:xfrm>
-            <a:off x="9296400" y="3162300"/>
-            <a:ext cx="2133600" cy="236728"/>
-          </a:xfrm>
-          <a:prstGeom prst="rect">
-            <a:avLst/>
-          </a:prstGeom>
-          <a:noFill/>
-        </p:spPr>
-        <p:txBody>
-          <a:bodyPr wrap="none" lIns="0" rIns="0" tIns="0" bIns="0">
-            <a:spAutoFit/>
-          </a:bodyPr>
-          <a:lstStyle/>
-          <a:p>
-            <a:pPr>
-              <a:lnSpc>
-                <a:spcPts val="1364"/>
-              </a:lnSpc>
-              <a:spcAft>
-                <a:spcPts val="0"/>
-              </a:spcAft>
-              <a:defRPr sz="1100" b="1">
-                <a:solidFill>
-                  <a:srgbClr val="F45E2B"/>
-                </a:solidFill>
-                <a:latin typeface="Arial"/>
-              </a:defRPr>
-            </a:pPr>
-            <a:r>
-              <a:t>04</a:t>
-            </a:r>
-          </a:p>
-        </p:txBody>
-      </p:sp>
-      <p:sp>
-        <p:nvSpPr>
-          <p:cNvPr id="26" name="TextBox 25"/>
-          <p:cNvSpPr txBox="1"/>
-          <p:nvPr/>
-        </p:nvSpPr>
-        <p:spPr>
-          <a:xfrm>
-            <a:off x="9296400" y="3568700"/>
-            <a:ext cx="2133600" cy="444500"/>
-          </a:xfrm>
-          <a:prstGeom prst="rect">
-            <a:avLst/>
-          </a:prstGeom>
-          <a:noFill/>
-        </p:spPr>
-        <p:txBody>
-          <a:bodyPr wrap="none" lIns="0" rIns="0" tIns="0" bIns="0">
-            <a:spAutoFit/>
-          </a:bodyPr>
-          <a:lstStyle/>
-          <a:p>
-            <a:pPr>
-              <a:lnSpc>
-                <a:spcPts val="2728"/>
-              </a:lnSpc>
-              <a:spcAft>
-                <a:spcPts val="0"/>
-              </a:spcAft>
-              <a:defRPr sz="2200" b="1">
-                <a:solidFill>
-                  <a:srgbClr val="181817"/>
-                </a:solidFill>
-                <a:latin typeface="Arial"/>
-              </a:defRPr>
-            </a:pPr>
-            <a:r>
-              <a:t>Program</a:t>
-            </a:r>
-          </a:p>
-        </p:txBody>
-      </p:sp>
-      <p:sp>
-        <p:nvSpPr>
-          <p:cNvPr id="27" name="TextBox 26"/>
-          <p:cNvSpPr txBox="1"/>
-          <p:nvPr/>
-        </p:nvSpPr>
-        <p:spPr>
-          <a:xfrm>
-            <a:off x="9296400" y="4140200"/>
-            <a:ext cx="2133600" cy="406400"/>
-          </a:xfrm>
-          <a:prstGeom prst="rect">
-            <a:avLst/>
-          </a:prstGeom>
-          <a:noFill/>
-        </p:spPr>
-        <p:txBody>
-          <a:bodyPr wrap="none" lIns="0" rIns="0" tIns="0" bIns="0">
-            <a:spAutoFit/>
-          </a:bodyPr>
-          <a:lstStyle/>
-          <a:p>
-            <a:pPr>
-              <a:lnSpc>
-                <a:spcPts val="1488"/>
-              </a:lnSpc>
-              <a:spcAft>
-                <a:spcPts val="0"/>
-              </a:spcAft>
-              <a:defRPr sz="1200" b="0">
-                <a:solidFill>
-                  <a:srgbClr val="181817"/>
-                </a:solidFill>
-                <a:latin typeface="Arial"/>
-              </a:defRPr>
-            </a:pPr>
-            <a:r>
-              <a:t>Zjistit čas</a:t>
-            </a:r>
-          </a:p>
-        </p:txBody>
-      </p:sp>
-      <p:sp>
-        <p:nvSpPr>
-          <p:cNvPr id="28" name="TextBox 27"/>
-          <p:cNvSpPr txBox="1"/>
-          <p:nvPr/>
-        </p:nvSpPr>
-        <p:spPr>
-          <a:xfrm>
-            <a:off x="533400" y="5207000"/>
-            <a:ext cx="11125200" cy="1016000"/>
-          </a:xfrm>
-          <a:prstGeom prst="rect">
-            <a:avLst/>
-          </a:prstGeom>
-          <a:noFill/>
-        </p:spPr>
-        <p:txBody>
-          <a:bodyPr wrap="none" lIns="0" rIns="0" tIns="0" bIns="0">
-            <a:spAutoFit/>
-          </a:bodyPr>
-          <a:lstStyle/>
-          <a:p>
-            <a:pPr>
-              <a:lnSpc>
-                <a:spcPts val="2108"/>
-              </a:lnSpc>
-              <a:spcAft>
-                <a:spcPts val="0"/>
-              </a:spcAft>
-              <a:defRPr sz="1700" b="0">
-                <a:solidFill>
-                  <a:srgbClr val="181817"/>
-                </a:solidFill>
-                <a:latin typeface="Arial"/>
-              </a:defRPr>
-            </a:pPr>
-            <a:r>
-              <a:t>Hledaný text se zobrazuje jako text.</a:t>
-            </a:r>
-          </a:p>
-          <a:p>
-            <a:pPr>
-              <a:lnSpc>
-                <a:spcPts val="2108"/>
-              </a:lnSpc>
-              <a:spcAft>
-                <a:spcPts val="0"/>
-              </a:spcAft>
-              <a:defRPr sz="1700" b="0">
-                <a:solidFill>
-                  <a:srgbClr val="181817"/>
-                </a:solidFill>
-                <a:latin typeface="Arial"/>
-              </a:defRPr>
-            </a:pPr>
-            <a:r>
-              <a:t>Detail a vystoupení používají stejné datové vazby.</a:t>
-            </a:r>
-          </a:p>
-        </p:txBody>
-      </p:sp>
-      <p:sp>
-        <p:nvSpPr>
-          <p:cNvPr id="29" name="TextBox 28"/>
-          <p:cNvSpPr txBox="1"/>
-          <p:nvPr/>
-        </p:nvSpPr>
-        <p:spPr>
-          <a:xfrm>
-            <a:off x="533400" y="6413500"/>
-            <a:ext cx="10033000" cy="181610"/>
-          </a:xfrm>
-          <a:prstGeom prst="rect">
-            <a:avLst/>
-          </a:prstGeom>
-          <a:noFill/>
-        </p:spPr>
-        <p:txBody>
-          <a:bodyPr wrap="none" lIns="0" rIns="0" tIns="0" bIns="0">
-            <a:spAutoFit/>
-          </a:bodyPr>
-          <a:lstStyle/>
-          <a:p>
-            <a:pPr>
-              <a:lnSpc>
-                <a:spcPts val="930"/>
-              </a:lnSpc>
-              <a:spcAft>
-                <a:spcPts val="0"/>
-              </a:spcAft>
-              <a:defRPr sz="750" b="0">
-                <a:solidFill>
-                  <a:srgbClr val="68635B"/>
-                </a:solidFill>
-                <a:latin typeface="Arial"/>
-              </a:defRPr>
-            </a:pPr>
-            <a:r>
-              <a:t>DODATEČNĚ PŘIPRAVENÝ PODKLAD K MILNÍKU</a:t>
-            </a:r>
-          </a:p>
-        </p:txBody>
-      </p:sp>
-      <p:sp>
-        <p:nvSpPr>
-          <p:cNvPr id="30" name="TextBox 29"/>
-          <p:cNvSpPr txBox="1"/>
-          <p:nvPr/>
-        </p:nvSpPr>
-        <p:spPr>
-          <a:xfrm>
-            <a:off x="10947400" y="6350000"/>
-            <a:ext cx="825500" cy="220979"/>
-          </a:xfrm>
-          <a:prstGeom prst="rect">
-            <a:avLst/>
-          </a:prstGeom>
-          <a:noFill/>
-        </p:spPr>
-        <p:txBody>
-          <a:bodyPr wrap="none" lIns="0" rIns="0" tIns="0" bIns="0">
-            <a:spAutoFit/>
-          </a:bodyPr>
-          <a:lstStyle/>
-          <a:p>
-            <a:pPr>
-              <a:lnSpc>
-                <a:spcPts val="1240"/>
-              </a:lnSpc>
-              <a:spcAft>
-                <a:spcPts val="0"/>
-              </a:spcAft>
-              <a:defRPr sz="1000" b="1">
-                <a:solidFill>
-                  <a:srgbClr val="68635B"/>
-                </a:solidFill>
-                <a:latin typeface="Arial"/>
-              </a:defRPr>
-            </a:pPr>
-            <a:r>
-              <a:t>03 / 05</a:t>
+              <a:t>5 / 6</a:t>
             </a:r>
           </a:p>
         </p:txBody>
@@ -9065,7 +7285,7 @@
             <a:avLst/>
           </a:prstGeom>
           <a:solidFill>
-            <a:srgbClr val="F4F0E7"/>
+            <a:srgbClr val="FFFFFF"/>
           </a:solidFill>
           <a:ln>
             <a:noFill/>
@@ -9101,8 +7321,8 @@
         </p:nvSpPr>
         <p:spPr>
           <a:xfrm>
-            <a:off x="533400" y="304800"/>
-            <a:ext cx="1905000" cy="283972"/>
+            <a:off x="711200" y="457200"/>
+            <a:ext cx="10769600" cy="228600"/>
           </a:xfrm>
           <a:prstGeom prst="rect">
             <a:avLst/>
@@ -9111,172 +7331,46 @@
         </p:spPr>
         <p:txBody>
           <a:bodyPr wrap="none" lIns="0" rIns="0" tIns="0" bIns="0">
-            <a:spAutoFit/>
+            <a:noAutofit/>
           </a:bodyPr>
           <a:lstStyle/>
           <a:p>
             <a:pPr>
               <a:lnSpc>
-                <a:spcPts val="1736"/>
+                <a:spcPts val="1534"/>
               </a:lnSpc>
               <a:spcAft>
                 <a:spcPts val="0"/>
               </a:spcAft>
-              <a:defRPr sz="1400" b="1">
+              <a:defRPr sz="1300" b="1">
                 <a:solidFill>
-                  <a:srgbClr val="181817"/>
+                  <a:srgbClr val="626773"/>
                 </a:solidFill>
                 <a:latin typeface="Arial"/>
               </a:defRPr>
             </a:pPr>
             <a:r>
-              <a:t>PRAGUE</a:t>
-            </a:r>
-          </a:p>
-        </p:txBody>
-      </p:sp>
-      <p:sp>
-        <p:nvSpPr>
-          <p:cNvPr id="4" name="TextBox 3"/>
-          <p:cNvSpPr txBox="1"/>
-          <p:nvPr/>
-        </p:nvSpPr>
-        <p:spPr>
-          <a:xfrm>
-            <a:off x="533400" y="495300"/>
-            <a:ext cx="1905000" cy="409956"/>
-          </a:xfrm>
-          <a:prstGeom prst="rect">
-            <a:avLst/>
-          </a:prstGeom>
-          <a:noFill/>
-        </p:spPr>
-        <p:txBody>
-          <a:bodyPr wrap="none" lIns="0" rIns="0" tIns="0" bIns="0">
-            <a:spAutoFit/>
-          </a:bodyPr>
-          <a:lstStyle/>
-          <a:p>
-            <a:pPr>
-              <a:lnSpc>
-                <a:spcPts val="2728"/>
-              </a:lnSpc>
-              <a:spcAft>
-                <a:spcPts val="0"/>
-              </a:spcAft>
-              <a:defRPr sz="2200" b="1">
-                <a:solidFill>
-                  <a:srgbClr val="181817"/>
-                </a:solidFill>
-                <a:latin typeface="Arial"/>
-              </a:defRPr>
-            </a:pPr>
-            <a:r>
-              <a:t>PULSE</a:t>
-            </a:r>
-          </a:p>
-        </p:txBody>
-      </p:sp>
-      <p:sp>
-        <p:nvSpPr>
-          <p:cNvPr id="5" name="TextBox 4"/>
-          <p:cNvSpPr txBox="1"/>
-          <p:nvPr/>
-        </p:nvSpPr>
-        <p:spPr>
-          <a:xfrm>
-            <a:off x="533400" y="812800"/>
-            <a:ext cx="2032000" cy="165862"/>
-          </a:xfrm>
-          <a:prstGeom prst="rect">
-            <a:avLst/>
-          </a:prstGeom>
-          <a:noFill/>
-        </p:spPr>
-        <p:txBody>
-          <a:bodyPr wrap="none" lIns="0" rIns="0" tIns="0" bIns="0">
-            <a:spAutoFit/>
-          </a:bodyPr>
-          <a:lstStyle/>
-          <a:p>
-            <a:pPr>
-              <a:lnSpc>
-                <a:spcPts val="806"/>
-              </a:lnSpc>
-              <a:spcAft>
-                <a:spcPts val="0"/>
-              </a:spcAft>
-              <a:defRPr sz="650" b="1">
-                <a:solidFill>
-                  <a:srgbClr val="181817"/>
-                </a:solidFill>
-                <a:latin typeface="Arial"/>
-              </a:defRPr>
-            </a:pPr>
-            <a:r>
-              <a:t>FEST / 2027</a:t>
-            </a:r>
-          </a:p>
-        </p:txBody>
-      </p:sp>
-      <p:sp>
-        <p:nvSpPr>
-          <p:cNvPr id="6" name="TextBox 5"/>
-          <p:cNvSpPr txBox="1"/>
-          <p:nvPr/>
-        </p:nvSpPr>
-        <p:spPr>
-          <a:xfrm>
-            <a:off x="5588000" y="533400"/>
-            <a:ext cx="6070600" cy="220979"/>
-          </a:xfrm>
-          <a:prstGeom prst="rect">
-            <a:avLst/>
-          </a:prstGeom>
-          <a:noFill/>
-        </p:spPr>
-        <p:txBody>
-          <a:bodyPr wrap="none" lIns="0" rIns="0" tIns="0" bIns="0">
-            <a:spAutoFit/>
-          </a:bodyPr>
-          <a:lstStyle/>
-          <a:p>
-            <a:pPr>
-              <a:lnSpc>
-                <a:spcPts val="1240"/>
-              </a:lnSpc>
-              <a:spcAft>
-                <a:spcPts val="0"/>
-              </a:spcAft>
-              <a:defRPr sz="1000" b="1">
-                <a:solidFill>
-                  <a:srgbClr val="68635B"/>
-                </a:solidFill>
-                <a:latin typeface="Arial"/>
-              </a:defRPr>
-            </a:pPr>
-            <a:r>
-              <a:t>AI / VALIDACE / DALŠÍ KROK</a:t>
-            </a:r>
-          </a:p>
-        </p:txBody>
-      </p:sp>
-      <p:sp>
-        <p:nvSpPr>
-          <p:cNvPr id="7" name="Rectangle 6"/>
+              <a:t>PŘIJATO, UPRAVENO, ZKONTROLOVÁNO</a:t>
+            </a:r>
+          </a:p>
+        </p:txBody>
+      </p:sp>
+      <p:sp>
+        <p:nvSpPr>
+          <p:cNvPr id="4" name="Rectangle 3"/>
           <p:cNvSpPr/>
           <p:nvPr/>
         </p:nvSpPr>
         <p:spPr>
           <a:xfrm>
-            <a:off x="533400" y="1155700"/>
-            <a:ext cx="11125200" cy="25400"/>
+            <a:off x="711200" y="876300"/>
+            <a:ext cx="622300" cy="50800"/>
           </a:xfrm>
           <a:prstGeom prst="rect">
             <a:avLst/>
           </a:prstGeom>
           <a:solidFill>
-            <a:srgbClr val="181817"/>
+            <a:srgbClr val="E55024"/>
           </a:solidFill>
           <a:ln>
             <a:noFill/>
@@ -9306,14 +7400,14 @@
       </p:sp>
       <p:sp>
         <p:nvSpPr>
-          <p:cNvPr id="8" name="TextBox 7"/>
+          <p:cNvPr id="5" name="TextBox 4"/>
           <p:cNvSpPr txBox="1"/>
           <p:nvPr/>
         </p:nvSpPr>
         <p:spPr>
           <a:xfrm>
-            <a:off x="508000" y="1422400"/>
-            <a:ext cx="11176000" cy="1079500"/>
+            <a:off x="685800" y="1257300"/>
+            <a:ext cx="10795000" cy="1168400"/>
           </a:xfrm>
           <a:prstGeom prst="rect">
             <a:avLst/>
@@ -9322,46 +7416,46 @@
         </p:spPr>
         <p:txBody>
           <a:bodyPr wrap="none" lIns="0" rIns="0" tIns="0" bIns="0">
-            <a:spAutoFit/>
+            <a:noAutofit/>
           </a:bodyPr>
           <a:lstStyle/>
           <a:p>
             <a:pPr>
               <a:lnSpc>
-                <a:spcPts val="3740"/>
+                <a:spcPts val="4032"/>
               </a:lnSpc>
               <a:spcAft>
                 <a:spcPts val="0"/>
               </a:spcAft>
-              <a:defRPr sz="3400" b="1">
+              <a:defRPr sz="3600" b="1">
                 <a:solidFill>
-                  <a:srgbClr val="181817"/>
+                  <a:srgbClr val="191B20"/>
                 </a:solidFill>
                 <a:latin typeface="Arial"/>
               </a:defRPr>
             </a:pPr>
             <a:r>
-              <a:t>Co prototyp ověřuje?</a:t>
-            </a:r>
-          </a:p>
-        </p:txBody>
-      </p:sp>
-      <p:sp>
-        <p:nvSpPr>
-          <p:cNvPr id="9" name="Rectangle 8"/>
+              <a:t>AI a ověření prototypu</a:t>
+            </a:r>
+          </a:p>
+        </p:txBody>
+      </p:sp>
+      <p:sp>
+        <p:nvSpPr>
+          <p:cNvPr id="6" name="Rectangle 5"/>
           <p:cNvSpPr/>
           <p:nvPr/>
         </p:nvSpPr>
         <p:spPr>
           <a:xfrm>
-            <a:off x="533400" y="2768600"/>
-            <a:ext cx="5448300" cy="2603500"/>
+            <a:off x="723900" y="2273300"/>
+            <a:ext cx="101600" cy="101600"/>
           </a:xfrm>
           <a:prstGeom prst="rect">
             <a:avLst/>
           </a:prstGeom>
           <a:solidFill>
-            <a:srgbClr val="181817"/>
+            <a:srgbClr val="E55024"/>
           </a:solidFill>
           <a:ln>
             <a:noFill/>
@@ -9391,20 +7485,62 @@
       </p:sp>
       <p:sp>
         <p:nvSpPr>
-          <p:cNvPr id="10" name="Rectangle 9"/>
+          <p:cNvPr id="7" name="TextBox 6"/>
+          <p:cNvSpPr txBox="1"/>
+          <p:nvPr/>
+        </p:nvSpPr>
+        <p:spPr>
+          <a:xfrm>
+            <a:off x="1066800" y="2146300"/>
+            <a:ext cx="10160000" cy="419100"/>
+          </a:xfrm>
+          <a:prstGeom prst="rect">
+            <a:avLst/>
+          </a:prstGeom>
+          <a:noFill/>
+        </p:spPr>
+        <p:txBody>
+          <a:bodyPr wrap="none" lIns="0" rIns="0" tIns="0" bIns="0">
+            <a:noAutofit/>
+          </a:bodyPr>
+          <a:lstStyle/>
+          <a:p>
+            <a:pPr>
+              <a:lnSpc>
+                <a:spcPts val="3360"/>
+              </a:lnSpc>
+              <a:spcAft>
+                <a:spcPts val="0"/>
+              </a:spcAft>
+              <a:defRPr sz="2800" b="0">
+                <a:solidFill>
+                  <a:srgbClr val="191B20"/>
+                </a:solidFill>
+                <a:latin typeface="Arial"/>
+              </a:defRPr>
+            </a:pPr>
+            <a:r>
+              <a:t>AI: wireframe, návrh textů a obsluha dat.</a:t>
+            </a:r>
+          </a:p>
+        </p:txBody>
+      </p:sp>
+      <p:sp>
+        <p:nvSpPr>
+          <p:cNvPr id="8" name="Rectangle 7"/>
           <p:cNvSpPr/>
           <p:nvPr/>
         </p:nvSpPr>
         <p:spPr>
           <a:xfrm>
-            <a:off x="533400" y="2768600"/>
-            <a:ext cx="5448300" cy="76200"/>
+            <a:off x="723900" y="2971800"/>
+            <a:ext cx="101600" cy="101600"/>
           </a:xfrm>
           <a:prstGeom prst="rect">
             <a:avLst/>
           </a:prstGeom>
           <a:solidFill>
-            <a:srgbClr val="F45E2B"/>
+            <a:srgbClr val="E55024"/>
           </a:solidFill>
           <a:ln>
             <a:noFill/>
@@ -9434,14 +7570,14 @@
       </p:sp>
       <p:sp>
         <p:nvSpPr>
-          <p:cNvPr id="11" name="TextBox 10"/>
+          <p:cNvPr id="9" name="TextBox 8"/>
           <p:cNvSpPr txBox="1"/>
           <p:nvPr/>
         </p:nvSpPr>
         <p:spPr>
           <a:xfrm>
-            <a:off x="749300" y="3035300"/>
-            <a:ext cx="5016500" cy="685800"/>
+            <a:off x="1066800" y="2844800"/>
+            <a:ext cx="10160000" cy="419100"/>
           </a:xfrm>
           <a:prstGeom prst="rect">
             <a:avLst/>
@@ -9450,142 +7586,46 @@
         </p:spPr>
         <p:txBody>
           <a:bodyPr wrap="none" lIns="0" rIns="0" tIns="0" bIns="0">
-            <a:spAutoFit/>
+            <a:noAutofit/>
           </a:bodyPr>
           <a:lstStyle/>
           <a:p>
             <a:pPr>
               <a:lnSpc>
-                <a:spcPts val="2200"/>
+                <a:spcPts val="3360"/>
               </a:lnSpc>
               <a:spcAft>
                 <a:spcPts val="0"/>
               </a:spcAft>
-              <a:defRPr sz="2000" b="1">
+              <a:defRPr sz="2800" b="0">
                 <a:solidFill>
-                  <a:srgbClr val="F4F0E7"/>
+                  <a:srgbClr val="191B20"/>
                 </a:solidFill>
                 <a:latin typeface="Arial"/>
               </a:defRPr>
             </a:pPr>
             <a:r>
-              <a:t>Ověřené hranice</a:t>
-            </a:r>
-          </a:p>
-        </p:txBody>
-      </p:sp>
-      <p:sp>
-        <p:nvSpPr>
-          <p:cNvPr id="12" name="TextBox 11"/>
-          <p:cNvSpPr txBox="1"/>
-          <p:nvPr/>
-        </p:nvSpPr>
-        <p:spPr>
-          <a:xfrm>
-            <a:off x="749300" y="3733800"/>
-            <a:ext cx="5016500" cy="1511300"/>
-          </a:xfrm>
-          <a:prstGeom prst="rect">
-            <a:avLst/>
-          </a:prstGeom>
-          <a:noFill/>
-        </p:spPr>
-        <p:txBody>
-          <a:bodyPr wrap="none" lIns="0" rIns="0" tIns="0" bIns="0">
-            <a:spAutoFit/>
-          </a:bodyPr>
-          <a:lstStyle/>
-          <a:p>
-            <a:pPr>
-              <a:lnSpc>
-                <a:spcPts val="1689"/>
-              </a:lnSpc>
-              <a:spcAft>
-                <a:spcPts val="0"/>
-              </a:spcAft>
-              <a:defRPr sz="1420" b="0">
-                <a:solidFill>
-                  <a:srgbClr val="F4F0E7"/>
-                </a:solidFill>
-                <a:latin typeface="Arial"/>
-              </a:defRPr>
-            </a:pPr>
-            <a:r>
-              <a:t>Data a reference; funkční filtry; oblíbené; hledání;</a:t>
-            </a:r>
-          </a:p>
-          <a:p>
-            <a:pPr>
-              <a:lnSpc>
-                <a:spcPts val="1689"/>
-              </a:lnSpc>
-              <a:spcAft>
-                <a:spcPts val="0"/>
-              </a:spcAft>
-              <a:defRPr sz="1420" b="0">
-                <a:solidFill>
-                  <a:srgbClr val="F4F0E7"/>
-                </a:solidFill>
-                <a:latin typeface="Arial"/>
-              </a:defRPr>
-            </a:pPr>
-            <a:r>
-              <a:t>dialog.</a:t>
-            </a:r>
-          </a:p>
-          <a:p>
-            <a:pPr>
-              <a:lnSpc>
-                <a:spcPts val="1689"/>
-              </a:lnSpc>
-              <a:spcAft>
-                <a:spcPts val="0"/>
-              </a:spcAft>
-              <a:defRPr sz="1420" b="0">
-                <a:solidFill>
-                  <a:srgbClr val="F4F0E7"/>
-                </a:solidFill>
-                <a:latin typeface="Arial"/>
-              </a:defRPr>
-            </a:pPr>
-          </a:p>
-          <a:p>
-            <a:pPr>
-              <a:lnSpc>
-                <a:spcPts val="1689"/>
-              </a:lnSpc>
-              <a:spcAft>
-                <a:spcPts val="0"/>
-              </a:spcAft>
-              <a:defRPr sz="1420" b="0">
-                <a:solidFill>
-                  <a:srgbClr val="F4F0E7"/>
-                </a:solidFill>
-                <a:latin typeface="Arial"/>
-              </a:defRPr>
-            </a:pPr>
-            <a:r>
-              <a:t>Záznam: prototype-validation.md.</a:t>
-            </a:r>
-          </a:p>
-        </p:txBody>
-      </p:sp>
-      <p:sp>
-        <p:nvSpPr>
-          <p:cNvPr id="13" name="Rectangle 12"/>
+              <a:t>Přijato: filtry; upraveno: hierarchie obsahu pro mobil.</a:t>
+            </a:r>
+          </a:p>
+        </p:txBody>
+      </p:sp>
+      <p:sp>
+        <p:nvSpPr>
+          <p:cNvPr id="10" name="Rectangle 9"/>
           <p:cNvSpPr/>
           <p:nvPr/>
         </p:nvSpPr>
         <p:spPr>
           <a:xfrm>
-            <a:off x="6210300" y="2768600"/>
-            <a:ext cx="5448300" cy="2603500"/>
+            <a:off x="723900" y="3670300"/>
+            <a:ext cx="101600" cy="101600"/>
           </a:xfrm>
           <a:prstGeom prst="rect">
             <a:avLst/>
           </a:prstGeom>
           <a:solidFill>
-            <a:srgbClr val="E7E0D5"/>
+            <a:srgbClr val="E55024"/>
           </a:solidFill>
           <a:ln>
             <a:noFill/>
@@ -9615,20 +7655,62 @@
       </p:sp>
       <p:sp>
         <p:nvSpPr>
-          <p:cNvPr id="14" name="Rectangle 13"/>
+          <p:cNvPr id="11" name="TextBox 10"/>
+          <p:cNvSpPr txBox="1"/>
+          <p:nvPr/>
+        </p:nvSpPr>
+        <p:spPr>
+          <a:xfrm>
+            <a:off x="1066800" y="3543300"/>
+            <a:ext cx="10160000" cy="419100"/>
+          </a:xfrm>
+          <a:prstGeom prst="rect">
+            <a:avLst/>
+          </a:prstGeom>
+          <a:noFill/>
+        </p:spPr>
+        <p:txBody>
+          <a:bodyPr wrap="none" lIns="0" rIns="0" tIns="0" bIns="0">
+            <a:noAutofit/>
+          </a:bodyPr>
+          <a:lstStyle/>
+          <a:p>
+            <a:pPr>
+              <a:lnSpc>
+                <a:spcPts val="3360"/>
+              </a:lnSpc>
+              <a:spcAft>
+                <a:spcPts val="0"/>
+              </a:spcAft>
+              <a:defRPr sz="2800" b="0">
+                <a:solidFill>
+                  <a:srgbClr val="191B20"/>
+                </a:solidFill>
+                <a:latin typeface="Arial"/>
+              </a:defRPr>
+            </a:pPr>
+            <a:r>
+              <a:t>Ověřeno: scénáře, uložení, dialog a šířky 320 / 768 / 1440 px.</a:t>
+            </a:r>
+          </a:p>
+        </p:txBody>
+      </p:sp>
+      <p:sp>
+        <p:nvSpPr>
+          <p:cNvPr id="12" name="Rectangle 11"/>
           <p:cNvSpPr/>
           <p:nvPr/>
         </p:nvSpPr>
         <p:spPr>
           <a:xfrm>
-            <a:off x="6210300" y="2768600"/>
-            <a:ext cx="5448300" cy="76200"/>
+            <a:off x="723900" y="4368800"/>
+            <a:ext cx="101600" cy="101600"/>
           </a:xfrm>
           <a:prstGeom prst="rect">
             <a:avLst/>
           </a:prstGeom>
           <a:solidFill>
-            <a:srgbClr val="F45E2B"/>
+            <a:srgbClr val="E55024"/>
           </a:solidFill>
           <a:ln>
             <a:noFill/>
@@ -9658,14 +7740,14 @@
       </p:sp>
       <p:sp>
         <p:nvSpPr>
-          <p:cNvPr id="15" name="TextBox 14"/>
+          <p:cNvPr id="13" name="TextBox 12"/>
           <p:cNvSpPr txBox="1"/>
           <p:nvPr/>
         </p:nvSpPr>
         <p:spPr>
           <a:xfrm>
-            <a:off x="6426200" y="3035300"/>
-            <a:ext cx="5016500" cy="685800"/>
+            <a:off x="1066800" y="4241800"/>
+            <a:ext cx="10160000" cy="419100"/>
           </a:xfrm>
           <a:prstGeom prst="rect">
             <a:avLst/>
@@ -9674,40 +7756,83 @@
         </p:spPr>
         <p:txBody>
           <a:bodyPr wrap="none" lIns="0" rIns="0" tIns="0" bIns="0">
-            <a:spAutoFit/>
+            <a:noAutofit/>
           </a:bodyPr>
           <a:lstStyle/>
           <a:p>
             <a:pPr>
               <a:lnSpc>
-                <a:spcPts val="2200"/>
+                <a:spcPts val="3360"/>
               </a:lnSpc>
               <a:spcAft>
                 <a:spcPts val="0"/>
               </a:spcAft>
-              <a:defRPr sz="2000" b="1">
+              <a:defRPr sz="2800" b="0">
                 <a:solidFill>
-                  <a:srgbClr val="181817"/>
+                  <a:srgbClr val="191B20"/>
                 </a:solidFill>
                 <a:latin typeface="Arial"/>
               </a:defRPr>
             </a:pPr>
             <a:r>
-              <a:t>Zbývající práce</a:t>
-            </a:r>
-          </a:p>
-        </p:txBody>
-      </p:sp>
-      <p:sp>
-        <p:nvSpPr>
-          <p:cNvPr id="16" name="TextBox 15"/>
+              <a:t>Limit: bez testu s návštěvníky na fyzických telefonech.</a:t>
+            </a:r>
+          </a:p>
+        </p:txBody>
+      </p:sp>
+      <p:sp>
+        <p:nvSpPr>
+          <p:cNvPr id="14" name="Rectangle 13"/>
+          <p:cNvSpPr/>
+          <p:nvPr/>
+        </p:nvSpPr>
+        <p:spPr>
+          <a:xfrm>
+            <a:off x="711200" y="6248400"/>
+            <a:ext cx="10769600" cy="12700"/>
+          </a:xfrm>
+          <a:prstGeom prst="rect">
+            <a:avLst/>
+          </a:prstGeom>
+          <a:solidFill>
+            <a:srgbClr val="DFE2E7"/>
+          </a:solidFill>
+          <a:ln>
+            <a:noFill/>
+          </a:ln>
+        </p:spPr>
+        <p:style>
+          <a:lnRef idx="1">
+            <a:schemeClr val="accent1"/>
+          </a:lnRef>
+          <a:fillRef idx="3">
+            <a:schemeClr val="accent1"/>
+          </a:fillRef>
+          <a:effectRef idx="2">
+            <a:schemeClr val="accent1"/>
+          </a:effectRef>
+          <a:fontRef idx="minor">
+            <a:schemeClr val="lt1"/>
+          </a:fontRef>
+        </p:style>
+        <p:txBody>
+          <a:bodyPr rtlCol="0" anchor="ctr"/>
+          <a:lstStyle/>
+          <a:p>
+            <a:pPr algn="ctr"/>
+          </a:p>
+        </p:txBody>
+      </p:sp>
+      <p:sp>
+        <p:nvSpPr>
+          <p:cNvPr id="15" name="TextBox 14"/>
           <p:cNvSpPr txBox="1"/>
           <p:nvPr/>
         </p:nvSpPr>
         <p:spPr>
           <a:xfrm>
-            <a:off x="6426200" y="3733800"/>
-            <a:ext cx="5016500" cy="1511300"/>
+            <a:off x="711200" y="6438900"/>
+            <a:ext cx="9652000" cy="203200"/>
           </a:xfrm>
           <a:prstGeom prst="rect">
             <a:avLst/>
@@ -9716,187 +7841,68 @@
         </p:spPr>
         <p:txBody>
           <a:bodyPr wrap="none" lIns="0" rIns="0" tIns="0" bIns="0">
-            <a:spAutoFit/>
+            <a:noAutofit/>
           </a:bodyPr>
           <a:lstStyle/>
           <a:p>
             <a:pPr>
               <a:lnSpc>
-                <a:spcPts val="1689"/>
+                <a:spcPts val="1297"/>
               </a:lnSpc>
               <a:spcAft>
                 <a:spcPts val="0"/>
               </a:spcAft>
-              <a:defRPr sz="1420" b="0">
+              <a:defRPr sz="1100" b="0">
                 <a:solidFill>
-                  <a:srgbClr val="181817"/>
+                  <a:srgbClr val="626773"/>
                 </a:solidFill>
                 <a:latin typeface="Arial"/>
               </a:defRPr>
             </a:pPr>
             <a:r>
-              <a:t>Finální grafika, jazykové mutace, vstupenky a PDF.</a:t>
-            </a:r>
-          </a:p>
+              <a:t>Prague Pulse Fest · Výstaviště Praha · 2027</a:t>
+            </a:r>
+          </a:p>
+        </p:txBody>
+      </p:sp>
+      <p:sp>
+        <p:nvSpPr>
+          <p:cNvPr id="16" name="TextBox 15"/>
+          <p:cNvSpPr txBox="1"/>
+          <p:nvPr/>
+        </p:nvSpPr>
+        <p:spPr>
+          <a:xfrm>
+            <a:off x="10807700" y="6413500"/>
+            <a:ext cx="673100" cy="215900"/>
+          </a:xfrm>
+          <a:prstGeom prst="rect">
+            <a:avLst/>
+          </a:prstGeom>
+          <a:noFill/>
+        </p:spPr>
+        <p:txBody>
+          <a:bodyPr wrap="none" lIns="0" rIns="0" tIns="0" bIns="0">
+            <a:noAutofit/>
+          </a:bodyPr>
+          <a:lstStyle/>
           <a:p>
             <a:pPr>
               <a:lnSpc>
-                <a:spcPts val="1689"/>
+                <a:spcPts val="1416"/>
               </a:lnSpc>
               <a:spcAft>
                 <a:spcPts val="0"/>
               </a:spcAft>
-              <a:defRPr sz="1420" b="0">
+              <a:defRPr sz="1200" b="0">
                 <a:solidFill>
-                  <a:srgbClr val="181817"/>
+                  <a:srgbClr val="626773"/>
                 </a:solidFill>
                 <a:latin typeface="Arial"/>
               </a:defRPr>
             </a:pPr>
-          </a:p>
-          <a:p>
-            <a:pPr>
-              <a:lnSpc>
-                <a:spcPts val="1689"/>
-              </a:lnSpc>
-              <a:spcAft>
-                <a:spcPts val="0"/>
-              </a:spcAft>
-              <a:defRPr sz="1420" b="0">
-                <a:solidFill>
-                  <a:srgbClr val="181817"/>
-                </a:solidFill>
-                <a:latin typeface="Arial"/>
-              </a:defRPr>
-            </a:pPr>
-            <a:r>
-              <a:t>Wireframe nepředstírá hotovou objednávku.</a:t>
-            </a:r>
-          </a:p>
-        </p:txBody>
-      </p:sp>
-      <p:sp>
-        <p:nvSpPr>
-          <p:cNvPr id="17" name="TextBox 16"/>
-          <p:cNvSpPr txBox="1"/>
-          <p:nvPr/>
-        </p:nvSpPr>
-        <p:spPr>
-          <a:xfrm>
-            <a:off x="533400" y="5676900"/>
-            <a:ext cx="11125200" cy="546100"/>
-          </a:xfrm>
-          <a:prstGeom prst="rect">
-            <a:avLst/>
-          </a:prstGeom>
-          <a:noFill/>
-        </p:spPr>
-        <p:txBody>
-          <a:bodyPr wrap="none" lIns="0" rIns="0" tIns="0" bIns="0">
-            <a:spAutoFit/>
-          </a:bodyPr>
-          <a:lstStyle/>
-          <a:p>
-            <a:pPr>
-              <a:lnSpc>
-                <a:spcPts val="1583"/>
-              </a:lnSpc>
-              <a:spcAft>
-                <a:spcPts val="0"/>
-              </a:spcAft>
-              <a:defRPr sz="1320" b="0">
-                <a:solidFill>
-                  <a:srgbClr val="68635B"/>
-                </a:solidFill>
-                <a:latin typeface="Arial"/>
-              </a:defRPr>
-            </a:pPr>
-            <a:r>
-              <a:t>AI návrh byl upraven podle scénářů. Uživatelský výzkum není doložen.</a:t>
-            </a:r>
-          </a:p>
-        </p:txBody>
-      </p:sp>
-      <p:sp>
-        <p:nvSpPr>
-          <p:cNvPr id="18" name="TextBox 17"/>
-          <p:cNvSpPr txBox="1"/>
-          <p:nvPr/>
-        </p:nvSpPr>
-        <p:spPr>
-          <a:xfrm>
-            <a:off x="533400" y="6413500"/>
-            <a:ext cx="10033000" cy="181610"/>
-          </a:xfrm>
-          <a:prstGeom prst="rect">
-            <a:avLst/>
-          </a:prstGeom>
-          <a:noFill/>
-        </p:spPr>
-        <p:txBody>
-          <a:bodyPr wrap="none" lIns="0" rIns="0" tIns="0" bIns="0">
-            <a:spAutoFit/>
-          </a:bodyPr>
-          <a:lstStyle/>
-          <a:p>
-            <a:pPr>
-              <a:lnSpc>
-                <a:spcPts val="930"/>
-              </a:lnSpc>
-              <a:spcAft>
-                <a:spcPts val="0"/>
-              </a:spcAft>
-              <a:defRPr sz="750" b="0">
-                <a:solidFill>
-                  <a:srgbClr val="68635B"/>
-                </a:solidFill>
-                <a:latin typeface="Arial"/>
-              </a:defRPr>
-            </a:pPr>
-            <a:r>
-              <a:t>DODATEČNĚ PŘIPRAVENÝ PODKLAD K MILNÍKU</a:t>
-            </a:r>
-          </a:p>
-        </p:txBody>
-      </p:sp>
-      <p:sp>
-        <p:nvSpPr>
-          <p:cNvPr id="19" name="TextBox 18"/>
-          <p:cNvSpPr txBox="1"/>
-          <p:nvPr/>
-        </p:nvSpPr>
-        <p:spPr>
-          <a:xfrm>
-            <a:off x="10947400" y="6350000"/>
-            <a:ext cx="825500" cy="220979"/>
-          </a:xfrm>
-          <a:prstGeom prst="rect">
-            <a:avLst/>
-          </a:prstGeom>
-          <a:noFill/>
-        </p:spPr>
-        <p:txBody>
-          <a:bodyPr wrap="none" lIns="0" rIns="0" tIns="0" bIns="0">
-            <a:spAutoFit/>
-          </a:bodyPr>
-          <a:lstStyle/>
-          <a:p>
-            <a:pPr>
-              <a:lnSpc>
-                <a:spcPts val="1240"/>
-              </a:lnSpc>
-              <a:spcAft>
-                <a:spcPts val="0"/>
-              </a:spcAft>
-              <a:defRPr sz="1000" b="1">
-                <a:solidFill>
-                  <a:srgbClr val="68635B"/>
-                </a:solidFill>
-                <a:latin typeface="Arial"/>
-              </a:defRPr>
-            </a:pPr>
-            <a:r>
-              <a:t>03 / 06</a:t>
+            <a:r>
+              <a:t>6 / 6</a:t>
             </a:r>
           </a:p>
         </p:txBody>

--- a/odevzdani/cviceni-03-prototyp/prezentace.pptx
+++ b/odevzdani/cviceni-03-prototyp/prezentace.pptx
@@ -3878,7 +3878,7 @@
             <a:avLst/>
           </a:prstGeom>
           <a:solidFill>
-            <a:srgbClr val="FFFFFF"/>
+            <a:srgbClr val="101217"/>
           </a:solidFill>
           <a:ln>
             <a:noFill/>
@@ -3914,14 +3914,14 @@
         </p:nvSpPr>
         <p:spPr>
           <a:xfrm>
-            <a:off x="711200" y="609600"/>
-            <a:ext cx="76200" cy="381000"/>
+            <a:off x="0" y="0"/>
+            <a:ext cx="152400" cy="6858000"/>
           </a:xfrm>
           <a:prstGeom prst="rect">
             <a:avLst/>
           </a:prstGeom>
           <a:solidFill>
-            <a:srgbClr val="E55024"/>
+            <a:srgbClr val="FF885D"/>
           </a:solidFill>
           <a:ln>
             <a:noFill/>
@@ -3951,56 +3951,100 @@
       </p:sp>
       <p:sp>
         <p:nvSpPr>
-          <p:cNvPr id="4" name="TextBox 3"/>
+          <p:cNvPr id="4" name="Rectangle 3"/>
+          <p:cNvSpPr/>
+          <p:nvPr/>
+        </p:nvSpPr>
+        <p:spPr>
+          <a:xfrm>
+            <a:off x="8255000" y="0"/>
+            <a:ext cx="3937000" cy="6858000"/>
+          </a:xfrm>
+          <a:prstGeom prst="rect">
+            <a:avLst/>
+          </a:prstGeom>
+          <a:solidFill>
+            <a:srgbClr val="1D222C"/>
+          </a:solidFill>
+          <a:ln>
+            <a:noFill/>
+          </a:ln>
+        </p:spPr>
+        <p:style>
+          <a:lnRef idx="1">
+            <a:schemeClr val="accent1"/>
+          </a:lnRef>
+          <a:fillRef idx="3">
+            <a:schemeClr val="accent1"/>
+          </a:fillRef>
+          <a:effectRef idx="2">
+            <a:schemeClr val="accent1"/>
+          </a:effectRef>
+          <a:fontRef idx="minor">
+            <a:schemeClr val="lt1"/>
+          </a:fontRef>
+        </p:style>
+        <p:txBody>
+          <a:bodyPr rtlCol="0" anchor="ctr"/>
+          <a:lstStyle/>
+          <a:p>
+            <a:pPr algn="ctr"/>
+          </a:p>
+        </p:txBody>
+      </p:sp>
+      <p:sp>
+        <p:nvSpPr>
+          <p:cNvPr id="5" name="Rectangle 4"/>
+          <p:cNvSpPr/>
+          <p:nvPr/>
+        </p:nvSpPr>
+        <p:spPr>
+          <a:xfrm>
+            <a:off x="8255000" y="0"/>
+            <a:ext cx="3937000" cy="101600"/>
+          </a:xfrm>
+          <a:prstGeom prst="rect">
+            <a:avLst/>
+          </a:prstGeom>
+          <a:solidFill>
+            <a:srgbClr val="FF885D"/>
+          </a:solidFill>
+          <a:ln>
+            <a:noFill/>
+          </a:ln>
+        </p:spPr>
+        <p:style>
+          <a:lnRef idx="1">
+            <a:schemeClr val="accent1"/>
+          </a:lnRef>
+          <a:fillRef idx="3">
+            <a:schemeClr val="accent1"/>
+          </a:fillRef>
+          <a:effectRef idx="2">
+            <a:schemeClr val="accent1"/>
+          </a:effectRef>
+          <a:fontRef idx="minor">
+            <a:schemeClr val="lt1"/>
+          </a:fontRef>
+        </p:style>
+        <p:txBody>
+          <a:bodyPr rtlCol="0" anchor="ctr"/>
+          <a:lstStyle/>
+          <a:p>
+            <a:pPr algn="ctr"/>
+          </a:p>
+        </p:txBody>
+      </p:sp>
+      <p:sp>
+        <p:nvSpPr>
+          <p:cNvPr id="6" name="TextBox 5"/>
           <p:cNvSpPr txBox="1"/>
           <p:nvPr/>
         </p:nvSpPr>
         <p:spPr>
           <a:xfrm>
-            <a:off x="977900" y="647700"/>
-            <a:ext cx="10502900" cy="317500"/>
-          </a:xfrm>
-          <a:prstGeom prst="rect">
-            <a:avLst/>
-          </a:prstGeom>
-          <a:noFill/>
-        </p:spPr>
-        <p:txBody>
-          <a:bodyPr wrap="none" lIns="0" rIns="0" tIns="0" bIns="0">
-            <a:noAutofit/>
-          </a:bodyPr>
-          <a:lstStyle/>
-          <a:p>
-            <a:pPr>
-              <a:lnSpc>
-                <a:spcPts val="2360"/>
-              </a:lnSpc>
-              <a:spcAft>
-                <a:spcPts val="0"/>
-              </a:spcAft>
-              <a:defRPr sz="2000" b="1">
-                <a:solidFill>
-                  <a:srgbClr val="191B20"/>
-                </a:solidFill>
-                <a:latin typeface="Arial"/>
-              </a:defRPr>
-            </a:pPr>
-            <a:r>
-              <a:t>PRAGUE PULSE FEST</a:t>
-            </a:r>
-          </a:p>
-        </p:txBody>
-      </p:sp>
-      <p:sp>
-        <p:nvSpPr>
-          <p:cNvPr id="5" name="TextBox 4"/>
-          <p:cNvSpPr txBox="1"/>
-          <p:nvPr/>
-        </p:nvSpPr>
-        <p:spPr>
-          <a:xfrm>
-            <a:off x="711200" y="1600200"/>
-            <a:ext cx="10769600" cy="241300"/>
+            <a:off x="609600" y="546100"/>
+            <a:ext cx="10972800" cy="304800"/>
           </a:xfrm>
           <a:prstGeom prst="rect">
             <a:avLst/>
@@ -4022,7 +4066,7 @@
               </a:spcAft>
               <a:defRPr sz="1400" b="1">
                 <a:solidFill>
-                  <a:srgbClr val="E55024"/>
+                  <a:srgbClr val="FF885D"/>
                 </a:solidFill>
                 <a:latin typeface="Arial"/>
               </a:defRPr>
@@ -4035,14 +4079,14 @@
       </p:sp>
       <p:sp>
         <p:nvSpPr>
-          <p:cNvPr id="6" name="TextBox 5"/>
+          <p:cNvPr id="7" name="TextBox 6"/>
           <p:cNvSpPr txBox="1"/>
           <p:nvPr/>
         </p:nvSpPr>
         <p:spPr>
           <a:xfrm>
-            <a:off x="685800" y="2146300"/>
-            <a:ext cx="10795000" cy="1816100"/>
+            <a:off x="571500" y="1193800"/>
+            <a:ext cx="10985500" cy="1879600"/>
           </a:xfrm>
           <a:prstGeom prst="rect">
             <a:avLst/>
@@ -4057,19 +4101,80 @@
           <a:p>
             <a:pPr>
               <a:lnSpc>
-                <a:spcPts val="5376"/>
+                <a:spcPts val="6467"/>
               </a:lnSpc>
               <a:spcAft>
                 <a:spcPts val="0"/>
               </a:spcAft>
-              <a:defRPr sz="4800" b="1">
+              <a:defRPr sz="6600" b="1">
                 <a:solidFill>
-                  <a:srgbClr val="191B20"/>
+                  <a:srgbClr val="F5F6FA"/>
                 </a:solidFill>
                 <a:latin typeface="Arial"/>
               </a:defRPr>
             </a:pPr>
             <a:r>
+              <a:t>PRAGUE</a:t>
+            </a:r>
+          </a:p>
+          <a:p>
+            <a:pPr>
+              <a:lnSpc>
+                <a:spcPts val="6467"/>
+              </a:lnSpc>
+              <a:spcAft>
+                <a:spcPts val="0"/>
+              </a:spcAft>
+              <a:defRPr sz="6600" b="1">
+                <a:solidFill>
+                  <a:srgbClr val="F5F6FA"/>
+                </a:solidFill>
+                <a:latin typeface="Arial"/>
+              </a:defRPr>
+            </a:pPr>
+            <a:r>
+              <a:t>PULSE FEST</a:t>
+            </a:r>
+          </a:p>
+        </p:txBody>
+      </p:sp>
+      <p:sp>
+        <p:nvSpPr>
+          <p:cNvPr id="8" name="TextBox 7"/>
+          <p:cNvSpPr txBox="1"/>
+          <p:nvPr/>
+        </p:nvSpPr>
+        <p:spPr>
+          <a:xfrm>
+            <a:off x="609600" y="3492500"/>
+            <a:ext cx="10858500" cy="1092200"/>
+          </a:xfrm>
+          <a:prstGeom prst="rect">
+            <a:avLst/>
+          </a:prstGeom>
+          <a:noFill/>
+        </p:spPr>
+        <p:txBody>
+          <a:bodyPr wrap="none" lIns="0" rIns="0" tIns="0" bIns="0">
+            <a:noAutofit/>
+          </a:bodyPr>
+          <a:lstStyle/>
+          <a:p>
+            <a:pPr>
+              <a:lnSpc>
+                <a:spcPts val="4028"/>
+              </a:lnSpc>
+              <a:spcAft>
+                <a:spcPts val="0"/>
+              </a:spcAft>
+              <a:defRPr sz="3800" b="1">
+                <a:solidFill>
+                  <a:srgbClr val="FF885D"/>
+                </a:solidFill>
+                <a:latin typeface="Arial"/>
+              </a:defRPr>
+            </a:pPr>
+            <a:r>
               <a:t>UX návrh a prototyp</a:t>
             </a:r>
           </a:p>
@@ -4077,14 +4182,14 @@
       </p:sp>
       <p:sp>
         <p:nvSpPr>
-          <p:cNvPr id="7" name="TextBox 6"/>
+          <p:cNvPr id="9" name="TextBox 8"/>
           <p:cNvSpPr txBox="1"/>
           <p:nvPr/>
         </p:nvSpPr>
         <p:spPr>
           <a:xfrm>
-            <a:off x="711200" y="4191000"/>
-            <a:ext cx="10769600" cy="1016000"/>
+            <a:off x="609600" y="4889500"/>
+            <a:ext cx="10858500" cy="825500"/>
           </a:xfrm>
           <a:prstGeom prst="rect">
             <a:avLst/>
@@ -4106,7 +4211,7 @@
               </a:spcAft>
               <a:defRPr sz="2300" b="0">
                 <a:solidFill>
-                  <a:srgbClr val="626773"/>
+                  <a:srgbClr val="B7BFCC"/>
                 </a:solidFill>
                 <a:latin typeface="Arial"/>
               </a:defRPr>
@@ -4125,7 +4230,7 @@
               </a:spcAft>
               <a:defRPr sz="2300" b="0">
                 <a:solidFill>
-                  <a:srgbClr val="626773"/>
+                  <a:srgbClr val="B7BFCC"/>
                 </a:solidFill>
                 <a:latin typeface="Arial"/>
               </a:defRPr>
@@ -4138,14 +4243,14 @@
       </p:sp>
       <p:sp>
         <p:nvSpPr>
-          <p:cNvPr id="8" name="TextBox 7"/>
+          <p:cNvPr id="10" name="TextBox 9"/>
           <p:cNvSpPr txBox="1"/>
           <p:nvPr/>
         </p:nvSpPr>
         <p:spPr>
           <a:xfrm>
-            <a:off x="711200" y="5600700"/>
-            <a:ext cx="10769600" cy="304800"/>
+            <a:off x="609600" y="5880100"/>
+            <a:ext cx="10972800" cy="330200"/>
           </a:xfrm>
           <a:prstGeom prst="rect">
             <a:avLst/>
@@ -4160,14 +4265,14 @@
           <a:p>
             <a:pPr>
               <a:lnSpc>
-                <a:spcPts val="2242"/>
+                <a:spcPts val="2124"/>
               </a:lnSpc>
               <a:spcAft>
                 <a:spcPts val="0"/>
               </a:spcAft>
-              <a:defRPr sz="1900" b="0">
+              <a:defRPr sz="1800" b="0">
                 <a:solidFill>
-                  <a:srgbClr val="191B20"/>
+                  <a:srgbClr val="F5F6FA"/>
                 </a:solidFill>
                 <a:latin typeface="Arial"/>
               </a:defRPr>
@@ -4180,20 +4285,20 @@
       </p:sp>
       <p:sp>
         <p:nvSpPr>
-          <p:cNvPr id="9" name="Rectangle 8"/>
+          <p:cNvPr id="11" name="Rectangle 10"/>
           <p:cNvSpPr/>
           <p:nvPr/>
         </p:nvSpPr>
         <p:spPr>
           <a:xfrm>
-            <a:off x="711200" y="6248400"/>
-            <a:ext cx="10769600" cy="12700"/>
+            <a:off x="609600" y="6273800"/>
+            <a:ext cx="10972800" cy="12700"/>
           </a:xfrm>
           <a:prstGeom prst="rect">
             <a:avLst/>
           </a:prstGeom>
           <a:solidFill>
-            <a:srgbClr val="DFE2E7"/>
+            <a:srgbClr val="3D4552"/>
           </a:solidFill>
           <a:ln>
             <a:noFill/>
@@ -4223,14 +4328,14 @@
       </p:sp>
       <p:sp>
         <p:nvSpPr>
-          <p:cNvPr id="10" name="TextBox 9"/>
+          <p:cNvPr id="12" name="TextBox 11"/>
           <p:cNvSpPr txBox="1"/>
           <p:nvPr/>
         </p:nvSpPr>
         <p:spPr>
           <a:xfrm>
-            <a:off x="711200" y="6438900"/>
-            <a:ext cx="9652000" cy="203200"/>
+            <a:off x="609600" y="6464300"/>
+            <a:ext cx="9906000" cy="203200"/>
           </a:xfrm>
           <a:prstGeom prst="rect">
             <a:avLst/>
@@ -4252,7 +4357,7 @@
               </a:spcAft>
               <a:defRPr sz="1100" b="0">
                 <a:solidFill>
-                  <a:srgbClr val="626773"/>
+                  <a:srgbClr val="B7BFCC"/>
                 </a:solidFill>
                 <a:latin typeface="Arial"/>
               </a:defRPr>
@@ -4265,14 +4370,14 @@
       </p:sp>
       <p:sp>
         <p:nvSpPr>
-          <p:cNvPr id="11" name="TextBox 10"/>
+          <p:cNvPr id="13" name="TextBox 12"/>
           <p:cNvSpPr txBox="1"/>
           <p:nvPr/>
         </p:nvSpPr>
         <p:spPr>
           <a:xfrm>
-            <a:off x="10807700" y="6413500"/>
-            <a:ext cx="673100" cy="215900"/>
+            <a:off x="10972800" y="6438900"/>
+            <a:ext cx="609600" cy="215900"/>
           </a:xfrm>
           <a:prstGeom prst="rect">
             <a:avLst/>
@@ -4294,7 +4399,7 @@
               </a:spcAft>
               <a:defRPr sz="1200" b="0">
                 <a:solidFill>
-                  <a:srgbClr val="626773"/>
+                  <a:srgbClr val="B7BFCC"/>
                 </a:solidFill>
                 <a:latin typeface="Arial"/>
               </a:defRPr>
@@ -4338,7 +4443,7 @@
             <a:avLst/>
           </a:prstGeom>
           <a:solidFill>
-            <a:srgbClr val="FFFFFF"/>
+            <a:srgbClr val="101217"/>
           </a:solidFill>
           <a:ln>
             <a:noFill/>
@@ -4368,14 +4473,57 @@
       </p:sp>
       <p:sp>
         <p:nvSpPr>
-          <p:cNvPr id="3" name="TextBox 2"/>
+          <p:cNvPr id="3" name="Rectangle 2"/>
+          <p:cNvSpPr/>
+          <p:nvPr/>
+        </p:nvSpPr>
+        <p:spPr>
+          <a:xfrm>
+            <a:off x="0" y="0"/>
+            <a:ext cx="101600" cy="6858000"/>
+          </a:xfrm>
+          <a:prstGeom prst="rect">
+            <a:avLst/>
+          </a:prstGeom>
+          <a:solidFill>
+            <a:srgbClr val="FF885D"/>
+          </a:solidFill>
+          <a:ln>
+            <a:noFill/>
+          </a:ln>
+        </p:spPr>
+        <p:style>
+          <a:lnRef idx="1">
+            <a:schemeClr val="accent1"/>
+          </a:lnRef>
+          <a:fillRef idx="3">
+            <a:schemeClr val="accent1"/>
+          </a:fillRef>
+          <a:effectRef idx="2">
+            <a:schemeClr val="accent1"/>
+          </a:effectRef>
+          <a:fontRef idx="minor">
+            <a:schemeClr val="lt1"/>
+          </a:fontRef>
+        </p:style>
+        <p:txBody>
+          <a:bodyPr rtlCol="0" anchor="ctr"/>
+          <a:lstStyle/>
+          <a:p>
+            <a:pPr algn="ctr"/>
+          </a:p>
+        </p:txBody>
+      </p:sp>
+      <p:sp>
+        <p:nvSpPr>
+          <p:cNvPr id="4" name="TextBox 3"/>
           <p:cNvSpPr txBox="1"/>
           <p:nvPr/>
         </p:nvSpPr>
         <p:spPr>
           <a:xfrm>
-            <a:off x="711200" y="457200"/>
-            <a:ext cx="10769600" cy="228600"/>
+            <a:off x="609600" y="444500"/>
+            <a:ext cx="10972800" cy="279400"/>
           </a:xfrm>
           <a:prstGeom prst="rect">
             <a:avLst/>
@@ -4397,7 +4545,7 @@
               </a:spcAft>
               <a:defRPr sz="1300" b="1">
                 <a:solidFill>
-                  <a:srgbClr val="626773"/>
+                  <a:srgbClr val="B7BFCC"/>
                 </a:solidFill>
                 <a:latin typeface="Arial"/>
               </a:defRPr>
@@ -4410,20 +4558,20 @@
       </p:sp>
       <p:sp>
         <p:nvSpPr>
-          <p:cNvPr id="4" name="Rectangle 3"/>
+          <p:cNvPr id="5" name="Rectangle 4"/>
           <p:cNvSpPr/>
           <p:nvPr/>
         </p:nvSpPr>
         <p:spPr>
           <a:xfrm>
-            <a:off x="711200" y="876300"/>
-            <a:ext cx="622300" cy="50800"/>
+            <a:off x="609600" y="876300"/>
+            <a:ext cx="685800" cy="50800"/>
           </a:xfrm>
           <a:prstGeom prst="rect">
             <a:avLst/>
           </a:prstGeom>
           <a:solidFill>
-            <a:srgbClr val="E55024"/>
+            <a:srgbClr val="FF885D"/>
           </a:solidFill>
           <a:ln>
             <a:noFill/>
@@ -4453,14 +4601,14 @@
       </p:sp>
       <p:sp>
         <p:nvSpPr>
-          <p:cNvPr id="5" name="TextBox 4"/>
+          <p:cNvPr id="6" name="TextBox 5"/>
           <p:cNvSpPr txBox="1"/>
           <p:nvPr/>
         </p:nvSpPr>
         <p:spPr>
           <a:xfrm>
-            <a:off x="685800" y="1257300"/>
-            <a:ext cx="10795000" cy="1168400"/>
+            <a:off x="584200" y="1206500"/>
+            <a:ext cx="10998200" cy="1130300"/>
           </a:xfrm>
           <a:prstGeom prst="rect">
             <a:avLst/>
@@ -4482,7 +4630,7 @@
               </a:spcAft>
               <a:defRPr sz="3600" b="1">
                 <a:solidFill>
-                  <a:srgbClr val="191B20"/>
+                  <a:srgbClr val="F5F6FA"/>
                 </a:solidFill>
                 <a:latin typeface="Arial"/>
               </a:defRPr>
@@ -4495,20 +4643,20 @@
       </p:sp>
       <p:sp>
         <p:nvSpPr>
-          <p:cNvPr id="6" name="Rectangle 5"/>
+          <p:cNvPr id="7" name="Rectangle 6"/>
           <p:cNvSpPr/>
           <p:nvPr/>
         </p:nvSpPr>
         <p:spPr>
           <a:xfrm>
-            <a:off x="723900" y="2273300"/>
+            <a:off x="711200" y="2336800"/>
             <a:ext cx="101600" cy="101600"/>
           </a:xfrm>
           <a:prstGeom prst="rect">
             <a:avLst/>
           </a:prstGeom>
           <a:solidFill>
-            <a:srgbClr val="E55024"/>
+            <a:srgbClr val="FF885D"/>
           </a:solidFill>
           <a:ln>
             <a:noFill/>
@@ -4538,13 +4686,13 @@
       </p:sp>
       <p:sp>
         <p:nvSpPr>
-          <p:cNvPr id="7" name="TextBox 6"/>
+          <p:cNvPr id="8" name="TextBox 7"/>
           <p:cNvSpPr txBox="1"/>
           <p:nvPr/>
         </p:nvSpPr>
         <p:spPr>
           <a:xfrm>
-            <a:off x="1066800" y="2146300"/>
+            <a:off x="1066800" y="2209800"/>
             <a:ext cx="10160000" cy="419100"/>
           </a:xfrm>
           <a:prstGeom prst="rect">
@@ -4567,7 +4715,7 @@
               </a:spcAft>
               <a:defRPr sz="2800" b="0">
                 <a:solidFill>
-                  <a:srgbClr val="191B20"/>
+                  <a:srgbClr val="F5F6FA"/>
                 </a:solidFill>
                 <a:latin typeface="Arial"/>
               </a:defRPr>
@@ -4580,20 +4728,20 @@
       </p:sp>
       <p:sp>
         <p:nvSpPr>
-          <p:cNvPr id="8" name="Rectangle 7"/>
+          <p:cNvPr id="9" name="Rectangle 8"/>
           <p:cNvSpPr/>
           <p:nvPr/>
         </p:nvSpPr>
         <p:spPr>
           <a:xfrm>
-            <a:off x="723900" y="2971800"/>
+            <a:off x="711200" y="3009900"/>
             <a:ext cx="101600" cy="101600"/>
           </a:xfrm>
           <a:prstGeom prst="rect">
             <a:avLst/>
           </a:prstGeom>
           <a:solidFill>
-            <a:srgbClr val="E55024"/>
+            <a:srgbClr val="FF885D"/>
           </a:solidFill>
           <a:ln>
             <a:noFill/>
@@ -4623,13 +4771,13 @@
       </p:sp>
       <p:sp>
         <p:nvSpPr>
-          <p:cNvPr id="9" name="TextBox 8"/>
+          <p:cNvPr id="10" name="TextBox 9"/>
           <p:cNvSpPr txBox="1"/>
           <p:nvPr/>
         </p:nvSpPr>
         <p:spPr>
           <a:xfrm>
-            <a:off x="1066800" y="2844800"/>
+            <a:off x="1066800" y="2882900"/>
             <a:ext cx="10160000" cy="419100"/>
           </a:xfrm>
           <a:prstGeom prst="rect">
@@ -4652,7 +4800,7 @@
               </a:spcAft>
               <a:defRPr sz="2800" b="0">
                 <a:solidFill>
-                  <a:srgbClr val="191B20"/>
+                  <a:srgbClr val="F5F6FA"/>
                 </a:solidFill>
                 <a:latin typeface="Arial"/>
               </a:defRPr>
@@ -4665,20 +4813,20 @@
       </p:sp>
       <p:sp>
         <p:nvSpPr>
-          <p:cNvPr id="10" name="Rectangle 9"/>
+          <p:cNvPr id="11" name="Rectangle 10"/>
           <p:cNvSpPr/>
           <p:nvPr/>
         </p:nvSpPr>
         <p:spPr>
           <a:xfrm>
-            <a:off x="723900" y="3670300"/>
+            <a:off x="711200" y="3683000"/>
             <a:ext cx="101600" cy="101600"/>
           </a:xfrm>
           <a:prstGeom prst="rect">
             <a:avLst/>
           </a:prstGeom>
           <a:solidFill>
-            <a:srgbClr val="E55024"/>
+            <a:srgbClr val="FF885D"/>
           </a:solidFill>
           <a:ln>
             <a:noFill/>
@@ -4708,13 +4856,13 @@
       </p:sp>
       <p:sp>
         <p:nvSpPr>
-          <p:cNvPr id="11" name="TextBox 10"/>
+          <p:cNvPr id="12" name="TextBox 11"/>
           <p:cNvSpPr txBox="1"/>
           <p:nvPr/>
         </p:nvSpPr>
         <p:spPr>
           <a:xfrm>
-            <a:off x="1066800" y="3543300"/>
+            <a:off x="1066800" y="3556000"/>
             <a:ext cx="10160000" cy="419100"/>
           </a:xfrm>
           <a:prstGeom prst="rect">
@@ -4737,7 +4885,7 @@
               </a:spcAft>
               <a:defRPr sz="2800" b="0">
                 <a:solidFill>
-                  <a:srgbClr val="191B20"/>
+                  <a:srgbClr val="F5F6FA"/>
                 </a:solidFill>
                 <a:latin typeface="Arial"/>
               </a:defRPr>
@@ -4750,20 +4898,20 @@
       </p:sp>
       <p:sp>
         <p:nvSpPr>
-          <p:cNvPr id="12" name="Rectangle 11"/>
+          <p:cNvPr id="13" name="Rectangle 12"/>
           <p:cNvSpPr/>
           <p:nvPr/>
         </p:nvSpPr>
         <p:spPr>
           <a:xfrm>
-            <a:off x="723900" y="4368800"/>
+            <a:off x="711200" y="4356100"/>
             <a:ext cx="101600" cy="101600"/>
           </a:xfrm>
           <a:prstGeom prst="rect">
             <a:avLst/>
           </a:prstGeom>
           <a:solidFill>
-            <a:srgbClr val="E55024"/>
+            <a:srgbClr val="FF885D"/>
           </a:solidFill>
           <a:ln>
             <a:noFill/>
@@ -4793,13 +4941,13 @@
       </p:sp>
       <p:sp>
         <p:nvSpPr>
-          <p:cNvPr id="13" name="TextBox 12"/>
+          <p:cNvPr id="14" name="TextBox 13"/>
           <p:cNvSpPr txBox="1"/>
           <p:nvPr/>
         </p:nvSpPr>
         <p:spPr>
           <a:xfrm>
-            <a:off x="1066800" y="4241800"/>
+            <a:off x="1066800" y="4229100"/>
             <a:ext cx="10160000" cy="419100"/>
           </a:xfrm>
           <a:prstGeom prst="rect">
@@ -4822,7 +4970,7 @@
               </a:spcAft>
               <a:defRPr sz="2800" b="0">
                 <a:solidFill>
-                  <a:srgbClr val="191B20"/>
+                  <a:srgbClr val="F5F6FA"/>
                 </a:solidFill>
                 <a:latin typeface="Arial"/>
               </a:defRPr>
@@ -4835,20 +4983,20 @@
       </p:sp>
       <p:sp>
         <p:nvSpPr>
-          <p:cNvPr id="14" name="Rectangle 13"/>
+          <p:cNvPr id="15" name="Rectangle 14"/>
           <p:cNvSpPr/>
           <p:nvPr/>
         </p:nvSpPr>
         <p:spPr>
           <a:xfrm>
-            <a:off x="711200" y="6248400"/>
-            <a:ext cx="10769600" cy="12700"/>
+            <a:off x="609600" y="6273800"/>
+            <a:ext cx="10972800" cy="12700"/>
           </a:xfrm>
           <a:prstGeom prst="rect">
             <a:avLst/>
           </a:prstGeom>
           <a:solidFill>
-            <a:srgbClr val="DFE2E7"/>
+            <a:srgbClr val="3D4552"/>
           </a:solidFill>
           <a:ln>
             <a:noFill/>
@@ -4878,14 +5026,14 @@
       </p:sp>
       <p:sp>
         <p:nvSpPr>
-          <p:cNvPr id="15" name="TextBox 14"/>
+          <p:cNvPr id="16" name="TextBox 15"/>
           <p:cNvSpPr txBox="1"/>
           <p:nvPr/>
         </p:nvSpPr>
         <p:spPr>
           <a:xfrm>
-            <a:off x="711200" y="6438900"/>
-            <a:ext cx="9652000" cy="203200"/>
+            <a:off x="609600" y="6464300"/>
+            <a:ext cx="9906000" cy="203200"/>
           </a:xfrm>
           <a:prstGeom prst="rect">
             <a:avLst/>
@@ -4907,7 +5055,7 @@
               </a:spcAft>
               <a:defRPr sz="1100" b="0">
                 <a:solidFill>
-                  <a:srgbClr val="626773"/>
+                  <a:srgbClr val="B7BFCC"/>
                 </a:solidFill>
                 <a:latin typeface="Arial"/>
               </a:defRPr>
@@ -4920,14 +5068,14 @@
       </p:sp>
       <p:sp>
         <p:nvSpPr>
-          <p:cNvPr id="16" name="TextBox 15"/>
+          <p:cNvPr id="17" name="TextBox 16"/>
           <p:cNvSpPr txBox="1"/>
           <p:nvPr/>
         </p:nvSpPr>
         <p:spPr>
           <a:xfrm>
-            <a:off x="10807700" y="6413500"/>
-            <a:ext cx="673100" cy="215900"/>
+            <a:off x="10972800" y="6438900"/>
+            <a:ext cx="609600" cy="215900"/>
           </a:xfrm>
           <a:prstGeom prst="rect">
             <a:avLst/>
@@ -4949,7 +5097,7 @@
               </a:spcAft>
               <a:defRPr sz="1200" b="0">
                 <a:solidFill>
-                  <a:srgbClr val="626773"/>
+                  <a:srgbClr val="B7BFCC"/>
                 </a:solidFill>
                 <a:latin typeface="Arial"/>
               </a:defRPr>
@@ -4993,7 +5141,7 @@
             <a:avLst/>
           </a:prstGeom>
           <a:solidFill>
-            <a:srgbClr val="FFFFFF"/>
+            <a:srgbClr val="101217"/>
           </a:solidFill>
           <a:ln>
             <a:noFill/>
@@ -5023,14 +5171,57 @@
       </p:sp>
       <p:sp>
         <p:nvSpPr>
-          <p:cNvPr id="3" name="TextBox 2"/>
+          <p:cNvPr id="3" name="Rectangle 2"/>
+          <p:cNvSpPr/>
+          <p:nvPr/>
+        </p:nvSpPr>
+        <p:spPr>
+          <a:xfrm>
+            <a:off x="0" y="0"/>
+            <a:ext cx="101600" cy="6858000"/>
+          </a:xfrm>
+          <a:prstGeom prst="rect">
+            <a:avLst/>
+          </a:prstGeom>
+          <a:solidFill>
+            <a:srgbClr val="FF885D"/>
+          </a:solidFill>
+          <a:ln>
+            <a:noFill/>
+          </a:ln>
+        </p:spPr>
+        <p:style>
+          <a:lnRef idx="1">
+            <a:schemeClr val="accent1"/>
+          </a:lnRef>
+          <a:fillRef idx="3">
+            <a:schemeClr val="accent1"/>
+          </a:fillRef>
+          <a:effectRef idx="2">
+            <a:schemeClr val="accent1"/>
+          </a:effectRef>
+          <a:fontRef idx="minor">
+            <a:schemeClr val="lt1"/>
+          </a:fontRef>
+        </p:style>
+        <p:txBody>
+          <a:bodyPr rtlCol="0" anchor="ctr"/>
+          <a:lstStyle/>
+          <a:p>
+            <a:pPr algn="ctr"/>
+          </a:p>
+        </p:txBody>
+      </p:sp>
+      <p:sp>
+        <p:nvSpPr>
+          <p:cNvPr id="4" name="TextBox 3"/>
           <p:cNvSpPr txBox="1"/>
           <p:nvPr/>
         </p:nvSpPr>
         <p:spPr>
           <a:xfrm>
-            <a:off x="711200" y="457200"/>
-            <a:ext cx="10769600" cy="228600"/>
+            <a:off x="609600" y="444500"/>
+            <a:ext cx="10972800" cy="279400"/>
           </a:xfrm>
           <a:prstGeom prst="rect">
             <a:avLst/>
@@ -5052,7 +5243,7 @@
               </a:spcAft>
               <a:defRPr sz="1300" b="1">
                 <a:solidFill>
-                  <a:srgbClr val="626773"/>
+                  <a:srgbClr val="B7BFCC"/>
                 </a:solidFill>
                 <a:latin typeface="Arial"/>
               </a:defRPr>
@@ -5065,20 +5256,20 @@
       </p:sp>
       <p:sp>
         <p:nvSpPr>
-          <p:cNvPr id="4" name="Rectangle 3"/>
+          <p:cNvPr id="5" name="Rectangle 4"/>
           <p:cNvSpPr/>
           <p:nvPr/>
         </p:nvSpPr>
         <p:spPr>
           <a:xfrm>
-            <a:off x="711200" y="876300"/>
-            <a:ext cx="622300" cy="50800"/>
+            <a:off x="609600" y="876300"/>
+            <a:ext cx="685800" cy="50800"/>
           </a:xfrm>
           <a:prstGeom prst="rect">
             <a:avLst/>
           </a:prstGeom>
           <a:solidFill>
-            <a:srgbClr val="E55024"/>
+            <a:srgbClr val="FF885D"/>
           </a:solidFill>
           <a:ln>
             <a:noFill/>
@@ -5108,14 +5299,14 @@
       </p:sp>
       <p:sp>
         <p:nvSpPr>
-          <p:cNvPr id="5" name="TextBox 4"/>
+          <p:cNvPr id="6" name="TextBox 5"/>
           <p:cNvSpPr txBox="1"/>
           <p:nvPr/>
         </p:nvSpPr>
         <p:spPr>
           <a:xfrm>
-            <a:off x="685800" y="1257300"/>
-            <a:ext cx="10795000" cy="1168400"/>
+            <a:off x="584200" y="1206500"/>
+            <a:ext cx="10998200" cy="1130300"/>
           </a:xfrm>
           <a:prstGeom prst="rect">
             <a:avLst/>
@@ -5137,7 +5328,7 @@
               </a:spcAft>
               <a:defRPr sz="3600" b="1">
                 <a:solidFill>
-                  <a:srgbClr val="191B20"/>
+                  <a:srgbClr val="F5F6FA"/>
                 </a:solidFill>
                 <a:latin typeface="Arial"/>
               </a:defRPr>
@@ -5150,20 +5341,20 @@
       </p:sp>
       <p:sp>
         <p:nvSpPr>
-          <p:cNvPr id="6" name="Rectangle 5"/>
+          <p:cNvPr id="7" name="Rectangle 6"/>
           <p:cNvSpPr/>
           <p:nvPr/>
         </p:nvSpPr>
         <p:spPr>
           <a:xfrm>
-            <a:off x="723900" y="2273300"/>
+            <a:off x="711200" y="2336800"/>
             <a:ext cx="101600" cy="101600"/>
           </a:xfrm>
           <a:prstGeom prst="rect">
             <a:avLst/>
           </a:prstGeom>
           <a:solidFill>
-            <a:srgbClr val="E55024"/>
+            <a:srgbClr val="FF885D"/>
           </a:solidFill>
           <a:ln>
             <a:noFill/>
@@ -5193,13 +5384,13 @@
       </p:sp>
       <p:sp>
         <p:nvSpPr>
-          <p:cNvPr id="7" name="TextBox 6"/>
+          <p:cNvPr id="8" name="TextBox 7"/>
           <p:cNvSpPr txBox="1"/>
           <p:nvPr/>
         </p:nvSpPr>
         <p:spPr>
           <a:xfrm>
-            <a:off x="1066800" y="2146300"/>
+            <a:off x="1066800" y="2209800"/>
             <a:ext cx="10160000" cy="419100"/>
           </a:xfrm>
           <a:prstGeom prst="rect">
@@ -5222,7 +5413,7 @@
               </a:spcAft>
               <a:defRPr sz="2800" b="0">
                 <a:solidFill>
-                  <a:srgbClr val="191B20"/>
+                  <a:srgbClr val="F5F6FA"/>
                 </a:solidFill>
                 <a:latin typeface="Arial"/>
               </a:defRPr>
@@ -5235,20 +5426,20 @@
       </p:sp>
       <p:sp>
         <p:nvSpPr>
-          <p:cNvPr id="8" name="Rectangle 7"/>
+          <p:cNvPr id="9" name="Rectangle 8"/>
           <p:cNvSpPr/>
           <p:nvPr/>
         </p:nvSpPr>
         <p:spPr>
           <a:xfrm>
-            <a:off x="723900" y="2971800"/>
+            <a:off x="711200" y="3009900"/>
             <a:ext cx="101600" cy="101600"/>
           </a:xfrm>
           <a:prstGeom prst="rect">
             <a:avLst/>
           </a:prstGeom>
           <a:solidFill>
-            <a:srgbClr val="E55024"/>
+            <a:srgbClr val="FF885D"/>
           </a:solidFill>
           <a:ln>
             <a:noFill/>
@@ -5278,13 +5469,13 @@
       </p:sp>
       <p:sp>
         <p:nvSpPr>
-          <p:cNvPr id="9" name="TextBox 8"/>
+          <p:cNvPr id="10" name="TextBox 9"/>
           <p:cNvSpPr txBox="1"/>
           <p:nvPr/>
         </p:nvSpPr>
         <p:spPr>
           <a:xfrm>
-            <a:off x="1066800" y="2844800"/>
+            <a:off x="1066800" y="2882900"/>
             <a:ext cx="10160000" cy="419100"/>
           </a:xfrm>
           <a:prstGeom prst="rect">
@@ -5307,7 +5498,7 @@
               </a:spcAft>
               <a:defRPr sz="2800" b="0">
                 <a:solidFill>
-                  <a:srgbClr val="191B20"/>
+                  <a:srgbClr val="F5F6FA"/>
                 </a:solidFill>
                 <a:latin typeface="Arial"/>
               </a:defRPr>
@@ -5320,20 +5511,20 @@
       </p:sp>
       <p:sp>
         <p:nvSpPr>
-          <p:cNvPr id="10" name="Rectangle 9"/>
+          <p:cNvPr id="11" name="Rectangle 10"/>
           <p:cNvSpPr/>
           <p:nvPr/>
         </p:nvSpPr>
         <p:spPr>
           <a:xfrm>
-            <a:off x="723900" y="3670300"/>
+            <a:off x="711200" y="3683000"/>
             <a:ext cx="101600" cy="101600"/>
           </a:xfrm>
           <a:prstGeom prst="rect">
             <a:avLst/>
           </a:prstGeom>
           <a:solidFill>
-            <a:srgbClr val="E55024"/>
+            <a:srgbClr val="FF885D"/>
           </a:solidFill>
           <a:ln>
             <a:noFill/>
@@ -5363,13 +5554,13 @@
       </p:sp>
       <p:sp>
         <p:nvSpPr>
-          <p:cNvPr id="11" name="TextBox 10"/>
+          <p:cNvPr id="12" name="TextBox 11"/>
           <p:cNvSpPr txBox="1"/>
           <p:nvPr/>
         </p:nvSpPr>
         <p:spPr>
           <a:xfrm>
-            <a:off x="1066800" y="3543300"/>
+            <a:off x="1066800" y="3556000"/>
             <a:ext cx="10160000" cy="419100"/>
           </a:xfrm>
           <a:prstGeom prst="rect">
@@ -5392,7 +5583,7 @@
               </a:spcAft>
               <a:defRPr sz="2800" b="0">
                 <a:solidFill>
-                  <a:srgbClr val="191B20"/>
+                  <a:srgbClr val="F5F6FA"/>
                 </a:solidFill>
                 <a:latin typeface="Arial"/>
               </a:defRPr>
@@ -5405,20 +5596,20 @@
       </p:sp>
       <p:sp>
         <p:nvSpPr>
-          <p:cNvPr id="12" name="Rectangle 11"/>
+          <p:cNvPr id="13" name="Rectangle 12"/>
           <p:cNvSpPr/>
           <p:nvPr/>
         </p:nvSpPr>
         <p:spPr>
           <a:xfrm>
-            <a:off x="711200" y="6248400"/>
-            <a:ext cx="10769600" cy="12700"/>
+            <a:off x="609600" y="6273800"/>
+            <a:ext cx="10972800" cy="12700"/>
           </a:xfrm>
           <a:prstGeom prst="rect">
             <a:avLst/>
           </a:prstGeom>
           <a:solidFill>
-            <a:srgbClr val="DFE2E7"/>
+            <a:srgbClr val="3D4552"/>
           </a:solidFill>
           <a:ln>
             <a:noFill/>
@@ -5448,14 +5639,14 @@
       </p:sp>
       <p:sp>
         <p:nvSpPr>
-          <p:cNvPr id="13" name="TextBox 12"/>
+          <p:cNvPr id="14" name="TextBox 13"/>
           <p:cNvSpPr txBox="1"/>
           <p:nvPr/>
         </p:nvSpPr>
         <p:spPr>
           <a:xfrm>
-            <a:off x="711200" y="6438900"/>
-            <a:ext cx="9652000" cy="203200"/>
+            <a:off x="609600" y="6464300"/>
+            <a:ext cx="9906000" cy="203200"/>
           </a:xfrm>
           <a:prstGeom prst="rect">
             <a:avLst/>
@@ -5477,7 +5668,7 @@
               </a:spcAft>
               <a:defRPr sz="1100" b="0">
                 <a:solidFill>
-                  <a:srgbClr val="626773"/>
+                  <a:srgbClr val="B7BFCC"/>
                 </a:solidFill>
                 <a:latin typeface="Arial"/>
               </a:defRPr>
@@ -5490,14 +5681,14 @@
       </p:sp>
       <p:sp>
         <p:nvSpPr>
-          <p:cNvPr id="14" name="TextBox 13"/>
+          <p:cNvPr id="15" name="TextBox 14"/>
           <p:cNvSpPr txBox="1"/>
           <p:nvPr/>
         </p:nvSpPr>
         <p:spPr>
           <a:xfrm>
-            <a:off x="10807700" y="6413500"/>
-            <a:ext cx="673100" cy="215900"/>
+            <a:off x="10972800" y="6438900"/>
+            <a:ext cx="609600" cy="215900"/>
           </a:xfrm>
           <a:prstGeom prst="rect">
             <a:avLst/>
@@ -5519,7 +5710,7 @@
               </a:spcAft>
               <a:defRPr sz="1200" b="0">
                 <a:solidFill>
-                  <a:srgbClr val="626773"/>
+                  <a:srgbClr val="B7BFCC"/>
                 </a:solidFill>
                 <a:latin typeface="Arial"/>
               </a:defRPr>
@@ -5563,7 +5754,7 @@
             <a:avLst/>
           </a:prstGeom>
           <a:solidFill>
-            <a:srgbClr val="FFFFFF"/>
+            <a:srgbClr val="101217"/>
           </a:solidFill>
           <a:ln>
             <a:noFill/>
@@ -5593,14 +5784,57 @@
       </p:sp>
       <p:sp>
         <p:nvSpPr>
-          <p:cNvPr id="3" name="TextBox 2"/>
+          <p:cNvPr id="3" name="Rectangle 2"/>
+          <p:cNvSpPr/>
+          <p:nvPr/>
+        </p:nvSpPr>
+        <p:spPr>
+          <a:xfrm>
+            <a:off x="0" y="0"/>
+            <a:ext cx="101600" cy="6858000"/>
+          </a:xfrm>
+          <a:prstGeom prst="rect">
+            <a:avLst/>
+          </a:prstGeom>
+          <a:solidFill>
+            <a:srgbClr val="FF885D"/>
+          </a:solidFill>
+          <a:ln>
+            <a:noFill/>
+          </a:ln>
+        </p:spPr>
+        <p:style>
+          <a:lnRef idx="1">
+            <a:schemeClr val="accent1"/>
+          </a:lnRef>
+          <a:fillRef idx="3">
+            <a:schemeClr val="accent1"/>
+          </a:fillRef>
+          <a:effectRef idx="2">
+            <a:schemeClr val="accent1"/>
+          </a:effectRef>
+          <a:fontRef idx="minor">
+            <a:schemeClr val="lt1"/>
+          </a:fontRef>
+        </p:style>
+        <p:txBody>
+          <a:bodyPr rtlCol="0" anchor="ctr"/>
+          <a:lstStyle/>
+          <a:p>
+            <a:pPr algn="ctr"/>
+          </a:p>
+        </p:txBody>
+      </p:sp>
+      <p:sp>
+        <p:nvSpPr>
+          <p:cNvPr id="4" name="TextBox 3"/>
           <p:cNvSpPr txBox="1"/>
           <p:nvPr/>
         </p:nvSpPr>
         <p:spPr>
           <a:xfrm>
-            <a:off x="711200" y="457200"/>
-            <a:ext cx="10769600" cy="228600"/>
+            <a:off x="609600" y="444500"/>
+            <a:ext cx="10972800" cy="279400"/>
           </a:xfrm>
           <a:prstGeom prst="rect">
             <a:avLst/>
@@ -5622,7 +5856,7 @@
               </a:spcAft>
               <a:defRPr sz="1300" b="1">
                 <a:solidFill>
-                  <a:srgbClr val="626773"/>
+                  <a:srgbClr val="B7BFCC"/>
                 </a:solidFill>
                 <a:latin typeface="Arial"/>
               </a:defRPr>
@@ -5635,20 +5869,20 @@
       </p:sp>
       <p:sp>
         <p:nvSpPr>
-          <p:cNvPr id="4" name="Rectangle 3"/>
+          <p:cNvPr id="5" name="Rectangle 4"/>
           <p:cNvSpPr/>
           <p:nvPr/>
         </p:nvSpPr>
         <p:spPr>
           <a:xfrm>
-            <a:off x="711200" y="876300"/>
-            <a:ext cx="622300" cy="50800"/>
+            <a:off x="609600" y="876300"/>
+            <a:ext cx="685800" cy="50800"/>
           </a:xfrm>
           <a:prstGeom prst="rect">
             <a:avLst/>
           </a:prstGeom>
           <a:solidFill>
-            <a:srgbClr val="E55024"/>
+            <a:srgbClr val="FF885D"/>
           </a:solidFill>
           <a:ln>
             <a:noFill/>
@@ -5678,14 +5912,14 @@
       </p:sp>
       <p:sp>
         <p:nvSpPr>
-          <p:cNvPr id="5" name="TextBox 4"/>
+          <p:cNvPr id="6" name="TextBox 5"/>
           <p:cNvSpPr txBox="1"/>
           <p:nvPr/>
         </p:nvSpPr>
         <p:spPr>
           <a:xfrm>
-            <a:off x="685800" y="1257300"/>
-            <a:ext cx="10795000" cy="1168400"/>
+            <a:off x="584200" y="1206500"/>
+            <a:ext cx="10998200" cy="1130300"/>
           </a:xfrm>
           <a:prstGeom prst="rect">
             <a:avLst/>
@@ -5707,7 +5941,7 @@
               </a:spcAft>
               <a:defRPr sz="3600" b="1">
                 <a:solidFill>
-                  <a:srgbClr val="191B20"/>
+                  <a:srgbClr val="F5F6FA"/>
                 </a:solidFill>
                 <a:latin typeface="Arial"/>
               </a:defRPr>
@@ -5720,14 +5954,57 @@
       </p:sp>
       <p:sp>
         <p:nvSpPr>
-          <p:cNvPr id="6" name="TextBox 5"/>
+          <p:cNvPr id="7" name="Rectangle 6"/>
+          <p:cNvSpPr/>
+          <p:nvPr/>
+        </p:nvSpPr>
+        <p:spPr>
+          <a:xfrm>
+            <a:off x="609600" y="2209800"/>
+            <a:ext cx="609600" cy="482600"/>
+          </a:xfrm>
+          <a:prstGeom prst="rect">
+            <a:avLst/>
+          </a:prstGeom>
+          <a:solidFill>
+            <a:srgbClr val="1D222C"/>
+          </a:solidFill>
+          <a:ln>
+            <a:noFill/>
+          </a:ln>
+        </p:spPr>
+        <p:style>
+          <a:lnRef idx="1">
+            <a:schemeClr val="accent1"/>
+          </a:lnRef>
+          <a:fillRef idx="3">
+            <a:schemeClr val="accent1"/>
+          </a:fillRef>
+          <a:effectRef idx="2">
+            <a:schemeClr val="accent1"/>
+          </a:effectRef>
+          <a:fontRef idx="minor">
+            <a:schemeClr val="lt1"/>
+          </a:fontRef>
+        </p:style>
+        <p:txBody>
+          <a:bodyPr rtlCol="0" anchor="ctr"/>
+          <a:lstStyle/>
+          <a:p>
+            <a:pPr algn="ctr"/>
+          </a:p>
+        </p:txBody>
+      </p:sp>
+      <p:sp>
+        <p:nvSpPr>
+          <p:cNvPr id="8" name="TextBox 7"/>
           <p:cNvSpPr txBox="1"/>
           <p:nvPr/>
         </p:nvSpPr>
         <p:spPr>
           <a:xfrm>
-            <a:off x="711200" y="2146300"/>
-            <a:ext cx="482600" cy="355600"/>
+            <a:off x="736600" y="2286000"/>
+            <a:ext cx="482600" cy="368300"/>
           </a:xfrm>
           <a:prstGeom prst="rect">
             <a:avLst/>
@@ -5742,14 +6019,14 @@
           <a:p>
             <a:pPr>
               <a:lnSpc>
-                <a:spcPts val="2713"/>
+                <a:spcPts val="2477"/>
               </a:lnSpc>
               <a:spcAft>
                 <a:spcPts val="0"/>
               </a:spcAft>
-              <a:defRPr sz="2300" b="1">
+              <a:defRPr sz="2100" b="1">
                 <a:solidFill>
-                  <a:srgbClr val="E55024"/>
+                  <a:srgbClr val="FF885D"/>
                 </a:solidFill>
                 <a:latin typeface="Arial"/>
               </a:defRPr>
@@ -5762,14 +6039,14 @@
       </p:sp>
       <p:sp>
         <p:nvSpPr>
-          <p:cNvPr id="7" name="TextBox 6"/>
+          <p:cNvPr id="9" name="TextBox 8"/>
           <p:cNvSpPr txBox="1"/>
           <p:nvPr/>
         </p:nvSpPr>
         <p:spPr>
           <a:xfrm>
-            <a:off x="1346200" y="2146300"/>
-            <a:ext cx="3479800" cy="685800"/>
+            <a:off x="1422400" y="2247900"/>
+            <a:ext cx="3403600" cy="685800"/>
           </a:xfrm>
           <a:prstGeom prst="rect">
             <a:avLst/>
@@ -5791,7 +6068,7 @@
               </a:spcAft>
               <a:defRPr sz="2400" b="1">
                 <a:solidFill>
-                  <a:srgbClr val="191B20"/>
+                  <a:srgbClr val="F5F6FA"/>
                 </a:solidFill>
                 <a:latin typeface="Arial"/>
               </a:defRPr>
@@ -5804,13 +6081,13 @@
       </p:sp>
       <p:sp>
         <p:nvSpPr>
-          <p:cNvPr id="8" name="TextBox 7"/>
+          <p:cNvPr id="10" name="TextBox 9"/>
           <p:cNvSpPr txBox="1"/>
           <p:nvPr/>
         </p:nvSpPr>
         <p:spPr>
           <a:xfrm>
-            <a:off x="4965700" y="2171700"/>
+            <a:off x="4965700" y="2273300"/>
             <a:ext cx="6515100" cy="698500"/>
           </a:xfrm>
           <a:prstGeom prst="rect">
@@ -5833,7 +6110,7 @@
               </a:spcAft>
               <a:defRPr sz="2300" b="0">
                 <a:solidFill>
-                  <a:srgbClr val="626773"/>
+                  <a:srgbClr val="B7BFCC"/>
                 </a:solidFill>
                 <a:latin typeface="Arial"/>
               </a:defRPr>
@@ -5846,14 +6123,57 @@
       </p:sp>
       <p:sp>
         <p:nvSpPr>
-          <p:cNvPr id="9" name="TextBox 8"/>
+          <p:cNvPr id="11" name="Rectangle 10"/>
+          <p:cNvSpPr/>
+          <p:nvPr/>
+        </p:nvSpPr>
+        <p:spPr>
+          <a:xfrm>
+            <a:off x="609600" y="3035300"/>
+            <a:ext cx="609600" cy="482600"/>
+          </a:xfrm>
+          <a:prstGeom prst="rect">
+            <a:avLst/>
+          </a:prstGeom>
+          <a:solidFill>
+            <a:srgbClr val="1D222C"/>
+          </a:solidFill>
+          <a:ln>
+            <a:noFill/>
+          </a:ln>
+        </p:spPr>
+        <p:style>
+          <a:lnRef idx="1">
+            <a:schemeClr val="accent1"/>
+          </a:lnRef>
+          <a:fillRef idx="3">
+            <a:schemeClr val="accent1"/>
+          </a:fillRef>
+          <a:effectRef idx="2">
+            <a:schemeClr val="accent1"/>
+          </a:effectRef>
+          <a:fontRef idx="minor">
+            <a:schemeClr val="lt1"/>
+          </a:fontRef>
+        </p:style>
+        <p:txBody>
+          <a:bodyPr rtlCol="0" anchor="ctr"/>
+          <a:lstStyle/>
+          <a:p>
+            <a:pPr algn="ctr"/>
+          </a:p>
+        </p:txBody>
+      </p:sp>
+      <p:sp>
+        <p:nvSpPr>
+          <p:cNvPr id="12" name="TextBox 11"/>
           <p:cNvSpPr txBox="1"/>
           <p:nvPr/>
         </p:nvSpPr>
         <p:spPr>
           <a:xfrm>
-            <a:off x="711200" y="2971800"/>
-            <a:ext cx="482600" cy="355600"/>
+            <a:off x="736600" y="3111500"/>
+            <a:ext cx="482600" cy="368300"/>
           </a:xfrm>
           <a:prstGeom prst="rect">
             <a:avLst/>
@@ -5868,14 +6188,14 @@
           <a:p>
             <a:pPr>
               <a:lnSpc>
-                <a:spcPts val="2713"/>
+                <a:spcPts val="2477"/>
               </a:lnSpc>
               <a:spcAft>
                 <a:spcPts val="0"/>
               </a:spcAft>
-              <a:defRPr sz="2300" b="1">
+              <a:defRPr sz="2100" b="1">
                 <a:solidFill>
-                  <a:srgbClr val="E55024"/>
+                  <a:srgbClr val="FF885D"/>
                 </a:solidFill>
                 <a:latin typeface="Arial"/>
               </a:defRPr>
@@ -5888,14 +6208,14 @@
       </p:sp>
       <p:sp>
         <p:nvSpPr>
-          <p:cNvPr id="10" name="TextBox 9"/>
+          <p:cNvPr id="13" name="TextBox 12"/>
           <p:cNvSpPr txBox="1"/>
           <p:nvPr/>
         </p:nvSpPr>
         <p:spPr>
           <a:xfrm>
-            <a:off x="1346200" y="2971800"/>
-            <a:ext cx="3479800" cy="685800"/>
+            <a:off x="1422400" y="3073400"/>
+            <a:ext cx="3403600" cy="685800"/>
           </a:xfrm>
           <a:prstGeom prst="rect">
             <a:avLst/>
@@ -5917,7 +6237,7 @@
               </a:spcAft>
               <a:defRPr sz="2400" b="1">
                 <a:solidFill>
-                  <a:srgbClr val="191B20"/>
+                  <a:srgbClr val="F5F6FA"/>
                 </a:solidFill>
                 <a:latin typeface="Arial"/>
               </a:defRPr>
@@ -5930,13 +6250,13 @@
       </p:sp>
       <p:sp>
         <p:nvSpPr>
-          <p:cNvPr id="11" name="TextBox 10"/>
+          <p:cNvPr id="14" name="TextBox 13"/>
           <p:cNvSpPr txBox="1"/>
           <p:nvPr/>
         </p:nvSpPr>
         <p:spPr>
           <a:xfrm>
-            <a:off x="4965700" y="2997200"/>
+            <a:off x="4965700" y="3098800"/>
             <a:ext cx="6515100" cy="698500"/>
           </a:xfrm>
           <a:prstGeom prst="rect">
@@ -5959,7 +6279,7 @@
               </a:spcAft>
               <a:defRPr sz="2300" b="0">
                 <a:solidFill>
-                  <a:srgbClr val="626773"/>
+                  <a:srgbClr val="B7BFCC"/>
                 </a:solidFill>
                 <a:latin typeface="Arial"/>
               </a:defRPr>
@@ -5972,14 +6292,57 @@
       </p:sp>
       <p:sp>
         <p:nvSpPr>
-          <p:cNvPr id="12" name="TextBox 11"/>
+          <p:cNvPr id="15" name="Rectangle 14"/>
+          <p:cNvSpPr/>
+          <p:nvPr/>
+        </p:nvSpPr>
+        <p:spPr>
+          <a:xfrm>
+            <a:off x="609600" y="3860800"/>
+            <a:ext cx="609600" cy="482600"/>
+          </a:xfrm>
+          <a:prstGeom prst="rect">
+            <a:avLst/>
+          </a:prstGeom>
+          <a:solidFill>
+            <a:srgbClr val="1D222C"/>
+          </a:solidFill>
+          <a:ln>
+            <a:noFill/>
+          </a:ln>
+        </p:spPr>
+        <p:style>
+          <a:lnRef idx="1">
+            <a:schemeClr val="accent1"/>
+          </a:lnRef>
+          <a:fillRef idx="3">
+            <a:schemeClr val="accent1"/>
+          </a:fillRef>
+          <a:effectRef idx="2">
+            <a:schemeClr val="accent1"/>
+          </a:effectRef>
+          <a:fontRef idx="minor">
+            <a:schemeClr val="lt1"/>
+          </a:fontRef>
+        </p:style>
+        <p:txBody>
+          <a:bodyPr rtlCol="0" anchor="ctr"/>
+          <a:lstStyle/>
+          <a:p>
+            <a:pPr algn="ctr"/>
+          </a:p>
+        </p:txBody>
+      </p:sp>
+      <p:sp>
+        <p:nvSpPr>
+          <p:cNvPr id="16" name="TextBox 15"/>
           <p:cNvSpPr txBox="1"/>
           <p:nvPr/>
         </p:nvSpPr>
         <p:spPr>
           <a:xfrm>
-            <a:off x="711200" y="3797300"/>
-            <a:ext cx="482600" cy="355600"/>
+            <a:off x="736600" y="3937000"/>
+            <a:ext cx="482600" cy="368300"/>
           </a:xfrm>
           <a:prstGeom prst="rect">
             <a:avLst/>
@@ -5994,14 +6357,14 @@
           <a:p>
             <a:pPr>
               <a:lnSpc>
-                <a:spcPts val="2713"/>
+                <a:spcPts val="2477"/>
               </a:lnSpc>
               <a:spcAft>
                 <a:spcPts val="0"/>
               </a:spcAft>
-              <a:defRPr sz="2300" b="1">
+              <a:defRPr sz="2100" b="1">
                 <a:solidFill>
-                  <a:srgbClr val="E55024"/>
+                  <a:srgbClr val="FF885D"/>
                 </a:solidFill>
                 <a:latin typeface="Arial"/>
               </a:defRPr>
@@ -6014,14 +6377,14 @@
       </p:sp>
       <p:sp>
         <p:nvSpPr>
-          <p:cNvPr id="13" name="TextBox 12"/>
+          <p:cNvPr id="17" name="TextBox 16"/>
           <p:cNvSpPr txBox="1"/>
           <p:nvPr/>
         </p:nvSpPr>
         <p:spPr>
           <a:xfrm>
-            <a:off x="1346200" y="3797300"/>
-            <a:ext cx="3479800" cy="685800"/>
+            <a:off x="1422400" y="3898900"/>
+            <a:ext cx="3403600" cy="685800"/>
           </a:xfrm>
           <a:prstGeom prst="rect">
             <a:avLst/>
@@ -6043,7 +6406,7 @@
               </a:spcAft>
               <a:defRPr sz="2400" b="1">
                 <a:solidFill>
-                  <a:srgbClr val="191B20"/>
+                  <a:srgbClr val="F5F6FA"/>
                 </a:solidFill>
                 <a:latin typeface="Arial"/>
               </a:defRPr>
@@ -6056,13 +6419,13 @@
       </p:sp>
       <p:sp>
         <p:nvSpPr>
-          <p:cNvPr id="14" name="TextBox 13"/>
+          <p:cNvPr id="18" name="TextBox 17"/>
           <p:cNvSpPr txBox="1"/>
           <p:nvPr/>
         </p:nvSpPr>
         <p:spPr>
           <a:xfrm>
-            <a:off x="4965700" y="3822700"/>
+            <a:off x="4965700" y="3924300"/>
             <a:ext cx="6515100" cy="698500"/>
           </a:xfrm>
           <a:prstGeom prst="rect">
@@ -6085,7 +6448,7 @@
               </a:spcAft>
               <a:defRPr sz="2300" b="0">
                 <a:solidFill>
-                  <a:srgbClr val="626773"/>
+                  <a:srgbClr val="B7BFCC"/>
                 </a:solidFill>
                 <a:latin typeface="Arial"/>
               </a:defRPr>
@@ -6098,14 +6461,57 @@
       </p:sp>
       <p:sp>
         <p:nvSpPr>
-          <p:cNvPr id="15" name="TextBox 14"/>
+          <p:cNvPr id="19" name="Rectangle 18"/>
+          <p:cNvSpPr/>
+          <p:nvPr/>
+        </p:nvSpPr>
+        <p:spPr>
+          <a:xfrm>
+            <a:off x="609600" y="4686300"/>
+            <a:ext cx="609600" cy="482600"/>
+          </a:xfrm>
+          <a:prstGeom prst="rect">
+            <a:avLst/>
+          </a:prstGeom>
+          <a:solidFill>
+            <a:srgbClr val="1D222C"/>
+          </a:solidFill>
+          <a:ln>
+            <a:noFill/>
+          </a:ln>
+        </p:spPr>
+        <p:style>
+          <a:lnRef idx="1">
+            <a:schemeClr val="accent1"/>
+          </a:lnRef>
+          <a:fillRef idx="3">
+            <a:schemeClr val="accent1"/>
+          </a:fillRef>
+          <a:effectRef idx="2">
+            <a:schemeClr val="accent1"/>
+          </a:effectRef>
+          <a:fontRef idx="minor">
+            <a:schemeClr val="lt1"/>
+          </a:fontRef>
+        </p:style>
+        <p:txBody>
+          <a:bodyPr rtlCol="0" anchor="ctr"/>
+          <a:lstStyle/>
+          <a:p>
+            <a:pPr algn="ctr"/>
+          </a:p>
+        </p:txBody>
+      </p:sp>
+      <p:sp>
+        <p:nvSpPr>
+          <p:cNvPr id="20" name="TextBox 19"/>
           <p:cNvSpPr txBox="1"/>
           <p:nvPr/>
         </p:nvSpPr>
         <p:spPr>
           <a:xfrm>
-            <a:off x="711200" y="4622800"/>
-            <a:ext cx="482600" cy="355600"/>
+            <a:off x="736600" y="4762500"/>
+            <a:ext cx="482600" cy="368300"/>
           </a:xfrm>
           <a:prstGeom prst="rect">
             <a:avLst/>
@@ -6120,14 +6526,14 @@
           <a:p>
             <a:pPr>
               <a:lnSpc>
-                <a:spcPts val="2713"/>
+                <a:spcPts val="2477"/>
               </a:lnSpc>
               <a:spcAft>
                 <a:spcPts val="0"/>
               </a:spcAft>
-              <a:defRPr sz="2300" b="1">
+              <a:defRPr sz="2100" b="1">
                 <a:solidFill>
-                  <a:srgbClr val="E55024"/>
+                  <a:srgbClr val="FF885D"/>
                 </a:solidFill>
                 <a:latin typeface="Arial"/>
               </a:defRPr>
@@ -6140,14 +6546,14 @@
       </p:sp>
       <p:sp>
         <p:nvSpPr>
-          <p:cNvPr id="16" name="TextBox 15"/>
+          <p:cNvPr id="21" name="TextBox 20"/>
           <p:cNvSpPr txBox="1"/>
           <p:nvPr/>
         </p:nvSpPr>
         <p:spPr>
           <a:xfrm>
-            <a:off x="1346200" y="4622800"/>
-            <a:ext cx="3479800" cy="685800"/>
+            <a:off x="1422400" y="4724400"/>
+            <a:ext cx="3403600" cy="685800"/>
           </a:xfrm>
           <a:prstGeom prst="rect">
             <a:avLst/>
@@ -6169,7 +6575,7 @@
               </a:spcAft>
               <a:defRPr sz="2400" b="1">
                 <a:solidFill>
-                  <a:srgbClr val="191B20"/>
+                  <a:srgbClr val="F5F6FA"/>
                 </a:solidFill>
                 <a:latin typeface="Arial"/>
               </a:defRPr>
@@ -6182,13 +6588,13 @@
       </p:sp>
       <p:sp>
         <p:nvSpPr>
-          <p:cNvPr id="17" name="TextBox 16"/>
+          <p:cNvPr id="22" name="TextBox 21"/>
           <p:cNvSpPr txBox="1"/>
           <p:nvPr/>
         </p:nvSpPr>
         <p:spPr>
           <a:xfrm>
-            <a:off x="4965700" y="4648200"/>
+            <a:off x="4965700" y="4749800"/>
             <a:ext cx="6515100" cy="698500"/>
           </a:xfrm>
           <a:prstGeom prst="rect">
@@ -6211,7 +6617,7 @@
               </a:spcAft>
               <a:defRPr sz="2300" b="0">
                 <a:solidFill>
-                  <a:srgbClr val="626773"/>
+                  <a:srgbClr val="B7BFCC"/>
                 </a:solidFill>
                 <a:latin typeface="Arial"/>
               </a:defRPr>
@@ -6224,14 +6630,14 @@
       </p:sp>
       <p:sp>
         <p:nvSpPr>
-          <p:cNvPr id="18" name="TextBox 17"/>
+          <p:cNvPr id="23" name="TextBox 22"/>
           <p:cNvSpPr txBox="1"/>
           <p:nvPr/>
         </p:nvSpPr>
         <p:spPr>
           <a:xfrm>
-            <a:off x="711200" y="5473700"/>
-            <a:ext cx="10769600" cy="596900"/>
+            <a:off x="609600" y="5651500"/>
+            <a:ext cx="10972800" cy="508000"/>
           </a:xfrm>
           <a:prstGeom prst="rect">
             <a:avLst/>
@@ -6253,7 +6659,7 @@
               </a:spcAft>
               <a:defRPr sz="1800" b="0">
                 <a:solidFill>
-                  <a:srgbClr val="626773"/>
+                  <a:srgbClr val="B7BFCC"/>
                 </a:solidFill>
                 <a:latin typeface="Arial"/>
               </a:defRPr>
@@ -6266,20 +6672,20 @@
       </p:sp>
       <p:sp>
         <p:nvSpPr>
-          <p:cNvPr id="19" name="Rectangle 18"/>
+          <p:cNvPr id="24" name="Rectangle 23"/>
           <p:cNvSpPr/>
           <p:nvPr/>
         </p:nvSpPr>
         <p:spPr>
           <a:xfrm>
-            <a:off x="711200" y="6248400"/>
-            <a:ext cx="10769600" cy="12700"/>
+            <a:off x="609600" y="6273800"/>
+            <a:ext cx="10972800" cy="12700"/>
           </a:xfrm>
           <a:prstGeom prst="rect">
             <a:avLst/>
           </a:prstGeom>
           <a:solidFill>
-            <a:srgbClr val="DFE2E7"/>
+            <a:srgbClr val="3D4552"/>
           </a:solidFill>
           <a:ln>
             <a:noFill/>
@@ -6309,14 +6715,14 @@
       </p:sp>
       <p:sp>
         <p:nvSpPr>
-          <p:cNvPr id="20" name="TextBox 19"/>
+          <p:cNvPr id="25" name="TextBox 24"/>
           <p:cNvSpPr txBox="1"/>
           <p:nvPr/>
         </p:nvSpPr>
         <p:spPr>
           <a:xfrm>
-            <a:off x="711200" y="6438900"/>
-            <a:ext cx="9652000" cy="203200"/>
+            <a:off x="609600" y="6464300"/>
+            <a:ext cx="9906000" cy="203200"/>
           </a:xfrm>
           <a:prstGeom prst="rect">
             <a:avLst/>
@@ -6338,7 +6744,7 @@
               </a:spcAft>
               <a:defRPr sz="1100" b="0">
                 <a:solidFill>
-                  <a:srgbClr val="626773"/>
+                  <a:srgbClr val="B7BFCC"/>
                 </a:solidFill>
                 <a:latin typeface="Arial"/>
               </a:defRPr>
@@ -6351,14 +6757,14 @@
       </p:sp>
       <p:sp>
         <p:nvSpPr>
-          <p:cNvPr id="21" name="TextBox 20"/>
+          <p:cNvPr id="26" name="TextBox 25"/>
           <p:cNvSpPr txBox="1"/>
           <p:nvPr/>
         </p:nvSpPr>
         <p:spPr>
           <a:xfrm>
-            <a:off x="10807700" y="6413500"/>
-            <a:ext cx="673100" cy="215900"/>
+            <a:off x="10972800" y="6438900"/>
+            <a:ext cx="609600" cy="215900"/>
           </a:xfrm>
           <a:prstGeom prst="rect">
             <a:avLst/>
@@ -6380,7 +6786,7 @@
               </a:spcAft>
               <a:defRPr sz="1200" b="0">
                 <a:solidFill>
-                  <a:srgbClr val="626773"/>
+                  <a:srgbClr val="B7BFCC"/>
                 </a:solidFill>
                 <a:latin typeface="Arial"/>
               </a:defRPr>
@@ -6424,7 +6830,7 @@
             <a:avLst/>
           </a:prstGeom>
           <a:solidFill>
-            <a:srgbClr val="FFFFFF"/>
+            <a:srgbClr val="101217"/>
           </a:solidFill>
           <a:ln>
             <a:noFill/>
@@ -6454,14 +6860,57 @@
       </p:sp>
       <p:sp>
         <p:nvSpPr>
-          <p:cNvPr id="3" name="TextBox 2"/>
+          <p:cNvPr id="3" name="Rectangle 2"/>
+          <p:cNvSpPr/>
+          <p:nvPr/>
+        </p:nvSpPr>
+        <p:spPr>
+          <a:xfrm>
+            <a:off x="0" y="0"/>
+            <a:ext cx="101600" cy="6858000"/>
+          </a:xfrm>
+          <a:prstGeom prst="rect">
+            <a:avLst/>
+          </a:prstGeom>
+          <a:solidFill>
+            <a:srgbClr val="FF885D"/>
+          </a:solidFill>
+          <a:ln>
+            <a:noFill/>
+          </a:ln>
+        </p:spPr>
+        <p:style>
+          <a:lnRef idx="1">
+            <a:schemeClr val="accent1"/>
+          </a:lnRef>
+          <a:fillRef idx="3">
+            <a:schemeClr val="accent1"/>
+          </a:fillRef>
+          <a:effectRef idx="2">
+            <a:schemeClr val="accent1"/>
+          </a:effectRef>
+          <a:fontRef idx="minor">
+            <a:schemeClr val="lt1"/>
+          </a:fontRef>
+        </p:style>
+        <p:txBody>
+          <a:bodyPr rtlCol="0" anchor="ctr"/>
+          <a:lstStyle/>
+          <a:p>
+            <a:pPr algn="ctr"/>
+          </a:p>
+        </p:txBody>
+      </p:sp>
+      <p:sp>
+        <p:nvSpPr>
+          <p:cNvPr id="4" name="TextBox 3"/>
           <p:cNvSpPr txBox="1"/>
           <p:nvPr/>
         </p:nvSpPr>
         <p:spPr>
           <a:xfrm>
-            <a:off x="711200" y="457200"/>
-            <a:ext cx="10769600" cy="228600"/>
+            <a:off x="609600" y="444500"/>
+            <a:ext cx="10972800" cy="279400"/>
           </a:xfrm>
           <a:prstGeom prst="rect">
             <a:avLst/>
@@ -6483,7 +6932,7 @@
               </a:spcAft>
               <a:defRPr sz="1300" b="1">
                 <a:solidFill>
-                  <a:srgbClr val="626773"/>
+                  <a:srgbClr val="B7BFCC"/>
                 </a:solidFill>
                 <a:latin typeface="Arial"/>
               </a:defRPr>
@@ -6496,20 +6945,20 @@
       </p:sp>
       <p:sp>
         <p:nvSpPr>
-          <p:cNvPr id="4" name="Rectangle 3"/>
+          <p:cNvPr id="5" name="Rectangle 4"/>
           <p:cNvSpPr/>
           <p:nvPr/>
         </p:nvSpPr>
         <p:spPr>
           <a:xfrm>
-            <a:off x="711200" y="876300"/>
-            <a:ext cx="622300" cy="50800"/>
+            <a:off x="609600" y="876300"/>
+            <a:ext cx="685800" cy="50800"/>
           </a:xfrm>
           <a:prstGeom prst="rect">
             <a:avLst/>
           </a:prstGeom>
           <a:solidFill>
-            <a:srgbClr val="E55024"/>
+            <a:srgbClr val="FF885D"/>
           </a:solidFill>
           <a:ln>
             <a:noFill/>
@@ -6539,14 +6988,14 @@
       </p:sp>
       <p:sp>
         <p:nvSpPr>
-          <p:cNvPr id="5" name="TextBox 4"/>
+          <p:cNvPr id="6" name="TextBox 5"/>
           <p:cNvSpPr txBox="1"/>
           <p:nvPr/>
         </p:nvSpPr>
         <p:spPr>
           <a:xfrm>
-            <a:off x="685800" y="1257300"/>
-            <a:ext cx="10795000" cy="1168400"/>
+            <a:off x="584200" y="1206500"/>
+            <a:ext cx="10998200" cy="1130300"/>
           </a:xfrm>
           <a:prstGeom prst="rect">
             <a:avLst/>
@@ -6568,7 +7017,7 @@
               </a:spcAft>
               <a:defRPr sz="3600" b="1">
                 <a:solidFill>
-                  <a:srgbClr val="191B20"/>
+                  <a:srgbClr val="F5F6FA"/>
                 </a:solidFill>
                 <a:latin typeface="Arial"/>
               </a:defRPr>
@@ -6581,14 +7030,57 @@
       </p:sp>
       <p:sp>
         <p:nvSpPr>
-          <p:cNvPr id="6" name="TextBox 5"/>
+          <p:cNvPr id="7" name="Rectangle 6"/>
+          <p:cNvSpPr/>
+          <p:nvPr/>
+        </p:nvSpPr>
+        <p:spPr>
+          <a:xfrm>
+            <a:off x="609600" y="2209800"/>
+            <a:ext cx="609600" cy="482600"/>
+          </a:xfrm>
+          <a:prstGeom prst="rect">
+            <a:avLst/>
+          </a:prstGeom>
+          <a:solidFill>
+            <a:srgbClr val="1D222C"/>
+          </a:solidFill>
+          <a:ln>
+            <a:noFill/>
+          </a:ln>
+        </p:spPr>
+        <p:style>
+          <a:lnRef idx="1">
+            <a:schemeClr val="accent1"/>
+          </a:lnRef>
+          <a:fillRef idx="3">
+            <a:schemeClr val="accent1"/>
+          </a:fillRef>
+          <a:effectRef idx="2">
+            <a:schemeClr val="accent1"/>
+          </a:effectRef>
+          <a:fontRef idx="minor">
+            <a:schemeClr val="lt1"/>
+          </a:fontRef>
+        </p:style>
+        <p:txBody>
+          <a:bodyPr rtlCol="0" anchor="ctr"/>
+          <a:lstStyle/>
+          <a:p>
+            <a:pPr algn="ctr"/>
+          </a:p>
+        </p:txBody>
+      </p:sp>
+      <p:sp>
+        <p:nvSpPr>
+          <p:cNvPr id="8" name="TextBox 7"/>
           <p:cNvSpPr txBox="1"/>
           <p:nvPr/>
         </p:nvSpPr>
         <p:spPr>
           <a:xfrm>
-            <a:off x="711200" y="2146300"/>
-            <a:ext cx="482600" cy="355600"/>
+            <a:off x="736600" y="2286000"/>
+            <a:ext cx="482600" cy="368300"/>
           </a:xfrm>
           <a:prstGeom prst="rect">
             <a:avLst/>
@@ -6603,14 +7095,14 @@
           <a:p>
             <a:pPr>
               <a:lnSpc>
-                <a:spcPts val="2713"/>
+                <a:spcPts val="2477"/>
               </a:lnSpc>
               <a:spcAft>
                 <a:spcPts val="0"/>
               </a:spcAft>
-              <a:defRPr sz="2300" b="1">
+              <a:defRPr sz="2100" b="1">
                 <a:solidFill>
-                  <a:srgbClr val="E55024"/>
+                  <a:srgbClr val="FF885D"/>
                 </a:solidFill>
                 <a:latin typeface="Arial"/>
               </a:defRPr>
@@ -6623,14 +7115,14 @@
       </p:sp>
       <p:sp>
         <p:nvSpPr>
-          <p:cNvPr id="7" name="TextBox 6"/>
+          <p:cNvPr id="9" name="TextBox 8"/>
           <p:cNvSpPr txBox="1"/>
           <p:nvPr/>
         </p:nvSpPr>
         <p:spPr>
           <a:xfrm>
-            <a:off x="1346200" y="2146300"/>
-            <a:ext cx="3479800" cy="685800"/>
+            <a:off x="1422400" y="2247900"/>
+            <a:ext cx="3403600" cy="685800"/>
           </a:xfrm>
           <a:prstGeom prst="rect">
             <a:avLst/>
@@ -6652,7 +7144,7 @@
               </a:spcAft>
               <a:defRPr sz="2400" b="1">
                 <a:solidFill>
-                  <a:srgbClr val="191B20"/>
+                  <a:srgbClr val="F5F6FA"/>
                 </a:solidFill>
                 <a:latin typeface="Arial"/>
               </a:defRPr>
@@ -6665,13 +7157,13 @@
       </p:sp>
       <p:sp>
         <p:nvSpPr>
-          <p:cNvPr id="8" name="TextBox 7"/>
+          <p:cNvPr id="10" name="TextBox 9"/>
           <p:cNvSpPr txBox="1"/>
           <p:nvPr/>
         </p:nvSpPr>
         <p:spPr>
           <a:xfrm>
-            <a:off x="4965700" y="2171700"/>
+            <a:off x="4965700" y="2273300"/>
             <a:ext cx="6515100" cy="698500"/>
           </a:xfrm>
           <a:prstGeom prst="rect">
@@ -6694,7 +7186,7 @@
               </a:spcAft>
               <a:defRPr sz="2300" b="0">
                 <a:solidFill>
-                  <a:srgbClr val="626773"/>
+                  <a:srgbClr val="B7BFCC"/>
                 </a:solidFill>
                 <a:latin typeface="Arial"/>
               </a:defRPr>
@@ -6707,14 +7199,57 @@
       </p:sp>
       <p:sp>
         <p:nvSpPr>
-          <p:cNvPr id="9" name="TextBox 8"/>
+          <p:cNvPr id="11" name="Rectangle 10"/>
+          <p:cNvSpPr/>
+          <p:nvPr/>
+        </p:nvSpPr>
+        <p:spPr>
+          <a:xfrm>
+            <a:off x="609600" y="3035300"/>
+            <a:ext cx="609600" cy="482600"/>
+          </a:xfrm>
+          <a:prstGeom prst="rect">
+            <a:avLst/>
+          </a:prstGeom>
+          <a:solidFill>
+            <a:srgbClr val="1D222C"/>
+          </a:solidFill>
+          <a:ln>
+            <a:noFill/>
+          </a:ln>
+        </p:spPr>
+        <p:style>
+          <a:lnRef idx="1">
+            <a:schemeClr val="accent1"/>
+          </a:lnRef>
+          <a:fillRef idx="3">
+            <a:schemeClr val="accent1"/>
+          </a:fillRef>
+          <a:effectRef idx="2">
+            <a:schemeClr val="accent1"/>
+          </a:effectRef>
+          <a:fontRef idx="minor">
+            <a:schemeClr val="lt1"/>
+          </a:fontRef>
+        </p:style>
+        <p:txBody>
+          <a:bodyPr rtlCol="0" anchor="ctr"/>
+          <a:lstStyle/>
+          <a:p>
+            <a:pPr algn="ctr"/>
+          </a:p>
+        </p:txBody>
+      </p:sp>
+      <p:sp>
+        <p:nvSpPr>
+          <p:cNvPr id="12" name="TextBox 11"/>
           <p:cNvSpPr txBox="1"/>
           <p:nvPr/>
         </p:nvSpPr>
         <p:spPr>
           <a:xfrm>
-            <a:off x="711200" y="2971800"/>
-            <a:ext cx="482600" cy="355600"/>
+            <a:off x="736600" y="3111500"/>
+            <a:ext cx="482600" cy="368300"/>
           </a:xfrm>
           <a:prstGeom prst="rect">
             <a:avLst/>
@@ -6729,14 +7264,14 @@
           <a:p>
             <a:pPr>
               <a:lnSpc>
-                <a:spcPts val="2713"/>
+                <a:spcPts val="2477"/>
               </a:lnSpc>
               <a:spcAft>
                 <a:spcPts val="0"/>
               </a:spcAft>
-              <a:defRPr sz="2300" b="1">
+              <a:defRPr sz="2100" b="1">
                 <a:solidFill>
-                  <a:srgbClr val="E55024"/>
+                  <a:srgbClr val="FF885D"/>
                 </a:solidFill>
                 <a:latin typeface="Arial"/>
               </a:defRPr>
@@ -6749,14 +7284,14 @@
       </p:sp>
       <p:sp>
         <p:nvSpPr>
-          <p:cNvPr id="10" name="TextBox 9"/>
+          <p:cNvPr id="13" name="TextBox 12"/>
           <p:cNvSpPr txBox="1"/>
           <p:nvPr/>
         </p:nvSpPr>
         <p:spPr>
           <a:xfrm>
-            <a:off x="1346200" y="2971800"/>
-            <a:ext cx="3479800" cy="685800"/>
+            <a:off x="1422400" y="3073400"/>
+            <a:ext cx="3403600" cy="685800"/>
           </a:xfrm>
           <a:prstGeom prst="rect">
             <a:avLst/>
@@ -6778,7 +7313,7 @@
               </a:spcAft>
               <a:defRPr sz="2400" b="1">
                 <a:solidFill>
-                  <a:srgbClr val="191B20"/>
+                  <a:srgbClr val="F5F6FA"/>
                 </a:solidFill>
                 <a:latin typeface="Arial"/>
               </a:defRPr>
@@ -6791,13 +7326,13 @@
       </p:sp>
       <p:sp>
         <p:nvSpPr>
-          <p:cNvPr id="11" name="TextBox 10"/>
+          <p:cNvPr id="14" name="TextBox 13"/>
           <p:cNvSpPr txBox="1"/>
           <p:nvPr/>
         </p:nvSpPr>
         <p:spPr>
           <a:xfrm>
-            <a:off x="4965700" y="2997200"/>
+            <a:off x="4965700" y="3098800"/>
             <a:ext cx="6515100" cy="698500"/>
           </a:xfrm>
           <a:prstGeom prst="rect">
@@ -6820,7 +7355,7 @@
               </a:spcAft>
               <a:defRPr sz="2300" b="0">
                 <a:solidFill>
-                  <a:srgbClr val="626773"/>
+                  <a:srgbClr val="B7BFCC"/>
                 </a:solidFill>
                 <a:latin typeface="Arial"/>
               </a:defRPr>
@@ -6833,14 +7368,57 @@
       </p:sp>
       <p:sp>
         <p:nvSpPr>
-          <p:cNvPr id="12" name="TextBox 11"/>
+          <p:cNvPr id="15" name="Rectangle 14"/>
+          <p:cNvSpPr/>
+          <p:nvPr/>
+        </p:nvSpPr>
+        <p:spPr>
+          <a:xfrm>
+            <a:off x="609600" y="3860800"/>
+            <a:ext cx="609600" cy="482600"/>
+          </a:xfrm>
+          <a:prstGeom prst="rect">
+            <a:avLst/>
+          </a:prstGeom>
+          <a:solidFill>
+            <a:srgbClr val="1D222C"/>
+          </a:solidFill>
+          <a:ln>
+            <a:noFill/>
+          </a:ln>
+        </p:spPr>
+        <p:style>
+          <a:lnRef idx="1">
+            <a:schemeClr val="accent1"/>
+          </a:lnRef>
+          <a:fillRef idx="3">
+            <a:schemeClr val="accent1"/>
+          </a:fillRef>
+          <a:effectRef idx="2">
+            <a:schemeClr val="accent1"/>
+          </a:effectRef>
+          <a:fontRef idx="minor">
+            <a:schemeClr val="lt1"/>
+          </a:fontRef>
+        </p:style>
+        <p:txBody>
+          <a:bodyPr rtlCol="0" anchor="ctr"/>
+          <a:lstStyle/>
+          <a:p>
+            <a:pPr algn="ctr"/>
+          </a:p>
+        </p:txBody>
+      </p:sp>
+      <p:sp>
+        <p:nvSpPr>
+          <p:cNvPr id="16" name="TextBox 15"/>
           <p:cNvSpPr txBox="1"/>
           <p:nvPr/>
         </p:nvSpPr>
         <p:spPr>
           <a:xfrm>
-            <a:off x="711200" y="3797300"/>
-            <a:ext cx="482600" cy="355600"/>
+            <a:off x="736600" y="3937000"/>
+            <a:ext cx="482600" cy="368300"/>
           </a:xfrm>
           <a:prstGeom prst="rect">
             <a:avLst/>
@@ -6855,14 +7433,14 @@
           <a:p>
             <a:pPr>
               <a:lnSpc>
-                <a:spcPts val="2713"/>
+                <a:spcPts val="2477"/>
               </a:lnSpc>
               <a:spcAft>
                 <a:spcPts val="0"/>
               </a:spcAft>
-              <a:defRPr sz="2300" b="1">
+              <a:defRPr sz="2100" b="1">
                 <a:solidFill>
-                  <a:srgbClr val="E55024"/>
+                  <a:srgbClr val="FF885D"/>
                 </a:solidFill>
                 <a:latin typeface="Arial"/>
               </a:defRPr>
@@ -6875,14 +7453,14 @@
       </p:sp>
       <p:sp>
         <p:nvSpPr>
-          <p:cNvPr id="13" name="TextBox 12"/>
+          <p:cNvPr id="17" name="TextBox 16"/>
           <p:cNvSpPr txBox="1"/>
           <p:nvPr/>
         </p:nvSpPr>
         <p:spPr>
           <a:xfrm>
-            <a:off x="1346200" y="3797300"/>
-            <a:ext cx="3479800" cy="685800"/>
+            <a:off x="1422400" y="3898900"/>
+            <a:ext cx="3403600" cy="685800"/>
           </a:xfrm>
           <a:prstGeom prst="rect">
             <a:avLst/>
@@ -6904,7 +7482,7 @@
               </a:spcAft>
               <a:defRPr sz="2400" b="1">
                 <a:solidFill>
-                  <a:srgbClr val="191B20"/>
+                  <a:srgbClr val="F5F6FA"/>
                 </a:solidFill>
                 <a:latin typeface="Arial"/>
               </a:defRPr>
@@ -6917,13 +7495,13 @@
       </p:sp>
       <p:sp>
         <p:nvSpPr>
-          <p:cNvPr id="14" name="TextBox 13"/>
+          <p:cNvPr id="18" name="TextBox 17"/>
           <p:cNvSpPr txBox="1"/>
           <p:nvPr/>
         </p:nvSpPr>
         <p:spPr>
           <a:xfrm>
-            <a:off x="4965700" y="3822700"/>
+            <a:off x="4965700" y="3924300"/>
             <a:ext cx="6515100" cy="698500"/>
           </a:xfrm>
           <a:prstGeom prst="rect">
@@ -6946,7 +7524,7 @@
               </a:spcAft>
               <a:defRPr sz="2300" b="0">
                 <a:solidFill>
-                  <a:srgbClr val="626773"/>
+                  <a:srgbClr val="B7BFCC"/>
                 </a:solidFill>
                 <a:latin typeface="Arial"/>
               </a:defRPr>
@@ -6959,14 +7537,57 @@
       </p:sp>
       <p:sp>
         <p:nvSpPr>
-          <p:cNvPr id="15" name="TextBox 14"/>
+          <p:cNvPr id="19" name="Rectangle 18"/>
+          <p:cNvSpPr/>
+          <p:nvPr/>
+        </p:nvSpPr>
+        <p:spPr>
+          <a:xfrm>
+            <a:off x="609600" y="4686300"/>
+            <a:ext cx="609600" cy="482600"/>
+          </a:xfrm>
+          <a:prstGeom prst="rect">
+            <a:avLst/>
+          </a:prstGeom>
+          <a:solidFill>
+            <a:srgbClr val="1D222C"/>
+          </a:solidFill>
+          <a:ln>
+            <a:noFill/>
+          </a:ln>
+        </p:spPr>
+        <p:style>
+          <a:lnRef idx="1">
+            <a:schemeClr val="accent1"/>
+          </a:lnRef>
+          <a:fillRef idx="3">
+            <a:schemeClr val="accent1"/>
+          </a:fillRef>
+          <a:effectRef idx="2">
+            <a:schemeClr val="accent1"/>
+          </a:effectRef>
+          <a:fontRef idx="minor">
+            <a:schemeClr val="lt1"/>
+          </a:fontRef>
+        </p:style>
+        <p:txBody>
+          <a:bodyPr rtlCol="0" anchor="ctr"/>
+          <a:lstStyle/>
+          <a:p>
+            <a:pPr algn="ctr"/>
+          </a:p>
+        </p:txBody>
+      </p:sp>
+      <p:sp>
+        <p:nvSpPr>
+          <p:cNvPr id="20" name="TextBox 19"/>
           <p:cNvSpPr txBox="1"/>
           <p:nvPr/>
         </p:nvSpPr>
         <p:spPr>
           <a:xfrm>
-            <a:off x="711200" y="4622800"/>
-            <a:ext cx="482600" cy="355600"/>
+            <a:off x="736600" y="4762500"/>
+            <a:ext cx="482600" cy="368300"/>
           </a:xfrm>
           <a:prstGeom prst="rect">
             <a:avLst/>
@@ -6981,14 +7602,14 @@
           <a:p>
             <a:pPr>
               <a:lnSpc>
-                <a:spcPts val="2713"/>
+                <a:spcPts val="2477"/>
               </a:lnSpc>
               <a:spcAft>
                 <a:spcPts val="0"/>
               </a:spcAft>
-              <a:defRPr sz="2300" b="1">
+              <a:defRPr sz="2100" b="1">
                 <a:solidFill>
-                  <a:srgbClr val="E55024"/>
+                  <a:srgbClr val="FF885D"/>
                 </a:solidFill>
                 <a:latin typeface="Arial"/>
               </a:defRPr>
@@ -7001,14 +7622,14 @@
       </p:sp>
       <p:sp>
         <p:nvSpPr>
-          <p:cNvPr id="16" name="TextBox 15"/>
+          <p:cNvPr id="21" name="TextBox 20"/>
           <p:cNvSpPr txBox="1"/>
           <p:nvPr/>
         </p:nvSpPr>
         <p:spPr>
           <a:xfrm>
-            <a:off x="1346200" y="4622800"/>
-            <a:ext cx="3479800" cy="685800"/>
+            <a:off x="1422400" y="4724400"/>
+            <a:ext cx="3403600" cy="685800"/>
           </a:xfrm>
           <a:prstGeom prst="rect">
             <a:avLst/>
@@ -7030,7 +7651,7 @@
               </a:spcAft>
               <a:defRPr sz="2400" b="1">
                 <a:solidFill>
-                  <a:srgbClr val="191B20"/>
+                  <a:srgbClr val="F5F6FA"/>
                 </a:solidFill>
                 <a:latin typeface="Arial"/>
               </a:defRPr>
@@ -7043,13 +7664,13 @@
       </p:sp>
       <p:sp>
         <p:nvSpPr>
-          <p:cNvPr id="17" name="TextBox 16"/>
+          <p:cNvPr id="22" name="TextBox 21"/>
           <p:cNvSpPr txBox="1"/>
           <p:nvPr/>
         </p:nvSpPr>
         <p:spPr>
           <a:xfrm>
-            <a:off x="4965700" y="4648200"/>
+            <a:off x="4965700" y="4749800"/>
             <a:ext cx="6515100" cy="698500"/>
           </a:xfrm>
           <a:prstGeom prst="rect">
@@ -7072,7 +7693,7 @@
               </a:spcAft>
               <a:defRPr sz="2300" b="0">
                 <a:solidFill>
-                  <a:srgbClr val="626773"/>
+                  <a:srgbClr val="B7BFCC"/>
                 </a:solidFill>
                 <a:latin typeface="Arial"/>
               </a:defRPr>
@@ -7085,14 +7706,14 @@
       </p:sp>
       <p:sp>
         <p:nvSpPr>
-          <p:cNvPr id="18" name="TextBox 17"/>
+          <p:cNvPr id="23" name="TextBox 22"/>
           <p:cNvSpPr txBox="1"/>
           <p:nvPr/>
         </p:nvSpPr>
         <p:spPr>
           <a:xfrm>
-            <a:off x="711200" y="5473700"/>
-            <a:ext cx="10769600" cy="596900"/>
+            <a:off x="609600" y="5651500"/>
+            <a:ext cx="10972800" cy="508000"/>
           </a:xfrm>
           <a:prstGeom prst="rect">
             <a:avLst/>
@@ -7114,7 +7735,7 @@
               </a:spcAft>
               <a:defRPr sz="1800" b="0">
                 <a:solidFill>
-                  <a:srgbClr val="626773"/>
+                  <a:srgbClr val="B7BFCC"/>
                 </a:solidFill>
                 <a:latin typeface="Arial"/>
               </a:defRPr>
@@ -7127,20 +7748,20 @@
       </p:sp>
       <p:sp>
         <p:nvSpPr>
-          <p:cNvPr id="19" name="Rectangle 18"/>
+          <p:cNvPr id="24" name="Rectangle 23"/>
           <p:cNvSpPr/>
           <p:nvPr/>
         </p:nvSpPr>
         <p:spPr>
           <a:xfrm>
-            <a:off x="711200" y="6248400"/>
-            <a:ext cx="10769600" cy="12700"/>
+            <a:off x="609600" y="6273800"/>
+            <a:ext cx="10972800" cy="12700"/>
           </a:xfrm>
           <a:prstGeom prst="rect">
             <a:avLst/>
           </a:prstGeom>
           <a:solidFill>
-            <a:srgbClr val="DFE2E7"/>
+            <a:srgbClr val="3D4552"/>
           </a:solidFill>
           <a:ln>
             <a:noFill/>
@@ -7170,14 +7791,14 @@
       </p:sp>
       <p:sp>
         <p:nvSpPr>
-          <p:cNvPr id="20" name="TextBox 19"/>
+          <p:cNvPr id="25" name="TextBox 24"/>
           <p:cNvSpPr txBox="1"/>
           <p:nvPr/>
         </p:nvSpPr>
         <p:spPr>
           <a:xfrm>
-            <a:off x="711200" y="6438900"/>
-            <a:ext cx="9652000" cy="203200"/>
+            <a:off x="609600" y="6464300"/>
+            <a:ext cx="9906000" cy="203200"/>
           </a:xfrm>
           <a:prstGeom prst="rect">
             <a:avLst/>
@@ -7199,7 +7820,7 @@
               </a:spcAft>
               <a:defRPr sz="1100" b="0">
                 <a:solidFill>
-                  <a:srgbClr val="626773"/>
+                  <a:srgbClr val="B7BFCC"/>
                 </a:solidFill>
                 <a:latin typeface="Arial"/>
               </a:defRPr>
@@ -7212,14 +7833,14 @@
       </p:sp>
       <p:sp>
         <p:nvSpPr>
-          <p:cNvPr id="21" name="TextBox 20"/>
+          <p:cNvPr id="26" name="TextBox 25"/>
           <p:cNvSpPr txBox="1"/>
           <p:nvPr/>
         </p:nvSpPr>
         <p:spPr>
           <a:xfrm>
-            <a:off x="10807700" y="6413500"/>
-            <a:ext cx="673100" cy="215900"/>
+            <a:off x="10972800" y="6438900"/>
+            <a:ext cx="609600" cy="215900"/>
           </a:xfrm>
           <a:prstGeom prst="rect">
             <a:avLst/>
@@ -7241,7 +7862,7 @@
               </a:spcAft>
               <a:defRPr sz="1200" b="0">
                 <a:solidFill>
-                  <a:srgbClr val="626773"/>
+                  <a:srgbClr val="B7BFCC"/>
                 </a:solidFill>
                 <a:latin typeface="Arial"/>
               </a:defRPr>
@@ -7285,7 +7906,7 @@
             <a:avLst/>
           </a:prstGeom>
           <a:solidFill>
-            <a:srgbClr val="FFFFFF"/>
+            <a:srgbClr val="101217"/>
           </a:solidFill>
           <a:ln>
             <a:noFill/>
@@ -7315,14 +7936,57 @@
       </p:sp>
       <p:sp>
         <p:nvSpPr>
-          <p:cNvPr id="3" name="TextBox 2"/>
+          <p:cNvPr id="3" name="Rectangle 2"/>
+          <p:cNvSpPr/>
+          <p:nvPr/>
+        </p:nvSpPr>
+        <p:spPr>
+          <a:xfrm>
+            <a:off x="0" y="0"/>
+            <a:ext cx="101600" cy="6858000"/>
+          </a:xfrm>
+          <a:prstGeom prst="rect">
+            <a:avLst/>
+          </a:prstGeom>
+          <a:solidFill>
+            <a:srgbClr val="FF885D"/>
+          </a:solidFill>
+          <a:ln>
+            <a:noFill/>
+          </a:ln>
+        </p:spPr>
+        <p:style>
+          <a:lnRef idx="1">
+            <a:schemeClr val="accent1"/>
+          </a:lnRef>
+          <a:fillRef idx="3">
+            <a:schemeClr val="accent1"/>
+          </a:fillRef>
+          <a:effectRef idx="2">
+            <a:schemeClr val="accent1"/>
+          </a:effectRef>
+          <a:fontRef idx="minor">
+            <a:schemeClr val="lt1"/>
+          </a:fontRef>
+        </p:style>
+        <p:txBody>
+          <a:bodyPr rtlCol="0" anchor="ctr"/>
+          <a:lstStyle/>
+          <a:p>
+            <a:pPr algn="ctr"/>
+          </a:p>
+        </p:txBody>
+      </p:sp>
+      <p:sp>
+        <p:nvSpPr>
+          <p:cNvPr id="4" name="TextBox 3"/>
           <p:cNvSpPr txBox="1"/>
           <p:nvPr/>
         </p:nvSpPr>
         <p:spPr>
           <a:xfrm>
-            <a:off x="711200" y="457200"/>
-            <a:ext cx="10769600" cy="228600"/>
+            <a:off x="609600" y="444500"/>
+            <a:ext cx="10972800" cy="279400"/>
           </a:xfrm>
           <a:prstGeom prst="rect">
             <a:avLst/>
@@ -7344,7 +8008,7 @@
               </a:spcAft>
               <a:defRPr sz="1300" b="1">
                 <a:solidFill>
-                  <a:srgbClr val="626773"/>
+                  <a:srgbClr val="B7BFCC"/>
                 </a:solidFill>
                 <a:latin typeface="Arial"/>
               </a:defRPr>
@@ -7357,20 +8021,20 @@
       </p:sp>
       <p:sp>
         <p:nvSpPr>
-          <p:cNvPr id="4" name="Rectangle 3"/>
+          <p:cNvPr id="5" name="Rectangle 4"/>
           <p:cNvSpPr/>
           <p:nvPr/>
         </p:nvSpPr>
         <p:spPr>
           <a:xfrm>
-            <a:off x="711200" y="876300"/>
-            <a:ext cx="622300" cy="50800"/>
+            <a:off x="609600" y="876300"/>
+            <a:ext cx="685800" cy="50800"/>
           </a:xfrm>
           <a:prstGeom prst="rect">
             <a:avLst/>
           </a:prstGeom>
           <a:solidFill>
-            <a:srgbClr val="E55024"/>
+            <a:srgbClr val="FF885D"/>
           </a:solidFill>
           <a:ln>
             <a:noFill/>
@@ -7400,14 +8064,14 @@
       </p:sp>
       <p:sp>
         <p:nvSpPr>
-          <p:cNvPr id="5" name="TextBox 4"/>
+          <p:cNvPr id="6" name="TextBox 5"/>
           <p:cNvSpPr txBox="1"/>
           <p:nvPr/>
         </p:nvSpPr>
         <p:spPr>
           <a:xfrm>
-            <a:off x="685800" y="1257300"/>
-            <a:ext cx="10795000" cy="1168400"/>
+            <a:off x="584200" y="1206500"/>
+            <a:ext cx="10998200" cy="1130300"/>
           </a:xfrm>
           <a:prstGeom prst="rect">
             <a:avLst/>
@@ -7429,7 +8093,7 @@
               </a:spcAft>
               <a:defRPr sz="3600" b="1">
                 <a:solidFill>
-                  <a:srgbClr val="191B20"/>
+                  <a:srgbClr val="F5F6FA"/>
                 </a:solidFill>
                 <a:latin typeface="Arial"/>
               </a:defRPr>
@@ -7442,20 +8106,20 @@
       </p:sp>
       <p:sp>
         <p:nvSpPr>
-          <p:cNvPr id="6" name="Rectangle 5"/>
+          <p:cNvPr id="7" name="Rectangle 6"/>
           <p:cNvSpPr/>
           <p:nvPr/>
         </p:nvSpPr>
         <p:spPr>
           <a:xfrm>
-            <a:off x="723900" y="2273300"/>
+            <a:off x="711200" y="2336800"/>
             <a:ext cx="101600" cy="101600"/>
           </a:xfrm>
           <a:prstGeom prst="rect">
             <a:avLst/>
           </a:prstGeom>
           <a:solidFill>
-            <a:srgbClr val="E55024"/>
+            <a:srgbClr val="FF885D"/>
           </a:solidFill>
           <a:ln>
             <a:noFill/>
@@ -7485,13 +8149,13 @@
       </p:sp>
       <p:sp>
         <p:nvSpPr>
-          <p:cNvPr id="7" name="TextBox 6"/>
+          <p:cNvPr id="8" name="TextBox 7"/>
           <p:cNvSpPr txBox="1"/>
           <p:nvPr/>
         </p:nvSpPr>
         <p:spPr>
           <a:xfrm>
-            <a:off x="1066800" y="2146300"/>
+            <a:off x="1066800" y="2209800"/>
             <a:ext cx="10160000" cy="419100"/>
           </a:xfrm>
           <a:prstGeom prst="rect">
@@ -7514,7 +8178,7 @@
               </a:spcAft>
               <a:defRPr sz="2800" b="0">
                 <a:solidFill>
-                  <a:srgbClr val="191B20"/>
+                  <a:srgbClr val="F5F6FA"/>
                 </a:solidFill>
                 <a:latin typeface="Arial"/>
               </a:defRPr>
@@ -7527,20 +8191,20 @@
       </p:sp>
       <p:sp>
         <p:nvSpPr>
-          <p:cNvPr id="8" name="Rectangle 7"/>
+          <p:cNvPr id="9" name="Rectangle 8"/>
           <p:cNvSpPr/>
           <p:nvPr/>
         </p:nvSpPr>
         <p:spPr>
           <a:xfrm>
-            <a:off x="723900" y="2971800"/>
+            <a:off x="711200" y="3009900"/>
             <a:ext cx="101600" cy="101600"/>
           </a:xfrm>
           <a:prstGeom prst="rect">
             <a:avLst/>
           </a:prstGeom>
           <a:solidFill>
-            <a:srgbClr val="E55024"/>
+            <a:srgbClr val="FF885D"/>
           </a:solidFill>
           <a:ln>
             <a:noFill/>
@@ -7570,13 +8234,13 @@
       </p:sp>
       <p:sp>
         <p:nvSpPr>
-          <p:cNvPr id="9" name="TextBox 8"/>
+          <p:cNvPr id="10" name="TextBox 9"/>
           <p:cNvSpPr txBox="1"/>
           <p:nvPr/>
         </p:nvSpPr>
         <p:spPr>
           <a:xfrm>
-            <a:off x="1066800" y="2844800"/>
+            <a:off x="1066800" y="2882900"/>
             <a:ext cx="10160000" cy="419100"/>
           </a:xfrm>
           <a:prstGeom prst="rect">
@@ -7599,7 +8263,7 @@
               </a:spcAft>
               <a:defRPr sz="2800" b="0">
                 <a:solidFill>
-                  <a:srgbClr val="191B20"/>
+                  <a:srgbClr val="F5F6FA"/>
                 </a:solidFill>
                 <a:latin typeface="Arial"/>
               </a:defRPr>
@@ -7612,20 +8276,20 @@
       </p:sp>
       <p:sp>
         <p:nvSpPr>
-          <p:cNvPr id="10" name="Rectangle 9"/>
+          <p:cNvPr id="11" name="Rectangle 10"/>
           <p:cNvSpPr/>
           <p:nvPr/>
         </p:nvSpPr>
         <p:spPr>
           <a:xfrm>
-            <a:off x="723900" y="3670300"/>
+            <a:off x="711200" y="3683000"/>
             <a:ext cx="101600" cy="101600"/>
           </a:xfrm>
           <a:prstGeom prst="rect">
             <a:avLst/>
           </a:prstGeom>
           <a:solidFill>
-            <a:srgbClr val="E55024"/>
+            <a:srgbClr val="FF885D"/>
           </a:solidFill>
           <a:ln>
             <a:noFill/>
@@ -7655,13 +8319,13 @@
       </p:sp>
       <p:sp>
         <p:nvSpPr>
-          <p:cNvPr id="11" name="TextBox 10"/>
+          <p:cNvPr id="12" name="TextBox 11"/>
           <p:cNvSpPr txBox="1"/>
           <p:nvPr/>
         </p:nvSpPr>
         <p:spPr>
           <a:xfrm>
-            <a:off x="1066800" y="3543300"/>
+            <a:off x="1066800" y="3556000"/>
             <a:ext cx="10160000" cy="419100"/>
           </a:xfrm>
           <a:prstGeom prst="rect">
@@ -7684,7 +8348,7 @@
               </a:spcAft>
               <a:defRPr sz="2800" b="0">
                 <a:solidFill>
-                  <a:srgbClr val="191B20"/>
+                  <a:srgbClr val="F5F6FA"/>
                 </a:solidFill>
                 <a:latin typeface="Arial"/>
               </a:defRPr>
@@ -7697,20 +8361,20 @@
       </p:sp>
       <p:sp>
         <p:nvSpPr>
-          <p:cNvPr id="12" name="Rectangle 11"/>
+          <p:cNvPr id="13" name="Rectangle 12"/>
           <p:cNvSpPr/>
           <p:nvPr/>
         </p:nvSpPr>
         <p:spPr>
           <a:xfrm>
-            <a:off x="723900" y="4368800"/>
+            <a:off x="711200" y="4356100"/>
             <a:ext cx="101600" cy="101600"/>
           </a:xfrm>
           <a:prstGeom prst="rect">
             <a:avLst/>
           </a:prstGeom>
           <a:solidFill>
-            <a:srgbClr val="E55024"/>
+            <a:srgbClr val="FF885D"/>
           </a:solidFill>
           <a:ln>
             <a:noFill/>
@@ -7740,13 +8404,13 @@
       </p:sp>
       <p:sp>
         <p:nvSpPr>
-          <p:cNvPr id="13" name="TextBox 12"/>
+          <p:cNvPr id="14" name="TextBox 13"/>
           <p:cNvSpPr txBox="1"/>
           <p:nvPr/>
         </p:nvSpPr>
         <p:spPr>
           <a:xfrm>
-            <a:off x="1066800" y="4241800"/>
+            <a:off x="1066800" y="4229100"/>
             <a:ext cx="10160000" cy="419100"/>
           </a:xfrm>
           <a:prstGeom prst="rect">
@@ -7769,7 +8433,7 @@
               </a:spcAft>
               <a:defRPr sz="2800" b="0">
                 <a:solidFill>
-                  <a:srgbClr val="191B20"/>
+                  <a:srgbClr val="F5F6FA"/>
                 </a:solidFill>
                 <a:latin typeface="Arial"/>
               </a:defRPr>
@@ -7782,20 +8446,20 @@
       </p:sp>
       <p:sp>
         <p:nvSpPr>
-          <p:cNvPr id="14" name="Rectangle 13"/>
+          <p:cNvPr id="15" name="Rectangle 14"/>
           <p:cNvSpPr/>
           <p:nvPr/>
         </p:nvSpPr>
         <p:spPr>
           <a:xfrm>
-            <a:off x="711200" y="6248400"/>
-            <a:ext cx="10769600" cy="12700"/>
+            <a:off x="609600" y="6273800"/>
+            <a:ext cx="10972800" cy="12700"/>
           </a:xfrm>
           <a:prstGeom prst="rect">
             <a:avLst/>
           </a:prstGeom>
           <a:solidFill>
-            <a:srgbClr val="DFE2E7"/>
+            <a:srgbClr val="3D4552"/>
           </a:solidFill>
           <a:ln>
             <a:noFill/>
@@ -7825,14 +8489,14 @@
       </p:sp>
       <p:sp>
         <p:nvSpPr>
-          <p:cNvPr id="15" name="TextBox 14"/>
+          <p:cNvPr id="16" name="TextBox 15"/>
           <p:cNvSpPr txBox="1"/>
           <p:nvPr/>
         </p:nvSpPr>
         <p:spPr>
           <a:xfrm>
-            <a:off x="711200" y="6438900"/>
-            <a:ext cx="9652000" cy="203200"/>
+            <a:off x="609600" y="6464300"/>
+            <a:ext cx="9906000" cy="203200"/>
           </a:xfrm>
           <a:prstGeom prst="rect">
             <a:avLst/>
@@ -7854,7 +8518,7 @@
               </a:spcAft>
               <a:defRPr sz="1100" b="0">
                 <a:solidFill>
-                  <a:srgbClr val="626773"/>
+                  <a:srgbClr val="B7BFCC"/>
                 </a:solidFill>
                 <a:latin typeface="Arial"/>
               </a:defRPr>
@@ -7867,14 +8531,14 @@
       </p:sp>
       <p:sp>
         <p:nvSpPr>
-          <p:cNvPr id="16" name="TextBox 15"/>
+          <p:cNvPr id="17" name="TextBox 16"/>
           <p:cNvSpPr txBox="1"/>
           <p:nvPr/>
         </p:nvSpPr>
         <p:spPr>
           <a:xfrm>
-            <a:off x="10807700" y="6413500"/>
-            <a:ext cx="673100" cy="215900"/>
+            <a:off x="10972800" y="6438900"/>
+            <a:ext cx="609600" cy="215900"/>
           </a:xfrm>
           <a:prstGeom prst="rect">
             <a:avLst/>
@@ -7896,7 +8560,7 @@
               </a:spcAft>
               <a:defRPr sz="1200" b="0">
                 <a:solidFill>
-                  <a:srgbClr val="626773"/>
+                  <a:srgbClr val="B7BFCC"/>
                 </a:solidFill>
                 <a:latin typeface="Arial"/>
               </a:defRPr>

--- a/odevzdani/cviceni-03-prototyp/prezentace.pptx
+++ b/odevzdani/cviceni-03-prototyp/prezentace.pptx
@@ -507,7 +507,7 @@
           <a:lstStyle/>
           <a:p>
             <a:r>
-              <a:t>[30 s] Oproti specifikaci máme spustitelný HTML wireframe. Otevře se bez instalace a používá stejnou datovou základnu jako web. Záměrně má jednoduchou grafiku: ověřujeme pořadí obsahu, navigaci a dva klíčové scénáře. Prototyp není šablona, kterou by hotový web při spuštění načítal; je to samostatná návrhová ukázka. Nynější prototyp byl sestaven pro tyto podklady, nepředstavujeme ho jako doložený historický export ze semestru.</a:t>
+              <a:t>[30 s] Oproti specifikaci máme spustitelný HTML wireframe. Otevře se bez instalace a používá stejnou datovou základnu jako web. Záměrně má jednoduchou grafiku: ověřujeme pořadí obsahu, navigaci a dva klíčové scénáře. Prototyp není šablona, kterou by hotový web při spuštění načítal; je to samostatná návrhová ukázka.</a:t>
             </a:r>
           </a:p>
         </p:txBody>
@@ -717,7 +717,7 @@
           <a:lstStyle/>
           <a:p>
             <a:r>
-              <a:t>[45 s včetně ukázky] Otevřeme prototyp, přejdeme na Program a zvolíme první srpen s River Stage. Ověříme datum a scénu výsledků, ne jen počet karet. Vybraný koncert uložíme a zapneme Jen uložené. Po obnovení stránky se k výběru vrátíme. Pokud není žádný výsledek, rozhraní má nabídnout pochopitelnou cestu ke změně filtrů. Tento průchod je součástí browserového ověření prototypu; není to výzkum s reprezentativním vzorkem uživatelů.</a:t>
+              <a:t>[45 s včetně ukázky] Otevřeme prototyp, přejdeme na Program a zvolíme první srpen s River Stage. Ověříme datum a scénu výsledků, ne jen počet karet. Vybraný koncert uložíme a zapneme Jen uložené. Po obnovení stránky se k výběru vrátíme. Pokud není žádný výsledek, rozhraní má nabídnout pochopitelnou cestu ke změně filtrů. Při kontrole musí uložené ID odpovídat stejnému vystoupení ve zdrojových datech.</a:t>
             </a:r>
           </a:p>
         </p:txBody>
@@ -8439,7 +8439,7 @@
               </a:defRPr>
             </a:pPr>
             <a:r>
-              <a:t>Limit: bez testu s návštěvníky na fyzických telefonech.</a:t>
+              <a:t>Výsledky porovnány s očekávanými ID ve zdrojových datech.</a:t>
             </a:r>
           </a:p>
         </p:txBody>
